--- a/ppts/CHAPTER 2 RAG Part I_Indexing Your Data.pptx
+++ b/ppts/CHAPTER 2 RAG Part I_Indexing Your Data.pptx
@@ -5,36 +5,35 @@
     <p:sldMasterId id="2147483660" r:id="rId1"/>
   </p:sldMasterIdLst>
   <p:notesMasterIdLst>
-    <p:notesMasterId r:id="rId26"/>
+    <p:notesMasterId r:id="rId25"/>
   </p:notesMasterIdLst>
   <p:handoutMasterIdLst>
-    <p:handoutMasterId r:id="rId27"/>
+    <p:handoutMasterId r:id="rId26"/>
   </p:handoutMasterIdLst>
   <p:sldIdLst>
     <p:sldId id="256" r:id="rId2"/>
-    <p:sldId id="1136" r:id="rId3"/>
-    <p:sldId id="1138" r:id="rId4"/>
-    <p:sldId id="1139" r:id="rId5"/>
-    <p:sldId id="1155" r:id="rId6"/>
-    <p:sldId id="1156" r:id="rId7"/>
-    <p:sldId id="1158" r:id="rId8"/>
-    <p:sldId id="1157" r:id="rId9"/>
-    <p:sldId id="1159" r:id="rId10"/>
-    <p:sldId id="1140" r:id="rId11"/>
-    <p:sldId id="1141" r:id="rId12"/>
-    <p:sldId id="1142" r:id="rId13"/>
-    <p:sldId id="1143" r:id="rId14"/>
-    <p:sldId id="1145" r:id="rId15"/>
-    <p:sldId id="1144" r:id="rId16"/>
-    <p:sldId id="1146" r:id="rId17"/>
-    <p:sldId id="1147" r:id="rId18"/>
-    <p:sldId id="1148" r:id="rId19"/>
-    <p:sldId id="1149" r:id="rId20"/>
-    <p:sldId id="1154" r:id="rId21"/>
-    <p:sldId id="1153" r:id="rId22"/>
-    <p:sldId id="1150" r:id="rId23"/>
-    <p:sldId id="1151" r:id="rId24"/>
-    <p:sldId id="1152" r:id="rId25"/>
+    <p:sldId id="1138" r:id="rId3"/>
+    <p:sldId id="1139" r:id="rId4"/>
+    <p:sldId id="1155" r:id="rId5"/>
+    <p:sldId id="1156" r:id="rId6"/>
+    <p:sldId id="1158" r:id="rId7"/>
+    <p:sldId id="1157" r:id="rId8"/>
+    <p:sldId id="1159" r:id="rId9"/>
+    <p:sldId id="1140" r:id="rId10"/>
+    <p:sldId id="1141" r:id="rId11"/>
+    <p:sldId id="1142" r:id="rId12"/>
+    <p:sldId id="1143" r:id="rId13"/>
+    <p:sldId id="1145" r:id="rId14"/>
+    <p:sldId id="1144" r:id="rId15"/>
+    <p:sldId id="1146" r:id="rId16"/>
+    <p:sldId id="1147" r:id="rId17"/>
+    <p:sldId id="1148" r:id="rId18"/>
+    <p:sldId id="1149" r:id="rId19"/>
+    <p:sldId id="1154" r:id="rId20"/>
+    <p:sldId id="1153" r:id="rId21"/>
+    <p:sldId id="1150" r:id="rId22"/>
+    <p:sldId id="1151" r:id="rId23"/>
+    <p:sldId id="1152" r:id="rId24"/>
   </p:sldIdLst>
   <p:sldSz cx="12192000" cy="6858000"/>
   <p:notesSz cx="6858000" cy="9144000"/>
@@ -143,7 +142,6 @@
         </p14:section>
         <p14:section name="디자인, 모핑, 주석 달기, 공동 작업, 입력하세요" id="{B9B51309-D148-4332-87C2-07BE32FBCA3B}">
           <p14:sldIdLst>
-            <p14:sldId id="1136"/>
             <p14:sldId id="1138"/>
             <p14:sldId id="1139"/>
             <p14:sldId id="1155"/>
@@ -290,7 +288,7 @@
                 <a:latin typeface="맑은 고딕" panose="020B0503020000020004" pitchFamily="50" charset="-127"/>
                 <a:ea typeface="맑은 고딕" panose="020B0503020000020004" pitchFamily="50" charset="-127"/>
               </a:rPr>
-              <a:t>2026-08-21</a:t>
+              <a:t>2026-09-20</a:t>
             </a:fld>
             <a:endParaRPr lang="ko-KR" altLang="en-US">
               <a:latin typeface="맑은 고딕" panose="020B0503020000020004" pitchFamily="50" charset="-127"/>
@@ -476,7 +474,7 @@
           <a:p>
             <a:fld id="{43E1C3DD-4A19-441D-907C-380838DB51C4}" type="datetime1">
               <a:rPr lang="ko-KR" altLang="en-US" noProof="0" smtClean="0"/>
-              <a:t>2026-08-21</a:t>
+              <a:t>2026-09-20</a:t>
             </a:fld>
             <a:endParaRPr lang="ko-KR" altLang="en-US" noProof="0"/>
           </a:p>
@@ -1324,7 +1322,7 @@
           <a:p>
             <a:fld id="{990475B5-67CA-4281-BDCA-DA943C3C8EB3}" type="datetime1">
               <a:rPr lang="ko-KR" altLang="en-US" noProof="0" smtClean="0"/>
-              <a:t>2026-08-21</a:t>
+              <a:t>2026-09-20</a:t>
             </a:fld>
             <a:endParaRPr lang="ko-KR" altLang="en-US" noProof="0"/>
           </a:p>
@@ -1978,7 +1976,7 @@
           <a:p>
             <a:fld id="{48A87A34-81AB-432B-8DAE-1953F412C126}" type="datetimeFigureOut">
               <a:rPr lang="en-US" smtClean="0"/>
-              <a:t>8/21/2026</a:t>
+              <a:t>9/20/2026</a:t>
             </a:fld>
             <a:endParaRPr lang="en-US" dirty="0"/>
           </a:p>
@@ -2274,7 +2272,7 @@
           <a:p>
             <a:fld id="{C655C81E-72E7-4D05-94B5-F45B321A525D}" type="datetime1">
               <a:rPr lang="ko-KR" altLang="en-US" noProof="0" smtClean="0"/>
-              <a:t>2026-08-21</a:t>
+              <a:t>2026-09-20</a:t>
             </a:fld>
             <a:endParaRPr lang="ko-KR" altLang="en-US" noProof="0" dirty="0">
               <a:latin typeface="맑은 고딕" panose="020B0503020000020004" pitchFamily="50" charset="-127"/>
@@ -3075,574 +3073,6 @@
         <p:cNvPr id="1" name="">
           <a:extLst>
             <a:ext uri="{FF2B5EF4-FFF2-40B4-BE49-F238E27FC236}">
-              <a16:creationId xmlns:a16="http://schemas.microsoft.com/office/drawing/2014/main" id="{AE06AADB-16FD-D031-093A-078B9B45A5A7}"/>
-            </a:ext>
-          </a:extLst>
-        </p:cNvPr>
-        <p:cNvGrpSpPr/>
-        <p:nvPr/>
-      </p:nvGrpSpPr>
-      <p:grpSpPr>
-        <a:xfrm>
-          <a:off x="0" y="0"/>
-          <a:ext cx="0" cy="0"/>
-          <a:chOff x="0" y="0"/>
-          <a:chExt cx="0" cy="0"/>
-        </a:xfrm>
-      </p:grpSpPr>
-      <p:sp>
-        <p:nvSpPr>
-          <p:cNvPr id="3" name="제목 1">
-            <a:extLst>
-              <a:ext uri="{FF2B5EF4-FFF2-40B4-BE49-F238E27FC236}">
-                <a16:creationId xmlns:a16="http://schemas.microsoft.com/office/drawing/2014/main" id="{9FF27C86-F5A7-56AC-6B7D-6AB573A8361D}"/>
-              </a:ext>
-            </a:extLst>
-          </p:cNvPr>
-          <p:cNvSpPr txBox="1">
-            <a:spLocks/>
-          </p:cNvSpPr>
-          <p:nvPr/>
-        </p:nvSpPr>
-        <p:spPr>
-          <a:xfrm>
-            <a:off x="475645" y="481983"/>
-            <a:ext cx="10353762" cy="766439"/>
-          </a:xfrm>
-          <a:prstGeom prst="rect">
-            <a:avLst/>
-          </a:prstGeom>
-        </p:spPr>
-        <p:txBody>
-          <a:bodyPr vert="horz" lIns="91440" tIns="45720" rIns="91440" bIns="45720" rtlCol="0" anchor="ctr">
-            <a:normAutofit/>
-          </a:bodyPr>
-          <a:lstStyle>
-            <a:lvl1pPr algn="ctr" defTabSz="914400" rtl="0" eaLnBrk="1" latinLnBrk="1" hangingPunct="1">
-              <a:lnSpc>
-                <a:spcPct val="90000"/>
-              </a:lnSpc>
-              <a:spcBef>
-                <a:spcPct val="0"/>
-              </a:spcBef>
-              <a:buNone/>
-              <a:defRPr sz="3200" kern="1200" cap="all" baseline="0">
-                <a:solidFill>
-                  <a:schemeClr val="tx1"/>
-                </a:solidFill>
-                <a:effectLst/>
-                <a:latin typeface="Batang" panose="02030600000101010101" pitchFamily="18" charset="-127"/>
-                <a:ea typeface="Batang" panose="02030600000101010101" pitchFamily="18" charset="-127"/>
-                <a:cs typeface="+mj-cs"/>
-              </a:defRPr>
-            </a:lvl1pPr>
-          </a:lstStyle>
-          <a:p>
-            <a:pPr algn="l"/>
-            <a:r>
-              <a:rPr lang="en-US" altLang="ko-KR" sz="2800" cap="none" dirty="0">
-                <a:solidFill>
-                  <a:schemeClr val="bg2">
-                    <a:lumMod val="25000"/>
-                  </a:schemeClr>
-                </a:solidFill>
-                <a:latin typeface="D2Coding" panose="020B0609020101020101" pitchFamily="49" charset="-127"/>
-                <a:ea typeface="D2Coding" panose="020B0609020101020101" pitchFamily="49" charset="-127"/>
-                <a:cs typeface="Segoe UI Light" panose="020B0502040204020203" pitchFamily="34" charset="0"/>
-              </a:rPr>
-              <a:t>The Goal: Picking Relevant Context for LLMs</a:t>
-            </a:r>
-            <a:endParaRPr lang="ko-KR" altLang="en-US" sz="2800" cap="none" dirty="0">
-              <a:solidFill>
-                <a:schemeClr val="bg2">
-                  <a:lumMod val="25000"/>
-                </a:schemeClr>
-              </a:solidFill>
-              <a:latin typeface="D2Coding" panose="020B0609020101020101" pitchFamily="49" charset="-127"/>
-              <a:ea typeface="D2Coding" panose="020B0609020101020101" pitchFamily="49" charset="-127"/>
-              <a:cs typeface="Segoe UI Light" panose="020B0502040204020203" pitchFamily="34" charset="0"/>
-            </a:endParaRPr>
-          </a:p>
-        </p:txBody>
-      </p:sp>
-      <p:sp>
-        <p:nvSpPr>
-          <p:cNvPr id="6" name="TextBox 5">
-            <a:extLst>
-              <a:ext uri="{FF2B5EF4-FFF2-40B4-BE49-F238E27FC236}">
-                <a16:creationId xmlns:a16="http://schemas.microsoft.com/office/drawing/2014/main" id="{ADDE27A3-7BCD-B963-0B8B-1E167166F732}"/>
-              </a:ext>
-            </a:extLst>
-          </p:cNvPr>
-          <p:cNvSpPr txBox="1"/>
-          <p:nvPr/>
-        </p:nvSpPr>
-        <p:spPr>
-          <a:xfrm>
-            <a:off x="609600" y="1248422"/>
-            <a:ext cx="10972800" cy="793166"/>
-          </a:xfrm>
-          <a:prstGeom prst="rect">
-            <a:avLst/>
-          </a:prstGeom>
-          <a:noFill/>
-        </p:spPr>
-        <p:txBody>
-          <a:bodyPr wrap="square">
-            <a:spAutoFit/>
-          </a:bodyPr>
-          <a:lstStyle/>
-          <a:p>
-            <a:pPr marL="285750" indent="-285750">
-              <a:lnSpc>
-                <a:spcPct val="150000"/>
-              </a:lnSpc>
-              <a:buFont typeface="Wingdings" panose="05000000000000000000" pitchFamily="2" charset="2"/>
-              <a:buChar char="v"/>
-            </a:pPr>
-            <a:r>
-              <a:rPr lang="en-US" altLang="ko-KR" sz="1600" b="1" dirty="0">
-                <a:latin typeface="D2Coding" panose="020B0609020101020101" pitchFamily="49" charset="-127"/>
-                <a:ea typeface="D2Coding" panose="020B0609020101020101" pitchFamily="49" charset="-127"/>
-              </a:rPr>
-              <a:t>Ingestion</a:t>
-            </a:r>
-            <a:r>
-              <a:rPr lang="en-US" altLang="ko-KR" sz="1600" dirty="0">
-                <a:latin typeface="D2Coding" panose="020B0609020101020101" pitchFamily="49" charset="-127"/>
-                <a:ea typeface="D2Coding" panose="020B0609020101020101" pitchFamily="49" charset="-127"/>
-              </a:rPr>
-              <a:t> is simply the process of converting your documents into numbers that computers can understand and analyze, and storing them in a special type of database for efficient retrieval. </a:t>
-            </a:r>
-            <a:endParaRPr lang="ko-KR" altLang="en-US" sz="1600" b="1" dirty="0">
-              <a:latin typeface="D2Coding" panose="020B0609020101020101" pitchFamily="49" charset="-127"/>
-              <a:ea typeface="D2Coding" panose="020B0609020101020101" pitchFamily="49" charset="-127"/>
-            </a:endParaRPr>
-          </a:p>
-        </p:txBody>
-      </p:sp>
-      <p:pic>
-        <p:nvPicPr>
-          <p:cNvPr id="5" name="그림 4">
-            <a:extLst>
-              <a:ext uri="{FF2B5EF4-FFF2-40B4-BE49-F238E27FC236}">
-                <a16:creationId xmlns:a16="http://schemas.microsoft.com/office/drawing/2014/main" id="{F642E58B-10CC-8E33-F868-76BDE8BDD9F4}"/>
-              </a:ext>
-            </a:extLst>
-          </p:cNvPr>
-          <p:cNvPicPr>
-            <a:picLocks noChangeAspect="1"/>
-          </p:cNvPicPr>
-          <p:nvPr/>
-        </p:nvPicPr>
-        <p:blipFill>
-          <a:blip r:embed="rId2"/>
-          <a:stretch>
-            <a:fillRect/>
-          </a:stretch>
-        </p:blipFill>
-        <p:spPr>
-          <a:xfrm>
-            <a:off x="686318" y="2714624"/>
-            <a:ext cx="7639100" cy="2676525"/>
-          </a:xfrm>
-          <a:prstGeom prst="rect">
-            <a:avLst/>
-          </a:prstGeom>
-          <a:ln>
-            <a:solidFill>
-              <a:schemeClr val="tx1"/>
-            </a:solidFill>
-          </a:ln>
-        </p:spPr>
-      </p:pic>
-      <p:sp>
-        <p:nvSpPr>
-          <p:cNvPr id="8" name="TextBox 7">
-            <a:extLst>
-              <a:ext uri="{FF2B5EF4-FFF2-40B4-BE49-F238E27FC236}">
-                <a16:creationId xmlns:a16="http://schemas.microsoft.com/office/drawing/2014/main" id="{7C4036C3-6CE1-9412-61CB-8AA26EABCFD4}"/>
-              </a:ext>
-            </a:extLst>
-          </p:cNvPr>
-          <p:cNvSpPr txBox="1"/>
-          <p:nvPr/>
-        </p:nvSpPr>
-        <p:spPr>
-          <a:xfrm>
-            <a:off x="8458199" y="2714625"/>
-            <a:ext cx="3324225" cy="2833981"/>
-          </a:xfrm>
-          <a:prstGeom prst="rect">
-            <a:avLst/>
-          </a:prstGeom>
-          <a:noFill/>
-          <a:ln>
-            <a:solidFill>
-              <a:schemeClr val="tx1"/>
-            </a:solidFill>
-          </a:ln>
-        </p:spPr>
-        <p:txBody>
-          <a:bodyPr wrap="square">
-            <a:spAutoFit/>
-          </a:bodyPr>
-          <a:lstStyle/>
-          <a:p>
-            <a:pPr marL="342900" indent="-342900">
-              <a:lnSpc>
-                <a:spcPct val="150000"/>
-              </a:lnSpc>
-              <a:buAutoNum type="arabicPeriod"/>
-            </a:pPr>
-            <a:r>
-              <a:rPr lang="en-US" altLang="ko-KR" sz="1200" dirty="0">
-                <a:latin typeface="D2Coding" panose="020B0609020101020101" pitchFamily="49" charset="-127"/>
-                <a:ea typeface="D2Coding" panose="020B0609020101020101" pitchFamily="49" charset="-127"/>
-              </a:rPr>
-              <a:t>Extract the text from the document. </a:t>
-            </a:r>
-          </a:p>
-          <a:p>
-            <a:pPr marL="342900" indent="-342900">
-              <a:lnSpc>
-                <a:spcPct val="150000"/>
-              </a:lnSpc>
-              <a:buAutoNum type="arabicPeriod"/>
-            </a:pPr>
-            <a:r>
-              <a:rPr lang="en-US" altLang="ko-KR" sz="1200" dirty="0">
-                <a:latin typeface="D2Coding" panose="020B0609020101020101" pitchFamily="49" charset="-127"/>
-                <a:ea typeface="D2Coding" panose="020B0609020101020101" pitchFamily="49" charset="-127"/>
-              </a:rPr>
-              <a:t>Split the text into manageable chunks. </a:t>
-            </a:r>
-          </a:p>
-          <a:p>
-            <a:pPr marL="342900" indent="-342900">
-              <a:lnSpc>
-                <a:spcPct val="150000"/>
-              </a:lnSpc>
-              <a:buAutoNum type="arabicPeriod"/>
-            </a:pPr>
-            <a:r>
-              <a:rPr lang="en-US" altLang="ko-KR" sz="1200" dirty="0">
-                <a:latin typeface="D2Coding" panose="020B0609020101020101" pitchFamily="49" charset="-127"/>
-                <a:ea typeface="D2Coding" panose="020B0609020101020101" pitchFamily="49" charset="-127"/>
-              </a:rPr>
-              <a:t>Convert the text into numbers that computers can understand. </a:t>
-            </a:r>
-          </a:p>
-          <a:p>
-            <a:pPr marL="342900" indent="-342900">
-              <a:lnSpc>
-                <a:spcPct val="150000"/>
-              </a:lnSpc>
-              <a:buAutoNum type="arabicPeriod"/>
-            </a:pPr>
-            <a:r>
-              <a:rPr lang="en-US" altLang="ko-KR" sz="1200" dirty="0">
-                <a:latin typeface="D2Coding" panose="020B0609020101020101" pitchFamily="49" charset="-127"/>
-                <a:ea typeface="D2Coding" panose="020B0609020101020101" pitchFamily="49" charset="-127"/>
-              </a:rPr>
-              <a:t>Store these number representations of your text somewhere that makes it easy and fast to retrieve the relevant sections of your document to answer a given question.</a:t>
-            </a:r>
-            <a:endParaRPr lang="ko-KR" altLang="en-US" sz="1200" dirty="0">
-              <a:latin typeface="D2Coding" panose="020B0609020101020101" pitchFamily="49" charset="-127"/>
-              <a:ea typeface="D2Coding" panose="020B0609020101020101" pitchFamily="49" charset="-127"/>
-            </a:endParaRPr>
-          </a:p>
-        </p:txBody>
-      </p:sp>
-      <p:sp>
-        <p:nvSpPr>
-          <p:cNvPr id="9" name="TextBox 8">
-            <a:extLst>
-              <a:ext uri="{FF2B5EF4-FFF2-40B4-BE49-F238E27FC236}">
-                <a16:creationId xmlns:a16="http://schemas.microsoft.com/office/drawing/2014/main" id="{270870DB-7FC7-C2F1-AC9D-0DCF09FD92E6}"/>
-              </a:ext>
-            </a:extLst>
-          </p:cNvPr>
-          <p:cNvSpPr txBox="1"/>
-          <p:nvPr/>
-        </p:nvSpPr>
-        <p:spPr>
-          <a:xfrm>
-            <a:off x="885826" y="2905780"/>
-            <a:ext cx="1428749" cy="523220"/>
-          </a:xfrm>
-          <a:prstGeom prst="rect">
-            <a:avLst/>
-          </a:prstGeom>
-          <a:noFill/>
-        </p:spPr>
-        <p:txBody>
-          <a:bodyPr wrap="square" rtlCol="0">
-            <a:spAutoFit/>
-          </a:bodyPr>
-          <a:lstStyle/>
-          <a:p>
-            <a:r>
-              <a:rPr lang="en-US" altLang="ko-KR" sz="1400" dirty="0">
-                <a:latin typeface="D2Coding" panose="020B0609020101020101" pitchFamily="49" charset="-127"/>
-                <a:ea typeface="D2Coding" panose="020B0609020101020101" pitchFamily="49" charset="-127"/>
-                <a:hlinkClick r:id="rId3">
-                  <a:extLst>
-                    <a:ext uri="{A12FA001-AC4F-418D-AE19-62706E023703}">
-                      <ahyp:hlinkClr xmlns:ahyp="http://schemas.microsoft.com/office/drawing/2018/hyperlinkcolor" val="tx"/>
-                    </a:ext>
-                  </a:extLst>
-                </a:hlinkClick>
-              </a:rPr>
-              <a:t>Tesla’s 2022 annual report</a:t>
-            </a:r>
-            <a:endParaRPr lang="ko-KR" altLang="en-US" sz="1400" dirty="0">
-              <a:latin typeface="D2Coding" panose="020B0609020101020101" pitchFamily="49" charset="-127"/>
-              <a:ea typeface="D2Coding" panose="020B0609020101020101" pitchFamily="49" charset="-127"/>
-            </a:endParaRPr>
-          </a:p>
-        </p:txBody>
-      </p:sp>
-      <p:sp>
-        <p:nvSpPr>
-          <p:cNvPr id="12" name="TextBox 11">
-            <a:extLst>
-              <a:ext uri="{FF2B5EF4-FFF2-40B4-BE49-F238E27FC236}">
-                <a16:creationId xmlns:a16="http://schemas.microsoft.com/office/drawing/2014/main" id="{A17C5159-309F-23EC-ADB3-6FAB4DCD08BE}"/>
-              </a:ext>
-            </a:extLst>
-          </p:cNvPr>
-          <p:cNvSpPr txBox="1"/>
-          <p:nvPr/>
-        </p:nvSpPr>
-        <p:spPr>
-          <a:xfrm>
-            <a:off x="1112771" y="5788190"/>
-            <a:ext cx="4295775" cy="338554"/>
-          </a:xfrm>
-          <a:prstGeom prst="rect">
-            <a:avLst/>
-          </a:prstGeom>
-          <a:solidFill>
-            <a:schemeClr val="tx1"/>
-          </a:solidFill>
-        </p:spPr>
-        <p:txBody>
-          <a:bodyPr wrap="square">
-            <a:spAutoFit/>
-          </a:bodyPr>
-          <a:lstStyle/>
-          <a:p>
-            <a:r>
-              <a:rPr lang="en-US" altLang="ko-KR" sz="1600" dirty="0">
-                <a:solidFill>
-                  <a:schemeClr val="bg1"/>
-                </a:solidFill>
-                <a:latin typeface="D2Coding" panose="020B0609020101020101" pitchFamily="49" charset="-127"/>
-                <a:ea typeface="D2Coding" panose="020B0609020101020101" pitchFamily="49" charset="-127"/>
-              </a:rPr>
-              <a:t>“What key risks did Tesla face in 2022?”</a:t>
-            </a:r>
-            <a:endParaRPr lang="ko-KR" altLang="en-US" sz="1600" dirty="0">
-              <a:solidFill>
-                <a:schemeClr val="bg1"/>
-              </a:solidFill>
-              <a:latin typeface="D2Coding" panose="020B0609020101020101" pitchFamily="49" charset="-127"/>
-              <a:ea typeface="D2Coding" panose="020B0609020101020101" pitchFamily="49" charset="-127"/>
-            </a:endParaRPr>
-          </a:p>
-        </p:txBody>
-      </p:sp>
-      <p:pic>
-        <p:nvPicPr>
-          <p:cNvPr id="14" name="그래픽 13" descr="웹 디자인">
-            <a:extLst>
-              <a:ext uri="{FF2B5EF4-FFF2-40B4-BE49-F238E27FC236}">
-                <a16:creationId xmlns:a16="http://schemas.microsoft.com/office/drawing/2014/main" id="{2390334E-00AF-997C-7435-855CCD58A09D}"/>
-              </a:ext>
-            </a:extLst>
-          </p:cNvPr>
-          <p:cNvPicPr>
-            <a:picLocks noChangeAspect="1"/>
-          </p:cNvPicPr>
-          <p:nvPr/>
-        </p:nvPicPr>
-        <p:blipFill>
-          <a:blip>
-            <a:extLst>
-              <a:ext uri="{96DAC541-7B7A-43D3-8B79-37D633B846F1}">
-                <asvg:svgBlip xmlns:asvg="http://schemas.microsoft.com/office/drawing/2016/SVG/main" r:embed="rId4"/>
-              </a:ext>
-            </a:extLst>
-          </a:blip>
-          <a:stretch>
-            <a:fillRect/>
-          </a:stretch>
-        </p:blipFill>
-        <p:spPr>
-          <a:xfrm>
-            <a:off x="569184" y="5686662"/>
-            <a:ext cx="543335" cy="543335"/>
-          </a:xfrm>
-          <a:prstGeom prst="rect">
-            <a:avLst/>
-          </a:prstGeom>
-        </p:spPr>
-      </p:pic>
-      <p:sp>
-        <p:nvSpPr>
-          <p:cNvPr id="2" name="슬라이드 번호 개체 틀 3">
-            <a:extLst>
-              <a:ext uri="{FF2B5EF4-FFF2-40B4-BE49-F238E27FC236}">
-                <a16:creationId xmlns:a16="http://schemas.microsoft.com/office/drawing/2014/main" id="{0164DB67-877E-2766-2071-AB2439A1502F}"/>
-              </a:ext>
-            </a:extLst>
-          </p:cNvPr>
-          <p:cNvSpPr txBox="1">
-            <a:spLocks/>
-          </p:cNvSpPr>
-          <p:nvPr/>
-        </p:nvSpPr>
-        <p:spPr>
-          <a:xfrm>
-            <a:off x="11180761" y="299420"/>
-            <a:ext cx="753545" cy="365125"/>
-          </a:xfrm>
-          <a:prstGeom prst="rect">
-            <a:avLst/>
-          </a:prstGeom>
-        </p:spPr>
-        <p:txBody>
-          <a:bodyPr vert="horz" lIns="91440" tIns="45720" rIns="91440" bIns="45720" rtlCol="0" anchor="ctr"/>
-          <a:lstStyle>
-            <a:defPPr rtl="0">
-              <a:defRPr lang="ko-KR"/>
-            </a:defPPr>
-            <a:lvl1pPr marL="0" algn="r" defTabSz="914400" rtl="0" eaLnBrk="1" latinLnBrk="0" hangingPunct="1">
-              <a:defRPr sz="1200" kern="1200" baseline="0">
-                <a:solidFill>
-                  <a:schemeClr val="tx1">
-                    <a:lumMod val="65000"/>
-                    <a:lumOff val="35000"/>
-                  </a:schemeClr>
-                </a:solidFill>
-                <a:latin typeface="맑은 고딕" panose="020B0503020000020004" pitchFamily="50" charset="-127"/>
-                <a:ea typeface="맑은 고딕" panose="020B0503020000020004" pitchFamily="50" charset="-127"/>
-                <a:cs typeface="+mn-cs"/>
-              </a:defRPr>
-            </a:lvl1pPr>
-            <a:lvl2pPr marL="457200" algn="l" defTabSz="914400" rtl="0" eaLnBrk="1" latinLnBrk="0" hangingPunct="1">
-              <a:defRPr sz="1800" kern="1200">
-                <a:solidFill>
-                  <a:schemeClr val="tx1"/>
-                </a:solidFill>
-                <a:latin typeface="+mn-lt"/>
-                <a:ea typeface="+mn-ea"/>
-                <a:cs typeface="+mn-cs"/>
-              </a:defRPr>
-            </a:lvl2pPr>
-            <a:lvl3pPr marL="914400" algn="l" defTabSz="914400" rtl="0" eaLnBrk="1" latinLnBrk="0" hangingPunct="1">
-              <a:defRPr sz="1800" kern="1200">
-                <a:solidFill>
-                  <a:schemeClr val="tx1"/>
-                </a:solidFill>
-                <a:latin typeface="+mn-lt"/>
-                <a:ea typeface="+mn-ea"/>
-                <a:cs typeface="+mn-cs"/>
-              </a:defRPr>
-            </a:lvl3pPr>
-            <a:lvl4pPr marL="1371600" algn="l" defTabSz="914400" rtl="0" eaLnBrk="1" latinLnBrk="0" hangingPunct="1">
-              <a:defRPr sz="1800" kern="1200">
-                <a:solidFill>
-                  <a:schemeClr val="tx1"/>
-                </a:solidFill>
-                <a:latin typeface="+mn-lt"/>
-                <a:ea typeface="+mn-ea"/>
-                <a:cs typeface="+mn-cs"/>
-              </a:defRPr>
-            </a:lvl4pPr>
-            <a:lvl5pPr marL="1828800" algn="l" defTabSz="914400" rtl="0" eaLnBrk="1" latinLnBrk="0" hangingPunct="1">
-              <a:defRPr sz="1800" kern="1200">
-                <a:solidFill>
-                  <a:schemeClr val="tx1"/>
-                </a:solidFill>
-                <a:latin typeface="+mn-lt"/>
-                <a:ea typeface="+mn-ea"/>
-                <a:cs typeface="+mn-cs"/>
-              </a:defRPr>
-            </a:lvl5pPr>
-            <a:lvl6pPr marL="2286000" algn="l" defTabSz="914400" rtl="0" eaLnBrk="1" latinLnBrk="0" hangingPunct="1">
-              <a:defRPr sz="1800" kern="1200">
-                <a:solidFill>
-                  <a:schemeClr val="tx1"/>
-                </a:solidFill>
-                <a:latin typeface="+mn-lt"/>
-                <a:ea typeface="+mn-ea"/>
-                <a:cs typeface="+mn-cs"/>
-              </a:defRPr>
-            </a:lvl6pPr>
-            <a:lvl7pPr marL="2743200" algn="l" defTabSz="914400" rtl="0" eaLnBrk="1" latinLnBrk="0" hangingPunct="1">
-              <a:defRPr sz="1800" kern="1200">
-                <a:solidFill>
-                  <a:schemeClr val="tx1"/>
-                </a:solidFill>
-                <a:latin typeface="+mn-lt"/>
-                <a:ea typeface="+mn-ea"/>
-                <a:cs typeface="+mn-cs"/>
-              </a:defRPr>
-            </a:lvl7pPr>
-            <a:lvl8pPr marL="3200400" algn="l" defTabSz="914400" rtl="0" eaLnBrk="1" latinLnBrk="0" hangingPunct="1">
-              <a:defRPr sz="1800" kern="1200">
-                <a:solidFill>
-                  <a:schemeClr val="tx1"/>
-                </a:solidFill>
-                <a:latin typeface="+mn-lt"/>
-                <a:ea typeface="+mn-ea"/>
-                <a:cs typeface="+mn-cs"/>
-              </a:defRPr>
-            </a:lvl8pPr>
-            <a:lvl9pPr marL="3657600" algn="l" defTabSz="914400" rtl="0" eaLnBrk="1" latinLnBrk="0" hangingPunct="1">
-              <a:defRPr sz="1800" kern="1200">
-                <a:solidFill>
-                  <a:schemeClr val="tx1"/>
-                </a:solidFill>
-                <a:latin typeface="+mn-lt"/>
-                <a:ea typeface="+mn-ea"/>
-                <a:cs typeface="+mn-cs"/>
-              </a:defRPr>
-            </a:lvl9pPr>
-          </a:lstStyle>
-          <a:p>
-            <a:fld id="{D57F1E4F-1CFF-5643-939E-217C01CDF565}" type="slidenum">
-              <a:rPr lang="en-US" sz="1400" b="1" smtClean="0"/>
-              <a:pPr/>
-              <a:t>10</a:t>
-            </a:fld>
-            <a:endParaRPr lang="en-US" sz="1400" b="1" dirty="0"/>
-          </a:p>
-        </p:txBody>
-      </p:sp>
-    </p:spTree>
-    <p:extLst>
-      <p:ext uri="{BB962C8B-B14F-4D97-AF65-F5344CB8AC3E}">
-        <p14:creationId xmlns:p14="http://schemas.microsoft.com/office/powerpoint/2010/main" val="4151685094"/>
-      </p:ext>
-    </p:extLst>
-  </p:cSld>
-  <p:clrMapOvr>
-    <a:masterClrMapping/>
-  </p:clrMapOvr>
-</p:sld>
-</file>
-
-<file path=ppt/slides/slide11.xml><?xml version="1.0" encoding="utf-8"?>
-<p:sld xmlns:a="http://schemas.openxmlformats.org/drawingml/2006/main" xmlns:r="http://schemas.openxmlformats.org/officeDocument/2006/relationships" xmlns:p="http://schemas.openxmlformats.org/presentationml/2006/main">
-  <p:cSld>
-    <p:spTree>
-      <p:nvGrpSpPr>
-        <p:cNvPr id="1" name="">
-          <a:extLst>
-            <a:ext uri="{FF2B5EF4-FFF2-40B4-BE49-F238E27FC236}">
               <a16:creationId xmlns:a16="http://schemas.microsoft.com/office/drawing/2014/main" id="{29036070-2CC2-66E6-DD08-B216F753E3FC}"/>
             </a:ext>
           </a:extLst>
@@ -4087,10 +3517,10 @@
           <p:nvPr/>
         </p:nvPicPr>
         <p:blipFill>
-          <a:blip>
+          <a:blip r:embed="rId4">
             <a:extLst>
               <a:ext uri="{96DAC541-7B7A-43D3-8B79-37D633B846F1}">
-                <asvg:svgBlip xmlns:asvg="http://schemas.microsoft.com/office/drawing/2016/SVG/main" r:embed="rId4"/>
+                <asvg:svgBlip xmlns:asvg="http://schemas.microsoft.com/office/drawing/2016/SVG/main" r:embed="rId5"/>
               </a:ext>
             </a:extLst>
           </a:blip>
@@ -4278,7 +3708,7 @@
             <a:fld id="{D57F1E4F-1CFF-5643-939E-217C01CDF565}" type="slidenum">
               <a:rPr lang="en-US" sz="1400" b="1" smtClean="0"/>
               <a:pPr/>
-              <a:t>11</a:t>
+              <a:t>10</a:t>
             </a:fld>
             <a:endParaRPr lang="en-US" sz="1400" b="1" dirty="0"/>
           </a:p>
@@ -4297,7 +3727,7 @@
 </p:sld>
 </file>
 
-<file path=ppt/slides/slide12.xml><?xml version="1.0" encoding="utf-8"?>
+<file path=ppt/slides/slide11.xml><?xml version="1.0" encoding="utf-8"?>
 <p:sld xmlns:a="http://schemas.openxmlformats.org/drawingml/2006/main" xmlns:r="http://schemas.openxmlformats.org/officeDocument/2006/relationships" xmlns:p="http://schemas.openxmlformats.org/presentationml/2006/main">
   <p:cSld>
     <p:spTree>
@@ -5095,7 +4525,7 @@
             <a:fld id="{D57F1E4F-1CFF-5643-939E-217C01CDF565}" type="slidenum">
               <a:rPr lang="en-US" sz="1400" b="1" smtClean="0"/>
               <a:pPr/>
-              <a:t>12</a:t>
+              <a:t>11</a:t>
             </a:fld>
             <a:endParaRPr lang="en-US" sz="1400" b="1" dirty="0"/>
           </a:p>
@@ -5114,7 +4544,7 @@
 </p:sld>
 </file>
 
-<file path=ppt/slides/slide13.xml><?xml version="1.0" encoding="utf-8"?>
+<file path=ppt/slides/slide12.xml><?xml version="1.0" encoding="utf-8"?>
 <p:sld xmlns:a="http://schemas.openxmlformats.org/drawingml/2006/main" xmlns:r="http://schemas.openxmlformats.org/officeDocument/2006/relationships" xmlns:p="http://schemas.openxmlformats.org/presentationml/2006/main">
   <p:cSld>
     <p:spTree>
@@ -5307,7 +4737,7 @@
                 <a:latin typeface="D2Coding" panose="020B0609020101020101" pitchFamily="49" charset="-127"/>
                 <a:ea typeface="D2Coding" panose="020B0609020101020101" pitchFamily="49" charset="-127"/>
               </a:rPr>
-              <a:t>개</a:t>
+              <a:t>개 단어</a:t>
             </a:r>
             <a:r>
               <a:rPr lang="en-US" altLang="ko-KR" sz="1600" dirty="0">
@@ -5638,45 +5068,52 @@
                 <a:latin typeface="D2Coding" panose="020B0609020101020101" pitchFamily="49" charset="-127"/>
                 <a:ea typeface="D2Coding" panose="020B0609020101020101" pitchFamily="49" charset="-127"/>
               </a:rPr>
-              <a:t>총 개수 2로 나누면 평균</a:t>
-            </a:r>
-            <a:r>
-              <a:rPr lang="en-US" altLang="ko-KR" sz="1500" dirty="0">
+              <a:t>총 개수 2로 나누면 </a:t>
+            </a:r>
+            <a:r>
+              <a:rPr lang="ko-KR" altLang="en-US" sz="1500" b="1" dirty="0">
+                <a:latin typeface="D2Coding" panose="020B0609020101020101" pitchFamily="49" charset="-127"/>
+                <a:ea typeface="D2Coding" panose="020B0609020101020101" pitchFamily="49" charset="-127"/>
+              </a:rPr>
+              <a:t>평균</a:t>
+            </a:r>
+            <a:r>
+              <a:rPr lang="en-US" altLang="ko-KR" sz="1500" b="1" dirty="0">
                 <a:latin typeface="D2Coding" panose="020B0609020101020101" pitchFamily="49" charset="-127"/>
                 <a:ea typeface="D2Coding" panose="020B0609020101020101" pitchFamily="49" charset="-127"/>
               </a:rPr>
               <a:t>(</a:t>
             </a:r>
             <a:r>
-              <a:rPr lang="ko-KR" altLang="en-US" sz="1500" dirty="0">
+              <a:rPr lang="ko-KR" altLang="en-US" sz="1500" b="1" dirty="0">
                 <a:latin typeface="D2Coding" panose="020B0609020101020101" pitchFamily="49" charset="-127"/>
                 <a:ea typeface="D2Coding" panose="020B0609020101020101" pitchFamily="49" charset="-127"/>
               </a:rPr>
               <a:t>대표</a:t>
             </a:r>
             <a:r>
-              <a:rPr lang="en-US" altLang="ko-KR" sz="1500" dirty="0">
+              <a:rPr lang="en-US" altLang="ko-KR" sz="1500" b="1" dirty="0">
                 <a:latin typeface="D2Coding" panose="020B0609020101020101" pitchFamily="49" charset="-127"/>
                 <a:ea typeface="D2Coding" panose="020B0609020101020101" pitchFamily="49" charset="-127"/>
               </a:rPr>
               <a:t>)</a:t>
             </a:r>
             <a:r>
-              <a:rPr lang="ko-KR" altLang="en-US" sz="1500" dirty="0">
+              <a:rPr lang="ko-KR" altLang="en-US" sz="1500" b="1" dirty="0">
                 <a:latin typeface="D2Coding" panose="020B0609020101020101" pitchFamily="49" charset="-127"/>
                 <a:ea typeface="D2Coding" panose="020B0609020101020101" pitchFamily="49" charset="-127"/>
               </a:rPr>
               <a:t> 벡터 </a:t>
             </a:r>
             <a:r>
-              <a:rPr lang="en-US" altLang="ko-KR" sz="1500" dirty="0">
+              <a:rPr lang="en-US" altLang="ko-KR" sz="1500" b="1" dirty="0">
                 <a:latin typeface="D2Coding" panose="020B0609020101020101" pitchFamily="49" charset="-127"/>
                 <a:ea typeface="D2Coding" panose="020B0609020101020101" pitchFamily="49" charset="-127"/>
               </a:rPr>
               <a:t>= </a:t>
             </a:r>
             <a:r>
-              <a:rPr lang="ko-KR" altLang="en-US" sz="1500" dirty="0">
+              <a:rPr lang="ko-KR" altLang="en-US" sz="1500" b="1" dirty="0">
                 <a:latin typeface="D2Coding" panose="020B0609020101020101" pitchFamily="49" charset="-127"/>
                 <a:ea typeface="D2Coding" panose="020B0609020101020101" pitchFamily="49" charset="-127"/>
               </a:rPr>
@@ -5815,101 +5252,108 @@
                 <a:latin typeface="D2Coding" panose="020B0609020101020101" pitchFamily="49" charset="-127"/>
                 <a:ea typeface="D2Coding" panose="020B0609020101020101" pitchFamily="49" charset="-127"/>
               </a:rPr>
-              <a:t>총 개수 2로 나누면 평균</a:t>
-            </a:r>
-            <a:r>
-              <a:rPr lang="en-US" altLang="ko-KR" sz="1500" dirty="0">
+              <a:t>총 개수 2로 나누면 </a:t>
+            </a:r>
+            <a:r>
+              <a:rPr lang="ko-KR" altLang="en-US" sz="1500" b="1" dirty="0">
+                <a:latin typeface="D2Coding" panose="020B0609020101020101" pitchFamily="49" charset="-127"/>
+                <a:ea typeface="D2Coding" panose="020B0609020101020101" pitchFamily="49" charset="-127"/>
+              </a:rPr>
+              <a:t>평균</a:t>
+            </a:r>
+            <a:r>
+              <a:rPr lang="en-US" altLang="ko-KR" sz="1500" b="1" dirty="0">
                 <a:latin typeface="D2Coding" panose="020B0609020101020101" pitchFamily="49" charset="-127"/>
                 <a:ea typeface="D2Coding" panose="020B0609020101020101" pitchFamily="49" charset="-127"/>
               </a:rPr>
               <a:t>(</a:t>
             </a:r>
             <a:r>
-              <a:rPr lang="ko-KR" altLang="en-US" sz="1500" dirty="0">
+              <a:rPr lang="ko-KR" altLang="en-US" sz="1500" b="1" dirty="0">
                 <a:latin typeface="D2Coding" panose="020B0609020101020101" pitchFamily="49" charset="-127"/>
                 <a:ea typeface="D2Coding" panose="020B0609020101020101" pitchFamily="49" charset="-127"/>
               </a:rPr>
               <a:t>대표</a:t>
             </a:r>
             <a:r>
-              <a:rPr lang="en-US" altLang="ko-KR" sz="1500" dirty="0">
+              <a:rPr lang="en-US" altLang="ko-KR" sz="1500" b="1" dirty="0">
                 <a:latin typeface="D2Coding" panose="020B0609020101020101" pitchFamily="49" charset="-127"/>
                 <a:ea typeface="D2Coding" panose="020B0609020101020101" pitchFamily="49" charset="-127"/>
               </a:rPr>
               <a:t>)</a:t>
             </a:r>
             <a:r>
-              <a:rPr lang="ko-KR" altLang="en-US" sz="1500" dirty="0">
+              <a:rPr lang="ko-KR" altLang="en-US" sz="1500" b="1" dirty="0">
                 <a:latin typeface="D2Coding" panose="020B0609020101020101" pitchFamily="49" charset="-127"/>
                 <a:ea typeface="D2Coding" panose="020B0609020101020101" pitchFamily="49" charset="-127"/>
               </a:rPr>
               <a:t> 벡터 </a:t>
             </a:r>
             <a:r>
-              <a:rPr lang="en-US" altLang="ko-KR" sz="1500" dirty="0">
+              <a:rPr lang="en-US" altLang="ko-KR" sz="1500" b="1" dirty="0">
                 <a:latin typeface="D2Coding" panose="020B0609020101020101" pitchFamily="49" charset="-127"/>
                 <a:ea typeface="D2Coding" panose="020B0609020101020101" pitchFamily="49" charset="-127"/>
               </a:rPr>
               <a:t>= </a:t>
             </a:r>
             <a:r>
-              <a:rPr lang="ko-KR" altLang="en-US" sz="1500" dirty="0">
+              <a:rPr lang="ko-KR" altLang="en-US" sz="1500" b="1" dirty="0">
                 <a:latin typeface="D2Coding" panose="020B0609020101020101" pitchFamily="49" charset="-127"/>
                 <a:ea typeface="D2Coding" panose="020B0609020101020101" pitchFamily="49" charset="-127"/>
               </a:rPr>
               <a:t>[</a:t>
             </a:r>
             <a:r>
-              <a:rPr lang="en-US" altLang="ko-KR" sz="1500" dirty="0">
+              <a:rPr lang="en-US" altLang="ko-KR" sz="1500" b="1" dirty="0">
                 <a:latin typeface="D2Coding" panose="020B0609020101020101" pitchFamily="49" charset="-127"/>
                 <a:ea typeface="D2Coding" panose="020B0609020101020101" pitchFamily="49" charset="-127"/>
               </a:rPr>
               <a:t>0</a:t>
             </a:r>
             <a:r>
-              <a:rPr lang="ko-KR" altLang="en-US" sz="1500" dirty="0">
+              <a:rPr lang="ko-KR" altLang="en-US" sz="1500" b="1" dirty="0">
                 <a:latin typeface="D2Coding" panose="020B0609020101020101" pitchFamily="49" charset="-127"/>
                 <a:ea typeface="D2Coding" panose="020B0609020101020101" pitchFamily="49" charset="-127"/>
               </a:rPr>
               <a:t>.0, 0.</a:t>
             </a:r>
             <a:r>
-              <a:rPr lang="en-US" altLang="ko-KR" sz="1500" dirty="0">
+              <a:rPr lang="en-US" altLang="ko-KR" sz="1500" b="1" dirty="0">
                 <a:latin typeface="D2Coding" panose="020B0609020101020101" pitchFamily="49" charset="-127"/>
                 <a:ea typeface="D2Coding" panose="020B0609020101020101" pitchFamily="49" charset="-127"/>
               </a:rPr>
               <a:t>0</a:t>
             </a:r>
             <a:r>
-              <a:rPr lang="ko-KR" altLang="en-US" sz="1500" dirty="0">
+              <a:rPr lang="ko-KR" altLang="en-US" sz="1500" b="1" dirty="0">
                 <a:latin typeface="D2Coding" panose="020B0609020101020101" pitchFamily="49" charset="-127"/>
                 <a:ea typeface="D2Coding" panose="020B0609020101020101" pitchFamily="49" charset="-127"/>
               </a:rPr>
               <a:t>, </a:t>
             </a:r>
             <a:r>
-              <a:rPr lang="en-US" altLang="ko-KR" sz="1500" dirty="0">
+              <a:rPr lang="en-US" altLang="ko-KR" sz="1500" b="1" dirty="0">
                 <a:latin typeface="D2Coding" panose="020B0609020101020101" pitchFamily="49" charset="-127"/>
                 <a:ea typeface="D2Coding" panose="020B0609020101020101" pitchFamily="49" charset="-127"/>
               </a:rPr>
               <a:t>1</a:t>
             </a:r>
             <a:r>
-              <a:rPr lang="ko-KR" altLang="en-US" sz="1500" dirty="0">
+              <a:rPr lang="ko-KR" altLang="en-US" sz="1500" b="1" dirty="0">
                 <a:latin typeface="D2Coding" panose="020B0609020101020101" pitchFamily="49" charset="-127"/>
                 <a:ea typeface="D2Coding" panose="020B0609020101020101" pitchFamily="49" charset="-127"/>
               </a:rPr>
               <a:t>.0, </a:t>
             </a:r>
             <a:r>
-              <a:rPr lang="en-US" altLang="ko-KR" sz="1500" dirty="0">
+              <a:rPr lang="en-US" altLang="ko-KR" sz="1500" b="1" dirty="0">
                 <a:latin typeface="D2Coding" panose="020B0609020101020101" pitchFamily="49" charset="-127"/>
                 <a:ea typeface="D2Coding" panose="020B0609020101020101" pitchFamily="49" charset="-127"/>
               </a:rPr>
               <a:t>1.0</a:t>
             </a:r>
             <a:r>
-              <a:rPr lang="ko-KR" altLang="en-US" sz="1500" dirty="0">
+              <a:rPr lang="ko-KR" altLang="en-US" sz="1500" b="1" dirty="0">
                 <a:latin typeface="D2Coding" panose="020B0609020101020101" pitchFamily="49" charset="-127"/>
                 <a:ea typeface="D2Coding" panose="020B0609020101020101" pitchFamily="49" charset="-127"/>
               </a:rPr>
@@ -6119,10 +5563,10 @@
           <p:nvPr/>
         </p:nvPicPr>
         <p:blipFill>
-          <a:blip>
+          <a:blip r:embed="rId2">
             <a:extLst>
               <a:ext uri="{96DAC541-7B7A-43D3-8B79-37D633B846F1}">
-                <asvg:svgBlip xmlns:asvg="http://schemas.microsoft.com/office/drawing/2016/SVG/main" r:embed="rId2"/>
+                <asvg:svgBlip xmlns:asvg="http://schemas.microsoft.com/office/drawing/2016/SVG/main" r:embed="rId3"/>
               </a:ext>
             </a:extLst>
           </a:blip>
@@ -6327,10 +5771,10 @@
           <p:nvPr/>
         </p:nvPicPr>
         <p:blipFill>
-          <a:blip>
+          <a:blip r:embed="rId2">
             <a:extLst>
               <a:ext uri="{96DAC541-7B7A-43D3-8B79-37D633B846F1}">
-                <asvg:svgBlip xmlns:asvg="http://schemas.microsoft.com/office/drawing/2016/SVG/main" r:embed="rId2"/>
+                <asvg:svgBlip xmlns:asvg="http://schemas.microsoft.com/office/drawing/2016/SVG/main" r:embed="rId3"/>
               </a:ext>
             </a:extLst>
           </a:blip>
@@ -6363,10 +5807,10 @@
           <p:nvPr/>
         </p:nvPicPr>
         <p:blipFill>
-          <a:blip>
+          <a:blip r:embed="rId2">
             <a:extLst>
               <a:ext uri="{96DAC541-7B7A-43D3-8B79-37D633B846F1}">
-                <asvg:svgBlip xmlns:asvg="http://schemas.microsoft.com/office/drawing/2016/SVG/main" r:embed="rId2"/>
+                <asvg:svgBlip xmlns:asvg="http://schemas.microsoft.com/office/drawing/2016/SVG/main" r:embed="rId3"/>
               </a:ext>
             </a:extLst>
           </a:blip>
@@ -6413,7 +5857,7 @@
             <a:fld id="{D57F1E4F-1CFF-5643-939E-217C01CDF565}" type="slidenum">
               <a:rPr lang="en-US" sz="1400" b="1" smtClean="0"/>
               <a:pPr/>
-              <a:t>13</a:t>
+              <a:t>12</a:t>
             </a:fld>
             <a:endParaRPr lang="en-US" sz="1400" b="1" dirty="0"/>
           </a:p>
@@ -6726,7 +6170,7 @@
 </p:sld>
 </file>
 
-<file path=ppt/slides/slide14.xml><?xml version="1.0" encoding="utf-8"?>
+<file path=ppt/slides/slide13.xml><?xml version="1.0" encoding="utf-8"?>
 <p:sld xmlns:a="http://schemas.openxmlformats.org/drawingml/2006/main" xmlns:r="http://schemas.openxmlformats.org/officeDocument/2006/relationships" xmlns:p="http://schemas.openxmlformats.org/presentationml/2006/main">
   <p:cSld>
     <p:spTree>
@@ -7162,7 +6606,7 @@
             <a:fld id="{D57F1E4F-1CFF-5643-939E-217C01CDF565}" type="slidenum">
               <a:rPr lang="en-US" sz="1400" b="1" smtClean="0"/>
               <a:pPr/>
-              <a:t>14</a:t>
+              <a:t>13</a:t>
             </a:fld>
             <a:endParaRPr lang="en-US" sz="1400" b="1" dirty="0"/>
           </a:p>
@@ -7396,7 +6840,7 @@
 </p:sld>
 </file>
 
-<file path=ppt/slides/slide15.xml><?xml version="1.0" encoding="utf-8"?>
+<file path=ppt/slides/slide14.xml><?xml version="1.0" encoding="utf-8"?>
 <p:sld xmlns:a="http://schemas.openxmlformats.org/drawingml/2006/main" xmlns:r="http://schemas.openxmlformats.org/officeDocument/2006/relationships" xmlns:p="http://schemas.openxmlformats.org/presentationml/2006/main">
   <p:cSld>
     <p:spTree>
@@ -8008,7 +7452,7 @@
             <a:fld id="{D57F1E4F-1CFF-5643-939E-217C01CDF565}" type="slidenum">
               <a:rPr lang="en-US" sz="1400" b="1" smtClean="0"/>
               <a:pPr/>
-              <a:t>15</a:t>
+              <a:t>14</a:t>
             </a:fld>
             <a:endParaRPr lang="en-US" sz="1400" b="1" dirty="0"/>
           </a:p>
@@ -8027,7 +7471,7 @@
 </p:sld>
 </file>
 
-<file path=ppt/slides/slide16.xml><?xml version="1.0" encoding="utf-8"?>
+<file path=ppt/slides/slide15.xml><?xml version="1.0" encoding="utf-8"?>
 <p:sld xmlns:a="http://schemas.openxmlformats.org/drawingml/2006/main" xmlns:r="http://schemas.openxmlformats.org/officeDocument/2006/relationships" xmlns:p="http://schemas.openxmlformats.org/presentationml/2006/main">
   <p:cSld>
     <p:spTree>
@@ -8992,7 +8436,7 @@
             <a:fld id="{D57F1E4F-1CFF-5643-939E-217C01CDF565}" type="slidenum">
               <a:rPr lang="en-US" sz="1400" b="1" smtClean="0"/>
               <a:pPr/>
-              <a:t>16</a:t>
+              <a:t>15</a:t>
             </a:fld>
             <a:endParaRPr lang="en-US" sz="1400" b="1" dirty="0"/>
           </a:p>
@@ -9011,7 +8455,7 @@
 </p:sld>
 </file>
 
-<file path=ppt/slides/slide17.xml><?xml version="1.0" encoding="utf-8"?>
+<file path=ppt/slides/slide16.xml><?xml version="1.0" encoding="utf-8"?>
 <p:sld xmlns:a="http://schemas.openxmlformats.org/drawingml/2006/main" xmlns:r="http://schemas.openxmlformats.org/officeDocument/2006/relationships" xmlns:p="http://schemas.openxmlformats.org/presentationml/2006/main">
   <p:cSld>
     <p:spTree>
@@ -10112,7 +9556,7 @@
             <a:fld id="{D57F1E4F-1CFF-5643-939E-217C01CDF565}" type="slidenum">
               <a:rPr lang="en-US" sz="1400" b="1" smtClean="0"/>
               <a:pPr/>
-              <a:t>17</a:t>
+              <a:t>16</a:t>
             </a:fld>
             <a:endParaRPr lang="en-US" sz="1400" b="1" dirty="0"/>
           </a:p>
@@ -10131,7 +9575,7 @@
 </p:sld>
 </file>
 
-<file path=ppt/slides/slide18.xml><?xml version="1.0" encoding="utf-8"?>
+<file path=ppt/slides/slide17.xml><?xml version="1.0" encoding="utf-8"?>
 <p:sld xmlns:a="http://schemas.openxmlformats.org/drawingml/2006/main" xmlns:r="http://schemas.openxmlformats.org/officeDocument/2006/relationships" xmlns:p="http://schemas.openxmlformats.org/presentationml/2006/main">
   <p:cSld>
     <p:spTree>
@@ -10743,7 +10187,7 @@
             <a:fld id="{D57F1E4F-1CFF-5643-939E-217C01CDF565}" type="slidenum">
               <a:rPr lang="en-US" sz="1400" b="1" smtClean="0"/>
               <a:pPr/>
-              <a:t>18</a:t>
+              <a:t>17</a:t>
             </a:fld>
             <a:endParaRPr lang="en-US" sz="1400" b="1" dirty="0"/>
           </a:p>
@@ -10762,7 +10206,7 @@
 </p:sld>
 </file>
 
-<file path=ppt/slides/slide19.xml><?xml version="1.0" encoding="utf-8"?>
+<file path=ppt/slides/slide18.xml><?xml version="1.0" encoding="utf-8"?>
 <p:sld xmlns:a="http://schemas.openxmlformats.org/drawingml/2006/main" xmlns:r="http://schemas.openxmlformats.org/officeDocument/2006/relationships" xmlns:p="http://schemas.openxmlformats.org/presentationml/2006/main">
   <p:cSld>
     <p:spTree>
@@ -11256,10 +10700,10 @@
           <p:nvPr/>
         </p:nvPicPr>
         <p:blipFill>
-          <a:blip>
+          <a:blip r:embed="rId3">
             <a:extLst>
               <a:ext uri="{96DAC541-7B7A-43D3-8B79-37D633B846F1}">
-                <asvg:svgBlip xmlns:asvg="http://schemas.microsoft.com/office/drawing/2016/SVG/main" r:embed="rId3"/>
+                <asvg:svgBlip xmlns:asvg="http://schemas.microsoft.com/office/drawing/2016/SVG/main" r:embed="rId4"/>
               </a:ext>
             </a:extLst>
           </a:blip>
@@ -11395,10 +10839,10 @@
           <p:nvPr/>
         </p:nvPicPr>
         <p:blipFill>
-          <a:blip>
+          <a:blip r:embed="rId3">
             <a:extLst>
               <a:ext uri="{96DAC541-7B7A-43D3-8B79-37D633B846F1}">
-                <asvg:svgBlip xmlns:asvg="http://schemas.microsoft.com/office/drawing/2016/SVG/main" r:embed="rId3"/>
+                <asvg:svgBlip xmlns:asvg="http://schemas.microsoft.com/office/drawing/2016/SVG/main" r:embed="rId4"/>
               </a:ext>
             </a:extLst>
           </a:blip>
@@ -11487,7 +10931,7 @@
             <a:fld id="{D57F1E4F-1CFF-5643-939E-217C01CDF565}" type="slidenum">
               <a:rPr lang="en-US" sz="1400" b="1" smtClean="0"/>
               <a:pPr/>
-              <a:t>19</a:t>
+              <a:t>18</a:t>
             </a:fld>
             <a:endParaRPr lang="en-US" sz="1400" b="1" dirty="0"/>
           </a:p>
@@ -11506,214 +10950,7 @@
 </p:sld>
 </file>
 
-<file path=ppt/slides/slide2.xml><?xml version="1.0" encoding="utf-8"?>
-<p:sld xmlns:a="http://schemas.openxmlformats.org/drawingml/2006/main" xmlns:r="http://schemas.openxmlformats.org/officeDocument/2006/relationships" xmlns:p="http://schemas.openxmlformats.org/presentationml/2006/main">
-  <p:cSld>
-    <p:spTree>
-      <p:nvGrpSpPr>
-        <p:cNvPr id="1" name="">
-          <a:extLst>
-            <a:ext uri="{FF2B5EF4-FFF2-40B4-BE49-F238E27FC236}">
-              <a16:creationId xmlns:a16="http://schemas.microsoft.com/office/drawing/2014/main" id="{BCFEDBDF-4942-26B7-ECF8-D411863DF1CC}"/>
-            </a:ext>
-          </a:extLst>
-        </p:cNvPr>
-        <p:cNvGrpSpPr/>
-        <p:nvPr/>
-      </p:nvGrpSpPr>
-      <p:grpSpPr>
-        <a:xfrm>
-          <a:off x="0" y="0"/>
-          <a:ext cx="0" cy="0"/>
-          <a:chOff x="0" y="0"/>
-          <a:chExt cx="0" cy="0"/>
-        </a:xfrm>
-      </p:grpSpPr>
-      <p:sp>
-        <p:nvSpPr>
-          <p:cNvPr id="4" name="슬라이드 번호 개체 틀 3">
-            <a:extLst>
-              <a:ext uri="{FF2B5EF4-FFF2-40B4-BE49-F238E27FC236}">
-                <a16:creationId xmlns:a16="http://schemas.microsoft.com/office/drawing/2014/main" id="{B32F42C0-07C8-1960-872A-C341FE529FB2}"/>
-              </a:ext>
-            </a:extLst>
-          </p:cNvPr>
-          <p:cNvSpPr>
-            <a:spLocks noGrp="1"/>
-          </p:cNvSpPr>
-          <p:nvPr>
-            <p:ph type="sldNum" sz="quarter" idx="12"/>
-          </p:nvPr>
-        </p:nvSpPr>
-        <p:spPr>
-          <a:xfrm>
-            <a:off x="10514011" y="6036261"/>
-            <a:ext cx="753545" cy="365125"/>
-          </a:xfrm>
-        </p:spPr>
-        <p:txBody>
-          <a:bodyPr/>
-          <a:lstStyle/>
-          <a:p>
-            <a:fld id="{D57F1E4F-1CFF-5643-939E-217C01CDF565}" type="slidenum">
-              <a:rPr lang="en-US" smtClean="0"/>
-              <a:pPr/>
-              <a:t>2</a:t>
-            </a:fld>
-            <a:endParaRPr lang="en-US" dirty="0"/>
-          </a:p>
-        </p:txBody>
-      </p:sp>
-      <p:sp>
-        <p:nvSpPr>
-          <p:cNvPr id="3" name="제목 1">
-            <a:extLst>
-              <a:ext uri="{FF2B5EF4-FFF2-40B4-BE49-F238E27FC236}">
-                <a16:creationId xmlns:a16="http://schemas.microsoft.com/office/drawing/2014/main" id="{C83E9E23-F77D-44D2-EB8C-9981740FAE83}"/>
-              </a:ext>
-            </a:extLst>
-          </p:cNvPr>
-          <p:cNvSpPr txBox="1">
-            <a:spLocks/>
-          </p:cNvSpPr>
-          <p:nvPr/>
-        </p:nvSpPr>
-        <p:spPr>
-          <a:xfrm>
-            <a:off x="475645" y="481983"/>
-            <a:ext cx="10353762" cy="766439"/>
-          </a:xfrm>
-          <a:prstGeom prst="rect">
-            <a:avLst/>
-          </a:prstGeom>
-        </p:spPr>
-        <p:txBody>
-          <a:bodyPr vert="horz" lIns="91440" tIns="45720" rIns="91440" bIns="45720" rtlCol="0" anchor="ctr">
-            <a:normAutofit/>
-          </a:bodyPr>
-          <a:lstStyle>
-            <a:lvl1pPr algn="ctr" defTabSz="914400" rtl="0" eaLnBrk="1" latinLnBrk="1" hangingPunct="1">
-              <a:lnSpc>
-                <a:spcPct val="90000"/>
-              </a:lnSpc>
-              <a:spcBef>
-                <a:spcPct val="0"/>
-              </a:spcBef>
-              <a:buNone/>
-              <a:defRPr sz="3200" kern="1200" cap="all" baseline="0">
-                <a:solidFill>
-                  <a:schemeClr val="tx1"/>
-                </a:solidFill>
-                <a:effectLst/>
-                <a:latin typeface="Batang" panose="02030600000101010101" pitchFamily="18" charset="-127"/>
-                <a:ea typeface="Batang" panose="02030600000101010101" pitchFamily="18" charset="-127"/>
-                <a:cs typeface="+mj-cs"/>
-              </a:defRPr>
-            </a:lvl1pPr>
-          </a:lstStyle>
-          <a:p>
-            <a:pPr algn="l"/>
-            <a:r>
-              <a:rPr lang="en-US" altLang="ko-KR" sz="2800" cap="none" dirty="0">
-                <a:solidFill>
-                  <a:schemeClr val="bg2">
-                    <a:lumMod val="25000"/>
-                  </a:schemeClr>
-                </a:solidFill>
-                <a:latin typeface="D2Coding" panose="020B0609020101020101" pitchFamily="49" charset="-127"/>
-                <a:ea typeface="D2Coding" panose="020B0609020101020101" pitchFamily="49" charset="-127"/>
-                <a:cs typeface="Segoe UI Light" panose="020B0502040204020203" pitchFamily="34" charset="0"/>
-              </a:rPr>
-              <a:t>Goals</a:t>
-            </a:r>
-            <a:endParaRPr lang="ko-KR" altLang="en-US" sz="2800" cap="none" dirty="0">
-              <a:solidFill>
-                <a:schemeClr val="bg2">
-                  <a:lumMod val="25000"/>
-                </a:schemeClr>
-              </a:solidFill>
-              <a:latin typeface="D2Coding" panose="020B0609020101020101" pitchFamily="49" charset="-127"/>
-              <a:ea typeface="D2Coding" panose="020B0609020101020101" pitchFamily="49" charset="-127"/>
-              <a:cs typeface="Segoe UI Light" panose="020B0502040204020203" pitchFamily="34" charset="0"/>
-            </a:endParaRPr>
-          </a:p>
-        </p:txBody>
-      </p:sp>
-      <p:sp>
-        <p:nvSpPr>
-          <p:cNvPr id="5" name="TextBox 4">
-            <a:extLst>
-              <a:ext uri="{FF2B5EF4-FFF2-40B4-BE49-F238E27FC236}">
-                <a16:creationId xmlns:a16="http://schemas.microsoft.com/office/drawing/2014/main" id="{A0CB7729-09DC-4690-5139-CD2649D9221F}"/>
-              </a:ext>
-            </a:extLst>
-          </p:cNvPr>
-          <p:cNvSpPr txBox="1"/>
-          <p:nvPr/>
-        </p:nvSpPr>
-        <p:spPr>
-          <a:xfrm>
-            <a:off x="1166927" y="1724672"/>
-            <a:ext cx="10100629" cy="958339"/>
-          </a:xfrm>
-          <a:prstGeom prst="rect">
-            <a:avLst/>
-          </a:prstGeom>
-          <a:noFill/>
-        </p:spPr>
-        <p:txBody>
-          <a:bodyPr wrap="square">
-            <a:spAutoFit/>
-          </a:bodyPr>
-          <a:lstStyle/>
-          <a:p>
-            <a:pPr marL="342900" indent="-342900">
-              <a:lnSpc>
-                <a:spcPct val="150000"/>
-              </a:lnSpc>
-              <a:buFont typeface="Wingdings" panose="05000000000000000000" pitchFamily="2" charset="2"/>
-              <a:buChar char="v"/>
-            </a:pPr>
-            <a:r>
-              <a:rPr lang="ko-KR" altLang="en-US" sz="2000" dirty="0" err="1"/>
-              <a:t>머신러닝</a:t>
-            </a:r>
-            <a:r>
-              <a:rPr lang="ko-KR" altLang="en-US" sz="2000" dirty="0"/>
-              <a:t> 알고리즘</a:t>
-            </a:r>
-            <a:endParaRPr lang="en-US" altLang="ko-KR" sz="2000" dirty="0"/>
-          </a:p>
-          <a:p>
-            <a:pPr marL="342900" indent="-342900">
-              <a:lnSpc>
-                <a:spcPct val="150000"/>
-              </a:lnSpc>
-              <a:buFont typeface="Wingdings" panose="05000000000000000000" pitchFamily="2" charset="2"/>
-              <a:buChar char="v"/>
-            </a:pPr>
-            <a:r>
-              <a:rPr lang="ko-KR" altLang="en-US" sz="2000" dirty="0"/>
-              <a:t>분산과 편향</a:t>
-            </a:r>
-            <a:endParaRPr lang="en-US" altLang="ko-KR" sz="2000" dirty="0"/>
-          </a:p>
-        </p:txBody>
-      </p:sp>
-    </p:spTree>
-    <p:extLst>
-      <p:ext uri="{BB962C8B-B14F-4D97-AF65-F5344CB8AC3E}">
-        <p14:creationId xmlns:p14="http://schemas.microsoft.com/office/powerpoint/2010/main" val="2827070286"/>
-      </p:ext>
-    </p:extLst>
-  </p:cSld>
-  <p:clrMapOvr>
-    <a:masterClrMapping/>
-  </p:clrMapOvr>
-</p:sld>
-</file>
-
-<file path=ppt/slides/slide20.xml><?xml version="1.0" encoding="utf-8"?>
+<file path=ppt/slides/slide19.xml><?xml version="1.0" encoding="utf-8"?>
 <p:sld xmlns:a="http://schemas.openxmlformats.org/drawingml/2006/main" xmlns:r="http://schemas.openxmlformats.org/officeDocument/2006/relationships" xmlns:p="http://schemas.openxmlformats.org/presentationml/2006/main">
   <p:cSld>
     <p:spTree>
@@ -12292,7 +11529,7 @@
             <a:fld id="{D57F1E4F-1CFF-5643-939E-217C01CDF565}" type="slidenum">
               <a:rPr lang="en-US" sz="1400" b="1" smtClean="0"/>
               <a:pPr/>
-              <a:t>20</a:t>
+              <a:t>19</a:t>
             </a:fld>
             <a:endParaRPr lang="en-US" sz="1400" b="1" dirty="0"/>
           </a:p>
@@ -12311,7 +11548,648 @@
 </p:sld>
 </file>
 
-<file path=ppt/slides/slide21.xml><?xml version="1.0" encoding="utf-8"?>
+<file path=ppt/slides/slide2.xml><?xml version="1.0" encoding="utf-8"?>
+<p:sld xmlns:a="http://schemas.openxmlformats.org/drawingml/2006/main" xmlns:r="http://schemas.openxmlformats.org/officeDocument/2006/relationships" xmlns:p="http://schemas.openxmlformats.org/presentationml/2006/main">
+  <p:cSld>
+    <p:spTree>
+      <p:nvGrpSpPr>
+        <p:cNvPr id="1" name="">
+          <a:extLst>
+            <a:ext uri="{FF2B5EF4-FFF2-40B4-BE49-F238E27FC236}">
+              <a16:creationId xmlns:a16="http://schemas.microsoft.com/office/drawing/2014/main" id="{E03667BA-883A-F760-A852-48089498115B}"/>
+            </a:ext>
+          </a:extLst>
+        </p:cNvPr>
+        <p:cNvGrpSpPr/>
+        <p:nvPr/>
+      </p:nvGrpSpPr>
+      <p:grpSpPr>
+        <a:xfrm>
+          <a:off x="0" y="0"/>
+          <a:ext cx="0" cy="0"/>
+          <a:chOff x="0" y="0"/>
+          <a:chExt cx="0" cy="0"/>
+        </a:xfrm>
+      </p:grpSpPr>
+      <p:sp>
+        <p:nvSpPr>
+          <p:cNvPr id="4" name="슬라이드 번호 개체 틀 3">
+            <a:extLst>
+              <a:ext uri="{FF2B5EF4-FFF2-40B4-BE49-F238E27FC236}">
+                <a16:creationId xmlns:a16="http://schemas.microsoft.com/office/drawing/2014/main" id="{DC25E88B-6D21-127E-3DF6-DC200AC37462}"/>
+              </a:ext>
+            </a:extLst>
+          </p:cNvPr>
+          <p:cNvSpPr>
+            <a:spLocks noGrp="1"/>
+          </p:cNvSpPr>
+          <p:nvPr>
+            <p:ph type="sldNum" sz="quarter" idx="12"/>
+          </p:nvPr>
+        </p:nvSpPr>
+        <p:spPr>
+          <a:xfrm>
+            <a:off x="11180761" y="299420"/>
+            <a:ext cx="753545" cy="365125"/>
+          </a:xfrm>
+        </p:spPr>
+        <p:txBody>
+          <a:bodyPr/>
+          <a:lstStyle/>
+          <a:p>
+            <a:fld id="{D57F1E4F-1CFF-5643-939E-217C01CDF565}" type="slidenum">
+              <a:rPr lang="en-US" sz="1400" b="1" smtClean="0"/>
+              <a:pPr/>
+              <a:t>2</a:t>
+            </a:fld>
+            <a:endParaRPr lang="en-US" sz="1400" b="1" dirty="0"/>
+          </a:p>
+        </p:txBody>
+      </p:sp>
+      <p:sp>
+        <p:nvSpPr>
+          <p:cNvPr id="3" name="제목 1">
+            <a:extLst>
+              <a:ext uri="{FF2B5EF4-FFF2-40B4-BE49-F238E27FC236}">
+                <a16:creationId xmlns:a16="http://schemas.microsoft.com/office/drawing/2014/main" id="{60151A18-B816-E6A4-DE0E-617FB6906B40}"/>
+              </a:ext>
+            </a:extLst>
+          </p:cNvPr>
+          <p:cNvSpPr txBox="1">
+            <a:spLocks/>
+          </p:cNvSpPr>
+          <p:nvPr/>
+        </p:nvSpPr>
+        <p:spPr>
+          <a:xfrm>
+            <a:off x="475645" y="481983"/>
+            <a:ext cx="10353762" cy="766439"/>
+          </a:xfrm>
+          <a:prstGeom prst="rect">
+            <a:avLst/>
+          </a:prstGeom>
+        </p:spPr>
+        <p:txBody>
+          <a:bodyPr vert="horz" lIns="91440" tIns="45720" rIns="91440" bIns="45720" rtlCol="0" anchor="ctr">
+            <a:normAutofit/>
+          </a:bodyPr>
+          <a:lstStyle>
+            <a:lvl1pPr algn="ctr" defTabSz="914400" rtl="0" eaLnBrk="1" latinLnBrk="1" hangingPunct="1">
+              <a:lnSpc>
+                <a:spcPct val="90000"/>
+              </a:lnSpc>
+              <a:spcBef>
+                <a:spcPct val="0"/>
+              </a:spcBef>
+              <a:buNone/>
+              <a:defRPr sz="3200" kern="1200" cap="all" baseline="0">
+                <a:solidFill>
+                  <a:schemeClr val="tx1"/>
+                </a:solidFill>
+                <a:effectLst/>
+                <a:latin typeface="Batang" panose="02030600000101010101" pitchFamily="18" charset="-127"/>
+                <a:ea typeface="Batang" panose="02030600000101010101" pitchFamily="18" charset="-127"/>
+                <a:cs typeface="+mj-cs"/>
+              </a:defRPr>
+            </a:lvl1pPr>
+          </a:lstStyle>
+          <a:p>
+            <a:pPr algn="l"/>
+            <a:r>
+              <a:rPr lang="en-US" altLang="ko-KR" sz="2800" cap="none" dirty="0">
+                <a:solidFill>
+                  <a:schemeClr val="bg2">
+                    <a:lumMod val="25000"/>
+                  </a:schemeClr>
+                </a:solidFill>
+                <a:latin typeface="D2Coding" panose="020B0609020101020101" pitchFamily="49" charset="-127"/>
+                <a:ea typeface="D2Coding" panose="020B0609020101020101" pitchFamily="49" charset="-127"/>
+                <a:cs typeface="Segoe UI Light" panose="020B0502040204020203" pitchFamily="34" charset="0"/>
+              </a:rPr>
+              <a:t>Motivation</a:t>
+            </a:r>
+            <a:endParaRPr lang="ko-KR" altLang="en-US" sz="2800" cap="none" dirty="0">
+              <a:solidFill>
+                <a:schemeClr val="bg2">
+                  <a:lumMod val="25000"/>
+                </a:schemeClr>
+              </a:solidFill>
+              <a:latin typeface="D2Coding" panose="020B0609020101020101" pitchFamily="49" charset="-127"/>
+              <a:ea typeface="D2Coding" panose="020B0609020101020101" pitchFamily="49" charset="-127"/>
+              <a:cs typeface="Segoe UI Light" panose="020B0502040204020203" pitchFamily="34" charset="0"/>
+            </a:endParaRPr>
+          </a:p>
+        </p:txBody>
+      </p:sp>
+      <p:sp>
+        <p:nvSpPr>
+          <p:cNvPr id="13" name="TextBox 12">
+            <a:extLst>
+              <a:ext uri="{FF2B5EF4-FFF2-40B4-BE49-F238E27FC236}">
+                <a16:creationId xmlns:a16="http://schemas.microsoft.com/office/drawing/2014/main" id="{18F3E3F8-C9F6-B196-98B4-3CC4BD8CE8BE}"/>
+              </a:ext>
+            </a:extLst>
+          </p:cNvPr>
+          <p:cNvSpPr txBox="1"/>
+          <p:nvPr/>
+        </p:nvSpPr>
+        <p:spPr>
+          <a:xfrm>
+            <a:off x="542406" y="1743722"/>
+            <a:ext cx="11173949" cy="3747821"/>
+          </a:xfrm>
+          <a:prstGeom prst="rect">
+            <a:avLst/>
+          </a:prstGeom>
+          <a:noFill/>
+        </p:spPr>
+        <p:txBody>
+          <a:bodyPr wrap="square">
+            <a:spAutoFit/>
+          </a:bodyPr>
+          <a:lstStyle/>
+          <a:p>
+            <a:pPr marL="285750" indent="-285750">
+              <a:lnSpc>
+                <a:spcPct val="150000"/>
+              </a:lnSpc>
+              <a:buFont typeface="Wingdings" panose="05000000000000000000" pitchFamily="2" charset="2"/>
+              <a:buChar char="v"/>
+            </a:pPr>
+            <a:r>
+              <a:rPr lang="en-US" altLang="ko-KR" sz="1600" dirty="0">
+                <a:latin typeface="D2Coding" panose="020B0609020101020101" pitchFamily="49" charset="-127"/>
+                <a:ea typeface="D2Coding" panose="020B0609020101020101" pitchFamily="49" charset="-127"/>
+              </a:rPr>
+              <a:t>AI </a:t>
+            </a:r>
+            <a:r>
+              <a:rPr lang="ko-KR" altLang="en-US" sz="1600" dirty="0">
+                <a:latin typeface="D2Coding" panose="020B0609020101020101" pitchFamily="49" charset="-127"/>
+                <a:ea typeface="D2Coding" panose="020B0609020101020101" pitchFamily="49" charset="-127"/>
+              </a:rPr>
+              <a:t>모델이 최신 정보를 알지 못하는 지식 컷오프 </a:t>
+            </a:r>
+            <a:r>
+              <a:rPr lang="en-US" altLang="ko-KR" sz="1600" dirty="0">
+                <a:latin typeface="D2Coding" panose="020B0609020101020101" pitchFamily="49" charset="-127"/>
+                <a:ea typeface="D2Coding" panose="020B0609020101020101" pitchFamily="49" charset="-127"/>
+              </a:rPr>
+              <a:t>(Knowledge Cutoff):</a:t>
+            </a:r>
+            <a:r>
+              <a:rPr lang="ko-KR" altLang="en-US" sz="1600" dirty="0">
+                <a:latin typeface="D2Coding" panose="020B0609020101020101" pitchFamily="49" charset="-127"/>
+                <a:ea typeface="D2Coding" panose="020B0609020101020101" pitchFamily="49" charset="-127"/>
+              </a:rPr>
+              <a:t> </a:t>
+            </a:r>
+            <a:r>
+              <a:rPr lang="en-US" altLang="ko-KR" sz="1600" dirty="0">
+                <a:latin typeface="D2Coding" panose="020B0609020101020101" pitchFamily="49" charset="-127"/>
+                <a:ea typeface="D2Coding" panose="020B0609020101020101" pitchFamily="49" charset="-127"/>
+              </a:rPr>
+              <a:t>AI </a:t>
+            </a:r>
+            <a:r>
+              <a:rPr lang="ko-KR" altLang="en-US" sz="1600" dirty="0">
+                <a:latin typeface="D2Coding" panose="020B0609020101020101" pitchFamily="49" charset="-127"/>
+                <a:ea typeface="D2Coding" panose="020B0609020101020101" pitchFamily="49" charset="-127"/>
+              </a:rPr>
+              <a:t>모델의 지식이 멈춘 </a:t>
+            </a:r>
+            <a:r>
+              <a:rPr lang="en-US" altLang="ko-KR" sz="1600" dirty="0">
+                <a:latin typeface="D2Coding" panose="020B0609020101020101" pitchFamily="49" charset="-127"/>
+                <a:ea typeface="D2Coding" panose="020B0609020101020101" pitchFamily="49" charset="-127"/>
+              </a:rPr>
+              <a:t>'</a:t>
+            </a:r>
+            <a:r>
+              <a:rPr lang="ko-KR" altLang="en-US" sz="1600" dirty="0">
+                <a:latin typeface="D2Coding" panose="020B0609020101020101" pitchFamily="49" charset="-127"/>
+                <a:ea typeface="D2Coding" panose="020B0609020101020101" pitchFamily="49" charset="-127"/>
+              </a:rPr>
+              <a:t>유통기한</a:t>
+            </a:r>
+            <a:r>
+              <a:rPr lang="en-US" altLang="ko-KR" sz="1600" dirty="0">
+                <a:latin typeface="D2Coding" panose="020B0609020101020101" pitchFamily="49" charset="-127"/>
+                <a:ea typeface="D2Coding" panose="020B0609020101020101" pitchFamily="49" charset="-127"/>
+              </a:rPr>
+              <a:t>' </a:t>
+            </a:r>
+            <a:r>
+              <a:rPr lang="ko-KR" altLang="en-US" sz="1600" dirty="0">
+                <a:latin typeface="D2Coding" panose="020B0609020101020101" pitchFamily="49" charset="-127"/>
+                <a:ea typeface="D2Coding" panose="020B0609020101020101" pitchFamily="49" charset="-127"/>
+              </a:rPr>
+              <a:t>같은 시점으로</a:t>
+            </a:r>
+            <a:r>
+              <a:rPr lang="en-US" altLang="ko-KR" sz="1600" dirty="0">
+                <a:latin typeface="D2Coding" panose="020B0609020101020101" pitchFamily="49" charset="-127"/>
+                <a:ea typeface="D2Coding" panose="020B0609020101020101" pitchFamily="49" charset="-127"/>
+              </a:rPr>
+              <a:t> </a:t>
+            </a:r>
+            <a:r>
+              <a:rPr lang="ko-KR" altLang="en-US" sz="1600" dirty="0">
+                <a:latin typeface="D2Coding" panose="020B0609020101020101" pitchFamily="49" charset="-127"/>
+                <a:ea typeface="D2Coding" panose="020B0609020101020101" pitchFamily="49" charset="-127"/>
+              </a:rPr>
+              <a:t>예를 들어 어떤 </a:t>
+            </a:r>
+            <a:r>
+              <a:rPr lang="en-US" altLang="ko-KR" sz="1600" dirty="0">
+                <a:latin typeface="D2Coding" panose="020B0609020101020101" pitchFamily="49" charset="-127"/>
+                <a:ea typeface="D2Coding" panose="020B0609020101020101" pitchFamily="49" charset="-127"/>
+              </a:rPr>
+              <a:t>AI</a:t>
+            </a:r>
+            <a:r>
+              <a:rPr lang="ko-KR" altLang="en-US" sz="1600" dirty="0">
+                <a:latin typeface="D2Coding" panose="020B0609020101020101" pitchFamily="49" charset="-127"/>
+                <a:ea typeface="D2Coding" panose="020B0609020101020101" pitchFamily="49" charset="-127"/>
+              </a:rPr>
+              <a:t>의 지식 컷오프가 </a:t>
+            </a:r>
+            <a:r>
+              <a:rPr lang="en-US" altLang="ko-KR" sz="1600" dirty="0">
+                <a:latin typeface="D2Coding" panose="020B0609020101020101" pitchFamily="49" charset="-127"/>
+                <a:ea typeface="D2Coding" panose="020B0609020101020101" pitchFamily="49" charset="-127"/>
+              </a:rPr>
+              <a:t>2025</a:t>
+            </a:r>
+            <a:r>
+              <a:rPr lang="ko-KR" altLang="en-US" sz="1600" dirty="0">
+                <a:latin typeface="D2Coding" panose="020B0609020101020101" pitchFamily="49" charset="-127"/>
+                <a:ea typeface="D2Coding" panose="020B0609020101020101" pitchFamily="49" charset="-127"/>
+              </a:rPr>
+              <a:t>년 </a:t>
+            </a:r>
+            <a:r>
+              <a:rPr lang="en-US" altLang="ko-KR" sz="1600" dirty="0">
+                <a:latin typeface="D2Coding" panose="020B0609020101020101" pitchFamily="49" charset="-127"/>
+                <a:ea typeface="D2Coding" panose="020B0609020101020101" pitchFamily="49" charset="-127"/>
+              </a:rPr>
+              <a:t>12</a:t>
+            </a:r>
+            <a:r>
+              <a:rPr lang="ko-KR" altLang="en-US" sz="1600" dirty="0">
+                <a:latin typeface="D2Coding" panose="020B0609020101020101" pitchFamily="49" charset="-127"/>
+                <a:ea typeface="D2Coding" panose="020B0609020101020101" pitchFamily="49" charset="-127"/>
+              </a:rPr>
+              <a:t>월이라면</a:t>
+            </a:r>
+            <a:r>
+              <a:rPr lang="en-US" altLang="ko-KR" sz="1600" dirty="0">
+                <a:latin typeface="D2Coding" panose="020B0609020101020101" pitchFamily="49" charset="-127"/>
+                <a:ea typeface="D2Coding" panose="020B0609020101020101" pitchFamily="49" charset="-127"/>
+              </a:rPr>
+              <a:t>, AI</a:t>
+            </a:r>
+            <a:r>
+              <a:rPr lang="ko-KR" altLang="en-US" sz="1600" dirty="0">
+                <a:latin typeface="D2Coding" panose="020B0609020101020101" pitchFamily="49" charset="-127"/>
+                <a:ea typeface="D2Coding" panose="020B0609020101020101" pitchFamily="49" charset="-127"/>
+              </a:rPr>
+              <a:t>는 </a:t>
+            </a:r>
+            <a:r>
+              <a:rPr lang="en-US" altLang="ko-KR" sz="1600" dirty="0">
+                <a:latin typeface="D2Coding" panose="020B0609020101020101" pitchFamily="49" charset="-127"/>
+                <a:ea typeface="D2Coding" panose="020B0609020101020101" pitchFamily="49" charset="-127"/>
+              </a:rPr>
+              <a:t>2026</a:t>
+            </a:r>
+            <a:r>
+              <a:rPr lang="ko-KR" altLang="en-US" sz="1600" dirty="0">
+                <a:latin typeface="D2Coding" panose="020B0609020101020101" pitchFamily="49" charset="-127"/>
+                <a:ea typeface="D2Coding" panose="020B0609020101020101" pitchFamily="49" charset="-127"/>
+              </a:rPr>
+              <a:t>년에 일어난 뉴스나 사건을 알지 못하고 엉뚱한 답변</a:t>
+            </a:r>
+            <a:r>
+              <a:rPr lang="en-US" altLang="ko-KR" sz="1600" dirty="0">
+                <a:latin typeface="D2Coding" panose="020B0609020101020101" pitchFamily="49" charset="-127"/>
+                <a:ea typeface="D2Coding" panose="020B0609020101020101" pitchFamily="49" charset="-127"/>
+              </a:rPr>
+              <a:t>(Hallucination)</a:t>
+            </a:r>
+            <a:r>
+              <a:rPr lang="ko-KR" altLang="en-US" sz="1600" dirty="0">
+                <a:latin typeface="D2Coding" panose="020B0609020101020101" pitchFamily="49" charset="-127"/>
+                <a:ea typeface="D2Coding" panose="020B0609020101020101" pitchFamily="49" charset="-127"/>
+              </a:rPr>
+              <a:t>을 생성</a:t>
+            </a:r>
+            <a:r>
+              <a:rPr lang="en-US" altLang="ko-KR" sz="1600" dirty="0">
+                <a:latin typeface="D2Coding" panose="020B0609020101020101" pitchFamily="49" charset="-127"/>
+                <a:ea typeface="D2Coding" panose="020B0609020101020101" pitchFamily="49" charset="-127"/>
+              </a:rPr>
+              <a:t>(Generate)</a:t>
+            </a:r>
+            <a:r>
+              <a:rPr lang="ko-KR" altLang="en-US" sz="1600" dirty="0">
+                <a:latin typeface="D2Coding" panose="020B0609020101020101" pitchFamily="49" charset="-127"/>
+                <a:ea typeface="D2Coding" panose="020B0609020101020101" pitchFamily="49" charset="-127"/>
+              </a:rPr>
+              <a:t>하게 됨</a:t>
+            </a:r>
+            <a:endParaRPr lang="en-US" altLang="ko-KR" sz="1600" dirty="0">
+              <a:latin typeface="D2Coding" panose="020B0609020101020101" pitchFamily="49" charset="-127"/>
+              <a:ea typeface="D2Coding" panose="020B0609020101020101" pitchFamily="49" charset="-127"/>
+            </a:endParaRPr>
+          </a:p>
+          <a:p>
+            <a:pPr marL="285750" indent="-285750">
+              <a:lnSpc>
+                <a:spcPct val="150000"/>
+              </a:lnSpc>
+              <a:buFont typeface="Wingdings" panose="05000000000000000000" pitchFamily="2" charset="2"/>
+              <a:buChar char="v"/>
+            </a:pPr>
+            <a:endParaRPr lang="en-US" altLang="ko-KR" sz="1600" dirty="0">
+              <a:latin typeface="D2Coding" panose="020B0609020101020101" pitchFamily="49" charset="-127"/>
+              <a:ea typeface="D2Coding" panose="020B0609020101020101" pitchFamily="49" charset="-127"/>
+            </a:endParaRPr>
+          </a:p>
+          <a:p>
+            <a:pPr marL="285750" indent="-285750">
+              <a:lnSpc>
+                <a:spcPct val="150000"/>
+              </a:lnSpc>
+              <a:buFont typeface="Wingdings" panose="05000000000000000000" pitchFamily="2" charset="2"/>
+              <a:buChar char="v"/>
+            </a:pPr>
+            <a:r>
+              <a:rPr lang="ko-KR" altLang="en-US" sz="1600" dirty="0">
+                <a:latin typeface="D2Coding" panose="020B0609020101020101" pitchFamily="49" charset="-127"/>
+                <a:ea typeface="D2Coding" panose="020B0609020101020101" pitchFamily="49" charset="-127"/>
+              </a:rPr>
+              <a:t>데이터가 </a:t>
+            </a:r>
+            <a:r>
+              <a:rPr lang="ko-KR" altLang="en-US" sz="1600" dirty="0" err="1">
+                <a:latin typeface="D2Coding" panose="020B0609020101020101" pitchFamily="49" charset="-127"/>
+                <a:ea typeface="D2Coding" panose="020B0609020101020101" pitchFamily="49" charset="-127"/>
+              </a:rPr>
+              <a:t>데이터가</a:t>
+            </a:r>
+            <a:r>
+              <a:rPr lang="ko-KR" altLang="en-US" sz="1600" dirty="0">
+                <a:latin typeface="D2Coding" panose="020B0609020101020101" pitchFamily="49" charset="-127"/>
+                <a:ea typeface="D2Coding" panose="020B0609020101020101" pitchFamily="49" charset="-127"/>
+              </a:rPr>
+              <a:t> </a:t>
+            </a:r>
+            <a:r>
+              <a:rPr lang="en-US" altLang="ko-KR" sz="1600" dirty="0">
+                <a:latin typeface="D2Coding" panose="020B0609020101020101" pitchFamily="49" charset="-127"/>
+                <a:ea typeface="D2Coding" panose="020B0609020101020101" pitchFamily="49" charset="-127"/>
+              </a:rPr>
+              <a:t>1~2</a:t>
+            </a:r>
+            <a:r>
+              <a:rPr lang="ko-KR" altLang="en-US" sz="1600" dirty="0">
+                <a:latin typeface="D2Coding" panose="020B0609020101020101" pitchFamily="49" charset="-127"/>
+                <a:ea typeface="D2Coding" panose="020B0609020101020101" pitchFamily="49" charset="-127"/>
+              </a:rPr>
+              <a:t>페이지일 때 질문할 때마다 프롬프트에 그 내용을 통째로 복사</a:t>
+            </a:r>
+            <a:r>
+              <a:rPr lang="en-US" altLang="ko-KR" sz="1600" dirty="0">
+                <a:latin typeface="D2Coding" panose="020B0609020101020101" pitchFamily="49" charset="-127"/>
+                <a:ea typeface="D2Coding" panose="020B0609020101020101" pitchFamily="49" charset="-127"/>
+              </a:rPr>
+              <a:t>·</a:t>
+            </a:r>
+            <a:r>
+              <a:rPr lang="ko-KR" altLang="en-US" sz="1600" dirty="0">
+                <a:latin typeface="D2Coding" panose="020B0609020101020101" pitchFamily="49" charset="-127"/>
+                <a:ea typeface="D2Coding" panose="020B0609020101020101" pitchFamily="49" charset="-127"/>
+              </a:rPr>
+              <a:t>붙여넣기</a:t>
+            </a:r>
+            <a:r>
+              <a:rPr lang="en-US" altLang="ko-KR" sz="1600" dirty="0">
+                <a:latin typeface="D2Coding" panose="020B0609020101020101" pitchFamily="49" charset="-127"/>
+                <a:ea typeface="D2Coding" panose="020B0609020101020101" pitchFamily="49" charset="-127"/>
+              </a:rPr>
+              <a:t>(Context)</a:t>
+            </a:r>
+            <a:r>
+              <a:rPr lang="ko-KR" altLang="en-US" sz="1600" dirty="0">
+                <a:latin typeface="D2Coding" panose="020B0609020101020101" pitchFamily="49" charset="-127"/>
+                <a:ea typeface="D2Coding" panose="020B0609020101020101" pitchFamily="49" charset="-127"/>
+              </a:rPr>
+              <a:t>해서 모델에 넘기면 해결되니 번거로운</a:t>
+            </a:r>
+            <a:r>
+              <a:rPr lang="en-US" altLang="ko-KR" sz="1600" dirty="0">
+                <a:latin typeface="D2Coding" panose="020B0609020101020101" pitchFamily="49" charset="-127"/>
+                <a:ea typeface="D2Coding" panose="020B0609020101020101" pitchFamily="49" charset="-127"/>
+              </a:rPr>
+              <a:t> </a:t>
+            </a:r>
+            <a:r>
+              <a:rPr lang="ko-KR" altLang="en-US" sz="1600" dirty="0">
+                <a:latin typeface="D2Coding" panose="020B0609020101020101" pitchFamily="49" charset="-127"/>
+                <a:ea typeface="D2Coding" panose="020B0609020101020101" pitchFamily="49" charset="-127"/>
+              </a:rPr>
+              <a:t>것 이외에는 기술적 고민이나 복잡한 아키텍처가 전혀 필요 없지만</a:t>
+            </a:r>
+            <a:r>
+              <a:rPr lang="en-US" altLang="ko-KR" sz="1600" dirty="0">
+                <a:latin typeface="D2Coding" panose="020B0609020101020101" pitchFamily="49" charset="-127"/>
+                <a:ea typeface="D2Coding" panose="020B0609020101020101" pitchFamily="49" charset="-127"/>
+              </a:rPr>
+              <a:t>,</a:t>
+            </a:r>
+          </a:p>
+          <a:p>
+            <a:pPr marL="285750" indent="-285750">
+              <a:lnSpc>
+                <a:spcPct val="150000"/>
+              </a:lnSpc>
+              <a:buFont typeface="Wingdings" panose="05000000000000000000" pitchFamily="2" charset="2"/>
+              <a:buChar char="v"/>
+            </a:pPr>
+            <a:endParaRPr lang="en-US" altLang="ko-KR" sz="1600" dirty="0">
+              <a:latin typeface="D2Coding" panose="020B0609020101020101" pitchFamily="49" charset="-127"/>
+              <a:ea typeface="D2Coding" panose="020B0609020101020101" pitchFamily="49" charset="-127"/>
+            </a:endParaRPr>
+          </a:p>
+          <a:p>
+            <a:pPr marL="285750" indent="-285750">
+              <a:lnSpc>
+                <a:spcPct val="150000"/>
+              </a:lnSpc>
+              <a:buFont typeface="Wingdings" panose="05000000000000000000" pitchFamily="2" charset="2"/>
+              <a:buChar char="v"/>
+            </a:pPr>
+            <a:r>
+              <a:rPr lang="ko-KR" altLang="en-US" sz="1600" dirty="0">
+                <a:latin typeface="D2Coding" panose="020B0609020101020101" pitchFamily="49" charset="-127"/>
+                <a:ea typeface="D2Coding" panose="020B0609020101020101" pitchFamily="49" charset="-127"/>
+              </a:rPr>
+              <a:t>만약 여러분 회사의 방대한 모든 </a:t>
+            </a:r>
+            <a:r>
+              <a:rPr lang="ko-KR" altLang="en-US" sz="1600" dirty="0" err="1">
+                <a:latin typeface="D2Coding" panose="020B0609020101020101" pitchFamily="49" charset="-127"/>
+                <a:ea typeface="D2Coding" panose="020B0609020101020101" pitchFamily="49" charset="-127"/>
+              </a:rPr>
+              <a:t>규정집</a:t>
+            </a:r>
+            <a:r>
+              <a:rPr lang="en-US" altLang="ko-KR" sz="1600" dirty="0">
+                <a:latin typeface="D2Coding" panose="020B0609020101020101" pitchFamily="49" charset="-127"/>
+                <a:ea typeface="D2Coding" panose="020B0609020101020101" pitchFamily="49" charset="-127"/>
+              </a:rPr>
+              <a:t>(Huge Quantity)</a:t>
+            </a:r>
+            <a:r>
+              <a:rPr lang="ko-KR" altLang="en-US" sz="1600" dirty="0">
+                <a:latin typeface="D2Coding" panose="020B0609020101020101" pitchFamily="49" charset="-127"/>
+                <a:ea typeface="D2Coding" panose="020B0609020101020101" pitchFamily="49" charset="-127"/>
+              </a:rPr>
+              <a:t>을 </a:t>
+            </a:r>
+            <a:r>
+              <a:rPr lang="en-US" altLang="ko-KR" sz="1600" dirty="0">
+                <a:latin typeface="D2Coding" panose="020B0609020101020101" pitchFamily="49" charset="-127"/>
+                <a:ea typeface="D2Coding" panose="020B0609020101020101" pitchFamily="49" charset="-127"/>
+              </a:rPr>
+              <a:t>LLM</a:t>
+            </a:r>
+            <a:r>
+              <a:rPr lang="ko-KR" altLang="en-US" sz="1600" dirty="0">
+                <a:latin typeface="D2Coding" panose="020B0609020101020101" pitchFamily="49" charset="-127"/>
+                <a:ea typeface="D2Coding" panose="020B0609020101020101" pitchFamily="49" charset="-127"/>
+              </a:rPr>
+              <a:t>에게 참고하라고 한다면</a:t>
+            </a:r>
+            <a:r>
+              <a:rPr lang="en-US" altLang="ko-KR" sz="1600" dirty="0">
+                <a:latin typeface="D2Coding" panose="020B0609020101020101" pitchFamily="49" charset="-127"/>
+                <a:ea typeface="D2Coding" panose="020B0609020101020101" pitchFamily="49" charset="-127"/>
+              </a:rPr>
+              <a:t>, </a:t>
+            </a:r>
+            <a:r>
+              <a:rPr lang="ko-KR" altLang="en-US" sz="1600" dirty="0">
+                <a:latin typeface="D2Coding" panose="020B0609020101020101" pitchFamily="49" charset="-127"/>
+                <a:ea typeface="D2Coding" panose="020B0609020101020101" pitchFamily="49" charset="-127"/>
+              </a:rPr>
+              <a:t>매번 수천 페이지를 복사해서 붙여 넣을 건가</a:t>
+            </a:r>
+            <a:r>
+              <a:rPr lang="en-US" altLang="ko-KR" sz="1600" dirty="0">
+                <a:latin typeface="D2Coding" panose="020B0609020101020101" pitchFamily="49" charset="-127"/>
+                <a:ea typeface="D2Coding" panose="020B0609020101020101" pitchFamily="49" charset="-127"/>
+              </a:rPr>
+              <a:t>? </a:t>
+            </a:r>
+            <a:r>
+              <a:rPr lang="ko-KR" altLang="en-US" sz="1600" dirty="0">
+                <a:latin typeface="D2Coding" panose="020B0609020101020101" pitchFamily="49" charset="-127"/>
+                <a:ea typeface="D2Coding" panose="020B0609020101020101" pitchFamily="49" charset="-127"/>
+              </a:rPr>
+              <a:t>불가능하죠</a:t>
+            </a:r>
+            <a:r>
+              <a:rPr lang="en-US" altLang="ko-KR" sz="1600" dirty="0">
+                <a:latin typeface="D2Coding" panose="020B0609020101020101" pitchFamily="49" charset="-127"/>
+                <a:ea typeface="D2Coding" panose="020B0609020101020101" pitchFamily="49" charset="-127"/>
+              </a:rPr>
+              <a:t>? </a:t>
+            </a:r>
+            <a:r>
+              <a:rPr lang="ko-KR" altLang="en-US" sz="1600" dirty="0">
+                <a:latin typeface="D2Coding" panose="020B0609020101020101" pitchFamily="49" charset="-127"/>
+                <a:ea typeface="D2Coding" panose="020B0609020101020101" pitchFamily="49" charset="-127"/>
+              </a:rPr>
+              <a:t>그래서 </a:t>
+            </a:r>
+            <a:r>
+              <a:rPr lang="en-US" altLang="ko-KR" sz="1600" dirty="0">
+                <a:latin typeface="D2Coding" panose="020B0609020101020101" pitchFamily="49" charset="-127"/>
+                <a:ea typeface="D2Coding" panose="020B0609020101020101" pitchFamily="49" charset="-127"/>
+              </a:rPr>
+              <a:t>'</a:t>
+            </a:r>
+            <a:r>
+              <a:rPr lang="ko-KR" altLang="en-US" sz="1600" dirty="0">
+                <a:latin typeface="D2Coding" panose="020B0609020101020101" pitchFamily="49" charset="-127"/>
+                <a:ea typeface="D2Coding" panose="020B0609020101020101" pitchFamily="49" charset="-127"/>
+              </a:rPr>
+              <a:t>정답 조각</a:t>
+            </a:r>
+            <a:r>
+              <a:rPr lang="en-US" altLang="ko-KR" sz="1600" dirty="0">
+                <a:latin typeface="D2Coding" panose="020B0609020101020101" pitchFamily="49" charset="-127"/>
+                <a:ea typeface="D2Coding" panose="020B0609020101020101" pitchFamily="49" charset="-127"/>
+              </a:rPr>
+              <a:t>(Chunk)</a:t>
+            </a:r>
+            <a:r>
+              <a:rPr lang="ko-KR" altLang="en-US" sz="1600" dirty="0">
+                <a:latin typeface="D2Coding" panose="020B0609020101020101" pitchFamily="49" charset="-127"/>
+                <a:ea typeface="D2Coding" panose="020B0609020101020101" pitchFamily="49" charset="-127"/>
+              </a:rPr>
+              <a:t> 고르기 기술</a:t>
+            </a:r>
+            <a:r>
+              <a:rPr lang="en-US" altLang="ko-KR" sz="1600" dirty="0">
+                <a:latin typeface="D2Coding" panose="020B0609020101020101" pitchFamily="49" charset="-127"/>
+                <a:ea typeface="D2Coding" panose="020B0609020101020101" pitchFamily="49" charset="-127"/>
+              </a:rPr>
+              <a:t>'</a:t>
+            </a:r>
+            <a:r>
+              <a:rPr lang="ko-KR" altLang="en-US" sz="1600" dirty="0">
+                <a:latin typeface="D2Coding" panose="020B0609020101020101" pitchFamily="49" charset="-127"/>
+                <a:ea typeface="D2Coding" panose="020B0609020101020101" pitchFamily="49" charset="-127"/>
+              </a:rPr>
+              <a:t>이 필요</a:t>
+            </a:r>
+            <a:endParaRPr lang="en-US" altLang="ko-KR" sz="1600" dirty="0">
+              <a:latin typeface="D2Coding" panose="020B0609020101020101" pitchFamily="49" charset="-127"/>
+              <a:ea typeface="D2Coding" panose="020B0609020101020101" pitchFamily="49" charset="-127"/>
+            </a:endParaRPr>
+          </a:p>
+          <a:p>
+            <a:pPr marL="285750" indent="-285750">
+              <a:lnSpc>
+                <a:spcPct val="150000"/>
+              </a:lnSpc>
+              <a:buFont typeface="Wingdings" panose="05000000000000000000" pitchFamily="2" charset="2"/>
+              <a:buChar char="v"/>
+            </a:pPr>
+            <a:endParaRPr lang="ko-KR" altLang="en-US" sz="1600" dirty="0">
+              <a:latin typeface="D2Coding" panose="020B0609020101020101" pitchFamily="49" charset="-127"/>
+              <a:ea typeface="D2Coding" panose="020B0609020101020101" pitchFamily="49" charset="-127"/>
+            </a:endParaRPr>
+          </a:p>
+        </p:txBody>
+      </p:sp>
+    </p:spTree>
+    <p:extLst>
+      <p:ext uri="{BB962C8B-B14F-4D97-AF65-F5344CB8AC3E}">
+        <p14:creationId xmlns:p14="http://schemas.microsoft.com/office/powerpoint/2010/main" val="2538986326"/>
+      </p:ext>
+    </p:extLst>
+  </p:cSld>
+  <p:clrMapOvr>
+    <a:masterClrMapping/>
+  </p:clrMapOvr>
+</p:sld>
+</file>
+
+<file path=ppt/slides/slide20.xml><?xml version="1.0" encoding="utf-8"?>
 <p:sld xmlns:a="http://schemas.openxmlformats.org/drawingml/2006/main" xmlns:r="http://schemas.openxmlformats.org/officeDocument/2006/relationships" xmlns:p="http://schemas.openxmlformats.org/presentationml/2006/main">
   <p:cSld>
     <p:spTree>
@@ -12394,7 +12272,7 @@
                 <a:ea typeface="D2Coding" panose="020B0609020101020101" pitchFamily="49" charset="-127"/>
                 <a:cs typeface="Segoe UI Light" panose="020B0502040204020203" pitchFamily="34" charset="0"/>
               </a:rPr>
-              <a:t>RAG(</a:t>
+              <a:t>RAG STEP</a:t>
             </a:r>
             <a:r>
               <a:rPr lang="ko-KR" altLang="en-US" sz="2800" cap="none" dirty="0">
@@ -12407,7 +12285,7 @@
                 <a:ea typeface="D2Coding" panose="020B0609020101020101" pitchFamily="49" charset="-127"/>
                 <a:cs typeface="Segoe UI Light" panose="020B0502040204020203" pitchFamily="34" charset="0"/>
               </a:rPr>
-              <a:t>검색 증강 생성</a:t>
+              <a:t> </a:t>
             </a:r>
             <a:r>
               <a:rPr lang="en-US" altLang="ko-KR" sz="2800" cap="none" dirty="0">
@@ -12420,7 +12298,7 @@
                 <a:ea typeface="D2Coding" panose="020B0609020101020101" pitchFamily="49" charset="-127"/>
                 <a:cs typeface="Segoe UI Light" panose="020B0502040204020203" pitchFamily="34" charset="0"/>
               </a:rPr>
-              <a:t>, Retrieval-Augmented Generation)</a:t>
+              <a:t>1. Data Indexing </a:t>
             </a:r>
             <a:endParaRPr lang="ko-KR" altLang="en-US" sz="2800" cap="none" dirty="0">
               <a:solidFill>
@@ -13115,7 +12993,7 @@
             <a:fld id="{D57F1E4F-1CFF-5643-939E-217C01CDF565}" type="slidenum">
               <a:rPr lang="en-US" sz="1400" b="1" smtClean="0"/>
               <a:pPr/>
-              <a:t>21</a:t>
+              <a:t>20</a:t>
             </a:fld>
             <a:endParaRPr lang="en-US" sz="1400" b="1" dirty="0"/>
           </a:p>
@@ -13134,7 +13012,7 @@
 </p:sld>
 </file>
 
-<file path=ppt/slides/slide22.xml><?xml version="1.0" encoding="utf-8"?>
+<file path=ppt/slides/slide21.xml><?xml version="1.0" encoding="utf-8"?>
 <p:sld xmlns:a="http://schemas.openxmlformats.org/drawingml/2006/main" xmlns:r="http://schemas.openxmlformats.org/officeDocument/2006/relationships" xmlns:p="http://schemas.openxmlformats.org/presentationml/2006/main">
   <p:cSld>
     <p:spTree>
@@ -13217,7 +13095,7 @@
                 <a:ea typeface="D2Coding" panose="020B0609020101020101" pitchFamily="49" charset="-127"/>
                 <a:cs typeface="Segoe UI Light" panose="020B0502040204020203" pitchFamily="34" charset="0"/>
               </a:rPr>
-              <a:t>RAG(</a:t>
+              <a:t>RAG STEP</a:t>
             </a:r>
             <a:r>
               <a:rPr lang="ko-KR" altLang="en-US" sz="2800" cap="none" dirty="0">
@@ -13230,7 +13108,7 @@
                 <a:ea typeface="D2Coding" panose="020B0609020101020101" pitchFamily="49" charset="-127"/>
                 <a:cs typeface="Segoe UI Light" panose="020B0502040204020203" pitchFamily="34" charset="0"/>
               </a:rPr>
-              <a:t>검색 증강 생성</a:t>
+              <a:t> </a:t>
             </a:r>
             <a:r>
               <a:rPr lang="en-US" altLang="ko-KR" sz="2800" cap="none" dirty="0">
@@ -13243,7 +13121,7 @@
                 <a:ea typeface="D2Coding" panose="020B0609020101020101" pitchFamily="49" charset="-127"/>
                 <a:cs typeface="Segoe UI Light" panose="020B0502040204020203" pitchFamily="34" charset="0"/>
               </a:rPr>
-              <a:t>, Retrieval-Augmented Generation)</a:t>
+              <a:t>1. Data Indexing </a:t>
             </a:r>
             <a:endParaRPr lang="ko-KR" altLang="en-US" sz="2800" cap="none" dirty="0">
               <a:solidFill>
@@ -13399,7 +13277,7 @@
             <a:fld id="{D57F1E4F-1CFF-5643-939E-217C01CDF565}" type="slidenum">
               <a:rPr lang="en-US" sz="1400" b="1" smtClean="0"/>
               <a:pPr/>
-              <a:t>22</a:t>
+              <a:t>21</a:t>
             </a:fld>
             <a:endParaRPr lang="en-US" sz="1400" b="1" dirty="0"/>
           </a:p>
@@ -13418,7 +13296,7 @@
 </p:sld>
 </file>
 
-<file path=ppt/slides/slide23.xml><?xml version="1.0" encoding="utf-8"?>
+<file path=ppt/slides/slide22.xml><?xml version="1.0" encoding="utf-8"?>
 <p:sld xmlns:a="http://schemas.openxmlformats.org/drawingml/2006/main" xmlns:r="http://schemas.openxmlformats.org/officeDocument/2006/relationships" xmlns:p="http://schemas.openxmlformats.org/presentationml/2006/main">
   <p:cSld>
     <p:spTree>
@@ -13501,10 +13379,17 @@
                 <a:ea typeface="D2Coding" panose="020B0609020101020101" pitchFamily="49" charset="-127"/>
                 <a:cs typeface="Segoe UI Light" panose="020B0502040204020203" pitchFamily="34" charset="0"/>
               </a:rPr>
-              <a:t>RAG(</a:t>
-            </a:r>
-            <a:r>
-              <a:rPr lang="ko-KR" altLang="en-US" sz="2800" cap="none" dirty="0">
+              <a:t>RAG </a:t>
+            </a:r>
+            <a:r>
+              <a:rPr lang="en-US" altLang="ko-KR" sz="2800" dirty="0">
+                <a:latin typeface="D2Coding" panose="020B0609020101020101" pitchFamily="49" charset="-127"/>
+                <a:ea typeface="D2Coding" panose="020B0609020101020101" pitchFamily="49" charset="-127"/>
+              </a:rPr>
+              <a:t>Step 2. </a:t>
+            </a:r>
+            <a:r>
+              <a:rPr lang="en-US" altLang="ko-KR" sz="2800" cap="none" dirty="0">
                 <a:solidFill>
                   <a:schemeClr val="bg2">
                     <a:lumMod val="25000"/>
@@ -13514,20 +13399,7 @@
                 <a:ea typeface="D2Coding" panose="020B0609020101020101" pitchFamily="49" charset="-127"/>
                 <a:cs typeface="Segoe UI Light" panose="020B0502040204020203" pitchFamily="34" charset="0"/>
               </a:rPr>
-              <a:t>검색 증강 생성</a:t>
-            </a:r>
-            <a:r>
-              <a:rPr lang="en-US" altLang="ko-KR" sz="2800" cap="none" dirty="0">
-                <a:solidFill>
-                  <a:schemeClr val="bg2">
-                    <a:lumMod val="25000"/>
-                  </a:schemeClr>
-                </a:solidFill>
-                <a:latin typeface="D2Coding" panose="020B0609020101020101" pitchFamily="49" charset="-127"/>
-                <a:ea typeface="D2Coding" panose="020B0609020101020101" pitchFamily="49" charset="-127"/>
-                <a:cs typeface="Segoe UI Light" panose="020B0502040204020203" pitchFamily="34" charset="0"/>
-              </a:rPr>
-              <a:t>, Retrieval-Augmented Generation)</a:t>
+              <a:t>Data Retrieval &amp; Generation</a:t>
             </a:r>
             <a:endParaRPr lang="ko-KR" altLang="en-US" sz="2800" cap="none" dirty="0">
               <a:solidFill>
@@ -14302,7 +14174,7 @@
             <a:fld id="{D57F1E4F-1CFF-5643-939E-217C01CDF565}" type="slidenum">
               <a:rPr lang="en-US" sz="1400" b="1" smtClean="0"/>
               <a:pPr/>
-              <a:t>23</a:t>
+              <a:t>22</a:t>
             </a:fld>
             <a:endParaRPr lang="en-US" sz="1400" b="1" dirty="0"/>
           </a:p>
@@ -14321,7 +14193,7 @@
 </p:sld>
 </file>
 
-<file path=ppt/slides/slide24.xml><?xml version="1.0" encoding="utf-8"?>
+<file path=ppt/slides/slide23.xml><?xml version="1.0" encoding="utf-8"?>
 <p:sld xmlns:a="http://schemas.openxmlformats.org/drawingml/2006/main" xmlns:r="http://schemas.openxmlformats.org/officeDocument/2006/relationships" xmlns:p="http://schemas.openxmlformats.org/presentationml/2006/main">
   <p:cSld>
     <p:spTree>
@@ -14404,10 +14276,17 @@
                 <a:ea typeface="D2Coding" panose="020B0609020101020101" pitchFamily="49" charset="-127"/>
                 <a:cs typeface="Segoe UI Light" panose="020B0502040204020203" pitchFamily="34" charset="0"/>
               </a:rPr>
-              <a:t>RAG(</a:t>
-            </a:r>
-            <a:r>
-              <a:rPr lang="ko-KR" altLang="en-US" sz="2800" cap="none" dirty="0">
+              <a:t>RAG </a:t>
+            </a:r>
+            <a:r>
+              <a:rPr lang="en-US" altLang="ko-KR" sz="2800" dirty="0">
+                <a:latin typeface="D2Coding" panose="020B0609020101020101" pitchFamily="49" charset="-127"/>
+                <a:ea typeface="D2Coding" panose="020B0609020101020101" pitchFamily="49" charset="-127"/>
+              </a:rPr>
+              <a:t>Step 2. </a:t>
+            </a:r>
+            <a:r>
+              <a:rPr lang="en-US" altLang="ko-KR" sz="2800" cap="none" dirty="0">
                 <a:solidFill>
                   <a:schemeClr val="bg2">
                     <a:lumMod val="25000"/>
@@ -14417,20 +14296,7 @@
                 <a:ea typeface="D2Coding" panose="020B0609020101020101" pitchFamily="49" charset="-127"/>
                 <a:cs typeface="Segoe UI Light" panose="020B0502040204020203" pitchFamily="34" charset="0"/>
               </a:rPr>
-              <a:t>검색 증강 생성</a:t>
-            </a:r>
-            <a:r>
-              <a:rPr lang="en-US" altLang="ko-KR" sz="2800" cap="none" dirty="0">
-                <a:solidFill>
-                  <a:schemeClr val="bg2">
-                    <a:lumMod val="25000"/>
-                  </a:schemeClr>
-                </a:solidFill>
-                <a:latin typeface="D2Coding" panose="020B0609020101020101" pitchFamily="49" charset="-127"/>
-                <a:ea typeface="D2Coding" panose="020B0609020101020101" pitchFamily="49" charset="-127"/>
-                <a:cs typeface="Segoe UI Light" panose="020B0502040204020203" pitchFamily="34" charset="0"/>
-              </a:rPr>
-              <a:t>, Retrieval-Augmented Generation)</a:t>
+              <a:t>Data Retrieval &amp; Generation</a:t>
             </a:r>
             <a:endParaRPr lang="ko-KR" altLang="en-US" sz="2800" cap="none" dirty="0">
               <a:solidFill>
@@ -14506,8 +14372,8 @@
         </p:nvSpPr>
         <p:spPr>
           <a:xfrm>
-            <a:off x="638175" y="1333411"/>
-            <a:ext cx="10858500" cy="584775"/>
+            <a:off x="638175" y="1228636"/>
+            <a:ext cx="10858500" cy="791435"/>
           </a:xfrm>
           <a:prstGeom prst="rect">
             <a:avLst/>
@@ -14521,6 +14387,9 @@
           <a:lstStyle/>
           <a:p>
             <a:pPr marL="285750" indent="-285750">
+              <a:lnSpc>
+                <a:spcPct val="150000"/>
+              </a:lnSpc>
               <a:buFont typeface="Wingdings" panose="05000000000000000000" pitchFamily="2" charset="2"/>
               <a:buChar char="v"/>
             </a:pPr>
@@ -14683,7 +14552,7 @@
             <a:fld id="{D57F1E4F-1CFF-5643-939E-217C01CDF565}" type="slidenum">
               <a:rPr lang="en-US" sz="1400" b="1" smtClean="0"/>
               <a:pPr/>
-              <a:t>24</a:t>
+              <a:t>23</a:t>
             </a:fld>
             <a:endParaRPr lang="en-US" sz="1400" b="1" dirty="0"/>
           </a:p>
@@ -14703,647 +14572,6 @@
 </file>
 
 <file path=ppt/slides/slide3.xml><?xml version="1.0" encoding="utf-8"?>
-<p:sld xmlns:a="http://schemas.openxmlformats.org/drawingml/2006/main" xmlns:r="http://schemas.openxmlformats.org/officeDocument/2006/relationships" xmlns:p="http://schemas.openxmlformats.org/presentationml/2006/main">
-  <p:cSld>
-    <p:spTree>
-      <p:nvGrpSpPr>
-        <p:cNvPr id="1" name="">
-          <a:extLst>
-            <a:ext uri="{FF2B5EF4-FFF2-40B4-BE49-F238E27FC236}">
-              <a16:creationId xmlns:a16="http://schemas.microsoft.com/office/drawing/2014/main" id="{E03667BA-883A-F760-A852-48089498115B}"/>
-            </a:ext>
-          </a:extLst>
-        </p:cNvPr>
-        <p:cNvGrpSpPr/>
-        <p:nvPr/>
-      </p:nvGrpSpPr>
-      <p:grpSpPr>
-        <a:xfrm>
-          <a:off x="0" y="0"/>
-          <a:ext cx="0" cy="0"/>
-          <a:chOff x="0" y="0"/>
-          <a:chExt cx="0" cy="0"/>
-        </a:xfrm>
-      </p:grpSpPr>
-      <p:sp>
-        <p:nvSpPr>
-          <p:cNvPr id="4" name="슬라이드 번호 개체 틀 3">
-            <a:extLst>
-              <a:ext uri="{FF2B5EF4-FFF2-40B4-BE49-F238E27FC236}">
-                <a16:creationId xmlns:a16="http://schemas.microsoft.com/office/drawing/2014/main" id="{DC25E88B-6D21-127E-3DF6-DC200AC37462}"/>
-              </a:ext>
-            </a:extLst>
-          </p:cNvPr>
-          <p:cNvSpPr>
-            <a:spLocks noGrp="1"/>
-          </p:cNvSpPr>
-          <p:nvPr>
-            <p:ph type="sldNum" sz="quarter" idx="12"/>
-          </p:nvPr>
-        </p:nvSpPr>
-        <p:spPr>
-          <a:xfrm>
-            <a:off x="11180761" y="299420"/>
-            <a:ext cx="753545" cy="365125"/>
-          </a:xfrm>
-        </p:spPr>
-        <p:txBody>
-          <a:bodyPr/>
-          <a:lstStyle/>
-          <a:p>
-            <a:fld id="{D57F1E4F-1CFF-5643-939E-217C01CDF565}" type="slidenum">
-              <a:rPr lang="en-US" sz="1400" b="1" smtClean="0"/>
-              <a:pPr/>
-              <a:t>3</a:t>
-            </a:fld>
-            <a:endParaRPr lang="en-US" sz="1400" b="1" dirty="0"/>
-          </a:p>
-        </p:txBody>
-      </p:sp>
-      <p:sp>
-        <p:nvSpPr>
-          <p:cNvPr id="3" name="제목 1">
-            <a:extLst>
-              <a:ext uri="{FF2B5EF4-FFF2-40B4-BE49-F238E27FC236}">
-                <a16:creationId xmlns:a16="http://schemas.microsoft.com/office/drawing/2014/main" id="{60151A18-B816-E6A4-DE0E-617FB6906B40}"/>
-              </a:ext>
-            </a:extLst>
-          </p:cNvPr>
-          <p:cNvSpPr txBox="1">
-            <a:spLocks/>
-          </p:cNvSpPr>
-          <p:nvPr/>
-        </p:nvSpPr>
-        <p:spPr>
-          <a:xfrm>
-            <a:off x="475645" y="481983"/>
-            <a:ext cx="10353762" cy="766439"/>
-          </a:xfrm>
-          <a:prstGeom prst="rect">
-            <a:avLst/>
-          </a:prstGeom>
-        </p:spPr>
-        <p:txBody>
-          <a:bodyPr vert="horz" lIns="91440" tIns="45720" rIns="91440" bIns="45720" rtlCol="0" anchor="ctr">
-            <a:normAutofit/>
-          </a:bodyPr>
-          <a:lstStyle>
-            <a:lvl1pPr algn="ctr" defTabSz="914400" rtl="0" eaLnBrk="1" latinLnBrk="1" hangingPunct="1">
-              <a:lnSpc>
-                <a:spcPct val="90000"/>
-              </a:lnSpc>
-              <a:spcBef>
-                <a:spcPct val="0"/>
-              </a:spcBef>
-              <a:buNone/>
-              <a:defRPr sz="3200" kern="1200" cap="all" baseline="0">
-                <a:solidFill>
-                  <a:schemeClr val="tx1"/>
-                </a:solidFill>
-                <a:effectLst/>
-                <a:latin typeface="Batang" panose="02030600000101010101" pitchFamily="18" charset="-127"/>
-                <a:ea typeface="Batang" panose="02030600000101010101" pitchFamily="18" charset="-127"/>
-                <a:cs typeface="+mj-cs"/>
-              </a:defRPr>
-            </a:lvl1pPr>
-          </a:lstStyle>
-          <a:p>
-            <a:pPr algn="l"/>
-            <a:r>
-              <a:rPr lang="en-US" altLang="ko-KR" sz="2800" cap="none" dirty="0">
-                <a:solidFill>
-                  <a:schemeClr val="bg2">
-                    <a:lumMod val="25000"/>
-                  </a:schemeClr>
-                </a:solidFill>
-                <a:latin typeface="D2Coding" panose="020B0609020101020101" pitchFamily="49" charset="-127"/>
-                <a:ea typeface="D2Coding" panose="020B0609020101020101" pitchFamily="49" charset="-127"/>
-                <a:cs typeface="Segoe UI Light" panose="020B0502040204020203" pitchFamily="34" charset="0"/>
-              </a:rPr>
-              <a:t>Motivation</a:t>
-            </a:r>
-            <a:endParaRPr lang="ko-KR" altLang="en-US" sz="2800" cap="none" dirty="0">
-              <a:solidFill>
-                <a:schemeClr val="bg2">
-                  <a:lumMod val="25000"/>
-                </a:schemeClr>
-              </a:solidFill>
-              <a:latin typeface="D2Coding" panose="020B0609020101020101" pitchFamily="49" charset="-127"/>
-              <a:ea typeface="D2Coding" panose="020B0609020101020101" pitchFamily="49" charset="-127"/>
-              <a:cs typeface="Segoe UI Light" panose="020B0502040204020203" pitchFamily="34" charset="0"/>
-            </a:endParaRPr>
-          </a:p>
-        </p:txBody>
-      </p:sp>
-      <p:sp>
-        <p:nvSpPr>
-          <p:cNvPr id="13" name="TextBox 12">
-            <a:extLst>
-              <a:ext uri="{FF2B5EF4-FFF2-40B4-BE49-F238E27FC236}">
-                <a16:creationId xmlns:a16="http://schemas.microsoft.com/office/drawing/2014/main" id="{18F3E3F8-C9F6-B196-98B4-3CC4BD8CE8BE}"/>
-              </a:ext>
-            </a:extLst>
-          </p:cNvPr>
-          <p:cNvSpPr txBox="1"/>
-          <p:nvPr/>
-        </p:nvSpPr>
-        <p:spPr>
-          <a:xfrm>
-            <a:off x="542406" y="1743722"/>
-            <a:ext cx="11173949" cy="3747821"/>
-          </a:xfrm>
-          <a:prstGeom prst="rect">
-            <a:avLst/>
-          </a:prstGeom>
-          <a:noFill/>
-        </p:spPr>
-        <p:txBody>
-          <a:bodyPr wrap="square">
-            <a:spAutoFit/>
-          </a:bodyPr>
-          <a:lstStyle/>
-          <a:p>
-            <a:pPr marL="285750" indent="-285750">
-              <a:lnSpc>
-                <a:spcPct val="150000"/>
-              </a:lnSpc>
-              <a:buFont typeface="Wingdings" panose="05000000000000000000" pitchFamily="2" charset="2"/>
-              <a:buChar char="v"/>
-            </a:pPr>
-            <a:r>
-              <a:rPr lang="en-US" altLang="ko-KR" sz="1600" dirty="0">
-                <a:latin typeface="D2Coding" panose="020B0609020101020101" pitchFamily="49" charset="-127"/>
-                <a:ea typeface="D2Coding" panose="020B0609020101020101" pitchFamily="49" charset="-127"/>
-              </a:rPr>
-              <a:t>AI </a:t>
-            </a:r>
-            <a:r>
-              <a:rPr lang="ko-KR" altLang="en-US" sz="1600" dirty="0">
-                <a:latin typeface="D2Coding" panose="020B0609020101020101" pitchFamily="49" charset="-127"/>
-                <a:ea typeface="D2Coding" panose="020B0609020101020101" pitchFamily="49" charset="-127"/>
-              </a:rPr>
-              <a:t>모델이 최신 정보를 알지 못하는 지식 컷오프 </a:t>
-            </a:r>
-            <a:r>
-              <a:rPr lang="en-US" altLang="ko-KR" sz="1600" dirty="0">
-                <a:latin typeface="D2Coding" panose="020B0609020101020101" pitchFamily="49" charset="-127"/>
-                <a:ea typeface="D2Coding" panose="020B0609020101020101" pitchFamily="49" charset="-127"/>
-              </a:rPr>
-              <a:t>(Knowledge Cutoff):</a:t>
-            </a:r>
-            <a:r>
-              <a:rPr lang="ko-KR" altLang="en-US" sz="1600" dirty="0">
-                <a:latin typeface="D2Coding" panose="020B0609020101020101" pitchFamily="49" charset="-127"/>
-                <a:ea typeface="D2Coding" panose="020B0609020101020101" pitchFamily="49" charset="-127"/>
-              </a:rPr>
-              <a:t> </a:t>
-            </a:r>
-            <a:r>
-              <a:rPr lang="en-US" altLang="ko-KR" sz="1600" dirty="0">
-                <a:latin typeface="D2Coding" panose="020B0609020101020101" pitchFamily="49" charset="-127"/>
-                <a:ea typeface="D2Coding" panose="020B0609020101020101" pitchFamily="49" charset="-127"/>
-              </a:rPr>
-              <a:t>AI </a:t>
-            </a:r>
-            <a:r>
-              <a:rPr lang="ko-KR" altLang="en-US" sz="1600" dirty="0">
-                <a:latin typeface="D2Coding" panose="020B0609020101020101" pitchFamily="49" charset="-127"/>
-                <a:ea typeface="D2Coding" panose="020B0609020101020101" pitchFamily="49" charset="-127"/>
-              </a:rPr>
-              <a:t>모델의 지식이 멈춘 </a:t>
-            </a:r>
-            <a:r>
-              <a:rPr lang="en-US" altLang="ko-KR" sz="1600" dirty="0">
-                <a:latin typeface="D2Coding" panose="020B0609020101020101" pitchFamily="49" charset="-127"/>
-                <a:ea typeface="D2Coding" panose="020B0609020101020101" pitchFamily="49" charset="-127"/>
-              </a:rPr>
-              <a:t>'</a:t>
-            </a:r>
-            <a:r>
-              <a:rPr lang="ko-KR" altLang="en-US" sz="1600" dirty="0">
-                <a:latin typeface="D2Coding" panose="020B0609020101020101" pitchFamily="49" charset="-127"/>
-                <a:ea typeface="D2Coding" panose="020B0609020101020101" pitchFamily="49" charset="-127"/>
-              </a:rPr>
-              <a:t>유통기한</a:t>
-            </a:r>
-            <a:r>
-              <a:rPr lang="en-US" altLang="ko-KR" sz="1600" dirty="0">
-                <a:latin typeface="D2Coding" panose="020B0609020101020101" pitchFamily="49" charset="-127"/>
-                <a:ea typeface="D2Coding" panose="020B0609020101020101" pitchFamily="49" charset="-127"/>
-              </a:rPr>
-              <a:t>' </a:t>
-            </a:r>
-            <a:r>
-              <a:rPr lang="ko-KR" altLang="en-US" sz="1600" dirty="0">
-                <a:latin typeface="D2Coding" panose="020B0609020101020101" pitchFamily="49" charset="-127"/>
-                <a:ea typeface="D2Coding" panose="020B0609020101020101" pitchFamily="49" charset="-127"/>
-              </a:rPr>
-              <a:t>같은 시점으로</a:t>
-            </a:r>
-            <a:r>
-              <a:rPr lang="en-US" altLang="ko-KR" sz="1600" dirty="0">
-                <a:latin typeface="D2Coding" panose="020B0609020101020101" pitchFamily="49" charset="-127"/>
-                <a:ea typeface="D2Coding" panose="020B0609020101020101" pitchFamily="49" charset="-127"/>
-              </a:rPr>
-              <a:t> </a:t>
-            </a:r>
-            <a:r>
-              <a:rPr lang="ko-KR" altLang="en-US" sz="1600" dirty="0">
-                <a:latin typeface="D2Coding" panose="020B0609020101020101" pitchFamily="49" charset="-127"/>
-                <a:ea typeface="D2Coding" panose="020B0609020101020101" pitchFamily="49" charset="-127"/>
-              </a:rPr>
-              <a:t>예를 들어 어떤 </a:t>
-            </a:r>
-            <a:r>
-              <a:rPr lang="en-US" altLang="ko-KR" sz="1600" dirty="0">
-                <a:latin typeface="D2Coding" panose="020B0609020101020101" pitchFamily="49" charset="-127"/>
-                <a:ea typeface="D2Coding" panose="020B0609020101020101" pitchFamily="49" charset="-127"/>
-              </a:rPr>
-              <a:t>AI</a:t>
-            </a:r>
-            <a:r>
-              <a:rPr lang="ko-KR" altLang="en-US" sz="1600" dirty="0">
-                <a:latin typeface="D2Coding" panose="020B0609020101020101" pitchFamily="49" charset="-127"/>
-                <a:ea typeface="D2Coding" panose="020B0609020101020101" pitchFamily="49" charset="-127"/>
-              </a:rPr>
-              <a:t>의 지식 컷오프가 </a:t>
-            </a:r>
-            <a:r>
-              <a:rPr lang="en-US" altLang="ko-KR" sz="1600" dirty="0">
-                <a:latin typeface="D2Coding" panose="020B0609020101020101" pitchFamily="49" charset="-127"/>
-                <a:ea typeface="D2Coding" panose="020B0609020101020101" pitchFamily="49" charset="-127"/>
-              </a:rPr>
-              <a:t>2025</a:t>
-            </a:r>
-            <a:r>
-              <a:rPr lang="ko-KR" altLang="en-US" sz="1600" dirty="0">
-                <a:latin typeface="D2Coding" panose="020B0609020101020101" pitchFamily="49" charset="-127"/>
-                <a:ea typeface="D2Coding" panose="020B0609020101020101" pitchFamily="49" charset="-127"/>
-              </a:rPr>
-              <a:t>년 </a:t>
-            </a:r>
-            <a:r>
-              <a:rPr lang="en-US" altLang="ko-KR" sz="1600" dirty="0">
-                <a:latin typeface="D2Coding" panose="020B0609020101020101" pitchFamily="49" charset="-127"/>
-                <a:ea typeface="D2Coding" panose="020B0609020101020101" pitchFamily="49" charset="-127"/>
-              </a:rPr>
-              <a:t>12</a:t>
-            </a:r>
-            <a:r>
-              <a:rPr lang="ko-KR" altLang="en-US" sz="1600" dirty="0">
-                <a:latin typeface="D2Coding" panose="020B0609020101020101" pitchFamily="49" charset="-127"/>
-                <a:ea typeface="D2Coding" panose="020B0609020101020101" pitchFamily="49" charset="-127"/>
-              </a:rPr>
-              <a:t>월이라면</a:t>
-            </a:r>
-            <a:r>
-              <a:rPr lang="en-US" altLang="ko-KR" sz="1600" dirty="0">
-                <a:latin typeface="D2Coding" panose="020B0609020101020101" pitchFamily="49" charset="-127"/>
-                <a:ea typeface="D2Coding" panose="020B0609020101020101" pitchFamily="49" charset="-127"/>
-              </a:rPr>
-              <a:t>, AI</a:t>
-            </a:r>
-            <a:r>
-              <a:rPr lang="ko-KR" altLang="en-US" sz="1600" dirty="0">
-                <a:latin typeface="D2Coding" panose="020B0609020101020101" pitchFamily="49" charset="-127"/>
-                <a:ea typeface="D2Coding" panose="020B0609020101020101" pitchFamily="49" charset="-127"/>
-              </a:rPr>
-              <a:t>는 </a:t>
-            </a:r>
-            <a:r>
-              <a:rPr lang="en-US" altLang="ko-KR" sz="1600" dirty="0">
-                <a:latin typeface="D2Coding" panose="020B0609020101020101" pitchFamily="49" charset="-127"/>
-                <a:ea typeface="D2Coding" panose="020B0609020101020101" pitchFamily="49" charset="-127"/>
-              </a:rPr>
-              <a:t>2026</a:t>
-            </a:r>
-            <a:r>
-              <a:rPr lang="ko-KR" altLang="en-US" sz="1600" dirty="0">
-                <a:latin typeface="D2Coding" panose="020B0609020101020101" pitchFamily="49" charset="-127"/>
-                <a:ea typeface="D2Coding" panose="020B0609020101020101" pitchFamily="49" charset="-127"/>
-              </a:rPr>
-              <a:t>년에 일어난 뉴스나 사건을 알지 못하고 엉뚱한 답변</a:t>
-            </a:r>
-            <a:r>
-              <a:rPr lang="en-US" altLang="ko-KR" sz="1600" dirty="0">
-                <a:latin typeface="D2Coding" panose="020B0609020101020101" pitchFamily="49" charset="-127"/>
-                <a:ea typeface="D2Coding" panose="020B0609020101020101" pitchFamily="49" charset="-127"/>
-              </a:rPr>
-              <a:t>(Hallucination)</a:t>
-            </a:r>
-            <a:r>
-              <a:rPr lang="ko-KR" altLang="en-US" sz="1600" dirty="0">
-                <a:latin typeface="D2Coding" panose="020B0609020101020101" pitchFamily="49" charset="-127"/>
-                <a:ea typeface="D2Coding" panose="020B0609020101020101" pitchFamily="49" charset="-127"/>
-              </a:rPr>
-              <a:t>을 생성</a:t>
-            </a:r>
-            <a:r>
-              <a:rPr lang="en-US" altLang="ko-KR" sz="1600" dirty="0">
-                <a:latin typeface="D2Coding" panose="020B0609020101020101" pitchFamily="49" charset="-127"/>
-                <a:ea typeface="D2Coding" panose="020B0609020101020101" pitchFamily="49" charset="-127"/>
-              </a:rPr>
-              <a:t>(Generate)</a:t>
-            </a:r>
-            <a:r>
-              <a:rPr lang="ko-KR" altLang="en-US" sz="1600" dirty="0">
-                <a:latin typeface="D2Coding" panose="020B0609020101020101" pitchFamily="49" charset="-127"/>
-                <a:ea typeface="D2Coding" panose="020B0609020101020101" pitchFamily="49" charset="-127"/>
-              </a:rPr>
-              <a:t>하게 됨</a:t>
-            </a:r>
-            <a:endParaRPr lang="en-US" altLang="ko-KR" sz="1600" dirty="0">
-              <a:latin typeface="D2Coding" panose="020B0609020101020101" pitchFamily="49" charset="-127"/>
-              <a:ea typeface="D2Coding" panose="020B0609020101020101" pitchFamily="49" charset="-127"/>
-            </a:endParaRPr>
-          </a:p>
-          <a:p>
-            <a:pPr marL="285750" indent="-285750">
-              <a:lnSpc>
-                <a:spcPct val="150000"/>
-              </a:lnSpc>
-              <a:buFont typeface="Wingdings" panose="05000000000000000000" pitchFamily="2" charset="2"/>
-              <a:buChar char="v"/>
-            </a:pPr>
-            <a:endParaRPr lang="en-US" altLang="ko-KR" sz="1600" dirty="0">
-              <a:latin typeface="D2Coding" panose="020B0609020101020101" pitchFamily="49" charset="-127"/>
-              <a:ea typeface="D2Coding" panose="020B0609020101020101" pitchFamily="49" charset="-127"/>
-            </a:endParaRPr>
-          </a:p>
-          <a:p>
-            <a:pPr marL="285750" indent="-285750">
-              <a:lnSpc>
-                <a:spcPct val="150000"/>
-              </a:lnSpc>
-              <a:buFont typeface="Wingdings" panose="05000000000000000000" pitchFamily="2" charset="2"/>
-              <a:buChar char="v"/>
-            </a:pPr>
-            <a:r>
-              <a:rPr lang="ko-KR" altLang="en-US" sz="1600" dirty="0">
-                <a:latin typeface="D2Coding" panose="020B0609020101020101" pitchFamily="49" charset="-127"/>
-                <a:ea typeface="D2Coding" panose="020B0609020101020101" pitchFamily="49" charset="-127"/>
-              </a:rPr>
-              <a:t>데이터가 </a:t>
-            </a:r>
-            <a:r>
-              <a:rPr lang="ko-KR" altLang="en-US" sz="1600" dirty="0" err="1">
-                <a:latin typeface="D2Coding" panose="020B0609020101020101" pitchFamily="49" charset="-127"/>
-                <a:ea typeface="D2Coding" panose="020B0609020101020101" pitchFamily="49" charset="-127"/>
-              </a:rPr>
-              <a:t>데이터가</a:t>
-            </a:r>
-            <a:r>
-              <a:rPr lang="ko-KR" altLang="en-US" sz="1600" dirty="0">
-                <a:latin typeface="D2Coding" panose="020B0609020101020101" pitchFamily="49" charset="-127"/>
-                <a:ea typeface="D2Coding" panose="020B0609020101020101" pitchFamily="49" charset="-127"/>
-              </a:rPr>
-              <a:t> </a:t>
-            </a:r>
-            <a:r>
-              <a:rPr lang="en-US" altLang="ko-KR" sz="1600" dirty="0">
-                <a:latin typeface="D2Coding" panose="020B0609020101020101" pitchFamily="49" charset="-127"/>
-                <a:ea typeface="D2Coding" panose="020B0609020101020101" pitchFamily="49" charset="-127"/>
-              </a:rPr>
-              <a:t>1~2</a:t>
-            </a:r>
-            <a:r>
-              <a:rPr lang="ko-KR" altLang="en-US" sz="1600" dirty="0">
-                <a:latin typeface="D2Coding" panose="020B0609020101020101" pitchFamily="49" charset="-127"/>
-                <a:ea typeface="D2Coding" panose="020B0609020101020101" pitchFamily="49" charset="-127"/>
-              </a:rPr>
-              <a:t>페이지일 때 질문할 때마다 프롬프트에 그 내용을 통째로 복사</a:t>
-            </a:r>
-            <a:r>
-              <a:rPr lang="en-US" altLang="ko-KR" sz="1600" dirty="0">
-                <a:latin typeface="D2Coding" panose="020B0609020101020101" pitchFamily="49" charset="-127"/>
-                <a:ea typeface="D2Coding" panose="020B0609020101020101" pitchFamily="49" charset="-127"/>
-              </a:rPr>
-              <a:t>·</a:t>
-            </a:r>
-            <a:r>
-              <a:rPr lang="ko-KR" altLang="en-US" sz="1600" dirty="0">
-                <a:latin typeface="D2Coding" panose="020B0609020101020101" pitchFamily="49" charset="-127"/>
-                <a:ea typeface="D2Coding" panose="020B0609020101020101" pitchFamily="49" charset="-127"/>
-              </a:rPr>
-              <a:t>붙여넣기</a:t>
-            </a:r>
-            <a:r>
-              <a:rPr lang="en-US" altLang="ko-KR" sz="1600" dirty="0">
-                <a:latin typeface="D2Coding" panose="020B0609020101020101" pitchFamily="49" charset="-127"/>
-                <a:ea typeface="D2Coding" panose="020B0609020101020101" pitchFamily="49" charset="-127"/>
-              </a:rPr>
-              <a:t>(Context)</a:t>
-            </a:r>
-            <a:r>
-              <a:rPr lang="ko-KR" altLang="en-US" sz="1600" dirty="0">
-                <a:latin typeface="D2Coding" panose="020B0609020101020101" pitchFamily="49" charset="-127"/>
-                <a:ea typeface="D2Coding" panose="020B0609020101020101" pitchFamily="49" charset="-127"/>
-              </a:rPr>
-              <a:t>해서 모델에 넘기면 해결되니 번거로운</a:t>
-            </a:r>
-            <a:r>
-              <a:rPr lang="en-US" altLang="ko-KR" sz="1600" dirty="0">
-                <a:latin typeface="D2Coding" panose="020B0609020101020101" pitchFamily="49" charset="-127"/>
-                <a:ea typeface="D2Coding" panose="020B0609020101020101" pitchFamily="49" charset="-127"/>
-              </a:rPr>
-              <a:t> </a:t>
-            </a:r>
-            <a:r>
-              <a:rPr lang="ko-KR" altLang="en-US" sz="1600" dirty="0">
-                <a:latin typeface="D2Coding" panose="020B0609020101020101" pitchFamily="49" charset="-127"/>
-                <a:ea typeface="D2Coding" panose="020B0609020101020101" pitchFamily="49" charset="-127"/>
-              </a:rPr>
-              <a:t>것 이외에는 기술적 고민이나 복잡한 아키텍처가 전혀 필요 없지만</a:t>
-            </a:r>
-            <a:r>
-              <a:rPr lang="en-US" altLang="ko-KR" sz="1600" dirty="0">
-                <a:latin typeface="D2Coding" panose="020B0609020101020101" pitchFamily="49" charset="-127"/>
-                <a:ea typeface="D2Coding" panose="020B0609020101020101" pitchFamily="49" charset="-127"/>
-              </a:rPr>
-              <a:t>,</a:t>
-            </a:r>
-          </a:p>
-          <a:p>
-            <a:pPr marL="285750" indent="-285750">
-              <a:lnSpc>
-                <a:spcPct val="150000"/>
-              </a:lnSpc>
-              <a:buFont typeface="Wingdings" panose="05000000000000000000" pitchFamily="2" charset="2"/>
-              <a:buChar char="v"/>
-            </a:pPr>
-            <a:endParaRPr lang="en-US" altLang="ko-KR" sz="1600" dirty="0">
-              <a:latin typeface="D2Coding" panose="020B0609020101020101" pitchFamily="49" charset="-127"/>
-              <a:ea typeface="D2Coding" panose="020B0609020101020101" pitchFamily="49" charset="-127"/>
-            </a:endParaRPr>
-          </a:p>
-          <a:p>
-            <a:pPr marL="285750" indent="-285750">
-              <a:lnSpc>
-                <a:spcPct val="150000"/>
-              </a:lnSpc>
-              <a:buFont typeface="Wingdings" panose="05000000000000000000" pitchFamily="2" charset="2"/>
-              <a:buChar char="v"/>
-            </a:pPr>
-            <a:r>
-              <a:rPr lang="ko-KR" altLang="en-US" sz="1600" dirty="0">
-                <a:latin typeface="D2Coding" panose="020B0609020101020101" pitchFamily="49" charset="-127"/>
-                <a:ea typeface="D2Coding" panose="020B0609020101020101" pitchFamily="49" charset="-127"/>
-              </a:rPr>
-              <a:t>만약 여러분 회사의 방대한 모든 </a:t>
-            </a:r>
-            <a:r>
-              <a:rPr lang="ko-KR" altLang="en-US" sz="1600" dirty="0" err="1">
-                <a:latin typeface="D2Coding" panose="020B0609020101020101" pitchFamily="49" charset="-127"/>
-                <a:ea typeface="D2Coding" panose="020B0609020101020101" pitchFamily="49" charset="-127"/>
-              </a:rPr>
-              <a:t>규정집</a:t>
-            </a:r>
-            <a:r>
-              <a:rPr lang="en-US" altLang="ko-KR" sz="1600" dirty="0">
-                <a:latin typeface="D2Coding" panose="020B0609020101020101" pitchFamily="49" charset="-127"/>
-                <a:ea typeface="D2Coding" panose="020B0609020101020101" pitchFamily="49" charset="-127"/>
-              </a:rPr>
-              <a:t>(Huge Quantity)</a:t>
-            </a:r>
-            <a:r>
-              <a:rPr lang="ko-KR" altLang="en-US" sz="1600" dirty="0">
-                <a:latin typeface="D2Coding" panose="020B0609020101020101" pitchFamily="49" charset="-127"/>
-                <a:ea typeface="D2Coding" panose="020B0609020101020101" pitchFamily="49" charset="-127"/>
-              </a:rPr>
-              <a:t>을 </a:t>
-            </a:r>
-            <a:r>
-              <a:rPr lang="en-US" altLang="ko-KR" sz="1600" dirty="0">
-                <a:latin typeface="D2Coding" panose="020B0609020101020101" pitchFamily="49" charset="-127"/>
-                <a:ea typeface="D2Coding" panose="020B0609020101020101" pitchFamily="49" charset="-127"/>
-              </a:rPr>
-              <a:t>LLM</a:t>
-            </a:r>
-            <a:r>
-              <a:rPr lang="ko-KR" altLang="en-US" sz="1600" dirty="0">
-                <a:latin typeface="D2Coding" panose="020B0609020101020101" pitchFamily="49" charset="-127"/>
-                <a:ea typeface="D2Coding" panose="020B0609020101020101" pitchFamily="49" charset="-127"/>
-              </a:rPr>
-              <a:t>에게 참고하라고 한다면</a:t>
-            </a:r>
-            <a:r>
-              <a:rPr lang="en-US" altLang="ko-KR" sz="1600" dirty="0">
-                <a:latin typeface="D2Coding" panose="020B0609020101020101" pitchFamily="49" charset="-127"/>
-                <a:ea typeface="D2Coding" panose="020B0609020101020101" pitchFamily="49" charset="-127"/>
-              </a:rPr>
-              <a:t>, </a:t>
-            </a:r>
-            <a:r>
-              <a:rPr lang="ko-KR" altLang="en-US" sz="1600" dirty="0">
-                <a:latin typeface="D2Coding" panose="020B0609020101020101" pitchFamily="49" charset="-127"/>
-                <a:ea typeface="D2Coding" panose="020B0609020101020101" pitchFamily="49" charset="-127"/>
-              </a:rPr>
-              <a:t>매번 수천 페이지를 복사해서 붙여 넣을 건가</a:t>
-            </a:r>
-            <a:r>
-              <a:rPr lang="en-US" altLang="ko-KR" sz="1600" dirty="0">
-                <a:latin typeface="D2Coding" panose="020B0609020101020101" pitchFamily="49" charset="-127"/>
-                <a:ea typeface="D2Coding" panose="020B0609020101020101" pitchFamily="49" charset="-127"/>
-              </a:rPr>
-              <a:t>? </a:t>
-            </a:r>
-            <a:r>
-              <a:rPr lang="ko-KR" altLang="en-US" sz="1600" dirty="0">
-                <a:latin typeface="D2Coding" panose="020B0609020101020101" pitchFamily="49" charset="-127"/>
-                <a:ea typeface="D2Coding" panose="020B0609020101020101" pitchFamily="49" charset="-127"/>
-              </a:rPr>
-              <a:t>불가능하죠</a:t>
-            </a:r>
-            <a:r>
-              <a:rPr lang="en-US" altLang="ko-KR" sz="1600" dirty="0">
-                <a:latin typeface="D2Coding" panose="020B0609020101020101" pitchFamily="49" charset="-127"/>
-                <a:ea typeface="D2Coding" panose="020B0609020101020101" pitchFamily="49" charset="-127"/>
-              </a:rPr>
-              <a:t>? </a:t>
-            </a:r>
-            <a:r>
-              <a:rPr lang="ko-KR" altLang="en-US" sz="1600" dirty="0">
-                <a:latin typeface="D2Coding" panose="020B0609020101020101" pitchFamily="49" charset="-127"/>
-                <a:ea typeface="D2Coding" panose="020B0609020101020101" pitchFamily="49" charset="-127"/>
-              </a:rPr>
-              <a:t>그래서 </a:t>
-            </a:r>
-            <a:r>
-              <a:rPr lang="en-US" altLang="ko-KR" sz="1600" dirty="0">
-                <a:latin typeface="D2Coding" panose="020B0609020101020101" pitchFamily="49" charset="-127"/>
-                <a:ea typeface="D2Coding" panose="020B0609020101020101" pitchFamily="49" charset="-127"/>
-              </a:rPr>
-              <a:t>'</a:t>
-            </a:r>
-            <a:r>
-              <a:rPr lang="ko-KR" altLang="en-US" sz="1600" dirty="0">
-                <a:latin typeface="D2Coding" panose="020B0609020101020101" pitchFamily="49" charset="-127"/>
-                <a:ea typeface="D2Coding" panose="020B0609020101020101" pitchFamily="49" charset="-127"/>
-              </a:rPr>
-              <a:t>정답 조각</a:t>
-            </a:r>
-            <a:r>
-              <a:rPr lang="en-US" altLang="ko-KR" sz="1600" dirty="0">
-                <a:latin typeface="D2Coding" panose="020B0609020101020101" pitchFamily="49" charset="-127"/>
-                <a:ea typeface="D2Coding" panose="020B0609020101020101" pitchFamily="49" charset="-127"/>
-              </a:rPr>
-              <a:t>(Chunk)</a:t>
-            </a:r>
-            <a:r>
-              <a:rPr lang="ko-KR" altLang="en-US" sz="1600" dirty="0">
-                <a:latin typeface="D2Coding" panose="020B0609020101020101" pitchFamily="49" charset="-127"/>
-                <a:ea typeface="D2Coding" panose="020B0609020101020101" pitchFamily="49" charset="-127"/>
-              </a:rPr>
-              <a:t> 고르기 기술</a:t>
-            </a:r>
-            <a:r>
-              <a:rPr lang="en-US" altLang="ko-KR" sz="1600" dirty="0">
-                <a:latin typeface="D2Coding" panose="020B0609020101020101" pitchFamily="49" charset="-127"/>
-                <a:ea typeface="D2Coding" panose="020B0609020101020101" pitchFamily="49" charset="-127"/>
-              </a:rPr>
-              <a:t>'</a:t>
-            </a:r>
-            <a:r>
-              <a:rPr lang="ko-KR" altLang="en-US" sz="1600" dirty="0">
-                <a:latin typeface="D2Coding" panose="020B0609020101020101" pitchFamily="49" charset="-127"/>
-                <a:ea typeface="D2Coding" panose="020B0609020101020101" pitchFamily="49" charset="-127"/>
-              </a:rPr>
-              <a:t>이 필요</a:t>
-            </a:r>
-            <a:endParaRPr lang="en-US" altLang="ko-KR" sz="1600" dirty="0">
-              <a:latin typeface="D2Coding" panose="020B0609020101020101" pitchFamily="49" charset="-127"/>
-              <a:ea typeface="D2Coding" panose="020B0609020101020101" pitchFamily="49" charset="-127"/>
-            </a:endParaRPr>
-          </a:p>
-          <a:p>
-            <a:pPr marL="285750" indent="-285750">
-              <a:lnSpc>
-                <a:spcPct val="150000"/>
-              </a:lnSpc>
-              <a:buFont typeface="Wingdings" panose="05000000000000000000" pitchFamily="2" charset="2"/>
-              <a:buChar char="v"/>
-            </a:pPr>
-            <a:endParaRPr lang="ko-KR" altLang="en-US" sz="1600" dirty="0">
-              <a:latin typeface="D2Coding" panose="020B0609020101020101" pitchFamily="49" charset="-127"/>
-              <a:ea typeface="D2Coding" panose="020B0609020101020101" pitchFamily="49" charset="-127"/>
-            </a:endParaRPr>
-          </a:p>
-        </p:txBody>
-      </p:sp>
-    </p:spTree>
-    <p:extLst>
-      <p:ext uri="{BB962C8B-B14F-4D97-AF65-F5344CB8AC3E}">
-        <p14:creationId xmlns:p14="http://schemas.microsoft.com/office/powerpoint/2010/main" val="2538986326"/>
-      </p:ext>
-    </p:extLst>
-  </p:cSld>
-  <p:clrMapOvr>
-    <a:masterClrMapping/>
-  </p:clrMapOvr>
-</p:sld>
-</file>
-
-<file path=ppt/slides/slide4.xml><?xml version="1.0" encoding="utf-8"?>
 <p:sld xmlns:a="http://schemas.openxmlformats.org/drawingml/2006/main" xmlns:r="http://schemas.openxmlformats.org/officeDocument/2006/relationships" xmlns:p="http://schemas.openxmlformats.org/presentationml/2006/main">
   <p:cSld>
     <p:spTree>
@@ -15965,7 +15193,7 @@
             <a:fld id="{D57F1E4F-1CFF-5643-939E-217C01CDF565}" type="slidenum">
               <a:rPr lang="en-US" sz="1400" b="1" smtClean="0"/>
               <a:pPr/>
-              <a:t>4</a:t>
+              <a:t>3</a:t>
             </a:fld>
             <a:endParaRPr lang="en-US" sz="1400" b="1" dirty="0"/>
           </a:p>
@@ -16033,7 +15261,7 @@
 </p:sld>
 </file>
 
-<file path=ppt/slides/slide5.xml><?xml version="1.0" encoding="utf-8"?>
+<file path=ppt/slides/slide4.xml><?xml version="1.0" encoding="utf-8"?>
 <p:sld xmlns:a="http://schemas.openxmlformats.org/drawingml/2006/main" xmlns:r="http://schemas.openxmlformats.org/officeDocument/2006/relationships" xmlns:p="http://schemas.openxmlformats.org/presentationml/2006/main">
   <p:cSld>
     <p:spTree>
@@ -16333,7 +15561,7 @@
             <a:fld id="{D57F1E4F-1CFF-5643-939E-217C01CDF565}" type="slidenum">
               <a:rPr lang="en-US" sz="1400" b="1" smtClean="0"/>
               <a:pPr/>
-              <a:t>5</a:t>
+              <a:t>4</a:t>
             </a:fld>
             <a:endParaRPr lang="en-US" sz="1400" b="1" dirty="0"/>
           </a:p>
@@ -16352,7 +15580,7 @@
 </p:sld>
 </file>
 
-<file path=ppt/slides/slide6.xml><?xml version="1.0" encoding="utf-8"?>
+<file path=ppt/slides/slide5.xml><?xml version="1.0" encoding="utf-8"?>
 <p:sld xmlns:a="http://schemas.openxmlformats.org/drawingml/2006/main" xmlns:r="http://schemas.openxmlformats.org/officeDocument/2006/relationships" xmlns:p="http://schemas.openxmlformats.org/presentationml/2006/main">
   <p:cSld>
     <p:spTree>
@@ -16709,7 +15937,7 @@
             <a:fld id="{D57F1E4F-1CFF-5643-939E-217C01CDF565}" type="slidenum">
               <a:rPr lang="en-US" sz="1400" b="1" smtClean="0"/>
               <a:pPr/>
-              <a:t>6</a:t>
+              <a:t>5</a:t>
             </a:fld>
             <a:endParaRPr lang="en-US" sz="1400" b="1" dirty="0"/>
           </a:p>
@@ -16728,7 +15956,7 @@
 </p:sld>
 </file>
 
-<file path=ppt/slides/slide7.xml><?xml version="1.0" encoding="utf-8"?>
+<file path=ppt/slides/slide6.xml><?xml version="1.0" encoding="utf-8"?>
 <p:sld xmlns:a="http://schemas.openxmlformats.org/drawingml/2006/main" xmlns:r="http://schemas.openxmlformats.org/officeDocument/2006/relationships" xmlns:p="http://schemas.openxmlformats.org/presentationml/2006/main">
   <p:cSld>
     <p:spTree>
@@ -17055,7 +16283,7 @@
             <a:fld id="{D57F1E4F-1CFF-5643-939E-217C01CDF565}" type="slidenum">
               <a:rPr lang="en-US" sz="1400" b="1" smtClean="0"/>
               <a:pPr/>
-              <a:t>7</a:t>
+              <a:t>6</a:t>
             </a:fld>
             <a:endParaRPr lang="en-US" sz="1400" b="1" dirty="0"/>
           </a:p>
@@ -18387,7 +17615,7 @@
 </p:sld>
 </file>
 
-<file path=ppt/slides/slide8.xml><?xml version="1.0" encoding="utf-8"?>
+<file path=ppt/slides/slide7.xml><?xml version="1.0" encoding="utf-8"?>
 <p:sld xmlns:a="http://schemas.openxmlformats.org/drawingml/2006/main" xmlns:r="http://schemas.openxmlformats.org/officeDocument/2006/relationships" xmlns:p="http://schemas.openxmlformats.org/presentationml/2006/main">
   <p:cSld>
     <p:spTree>
@@ -18730,7 +17958,7 @@
             <a:fld id="{D57F1E4F-1CFF-5643-939E-217C01CDF565}" type="slidenum">
               <a:rPr lang="en-US" sz="1400" b="1" smtClean="0"/>
               <a:pPr/>
-              <a:t>8</a:t>
+              <a:t>7</a:t>
             </a:fld>
             <a:endParaRPr lang="en-US" sz="1400" b="1" dirty="0"/>
           </a:p>
@@ -18749,7 +17977,7 @@
 </p:sld>
 </file>
 
-<file path=ppt/slides/slide9.xml><?xml version="1.0" encoding="utf-8"?>
+<file path=ppt/slides/slide8.xml><?xml version="1.0" encoding="utf-8"?>
 <p:sld xmlns:a="http://schemas.openxmlformats.org/drawingml/2006/main" xmlns:r="http://schemas.openxmlformats.org/officeDocument/2006/relationships" xmlns:p="http://schemas.openxmlformats.org/presentationml/2006/main">
   <p:cSld>
     <p:spTree>
@@ -19062,7 +18290,7 @@
             <a:fld id="{D57F1E4F-1CFF-5643-939E-217C01CDF565}" type="slidenum">
               <a:rPr lang="en-US" sz="1400" b="1" smtClean="0"/>
               <a:pPr/>
-              <a:t>9</a:t>
+              <a:t>8</a:t>
             </a:fld>
             <a:endParaRPr lang="en-US" sz="1400" b="1" dirty="0"/>
           </a:p>
@@ -20362,6 +19590,580 @@
     <p:extLst>
       <p:ext uri="{BB962C8B-B14F-4D97-AF65-F5344CB8AC3E}">
         <p14:creationId xmlns:p14="http://schemas.microsoft.com/office/powerpoint/2010/main" val="1543604122"/>
+      </p:ext>
+    </p:extLst>
+  </p:cSld>
+  <p:clrMapOvr>
+    <a:masterClrMapping/>
+  </p:clrMapOvr>
+</p:sld>
+</file>
+
+<file path=ppt/slides/slide9.xml><?xml version="1.0" encoding="utf-8"?>
+<p:sld xmlns:a="http://schemas.openxmlformats.org/drawingml/2006/main" xmlns:r="http://schemas.openxmlformats.org/officeDocument/2006/relationships" xmlns:p="http://schemas.openxmlformats.org/presentationml/2006/main">
+  <p:cSld>
+    <p:spTree>
+      <p:nvGrpSpPr>
+        <p:cNvPr id="1" name="">
+          <a:extLst>
+            <a:ext uri="{FF2B5EF4-FFF2-40B4-BE49-F238E27FC236}">
+              <a16:creationId xmlns:a16="http://schemas.microsoft.com/office/drawing/2014/main" id="{AE06AADB-16FD-D031-093A-078B9B45A5A7}"/>
+            </a:ext>
+          </a:extLst>
+        </p:cNvPr>
+        <p:cNvGrpSpPr/>
+        <p:nvPr/>
+      </p:nvGrpSpPr>
+      <p:grpSpPr>
+        <a:xfrm>
+          <a:off x="0" y="0"/>
+          <a:ext cx="0" cy="0"/>
+          <a:chOff x="0" y="0"/>
+          <a:chExt cx="0" cy="0"/>
+        </a:xfrm>
+      </p:grpSpPr>
+      <p:sp>
+        <p:nvSpPr>
+          <p:cNvPr id="3" name="제목 1">
+            <a:extLst>
+              <a:ext uri="{FF2B5EF4-FFF2-40B4-BE49-F238E27FC236}">
+                <a16:creationId xmlns:a16="http://schemas.microsoft.com/office/drawing/2014/main" id="{9FF27C86-F5A7-56AC-6B7D-6AB573A8361D}"/>
+              </a:ext>
+            </a:extLst>
+          </p:cNvPr>
+          <p:cNvSpPr txBox="1">
+            <a:spLocks/>
+          </p:cNvSpPr>
+          <p:nvPr/>
+        </p:nvSpPr>
+        <p:spPr>
+          <a:xfrm>
+            <a:off x="475645" y="481983"/>
+            <a:ext cx="10353762" cy="766439"/>
+          </a:xfrm>
+          <a:prstGeom prst="rect">
+            <a:avLst/>
+          </a:prstGeom>
+        </p:spPr>
+        <p:txBody>
+          <a:bodyPr vert="horz" lIns="91440" tIns="45720" rIns="91440" bIns="45720" rtlCol="0" anchor="ctr">
+            <a:normAutofit/>
+          </a:bodyPr>
+          <a:lstStyle>
+            <a:lvl1pPr algn="ctr" defTabSz="914400" rtl="0" eaLnBrk="1" latinLnBrk="1" hangingPunct="1">
+              <a:lnSpc>
+                <a:spcPct val="90000"/>
+              </a:lnSpc>
+              <a:spcBef>
+                <a:spcPct val="0"/>
+              </a:spcBef>
+              <a:buNone/>
+              <a:defRPr sz="3200" kern="1200" cap="all" baseline="0">
+                <a:solidFill>
+                  <a:schemeClr val="tx1"/>
+                </a:solidFill>
+                <a:effectLst/>
+                <a:latin typeface="Batang" panose="02030600000101010101" pitchFamily="18" charset="-127"/>
+                <a:ea typeface="Batang" panose="02030600000101010101" pitchFamily="18" charset="-127"/>
+                <a:cs typeface="+mj-cs"/>
+              </a:defRPr>
+            </a:lvl1pPr>
+          </a:lstStyle>
+          <a:p>
+            <a:pPr algn="l"/>
+            <a:r>
+              <a:rPr lang="en-US" altLang="ko-KR" sz="2800" cap="none" dirty="0">
+                <a:solidFill>
+                  <a:schemeClr val="bg2">
+                    <a:lumMod val="25000"/>
+                  </a:schemeClr>
+                </a:solidFill>
+                <a:latin typeface="D2Coding" panose="020B0609020101020101" pitchFamily="49" charset="-127"/>
+                <a:ea typeface="D2Coding" panose="020B0609020101020101" pitchFamily="49" charset="-127"/>
+                <a:cs typeface="Segoe UI Light" panose="020B0502040204020203" pitchFamily="34" charset="0"/>
+              </a:rPr>
+              <a:t>The Goal: Picking Relevant Context for LLMs</a:t>
+            </a:r>
+            <a:endParaRPr lang="ko-KR" altLang="en-US" sz="2800" cap="none" dirty="0">
+              <a:solidFill>
+                <a:schemeClr val="bg2">
+                  <a:lumMod val="25000"/>
+                </a:schemeClr>
+              </a:solidFill>
+              <a:latin typeface="D2Coding" panose="020B0609020101020101" pitchFamily="49" charset="-127"/>
+              <a:ea typeface="D2Coding" panose="020B0609020101020101" pitchFamily="49" charset="-127"/>
+              <a:cs typeface="Segoe UI Light" panose="020B0502040204020203" pitchFamily="34" charset="0"/>
+            </a:endParaRPr>
+          </a:p>
+        </p:txBody>
+      </p:sp>
+      <p:sp>
+        <p:nvSpPr>
+          <p:cNvPr id="6" name="TextBox 5">
+            <a:extLst>
+              <a:ext uri="{FF2B5EF4-FFF2-40B4-BE49-F238E27FC236}">
+                <a16:creationId xmlns:a16="http://schemas.microsoft.com/office/drawing/2014/main" id="{ADDE27A3-7BCD-B963-0B8B-1E167166F732}"/>
+              </a:ext>
+            </a:extLst>
+          </p:cNvPr>
+          <p:cNvSpPr txBox="1"/>
+          <p:nvPr/>
+        </p:nvSpPr>
+        <p:spPr>
+          <a:xfrm>
+            <a:off x="609600" y="1248422"/>
+            <a:ext cx="10972800" cy="793166"/>
+          </a:xfrm>
+          <a:prstGeom prst="rect">
+            <a:avLst/>
+          </a:prstGeom>
+          <a:noFill/>
+        </p:spPr>
+        <p:txBody>
+          <a:bodyPr wrap="square">
+            <a:spAutoFit/>
+          </a:bodyPr>
+          <a:lstStyle/>
+          <a:p>
+            <a:pPr marL="285750" indent="-285750">
+              <a:lnSpc>
+                <a:spcPct val="150000"/>
+              </a:lnSpc>
+              <a:buFont typeface="Wingdings" panose="05000000000000000000" pitchFamily="2" charset="2"/>
+              <a:buChar char="v"/>
+            </a:pPr>
+            <a:r>
+              <a:rPr lang="en-US" altLang="ko-KR" sz="1600" b="1" dirty="0">
+                <a:latin typeface="D2Coding" panose="020B0609020101020101" pitchFamily="49" charset="-127"/>
+                <a:ea typeface="D2Coding" panose="020B0609020101020101" pitchFamily="49" charset="-127"/>
+              </a:rPr>
+              <a:t>Ingestion</a:t>
+            </a:r>
+            <a:r>
+              <a:rPr lang="en-US" altLang="ko-KR" sz="1600" dirty="0">
+                <a:latin typeface="D2Coding" panose="020B0609020101020101" pitchFamily="49" charset="-127"/>
+                <a:ea typeface="D2Coding" panose="020B0609020101020101" pitchFamily="49" charset="-127"/>
+              </a:rPr>
+              <a:t> is simply the process of converting your documents into numbers that computers can understand and analyze, and storing them in a special type of database for efficient retrieval. </a:t>
+            </a:r>
+            <a:endParaRPr lang="ko-KR" altLang="en-US" sz="1600" b="1" dirty="0">
+              <a:latin typeface="D2Coding" panose="020B0609020101020101" pitchFamily="49" charset="-127"/>
+              <a:ea typeface="D2Coding" panose="020B0609020101020101" pitchFamily="49" charset="-127"/>
+            </a:endParaRPr>
+          </a:p>
+        </p:txBody>
+      </p:sp>
+      <p:pic>
+        <p:nvPicPr>
+          <p:cNvPr id="5" name="그림 4">
+            <a:extLst>
+              <a:ext uri="{FF2B5EF4-FFF2-40B4-BE49-F238E27FC236}">
+                <a16:creationId xmlns:a16="http://schemas.microsoft.com/office/drawing/2014/main" id="{F642E58B-10CC-8E33-F868-76BDE8BDD9F4}"/>
+              </a:ext>
+            </a:extLst>
+          </p:cNvPr>
+          <p:cNvPicPr>
+            <a:picLocks noChangeAspect="1"/>
+          </p:cNvPicPr>
+          <p:nvPr/>
+        </p:nvPicPr>
+        <p:blipFill>
+          <a:blip r:embed="rId2"/>
+          <a:stretch>
+            <a:fillRect/>
+          </a:stretch>
+        </p:blipFill>
+        <p:spPr>
+          <a:xfrm>
+            <a:off x="686318" y="2714624"/>
+            <a:ext cx="7639100" cy="2676525"/>
+          </a:xfrm>
+          <a:prstGeom prst="rect">
+            <a:avLst/>
+          </a:prstGeom>
+          <a:ln>
+            <a:solidFill>
+              <a:schemeClr val="tx1"/>
+            </a:solidFill>
+          </a:ln>
+        </p:spPr>
+      </p:pic>
+      <p:sp>
+        <p:nvSpPr>
+          <p:cNvPr id="8" name="TextBox 7">
+            <a:extLst>
+              <a:ext uri="{FF2B5EF4-FFF2-40B4-BE49-F238E27FC236}">
+                <a16:creationId xmlns:a16="http://schemas.microsoft.com/office/drawing/2014/main" id="{7C4036C3-6CE1-9412-61CB-8AA26EABCFD4}"/>
+              </a:ext>
+            </a:extLst>
+          </p:cNvPr>
+          <p:cNvSpPr txBox="1"/>
+          <p:nvPr/>
+        </p:nvSpPr>
+        <p:spPr>
+          <a:xfrm>
+            <a:off x="8458199" y="2714625"/>
+            <a:ext cx="3324225" cy="2833981"/>
+          </a:xfrm>
+          <a:prstGeom prst="rect">
+            <a:avLst/>
+          </a:prstGeom>
+          <a:noFill/>
+          <a:ln>
+            <a:solidFill>
+              <a:schemeClr val="tx1"/>
+            </a:solidFill>
+          </a:ln>
+        </p:spPr>
+        <p:txBody>
+          <a:bodyPr wrap="square">
+            <a:spAutoFit/>
+          </a:bodyPr>
+          <a:lstStyle/>
+          <a:p>
+            <a:pPr marL="342900" indent="-342900">
+              <a:lnSpc>
+                <a:spcPct val="150000"/>
+              </a:lnSpc>
+              <a:buAutoNum type="arabicPeriod"/>
+            </a:pPr>
+            <a:r>
+              <a:rPr lang="en-US" altLang="ko-KR" sz="1200" dirty="0">
+                <a:latin typeface="D2Coding" panose="020B0609020101020101" pitchFamily="49" charset="-127"/>
+                <a:ea typeface="D2Coding" panose="020B0609020101020101" pitchFamily="49" charset="-127"/>
+              </a:rPr>
+              <a:t>Extract the text from the document. </a:t>
+            </a:r>
+          </a:p>
+          <a:p>
+            <a:pPr marL="342900" indent="-342900">
+              <a:lnSpc>
+                <a:spcPct val="150000"/>
+              </a:lnSpc>
+              <a:buAutoNum type="arabicPeriod"/>
+            </a:pPr>
+            <a:r>
+              <a:rPr lang="en-US" altLang="ko-KR" sz="1200" dirty="0">
+                <a:latin typeface="D2Coding" panose="020B0609020101020101" pitchFamily="49" charset="-127"/>
+                <a:ea typeface="D2Coding" panose="020B0609020101020101" pitchFamily="49" charset="-127"/>
+              </a:rPr>
+              <a:t>Split the text into manageable chunks. </a:t>
+            </a:r>
+          </a:p>
+          <a:p>
+            <a:pPr marL="342900" indent="-342900">
+              <a:lnSpc>
+                <a:spcPct val="150000"/>
+              </a:lnSpc>
+              <a:buAutoNum type="arabicPeriod"/>
+            </a:pPr>
+            <a:r>
+              <a:rPr lang="en-US" altLang="ko-KR" sz="1200" dirty="0">
+                <a:latin typeface="D2Coding" panose="020B0609020101020101" pitchFamily="49" charset="-127"/>
+                <a:ea typeface="D2Coding" panose="020B0609020101020101" pitchFamily="49" charset="-127"/>
+              </a:rPr>
+              <a:t>Convert the text into numbers that computers can understand. </a:t>
+            </a:r>
+          </a:p>
+          <a:p>
+            <a:pPr marL="342900" indent="-342900">
+              <a:lnSpc>
+                <a:spcPct val="150000"/>
+              </a:lnSpc>
+              <a:buAutoNum type="arabicPeriod"/>
+            </a:pPr>
+            <a:r>
+              <a:rPr lang="en-US" altLang="ko-KR" sz="1200" dirty="0">
+                <a:latin typeface="D2Coding" panose="020B0609020101020101" pitchFamily="49" charset="-127"/>
+                <a:ea typeface="D2Coding" panose="020B0609020101020101" pitchFamily="49" charset="-127"/>
+              </a:rPr>
+              <a:t>Store these number representations of your text somewhere that makes it easy and fast to retrieve the relevant sections of your document to answer a given question.</a:t>
+            </a:r>
+            <a:endParaRPr lang="ko-KR" altLang="en-US" sz="1200" dirty="0">
+              <a:latin typeface="D2Coding" panose="020B0609020101020101" pitchFamily="49" charset="-127"/>
+              <a:ea typeface="D2Coding" panose="020B0609020101020101" pitchFamily="49" charset="-127"/>
+            </a:endParaRPr>
+          </a:p>
+        </p:txBody>
+      </p:sp>
+      <p:sp>
+        <p:nvSpPr>
+          <p:cNvPr id="9" name="TextBox 8">
+            <a:extLst>
+              <a:ext uri="{FF2B5EF4-FFF2-40B4-BE49-F238E27FC236}">
+                <a16:creationId xmlns:a16="http://schemas.microsoft.com/office/drawing/2014/main" id="{270870DB-7FC7-C2F1-AC9D-0DCF09FD92E6}"/>
+              </a:ext>
+            </a:extLst>
+          </p:cNvPr>
+          <p:cNvSpPr txBox="1"/>
+          <p:nvPr/>
+        </p:nvSpPr>
+        <p:spPr>
+          <a:xfrm>
+            <a:off x="885826" y="2905780"/>
+            <a:ext cx="1428749" cy="523220"/>
+          </a:xfrm>
+          <a:prstGeom prst="rect">
+            <a:avLst/>
+          </a:prstGeom>
+          <a:noFill/>
+        </p:spPr>
+        <p:txBody>
+          <a:bodyPr wrap="square" rtlCol="0">
+            <a:spAutoFit/>
+          </a:bodyPr>
+          <a:lstStyle/>
+          <a:p>
+            <a:r>
+              <a:rPr lang="en-US" altLang="ko-KR" sz="1400" dirty="0">
+                <a:solidFill>
+                  <a:srgbClr val="00B0F0"/>
+                </a:solidFill>
+                <a:latin typeface="D2Coding" panose="020B0609020101020101" pitchFamily="49" charset="-127"/>
+                <a:ea typeface="D2Coding" panose="020B0609020101020101" pitchFamily="49" charset="-127"/>
+                <a:hlinkClick r:id="rId3">
+                  <a:extLst>
+                    <a:ext uri="{A12FA001-AC4F-418D-AE19-62706E023703}">
+                      <ahyp:hlinkClr xmlns:ahyp="http://schemas.microsoft.com/office/drawing/2018/hyperlinkcolor" val="tx"/>
+                    </a:ext>
+                  </a:extLst>
+                </a:hlinkClick>
+              </a:rPr>
+              <a:t>Tesla’s 2022 annual report</a:t>
+            </a:r>
+            <a:endParaRPr lang="ko-KR" altLang="en-US" sz="1400" dirty="0">
+              <a:solidFill>
+                <a:srgbClr val="00B0F0"/>
+              </a:solidFill>
+              <a:latin typeface="D2Coding" panose="020B0609020101020101" pitchFamily="49" charset="-127"/>
+              <a:ea typeface="D2Coding" panose="020B0609020101020101" pitchFamily="49" charset="-127"/>
+            </a:endParaRPr>
+          </a:p>
+        </p:txBody>
+      </p:sp>
+      <p:sp>
+        <p:nvSpPr>
+          <p:cNvPr id="12" name="TextBox 11">
+            <a:extLst>
+              <a:ext uri="{FF2B5EF4-FFF2-40B4-BE49-F238E27FC236}">
+                <a16:creationId xmlns:a16="http://schemas.microsoft.com/office/drawing/2014/main" id="{A17C5159-309F-23EC-ADB3-6FAB4DCD08BE}"/>
+              </a:ext>
+            </a:extLst>
+          </p:cNvPr>
+          <p:cNvSpPr txBox="1"/>
+          <p:nvPr/>
+        </p:nvSpPr>
+        <p:spPr>
+          <a:xfrm>
+            <a:off x="1112771" y="5788190"/>
+            <a:ext cx="4295775" cy="338554"/>
+          </a:xfrm>
+          <a:prstGeom prst="rect">
+            <a:avLst/>
+          </a:prstGeom>
+          <a:solidFill>
+            <a:schemeClr val="tx1"/>
+          </a:solidFill>
+        </p:spPr>
+        <p:txBody>
+          <a:bodyPr wrap="square">
+            <a:spAutoFit/>
+          </a:bodyPr>
+          <a:lstStyle/>
+          <a:p>
+            <a:r>
+              <a:rPr lang="en-US" altLang="ko-KR" sz="1600" dirty="0">
+                <a:solidFill>
+                  <a:schemeClr val="bg1"/>
+                </a:solidFill>
+                <a:latin typeface="D2Coding" panose="020B0609020101020101" pitchFamily="49" charset="-127"/>
+                <a:ea typeface="D2Coding" panose="020B0609020101020101" pitchFamily="49" charset="-127"/>
+              </a:rPr>
+              <a:t>“What key risks did Tesla face in 2022?”</a:t>
+            </a:r>
+            <a:endParaRPr lang="ko-KR" altLang="en-US" sz="1600" dirty="0">
+              <a:solidFill>
+                <a:schemeClr val="bg1"/>
+              </a:solidFill>
+              <a:latin typeface="D2Coding" panose="020B0609020101020101" pitchFamily="49" charset="-127"/>
+              <a:ea typeface="D2Coding" panose="020B0609020101020101" pitchFamily="49" charset="-127"/>
+            </a:endParaRPr>
+          </a:p>
+        </p:txBody>
+      </p:sp>
+      <p:pic>
+        <p:nvPicPr>
+          <p:cNvPr id="14" name="그래픽 13" descr="웹 디자인">
+            <a:extLst>
+              <a:ext uri="{FF2B5EF4-FFF2-40B4-BE49-F238E27FC236}">
+                <a16:creationId xmlns:a16="http://schemas.microsoft.com/office/drawing/2014/main" id="{2390334E-00AF-997C-7435-855CCD58A09D}"/>
+              </a:ext>
+            </a:extLst>
+          </p:cNvPr>
+          <p:cNvPicPr>
+            <a:picLocks noChangeAspect="1"/>
+          </p:cNvPicPr>
+          <p:nvPr/>
+        </p:nvPicPr>
+        <p:blipFill>
+          <a:blip r:embed="rId4">
+            <a:extLst>
+              <a:ext uri="{96DAC541-7B7A-43D3-8B79-37D633B846F1}">
+                <asvg:svgBlip xmlns:asvg="http://schemas.microsoft.com/office/drawing/2016/SVG/main" r:embed="rId5"/>
+              </a:ext>
+            </a:extLst>
+          </a:blip>
+          <a:stretch>
+            <a:fillRect/>
+          </a:stretch>
+        </p:blipFill>
+        <p:spPr>
+          <a:xfrm>
+            <a:off x="569184" y="5686662"/>
+            <a:ext cx="543335" cy="543335"/>
+          </a:xfrm>
+          <a:prstGeom prst="rect">
+            <a:avLst/>
+          </a:prstGeom>
+        </p:spPr>
+      </p:pic>
+      <p:sp>
+        <p:nvSpPr>
+          <p:cNvPr id="2" name="슬라이드 번호 개체 틀 3">
+            <a:extLst>
+              <a:ext uri="{FF2B5EF4-FFF2-40B4-BE49-F238E27FC236}">
+                <a16:creationId xmlns:a16="http://schemas.microsoft.com/office/drawing/2014/main" id="{0164DB67-877E-2766-2071-AB2439A1502F}"/>
+              </a:ext>
+            </a:extLst>
+          </p:cNvPr>
+          <p:cNvSpPr txBox="1">
+            <a:spLocks/>
+          </p:cNvSpPr>
+          <p:nvPr/>
+        </p:nvSpPr>
+        <p:spPr>
+          <a:xfrm>
+            <a:off x="11180761" y="299420"/>
+            <a:ext cx="753545" cy="365125"/>
+          </a:xfrm>
+          <a:prstGeom prst="rect">
+            <a:avLst/>
+          </a:prstGeom>
+        </p:spPr>
+        <p:txBody>
+          <a:bodyPr vert="horz" lIns="91440" tIns="45720" rIns="91440" bIns="45720" rtlCol="0" anchor="ctr"/>
+          <a:lstStyle>
+            <a:defPPr rtl="0">
+              <a:defRPr lang="ko-KR"/>
+            </a:defPPr>
+            <a:lvl1pPr marL="0" algn="r" defTabSz="914400" rtl="0" eaLnBrk="1" latinLnBrk="0" hangingPunct="1">
+              <a:defRPr sz="1200" kern="1200" baseline="0">
+                <a:solidFill>
+                  <a:schemeClr val="tx1">
+                    <a:lumMod val="65000"/>
+                    <a:lumOff val="35000"/>
+                  </a:schemeClr>
+                </a:solidFill>
+                <a:latin typeface="맑은 고딕" panose="020B0503020000020004" pitchFamily="50" charset="-127"/>
+                <a:ea typeface="맑은 고딕" panose="020B0503020000020004" pitchFamily="50" charset="-127"/>
+                <a:cs typeface="+mn-cs"/>
+              </a:defRPr>
+            </a:lvl1pPr>
+            <a:lvl2pPr marL="457200" algn="l" defTabSz="914400" rtl="0" eaLnBrk="1" latinLnBrk="0" hangingPunct="1">
+              <a:defRPr sz="1800" kern="1200">
+                <a:solidFill>
+                  <a:schemeClr val="tx1"/>
+                </a:solidFill>
+                <a:latin typeface="+mn-lt"/>
+                <a:ea typeface="+mn-ea"/>
+                <a:cs typeface="+mn-cs"/>
+              </a:defRPr>
+            </a:lvl2pPr>
+            <a:lvl3pPr marL="914400" algn="l" defTabSz="914400" rtl="0" eaLnBrk="1" latinLnBrk="0" hangingPunct="1">
+              <a:defRPr sz="1800" kern="1200">
+                <a:solidFill>
+                  <a:schemeClr val="tx1"/>
+                </a:solidFill>
+                <a:latin typeface="+mn-lt"/>
+                <a:ea typeface="+mn-ea"/>
+                <a:cs typeface="+mn-cs"/>
+              </a:defRPr>
+            </a:lvl3pPr>
+            <a:lvl4pPr marL="1371600" algn="l" defTabSz="914400" rtl="0" eaLnBrk="1" latinLnBrk="0" hangingPunct="1">
+              <a:defRPr sz="1800" kern="1200">
+                <a:solidFill>
+                  <a:schemeClr val="tx1"/>
+                </a:solidFill>
+                <a:latin typeface="+mn-lt"/>
+                <a:ea typeface="+mn-ea"/>
+                <a:cs typeface="+mn-cs"/>
+              </a:defRPr>
+            </a:lvl4pPr>
+            <a:lvl5pPr marL="1828800" algn="l" defTabSz="914400" rtl="0" eaLnBrk="1" latinLnBrk="0" hangingPunct="1">
+              <a:defRPr sz="1800" kern="1200">
+                <a:solidFill>
+                  <a:schemeClr val="tx1"/>
+                </a:solidFill>
+                <a:latin typeface="+mn-lt"/>
+                <a:ea typeface="+mn-ea"/>
+                <a:cs typeface="+mn-cs"/>
+              </a:defRPr>
+            </a:lvl5pPr>
+            <a:lvl6pPr marL="2286000" algn="l" defTabSz="914400" rtl="0" eaLnBrk="1" latinLnBrk="0" hangingPunct="1">
+              <a:defRPr sz="1800" kern="1200">
+                <a:solidFill>
+                  <a:schemeClr val="tx1"/>
+                </a:solidFill>
+                <a:latin typeface="+mn-lt"/>
+                <a:ea typeface="+mn-ea"/>
+                <a:cs typeface="+mn-cs"/>
+              </a:defRPr>
+            </a:lvl6pPr>
+            <a:lvl7pPr marL="2743200" algn="l" defTabSz="914400" rtl="0" eaLnBrk="1" latinLnBrk="0" hangingPunct="1">
+              <a:defRPr sz="1800" kern="1200">
+                <a:solidFill>
+                  <a:schemeClr val="tx1"/>
+                </a:solidFill>
+                <a:latin typeface="+mn-lt"/>
+                <a:ea typeface="+mn-ea"/>
+                <a:cs typeface="+mn-cs"/>
+              </a:defRPr>
+            </a:lvl7pPr>
+            <a:lvl8pPr marL="3200400" algn="l" defTabSz="914400" rtl="0" eaLnBrk="1" latinLnBrk="0" hangingPunct="1">
+              <a:defRPr sz="1800" kern="1200">
+                <a:solidFill>
+                  <a:schemeClr val="tx1"/>
+                </a:solidFill>
+                <a:latin typeface="+mn-lt"/>
+                <a:ea typeface="+mn-ea"/>
+                <a:cs typeface="+mn-cs"/>
+              </a:defRPr>
+            </a:lvl8pPr>
+            <a:lvl9pPr marL="3657600" algn="l" defTabSz="914400" rtl="0" eaLnBrk="1" latinLnBrk="0" hangingPunct="1">
+              <a:defRPr sz="1800" kern="1200">
+                <a:solidFill>
+                  <a:schemeClr val="tx1"/>
+                </a:solidFill>
+                <a:latin typeface="+mn-lt"/>
+                <a:ea typeface="+mn-ea"/>
+                <a:cs typeface="+mn-cs"/>
+              </a:defRPr>
+            </a:lvl9pPr>
+          </a:lstStyle>
+          <a:p>
+            <a:fld id="{D57F1E4F-1CFF-5643-939E-217C01CDF565}" type="slidenum">
+              <a:rPr lang="en-US" sz="1400" b="1" smtClean="0"/>
+              <a:pPr/>
+              <a:t>9</a:t>
+            </a:fld>
+            <a:endParaRPr lang="en-US" sz="1400" b="1" dirty="0"/>
+          </a:p>
+        </p:txBody>
+      </p:sp>
+    </p:spTree>
+    <p:extLst>
+      <p:ext uri="{BB962C8B-B14F-4D97-AF65-F5344CB8AC3E}">
+        <p14:creationId xmlns:p14="http://schemas.microsoft.com/office/powerpoint/2010/main" val="4151685094"/>
       </p:ext>
     </p:extLst>
   </p:cSld>

--- a/ppts/CHAPTER 2 RAG Part I_Indexing Your Data.pptx
+++ b/ppts/CHAPTER 2 RAG Part I_Indexing Your Data.pptx
@@ -5,35 +5,36 @@
     <p:sldMasterId id="2147483660" r:id="rId1"/>
   </p:sldMasterIdLst>
   <p:notesMasterIdLst>
-    <p:notesMasterId r:id="rId25"/>
+    <p:notesMasterId r:id="rId26"/>
   </p:notesMasterIdLst>
   <p:handoutMasterIdLst>
-    <p:handoutMasterId r:id="rId26"/>
+    <p:handoutMasterId r:id="rId27"/>
   </p:handoutMasterIdLst>
   <p:sldIdLst>
     <p:sldId id="256" r:id="rId2"/>
     <p:sldId id="1138" r:id="rId3"/>
     <p:sldId id="1139" r:id="rId4"/>
     <p:sldId id="1155" r:id="rId5"/>
-    <p:sldId id="1156" r:id="rId6"/>
-    <p:sldId id="1158" r:id="rId7"/>
-    <p:sldId id="1157" r:id="rId8"/>
-    <p:sldId id="1159" r:id="rId9"/>
-    <p:sldId id="1140" r:id="rId10"/>
-    <p:sldId id="1141" r:id="rId11"/>
-    <p:sldId id="1142" r:id="rId12"/>
-    <p:sldId id="1143" r:id="rId13"/>
-    <p:sldId id="1145" r:id="rId14"/>
-    <p:sldId id="1144" r:id="rId15"/>
-    <p:sldId id="1146" r:id="rId16"/>
-    <p:sldId id="1147" r:id="rId17"/>
-    <p:sldId id="1148" r:id="rId18"/>
-    <p:sldId id="1149" r:id="rId19"/>
-    <p:sldId id="1154" r:id="rId20"/>
-    <p:sldId id="1153" r:id="rId21"/>
-    <p:sldId id="1150" r:id="rId22"/>
-    <p:sldId id="1151" r:id="rId23"/>
-    <p:sldId id="1152" r:id="rId24"/>
+    <p:sldId id="1160" r:id="rId6"/>
+    <p:sldId id="1156" r:id="rId7"/>
+    <p:sldId id="1158" r:id="rId8"/>
+    <p:sldId id="1157" r:id="rId9"/>
+    <p:sldId id="1159" r:id="rId10"/>
+    <p:sldId id="1140" r:id="rId11"/>
+    <p:sldId id="1141" r:id="rId12"/>
+    <p:sldId id="1142" r:id="rId13"/>
+    <p:sldId id="1143" r:id="rId14"/>
+    <p:sldId id="1145" r:id="rId15"/>
+    <p:sldId id="1144" r:id="rId16"/>
+    <p:sldId id="1146" r:id="rId17"/>
+    <p:sldId id="1147" r:id="rId18"/>
+    <p:sldId id="1148" r:id="rId19"/>
+    <p:sldId id="1149" r:id="rId20"/>
+    <p:sldId id="1154" r:id="rId21"/>
+    <p:sldId id="1153" r:id="rId22"/>
+    <p:sldId id="1150" r:id="rId23"/>
+    <p:sldId id="1151" r:id="rId24"/>
+    <p:sldId id="1152" r:id="rId25"/>
   </p:sldIdLst>
   <p:sldSz cx="12192000" cy="6858000"/>
   <p:notesSz cx="6858000" cy="9144000"/>
@@ -145,6 +146,7 @@
             <p14:sldId id="1138"/>
             <p14:sldId id="1139"/>
             <p14:sldId id="1155"/>
+            <p14:sldId id="1160"/>
             <p14:sldId id="1156"/>
             <p14:sldId id="1158"/>
             <p14:sldId id="1157"/>
@@ -288,7 +290,7 @@
                 <a:latin typeface="맑은 고딕" panose="020B0503020000020004" pitchFamily="50" charset="-127"/>
                 <a:ea typeface="맑은 고딕" panose="020B0503020000020004" pitchFamily="50" charset="-127"/>
               </a:rPr>
-              <a:t>2026-09-20</a:t>
+              <a:t>2026-09-23</a:t>
             </a:fld>
             <a:endParaRPr lang="ko-KR" altLang="en-US">
               <a:latin typeface="맑은 고딕" panose="020B0503020000020004" pitchFamily="50" charset="-127"/>
@@ -474,7 +476,7 @@
           <a:p>
             <a:fld id="{43E1C3DD-4A19-441D-907C-380838DB51C4}" type="datetime1">
               <a:rPr lang="ko-KR" altLang="en-US" noProof="0" smtClean="0"/>
-              <a:t>2026-09-20</a:t>
+              <a:t>2026-09-23</a:t>
             </a:fld>
             <a:endParaRPr lang="ko-KR" altLang="en-US" noProof="0"/>
           </a:p>
@@ -1322,7 +1324,7 @@
           <a:p>
             <a:fld id="{990475B5-67CA-4281-BDCA-DA943C3C8EB3}" type="datetime1">
               <a:rPr lang="ko-KR" altLang="en-US" noProof="0" smtClean="0"/>
-              <a:t>2026-09-20</a:t>
+              <a:t>2026-09-23</a:t>
             </a:fld>
             <a:endParaRPr lang="ko-KR" altLang="en-US" noProof="0"/>
           </a:p>
@@ -1976,7 +1978,7 @@
           <a:p>
             <a:fld id="{48A87A34-81AB-432B-8DAE-1953F412C126}" type="datetimeFigureOut">
               <a:rPr lang="en-US" smtClean="0"/>
-              <a:t>9/20/2026</a:t>
+              <a:t>9/23/2026</a:t>
             </a:fld>
             <a:endParaRPr lang="en-US" dirty="0"/>
           </a:p>
@@ -2272,7 +2274,7 @@
           <a:p>
             <a:fld id="{C655C81E-72E7-4D05-94B5-F45B321A525D}" type="datetime1">
               <a:rPr lang="ko-KR" altLang="en-US" noProof="0" smtClean="0"/>
-              <a:t>2026-09-20</a:t>
+              <a:t>2026-09-23</a:t>
             </a:fld>
             <a:endParaRPr lang="ko-KR" altLang="en-US" noProof="0" dirty="0">
               <a:latin typeface="맑은 고딕" panose="020B0503020000020004" pitchFamily="50" charset="-127"/>
@@ -3073,6 +3075,627 @@
         <p:cNvPr id="1" name="">
           <a:extLst>
             <a:ext uri="{FF2B5EF4-FFF2-40B4-BE49-F238E27FC236}">
+              <a16:creationId xmlns:a16="http://schemas.microsoft.com/office/drawing/2014/main" id="{AE06AADB-16FD-D031-093A-078B9B45A5A7}"/>
+            </a:ext>
+          </a:extLst>
+        </p:cNvPr>
+        <p:cNvGrpSpPr/>
+        <p:nvPr/>
+      </p:nvGrpSpPr>
+      <p:grpSpPr>
+        <a:xfrm>
+          <a:off x="0" y="0"/>
+          <a:ext cx="0" cy="0"/>
+          <a:chOff x="0" y="0"/>
+          <a:chExt cx="0" cy="0"/>
+        </a:xfrm>
+      </p:grpSpPr>
+      <p:pic>
+        <p:nvPicPr>
+          <p:cNvPr id="5" name="그림 4">
+            <a:extLst>
+              <a:ext uri="{FF2B5EF4-FFF2-40B4-BE49-F238E27FC236}">
+                <a16:creationId xmlns:a16="http://schemas.microsoft.com/office/drawing/2014/main" id="{F642E58B-10CC-8E33-F868-76BDE8BDD9F4}"/>
+              </a:ext>
+            </a:extLst>
+          </p:cNvPr>
+          <p:cNvPicPr>
+            <a:picLocks noChangeAspect="1"/>
+          </p:cNvPicPr>
+          <p:nvPr/>
+        </p:nvPicPr>
+        <p:blipFill>
+          <a:blip r:embed="rId2"/>
+          <a:stretch>
+            <a:fillRect/>
+          </a:stretch>
+        </p:blipFill>
+        <p:spPr>
+          <a:xfrm>
+            <a:off x="686318" y="2714624"/>
+            <a:ext cx="7639100" cy="2676525"/>
+          </a:xfrm>
+          <a:prstGeom prst="rect">
+            <a:avLst/>
+          </a:prstGeom>
+          <a:ln>
+            <a:solidFill>
+              <a:schemeClr val="tx1"/>
+            </a:solidFill>
+          </a:ln>
+        </p:spPr>
+      </p:pic>
+      <p:sp>
+        <p:nvSpPr>
+          <p:cNvPr id="3" name="제목 1">
+            <a:extLst>
+              <a:ext uri="{FF2B5EF4-FFF2-40B4-BE49-F238E27FC236}">
+                <a16:creationId xmlns:a16="http://schemas.microsoft.com/office/drawing/2014/main" id="{9FF27C86-F5A7-56AC-6B7D-6AB573A8361D}"/>
+              </a:ext>
+            </a:extLst>
+          </p:cNvPr>
+          <p:cNvSpPr txBox="1">
+            <a:spLocks/>
+          </p:cNvSpPr>
+          <p:nvPr/>
+        </p:nvSpPr>
+        <p:spPr>
+          <a:xfrm>
+            <a:off x="475645" y="481983"/>
+            <a:ext cx="10353762" cy="766439"/>
+          </a:xfrm>
+          <a:prstGeom prst="rect">
+            <a:avLst/>
+          </a:prstGeom>
+        </p:spPr>
+        <p:txBody>
+          <a:bodyPr vert="horz" lIns="91440" tIns="45720" rIns="91440" bIns="45720" rtlCol="0" anchor="ctr">
+            <a:normAutofit/>
+          </a:bodyPr>
+          <a:lstStyle>
+            <a:lvl1pPr algn="ctr" defTabSz="914400" rtl="0" eaLnBrk="1" latinLnBrk="1" hangingPunct="1">
+              <a:lnSpc>
+                <a:spcPct val="90000"/>
+              </a:lnSpc>
+              <a:spcBef>
+                <a:spcPct val="0"/>
+              </a:spcBef>
+              <a:buNone/>
+              <a:defRPr sz="3200" kern="1200" cap="all" baseline="0">
+                <a:solidFill>
+                  <a:schemeClr val="tx1"/>
+                </a:solidFill>
+                <a:effectLst/>
+                <a:latin typeface="Batang" panose="02030600000101010101" pitchFamily="18" charset="-127"/>
+                <a:ea typeface="Batang" panose="02030600000101010101" pitchFamily="18" charset="-127"/>
+                <a:cs typeface="+mj-cs"/>
+              </a:defRPr>
+            </a:lvl1pPr>
+          </a:lstStyle>
+          <a:p>
+            <a:pPr algn="l"/>
+            <a:r>
+              <a:rPr lang="en-US" altLang="ko-KR" sz="2800" cap="none" dirty="0">
+                <a:solidFill>
+                  <a:schemeClr val="bg2">
+                    <a:lumMod val="25000"/>
+                  </a:schemeClr>
+                </a:solidFill>
+                <a:latin typeface="D2Coding" panose="020B0609020101020101" pitchFamily="49" charset="-127"/>
+                <a:ea typeface="D2Coding" panose="020B0609020101020101" pitchFamily="49" charset="-127"/>
+                <a:cs typeface="Segoe UI Light" panose="020B0502040204020203" pitchFamily="34" charset="0"/>
+              </a:rPr>
+              <a:t>The Goal: Picking Relevant Context for LLMs</a:t>
+            </a:r>
+            <a:endParaRPr lang="ko-KR" altLang="en-US" sz="2800" cap="none" dirty="0">
+              <a:solidFill>
+                <a:schemeClr val="bg2">
+                  <a:lumMod val="25000"/>
+                </a:schemeClr>
+              </a:solidFill>
+              <a:latin typeface="D2Coding" panose="020B0609020101020101" pitchFamily="49" charset="-127"/>
+              <a:ea typeface="D2Coding" panose="020B0609020101020101" pitchFamily="49" charset="-127"/>
+              <a:cs typeface="Segoe UI Light" panose="020B0502040204020203" pitchFamily="34" charset="0"/>
+            </a:endParaRPr>
+          </a:p>
+        </p:txBody>
+      </p:sp>
+      <p:sp>
+        <p:nvSpPr>
+          <p:cNvPr id="6" name="TextBox 5">
+            <a:extLst>
+              <a:ext uri="{FF2B5EF4-FFF2-40B4-BE49-F238E27FC236}">
+                <a16:creationId xmlns:a16="http://schemas.microsoft.com/office/drawing/2014/main" id="{ADDE27A3-7BCD-B963-0B8B-1E167166F732}"/>
+              </a:ext>
+            </a:extLst>
+          </p:cNvPr>
+          <p:cNvSpPr txBox="1"/>
+          <p:nvPr/>
+        </p:nvSpPr>
+        <p:spPr>
+          <a:xfrm>
+            <a:off x="609600" y="1248422"/>
+            <a:ext cx="10972800" cy="793166"/>
+          </a:xfrm>
+          <a:prstGeom prst="rect">
+            <a:avLst/>
+          </a:prstGeom>
+          <a:noFill/>
+        </p:spPr>
+        <p:txBody>
+          <a:bodyPr wrap="square">
+            <a:spAutoFit/>
+          </a:bodyPr>
+          <a:lstStyle/>
+          <a:p>
+            <a:pPr marL="285750" indent="-285750">
+              <a:lnSpc>
+                <a:spcPct val="150000"/>
+              </a:lnSpc>
+              <a:buFont typeface="Wingdings" panose="05000000000000000000" pitchFamily="2" charset="2"/>
+              <a:buChar char="v"/>
+            </a:pPr>
+            <a:r>
+              <a:rPr lang="en-US" altLang="ko-KR" sz="1600" b="1" dirty="0">
+                <a:latin typeface="D2Coding" panose="020B0609020101020101" pitchFamily="49" charset="-127"/>
+                <a:ea typeface="D2Coding" panose="020B0609020101020101" pitchFamily="49" charset="-127"/>
+              </a:rPr>
+              <a:t>Ingestion</a:t>
+            </a:r>
+            <a:r>
+              <a:rPr lang="en-US" altLang="ko-KR" sz="1600" dirty="0">
+                <a:latin typeface="D2Coding" panose="020B0609020101020101" pitchFamily="49" charset="-127"/>
+                <a:ea typeface="D2Coding" panose="020B0609020101020101" pitchFamily="49" charset="-127"/>
+              </a:rPr>
+              <a:t> is simply the process of converting your documents into numbers that computers can understand and analyze, and storing them in a special type of database for efficient retrieval. </a:t>
+            </a:r>
+            <a:endParaRPr lang="ko-KR" altLang="en-US" sz="1600" b="1" dirty="0">
+              <a:latin typeface="D2Coding" panose="020B0609020101020101" pitchFamily="49" charset="-127"/>
+              <a:ea typeface="D2Coding" panose="020B0609020101020101" pitchFamily="49" charset="-127"/>
+            </a:endParaRPr>
+          </a:p>
+        </p:txBody>
+      </p:sp>
+      <p:sp>
+        <p:nvSpPr>
+          <p:cNvPr id="8" name="TextBox 7">
+            <a:extLst>
+              <a:ext uri="{FF2B5EF4-FFF2-40B4-BE49-F238E27FC236}">
+                <a16:creationId xmlns:a16="http://schemas.microsoft.com/office/drawing/2014/main" id="{7C4036C3-6CE1-9412-61CB-8AA26EABCFD4}"/>
+              </a:ext>
+            </a:extLst>
+          </p:cNvPr>
+          <p:cNvSpPr txBox="1"/>
+          <p:nvPr/>
+        </p:nvSpPr>
+        <p:spPr>
+          <a:xfrm>
+            <a:off x="8458199" y="2714625"/>
+            <a:ext cx="3324225" cy="2833981"/>
+          </a:xfrm>
+          <a:prstGeom prst="rect">
+            <a:avLst/>
+          </a:prstGeom>
+          <a:noFill/>
+          <a:ln>
+            <a:solidFill>
+              <a:schemeClr val="tx1"/>
+            </a:solidFill>
+          </a:ln>
+        </p:spPr>
+        <p:txBody>
+          <a:bodyPr wrap="square">
+            <a:spAutoFit/>
+          </a:bodyPr>
+          <a:lstStyle/>
+          <a:p>
+            <a:pPr marL="342900" indent="-342900">
+              <a:lnSpc>
+                <a:spcPct val="150000"/>
+              </a:lnSpc>
+              <a:buAutoNum type="arabicPeriod"/>
+            </a:pPr>
+            <a:r>
+              <a:rPr lang="en-US" altLang="ko-KR" sz="1200" dirty="0">
+                <a:latin typeface="D2Coding" panose="020B0609020101020101" pitchFamily="49" charset="-127"/>
+                <a:ea typeface="D2Coding" panose="020B0609020101020101" pitchFamily="49" charset="-127"/>
+              </a:rPr>
+              <a:t>Extract the text from the document. </a:t>
+            </a:r>
+          </a:p>
+          <a:p>
+            <a:pPr marL="342900" indent="-342900">
+              <a:lnSpc>
+                <a:spcPct val="150000"/>
+              </a:lnSpc>
+              <a:buAutoNum type="arabicPeriod"/>
+            </a:pPr>
+            <a:r>
+              <a:rPr lang="en-US" altLang="ko-KR" sz="1200" dirty="0">
+                <a:latin typeface="D2Coding" panose="020B0609020101020101" pitchFamily="49" charset="-127"/>
+                <a:ea typeface="D2Coding" panose="020B0609020101020101" pitchFamily="49" charset="-127"/>
+              </a:rPr>
+              <a:t>Split the text into manageable chunks. </a:t>
+            </a:r>
+          </a:p>
+          <a:p>
+            <a:pPr marL="342900" indent="-342900">
+              <a:lnSpc>
+                <a:spcPct val="150000"/>
+              </a:lnSpc>
+              <a:buAutoNum type="arabicPeriod"/>
+            </a:pPr>
+            <a:r>
+              <a:rPr lang="en-US" altLang="ko-KR" sz="1200" dirty="0">
+                <a:latin typeface="D2Coding" panose="020B0609020101020101" pitchFamily="49" charset="-127"/>
+                <a:ea typeface="D2Coding" panose="020B0609020101020101" pitchFamily="49" charset="-127"/>
+              </a:rPr>
+              <a:t>Convert the text into numbers that computers can understand. </a:t>
+            </a:r>
+          </a:p>
+          <a:p>
+            <a:pPr marL="342900" indent="-342900">
+              <a:lnSpc>
+                <a:spcPct val="150000"/>
+              </a:lnSpc>
+              <a:buAutoNum type="arabicPeriod"/>
+            </a:pPr>
+            <a:r>
+              <a:rPr lang="en-US" altLang="ko-KR" sz="1200" dirty="0">
+                <a:latin typeface="D2Coding" panose="020B0609020101020101" pitchFamily="49" charset="-127"/>
+                <a:ea typeface="D2Coding" panose="020B0609020101020101" pitchFamily="49" charset="-127"/>
+              </a:rPr>
+              <a:t>Store these number representations of your text somewhere that makes it easy and fast to retrieve the relevant sections of your document to answer a given question.</a:t>
+            </a:r>
+            <a:endParaRPr lang="ko-KR" altLang="en-US" sz="1200" dirty="0">
+              <a:latin typeface="D2Coding" panose="020B0609020101020101" pitchFamily="49" charset="-127"/>
+              <a:ea typeface="D2Coding" panose="020B0609020101020101" pitchFamily="49" charset="-127"/>
+            </a:endParaRPr>
+          </a:p>
+        </p:txBody>
+      </p:sp>
+      <p:sp>
+        <p:nvSpPr>
+          <p:cNvPr id="12" name="TextBox 11">
+            <a:extLst>
+              <a:ext uri="{FF2B5EF4-FFF2-40B4-BE49-F238E27FC236}">
+                <a16:creationId xmlns:a16="http://schemas.microsoft.com/office/drawing/2014/main" id="{A17C5159-309F-23EC-ADB3-6FAB4DCD08BE}"/>
+              </a:ext>
+            </a:extLst>
+          </p:cNvPr>
+          <p:cNvSpPr txBox="1"/>
+          <p:nvPr/>
+        </p:nvSpPr>
+        <p:spPr>
+          <a:xfrm>
+            <a:off x="1112771" y="5788190"/>
+            <a:ext cx="4295775" cy="338554"/>
+          </a:xfrm>
+          <a:prstGeom prst="rect">
+            <a:avLst/>
+          </a:prstGeom>
+          <a:solidFill>
+            <a:schemeClr val="tx1"/>
+          </a:solidFill>
+        </p:spPr>
+        <p:txBody>
+          <a:bodyPr wrap="square">
+            <a:spAutoFit/>
+          </a:bodyPr>
+          <a:lstStyle/>
+          <a:p>
+            <a:r>
+              <a:rPr lang="en-US" altLang="ko-KR" sz="1600" dirty="0">
+                <a:solidFill>
+                  <a:schemeClr val="bg1"/>
+                </a:solidFill>
+                <a:latin typeface="D2Coding" panose="020B0609020101020101" pitchFamily="49" charset="-127"/>
+                <a:ea typeface="D2Coding" panose="020B0609020101020101" pitchFamily="49" charset="-127"/>
+              </a:rPr>
+              <a:t>“What key risks did Tesla face in 2022?”</a:t>
+            </a:r>
+            <a:endParaRPr lang="ko-KR" altLang="en-US" sz="1600" dirty="0">
+              <a:solidFill>
+                <a:schemeClr val="bg1"/>
+              </a:solidFill>
+              <a:latin typeface="D2Coding" panose="020B0609020101020101" pitchFamily="49" charset="-127"/>
+              <a:ea typeface="D2Coding" panose="020B0609020101020101" pitchFamily="49" charset="-127"/>
+            </a:endParaRPr>
+          </a:p>
+        </p:txBody>
+      </p:sp>
+      <p:pic>
+        <p:nvPicPr>
+          <p:cNvPr id="14" name="그래픽 13" descr="웹 디자인">
+            <a:extLst>
+              <a:ext uri="{FF2B5EF4-FFF2-40B4-BE49-F238E27FC236}">
+                <a16:creationId xmlns:a16="http://schemas.microsoft.com/office/drawing/2014/main" id="{2390334E-00AF-997C-7435-855CCD58A09D}"/>
+              </a:ext>
+            </a:extLst>
+          </p:cNvPr>
+          <p:cNvPicPr>
+            <a:picLocks noChangeAspect="1"/>
+          </p:cNvPicPr>
+          <p:nvPr/>
+        </p:nvPicPr>
+        <p:blipFill>
+          <a:blip>
+            <a:extLst>
+              <a:ext uri="{96DAC541-7B7A-43D3-8B79-37D633B846F1}">
+                <asvg:svgBlip xmlns:asvg="http://schemas.microsoft.com/office/drawing/2016/SVG/main" r:embed="rId3"/>
+              </a:ext>
+            </a:extLst>
+          </a:blip>
+          <a:stretch>
+            <a:fillRect/>
+          </a:stretch>
+        </p:blipFill>
+        <p:spPr>
+          <a:xfrm>
+            <a:off x="569184" y="5686662"/>
+            <a:ext cx="543335" cy="543335"/>
+          </a:xfrm>
+          <a:prstGeom prst="rect">
+            <a:avLst/>
+          </a:prstGeom>
+        </p:spPr>
+      </p:pic>
+      <p:sp>
+        <p:nvSpPr>
+          <p:cNvPr id="2" name="슬라이드 번호 개체 틀 3">
+            <a:extLst>
+              <a:ext uri="{FF2B5EF4-FFF2-40B4-BE49-F238E27FC236}">
+                <a16:creationId xmlns:a16="http://schemas.microsoft.com/office/drawing/2014/main" id="{0164DB67-877E-2766-2071-AB2439A1502F}"/>
+              </a:ext>
+            </a:extLst>
+          </p:cNvPr>
+          <p:cNvSpPr txBox="1">
+            <a:spLocks/>
+          </p:cNvSpPr>
+          <p:nvPr/>
+        </p:nvSpPr>
+        <p:spPr>
+          <a:xfrm>
+            <a:off x="11180761" y="299420"/>
+            <a:ext cx="753545" cy="365125"/>
+          </a:xfrm>
+          <a:prstGeom prst="rect">
+            <a:avLst/>
+          </a:prstGeom>
+        </p:spPr>
+        <p:txBody>
+          <a:bodyPr vert="horz" lIns="91440" tIns="45720" rIns="91440" bIns="45720" rtlCol="0" anchor="ctr"/>
+          <a:lstStyle>
+            <a:defPPr rtl="0">
+              <a:defRPr lang="ko-KR"/>
+            </a:defPPr>
+            <a:lvl1pPr marL="0" algn="r" defTabSz="914400" rtl="0" eaLnBrk="1" latinLnBrk="0" hangingPunct="1">
+              <a:defRPr sz="1200" kern="1200" baseline="0">
+                <a:solidFill>
+                  <a:schemeClr val="tx1">
+                    <a:lumMod val="65000"/>
+                    <a:lumOff val="35000"/>
+                  </a:schemeClr>
+                </a:solidFill>
+                <a:latin typeface="맑은 고딕" panose="020B0503020000020004" pitchFamily="50" charset="-127"/>
+                <a:ea typeface="맑은 고딕" panose="020B0503020000020004" pitchFamily="50" charset="-127"/>
+                <a:cs typeface="+mn-cs"/>
+              </a:defRPr>
+            </a:lvl1pPr>
+            <a:lvl2pPr marL="457200" algn="l" defTabSz="914400" rtl="0" eaLnBrk="1" latinLnBrk="0" hangingPunct="1">
+              <a:defRPr sz="1800" kern="1200">
+                <a:solidFill>
+                  <a:schemeClr val="tx1"/>
+                </a:solidFill>
+                <a:latin typeface="+mn-lt"/>
+                <a:ea typeface="+mn-ea"/>
+                <a:cs typeface="+mn-cs"/>
+              </a:defRPr>
+            </a:lvl2pPr>
+            <a:lvl3pPr marL="914400" algn="l" defTabSz="914400" rtl="0" eaLnBrk="1" latinLnBrk="0" hangingPunct="1">
+              <a:defRPr sz="1800" kern="1200">
+                <a:solidFill>
+                  <a:schemeClr val="tx1"/>
+                </a:solidFill>
+                <a:latin typeface="+mn-lt"/>
+                <a:ea typeface="+mn-ea"/>
+                <a:cs typeface="+mn-cs"/>
+              </a:defRPr>
+            </a:lvl3pPr>
+            <a:lvl4pPr marL="1371600" algn="l" defTabSz="914400" rtl="0" eaLnBrk="1" latinLnBrk="0" hangingPunct="1">
+              <a:defRPr sz="1800" kern="1200">
+                <a:solidFill>
+                  <a:schemeClr val="tx1"/>
+                </a:solidFill>
+                <a:latin typeface="+mn-lt"/>
+                <a:ea typeface="+mn-ea"/>
+                <a:cs typeface="+mn-cs"/>
+              </a:defRPr>
+            </a:lvl4pPr>
+            <a:lvl5pPr marL="1828800" algn="l" defTabSz="914400" rtl="0" eaLnBrk="1" latinLnBrk="0" hangingPunct="1">
+              <a:defRPr sz="1800" kern="1200">
+                <a:solidFill>
+                  <a:schemeClr val="tx1"/>
+                </a:solidFill>
+                <a:latin typeface="+mn-lt"/>
+                <a:ea typeface="+mn-ea"/>
+                <a:cs typeface="+mn-cs"/>
+              </a:defRPr>
+            </a:lvl5pPr>
+            <a:lvl6pPr marL="2286000" algn="l" defTabSz="914400" rtl="0" eaLnBrk="1" latinLnBrk="0" hangingPunct="1">
+              <a:defRPr sz="1800" kern="1200">
+                <a:solidFill>
+                  <a:schemeClr val="tx1"/>
+                </a:solidFill>
+                <a:latin typeface="+mn-lt"/>
+                <a:ea typeface="+mn-ea"/>
+                <a:cs typeface="+mn-cs"/>
+              </a:defRPr>
+            </a:lvl6pPr>
+            <a:lvl7pPr marL="2743200" algn="l" defTabSz="914400" rtl="0" eaLnBrk="1" latinLnBrk="0" hangingPunct="1">
+              <a:defRPr sz="1800" kern="1200">
+                <a:solidFill>
+                  <a:schemeClr val="tx1"/>
+                </a:solidFill>
+                <a:latin typeface="+mn-lt"/>
+                <a:ea typeface="+mn-ea"/>
+                <a:cs typeface="+mn-cs"/>
+              </a:defRPr>
+            </a:lvl7pPr>
+            <a:lvl8pPr marL="3200400" algn="l" defTabSz="914400" rtl="0" eaLnBrk="1" latinLnBrk="0" hangingPunct="1">
+              <a:defRPr sz="1800" kern="1200">
+                <a:solidFill>
+                  <a:schemeClr val="tx1"/>
+                </a:solidFill>
+                <a:latin typeface="+mn-lt"/>
+                <a:ea typeface="+mn-ea"/>
+                <a:cs typeface="+mn-cs"/>
+              </a:defRPr>
+            </a:lvl8pPr>
+            <a:lvl9pPr marL="3657600" algn="l" defTabSz="914400" rtl="0" eaLnBrk="1" latinLnBrk="0" hangingPunct="1">
+              <a:defRPr sz="1800" kern="1200">
+                <a:solidFill>
+                  <a:schemeClr val="tx1"/>
+                </a:solidFill>
+                <a:latin typeface="+mn-lt"/>
+                <a:ea typeface="+mn-ea"/>
+                <a:cs typeface="+mn-cs"/>
+              </a:defRPr>
+            </a:lvl9pPr>
+          </a:lstStyle>
+          <a:p>
+            <a:fld id="{D57F1E4F-1CFF-5643-939E-217C01CDF565}" type="slidenum">
+              <a:rPr lang="en-US" sz="1400" b="1" smtClean="0"/>
+              <a:pPr/>
+              <a:t>10</a:t>
+            </a:fld>
+            <a:endParaRPr lang="en-US" sz="1400" b="1" dirty="0"/>
+          </a:p>
+        </p:txBody>
+      </p:sp>
+      <p:sp>
+        <p:nvSpPr>
+          <p:cNvPr id="4" name="두루마리 모양: 가로로 말림 3">
+            <a:extLst>
+              <a:ext uri="{FF2B5EF4-FFF2-40B4-BE49-F238E27FC236}">
+                <a16:creationId xmlns:a16="http://schemas.microsoft.com/office/drawing/2014/main" id="{18D8461A-F4D0-45BF-D36F-2936E3ECA64C}"/>
+              </a:ext>
+            </a:extLst>
+          </p:cNvPr>
+          <p:cNvSpPr/>
+          <p:nvPr/>
+        </p:nvSpPr>
+        <p:spPr>
+          <a:xfrm>
+            <a:off x="819151" y="2772098"/>
+            <a:ext cx="1428749" cy="771202"/>
+          </a:xfrm>
+          <a:prstGeom prst="horizontalScroll">
+            <a:avLst/>
+          </a:prstGeom>
+          <a:noFill/>
+        </p:spPr>
+        <p:style>
+          <a:lnRef idx="2">
+            <a:schemeClr val="accent1">
+              <a:shade val="15000"/>
+            </a:schemeClr>
+          </a:lnRef>
+          <a:fillRef idx="1">
+            <a:schemeClr val="accent1"/>
+          </a:fillRef>
+          <a:effectRef idx="0">
+            <a:schemeClr val="accent1"/>
+          </a:effectRef>
+          <a:fontRef idx="minor">
+            <a:schemeClr val="lt1"/>
+          </a:fontRef>
+        </p:style>
+        <p:txBody>
+          <a:bodyPr rtlCol="0" anchor="ctr"/>
+          <a:lstStyle/>
+          <a:p>
+            <a:pPr algn="ctr"/>
+            <a:endParaRPr lang="ko-KR" altLang="en-US" dirty="0"/>
+          </a:p>
+        </p:txBody>
+      </p:sp>
+      <p:sp>
+        <p:nvSpPr>
+          <p:cNvPr id="9" name="TextBox 8">
+            <a:extLst>
+              <a:ext uri="{FF2B5EF4-FFF2-40B4-BE49-F238E27FC236}">
+                <a16:creationId xmlns:a16="http://schemas.microsoft.com/office/drawing/2014/main" id="{270870DB-7FC7-C2F1-AC9D-0DCF09FD92E6}"/>
+              </a:ext>
+            </a:extLst>
+          </p:cNvPr>
+          <p:cNvSpPr txBox="1"/>
+          <p:nvPr/>
+        </p:nvSpPr>
+        <p:spPr>
+          <a:xfrm>
+            <a:off x="885826" y="2905780"/>
+            <a:ext cx="1428749" cy="523220"/>
+          </a:xfrm>
+          <a:prstGeom prst="rect">
+            <a:avLst/>
+          </a:prstGeom>
+          <a:noFill/>
+        </p:spPr>
+        <p:txBody>
+          <a:bodyPr wrap="square" rtlCol="0">
+            <a:spAutoFit/>
+          </a:bodyPr>
+          <a:lstStyle/>
+          <a:p>
+            <a:r>
+              <a:rPr lang="en-US" altLang="ko-KR" sz="1400" dirty="0">
+                <a:solidFill>
+                  <a:schemeClr val="accent5"/>
+                </a:solidFill>
+                <a:latin typeface="D2Coding" panose="020B0609020101020101" pitchFamily="49" charset="-127"/>
+                <a:ea typeface="D2Coding" panose="020B0609020101020101" pitchFamily="49" charset="-127"/>
+                <a:hlinkClick r:id="rId4">
+                  <a:extLst>
+                    <a:ext uri="{A12FA001-AC4F-418D-AE19-62706E023703}">
+                      <ahyp:hlinkClr xmlns:ahyp="http://schemas.microsoft.com/office/drawing/2018/hyperlinkcolor" val="tx"/>
+                    </a:ext>
+                  </a:extLst>
+                </a:hlinkClick>
+              </a:rPr>
+              <a:t>Tesla’s 2022 annual report</a:t>
+            </a:r>
+            <a:endParaRPr lang="ko-KR" altLang="en-US" sz="1400" dirty="0">
+              <a:solidFill>
+                <a:schemeClr val="accent5"/>
+              </a:solidFill>
+              <a:latin typeface="D2Coding" panose="020B0609020101020101" pitchFamily="49" charset="-127"/>
+              <a:ea typeface="D2Coding" panose="020B0609020101020101" pitchFamily="49" charset="-127"/>
+            </a:endParaRPr>
+          </a:p>
+        </p:txBody>
+      </p:sp>
+    </p:spTree>
+    <p:extLst>
+      <p:ext uri="{BB962C8B-B14F-4D97-AF65-F5344CB8AC3E}">
+        <p14:creationId xmlns:p14="http://schemas.microsoft.com/office/powerpoint/2010/main" val="4151685094"/>
+      </p:ext>
+    </p:extLst>
+  </p:cSld>
+  <p:clrMapOvr>
+    <a:masterClrMapping/>
+  </p:clrMapOvr>
+</p:sld>
+</file>
+
+<file path=ppt/slides/slide11.xml><?xml version="1.0" encoding="utf-8"?>
+<p:sld xmlns:a="http://schemas.openxmlformats.org/drawingml/2006/main" xmlns:r="http://schemas.openxmlformats.org/officeDocument/2006/relationships" xmlns:p="http://schemas.openxmlformats.org/presentationml/2006/main">
+  <p:cSld>
+    <p:spTree>
+      <p:nvGrpSpPr>
+        <p:cNvPr id="1" name="">
+          <a:extLst>
+            <a:ext uri="{FF2B5EF4-FFF2-40B4-BE49-F238E27FC236}">
               <a16:creationId xmlns:a16="http://schemas.microsoft.com/office/drawing/2014/main" id="{29036070-2CC2-66E6-DD08-B216F753E3FC}"/>
             </a:ext>
           </a:extLst>
@@ -3517,10 +4140,10 @@
           <p:nvPr/>
         </p:nvPicPr>
         <p:blipFill>
-          <a:blip r:embed="rId4">
+          <a:blip>
             <a:extLst>
               <a:ext uri="{96DAC541-7B7A-43D3-8B79-37D633B846F1}">
-                <asvg:svgBlip xmlns:asvg="http://schemas.microsoft.com/office/drawing/2016/SVG/main" r:embed="rId5"/>
+                <asvg:svgBlip xmlns:asvg="http://schemas.microsoft.com/office/drawing/2016/SVG/main" r:embed="rId4"/>
               </a:ext>
             </a:extLst>
           </a:blip>
@@ -3708,7 +4331,7 @@
             <a:fld id="{D57F1E4F-1CFF-5643-939E-217C01CDF565}" type="slidenum">
               <a:rPr lang="en-US" sz="1400" b="1" smtClean="0"/>
               <a:pPr/>
-              <a:t>10</a:t>
+              <a:t>11</a:t>
             </a:fld>
             <a:endParaRPr lang="en-US" sz="1400" b="1" dirty="0"/>
           </a:p>
@@ -3727,7 +4350,7 @@
 </p:sld>
 </file>
 
-<file path=ppt/slides/slide11.xml><?xml version="1.0" encoding="utf-8"?>
+<file path=ppt/slides/slide12.xml><?xml version="1.0" encoding="utf-8"?>
 <p:sld xmlns:a="http://schemas.openxmlformats.org/drawingml/2006/main" xmlns:r="http://schemas.openxmlformats.org/officeDocument/2006/relationships" xmlns:p="http://schemas.openxmlformats.org/presentationml/2006/main">
   <p:cSld>
     <p:spTree>
@@ -4525,7 +5148,7 @@
             <a:fld id="{D57F1E4F-1CFF-5643-939E-217C01CDF565}" type="slidenum">
               <a:rPr lang="en-US" sz="1400" b="1" smtClean="0"/>
               <a:pPr/>
-              <a:t>11</a:t>
+              <a:t>12</a:t>
             </a:fld>
             <a:endParaRPr lang="en-US" sz="1400" b="1" dirty="0"/>
           </a:p>
@@ -4544,7 +5167,7 @@
 </p:sld>
 </file>
 
-<file path=ppt/slides/slide12.xml><?xml version="1.0" encoding="utf-8"?>
+<file path=ppt/slides/slide13.xml><?xml version="1.0" encoding="utf-8"?>
 <p:sld xmlns:a="http://schemas.openxmlformats.org/drawingml/2006/main" xmlns:r="http://schemas.openxmlformats.org/officeDocument/2006/relationships" xmlns:p="http://schemas.openxmlformats.org/presentationml/2006/main">
   <p:cSld>
     <p:spTree>
@@ -5563,10 +6186,10 @@
           <p:nvPr/>
         </p:nvPicPr>
         <p:blipFill>
-          <a:blip r:embed="rId2">
+          <a:blip>
             <a:extLst>
               <a:ext uri="{96DAC541-7B7A-43D3-8B79-37D633B846F1}">
-                <asvg:svgBlip xmlns:asvg="http://schemas.microsoft.com/office/drawing/2016/SVG/main" r:embed="rId3"/>
+                <asvg:svgBlip xmlns:asvg="http://schemas.microsoft.com/office/drawing/2016/SVG/main" r:embed="rId2"/>
               </a:ext>
             </a:extLst>
           </a:blip>
@@ -5771,10 +6394,10 @@
           <p:nvPr/>
         </p:nvPicPr>
         <p:blipFill>
-          <a:blip r:embed="rId2">
+          <a:blip>
             <a:extLst>
               <a:ext uri="{96DAC541-7B7A-43D3-8B79-37D633B846F1}">
-                <asvg:svgBlip xmlns:asvg="http://schemas.microsoft.com/office/drawing/2016/SVG/main" r:embed="rId3"/>
+                <asvg:svgBlip xmlns:asvg="http://schemas.microsoft.com/office/drawing/2016/SVG/main" r:embed="rId2"/>
               </a:ext>
             </a:extLst>
           </a:blip>
@@ -5807,10 +6430,10 @@
           <p:nvPr/>
         </p:nvPicPr>
         <p:blipFill>
-          <a:blip r:embed="rId2">
+          <a:blip>
             <a:extLst>
               <a:ext uri="{96DAC541-7B7A-43D3-8B79-37D633B846F1}">
-                <asvg:svgBlip xmlns:asvg="http://schemas.microsoft.com/office/drawing/2016/SVG/main" r:embed="rId3"/>
+                <asvg:svgBlip xmlns:asvg="http://schemas.microsoft.com/office/drawing/2016/SVG/main" r:embed="rId2"/>
               </a:ext>
             </a:extLst>
           </a:blip>
@@ -5857,7 +6480,7 @@
             <a:fld id="{D57F1E4F-1CFF-5643-939E-217C01CDF565}" type="slidenum">
               <a:rPr lang="en-US" sz="1400" b="1" smtClean="0"/>
               <a:pPr/>
-              <a:t>12</a:t>
+              <a:t>13</a:t>
             </a:fld>
             <a:endParaRPr lang="en-US" sz="1400" b="1" dirty="0"/>
           </a:p>
@@ -6170,7 +6793,7 @@
 </p:sld>
 </file>
 
-<file path=ppt/slides/slide13.xml><?xml version="1.0" encoding="utf-8"?>
+<file path=ppt/slides/slide14.xml><?xml version="1.0" encoding="utf-8"?>
 <p:sld xmlns:a="http://schemas.openxmlformats.org/drawingml/2006/main" xmlns:r="http://schemas.openxmlformats.org/officeDocument/2006/relationships" xmlns:p="http://schemas.openxmlformats.org/presentationml/2006/main">
   <p:cSld>
     <p:spTree>
@@ -6606,7 +7229,7 @@
             <a:fld id="{D57F1E4F-1CFF-5643-939E-217C01CDF565}" type="slidenum">
               <a:rPr lang="en-US" sz="1400" b="1" smtClean="0"/>
               <a:pPr/>
-              <a:t>13</a:t>
+              <a:t>14</a:t>
             </a:fld>
             <a:endParaRPr lang="en-US" sz="1400" b="1" dirty="0"/>
           </a:p>
@@ -6840,7 +7463,7 @@
 </p:sld>
 </file>
 
-<file path=ppt/slides/slide14.xml><?xml version="1.0" encoding="utf-8"?>
+<file path=ppt/slides/slide15.xml><?xml version="1.0" encoding="utf-8"?>
 <p:sld xmlns:a="http://schemas.openxmlformats.org/drawingml/2006/main" xmlns:r="http://schemas.openxmlformats.org/officeDocument/2006/relationships" xmlns:p="http://schemas.openxmlformats.org/presentationml/2006/main">
   <p:cSld>
     <p:spTree>
@@ -7452,7 +8075,7 @@
             <a:fld id="{D57F1E4F-1CFF-5643-939E-217C01CDF565}" type="slidenum">
               <a:rPr lang="en-US" sz="1400" b="1" smtClean="0"/>
               <a:pPr/>
-              <a:t>14</a:t>
+              <a:t>15</a:t>
             </a:fld>
             <a:endParaRPr lang="en-US" sz="1400" b="1" dirty="0"/>
           </a:p>
@@ -7471,7 +8094,7 @@
 </p:sld>
 </file>
 
-<file path=ppt/slides/slide15.xml><?xml version="1.0" encoding="utf-8"?>
+<file path=ppt/slides/slide16.xml><?xml version="1.0" encoding="utf-8"?>
 <p:sld xmlns:a="http://schemas.openxmlformats.org/drawingml/2006/main" xmlns:r="http://schemas.openxmlformats.org/officeDocument/2006/relationships" xmlns:p="http://schemas.openxmlformats.org/presentationml/2006/main">
   <p:cSld>
     <p:spTree>
@@ -8436,7 +9059,7 @@
             <a:fld id="{D57F1E4F-1CFF-5643-939E-217C01CDF565}" type="slidenum">
               <a:rPr lang="en-US" sz="1400" b="1" smtClean="0"/>
               <a:pPr/>
-              <a:t>15</a:t>
+              <a:t>16</a:t>
             </a:fld>
             <a:endParaRPr lang="en-US" sz="1400" b="1" dirty="0"/>
           </a:p>
@@ -8455,7 +9078,7 @@
 </p:sld>
 </file>
 
-<file path=ppt/slides/slide16.xml><?xml version="1.0" encoding="utf-8"?>
+<file path=ppt/slides/slide17.xml><?xml version="1.0" encoding="utf-8"?>
 <p:sld xmlns:a="http://schemas.openxmlformats.org/drawingml/2006/main" xmlns:r="http://schemas.openxmlformats.org/officeDocument/2006/relationships" xmlns:p="http://schemas.openxmlformats.org/presentationml/2006/main">
   <p:cSld>
     <p:spTree>
@@ -9556,7 +10179,7 @@
             <a:fld id="{D57F1E4F-1CFF-5643-939E-217C01CDF565}" type="slidenum">
               <a:rPr lang="en-US" sz="1400" b="1" smtClean="0"/>
               <a:pPr/>
-              <a:t>16</a:t>
+              <a:t>17</a:t>
             </a:fld>
             <a:endParaRPr lang="en-US" sz="1400" b="1" dirty="0"/>
           </a:p>
@@ -9575,7 +10198,7 @@
 </p:sld>
 </file>
 
-<file path=ppt/slides/slide17.xml><?xml version="1.0" encoding="utf-8"?>
+<file path=ppt/slides/slide18.xml><?xml version="1.0" encoding="utf-8"?>
 <p:sld xmlns:a="http://schemas.openxmlformats.org/drawingml/2006/main" xmlns:r="http://schemas.openxmlformats.org/officeDocument/2006/relationships" xmlns:p="http://schemas.openxmlformats.org/presentationml/2006/main">
   <p:cSld>
     <p:spTree>
@@ -10187,7 +10810,7 @@
             <a:fld id="{D57F1E4F-1CFF-5643-939E-217C01CDF565}" type="slidenum">
               <a:rPr lang="en-US" sz="1400" b="1" smtClean="0"/>
               <a:pPr/>
-              <a:t>17</a:t>
+              <a:t>18</a:t>
             </a:fld>
             <a:endParaRPr lang="en-US" sz="1400" b="1" dirty="0"/>
           </a:p>
@@ -10206,7 +10829,7 @@
 </p:sld>
 </file>
 
-<file path=ppt/slides/slide18.xml><?xml version="1.0" encoding="utf-8"?>
+<file path=ppt/slides/slide19.xml><?xml version="1.0" encoding="utf-8"?>
 <p:sld xmlns:a="http://schemas.openxmlformats.org/drawingml/2006/main" xmlns:r="http://schemas.openxmlformats.org/officeDocument/2006/relationships" xmlns:p="http://schemas.openxmlformats.org/presentationml/2006/main">
   <p:cSld>
     <p:spTree>
@@ -10700,10 +11323,10 @@
           <p:nvPr/>
         </p:nvPicPr>
         <p:blipFill>
-          <a:blip r:embed="rId3">
+          <a:blip>
             <a:extLst>
               <a:ext uri="{96DAC541-7B7A-43D3-8B79-37D633B846F1}">
-                <asvg:svgBlip xmlns:asvg="http://schemas.microsoft.com/office/drawing/2016/SVG/main" r:embed="rId4"/>
+                <asvg:svgBlip xmlns:asvg="http://schemas.microsoft.com/office/drawing/2016/SVG/main" r:embed="rId3"/>
               </a:ext>
             </a:extLst>
           </a:blip>
@@ -10839,10 +11462,10 @@
           <p:nvPr/>
         </p:nvPicPr>
         <p:blipFill>
-          <a:blip r:embed="rId3">
+          <a:blip>
             <a:extLst>
               <a:ext uri="{96DAC541-7B7A-43D3-8B79-37D633B846F1}">
-                <asvg:svgBlip xmlns:asvg="http://schemas.microsoft.com/office/drawing/2016/SVG/main" r:embed="rId4"/>
+                <asvg:svgBlip xmlns:asvg="http://schemas.microsoft.com/office/drawing/2016/SVG/main" r:embed="rId3"/>
               </a:ext>
             </a:extLst>
           </a:blip>
@@ -10931,7 +11554,7 @@
             <a:fld id="{D57F1E4F-1CFF-5643-939E-217C01CDF565}" type="slidenum">
               <a:rPr lang="en-US" sz="1400" b="1" smtClean="0"/>
               <a:pPr/>
-              <a:t>18</a:t>
+              <a:t>19</a:t>
             </a:fld>
             <a:endParaRPr lang="en-US" sz="1400" b="1" dirty="0"/>
           </a:p>
@@ -10950,7 +11573,651 @@
 </p:sld>
 </file>
 
-<file path=ppt/slides/slide19.xml><?xml version="1.0" encoding="utf-8"?>
+<file path=ppt/slides/slide2.xml><?xml version="1.0" encoding="utf-8"?>
+<p:sld xmlns:a="http://schemas.openxmlformats.org/drawingml/2006/main" xmlns:r="http://schemas.openxmlformats.org/officeDocument/2006/relationships" xmlns:p="http://schemas.openxmlformats.org/presentationml/2006/main">
+  <p:cSld>
+    <p:spTree>
+      <p:nvGrpSpPr>
+        <p:cNvPr id="1" name="">
+          <a:extLst>
+            <a:ext uri="{FF2B5EF4-FFF2-40B4-BE49-F238E27FC236}">
+              <a16:creationId xmlns:a16="http://schemas.microsoft.com/office/drawing/2014/main" id="{E03667BA-883A-F760-A852-48089498115B}"/>
+            </a:ext>
+          </a:extLst>
+        </p:cNvPr>
+        <p:cNvGrpSpPr/>
+        <p:nvPr/>
+      </p:nvGrpSpPr>
+      <p:grpSpPr>
+        <a:xfrm>
+          <a:off x="0" y="0"/>
+          <a:ext cx="0" cy="0"/>
+          <a:chOff x="0" y="0"/>
+          <a:chExt cx="0" cy="0"/>
+        </a:xfrm>
+      </p:grpSpPr>
+      <p:sp>
+        <p:nvSpPr>
+          <p:cNvPr id="4" name="슬라이드 번호 개체 틀 3">
+            <a:extLst>
+              <a:ext uri="{FF2B5EF4-FFF2-40B4-BE49-F238E27FC236}">
+                <a16:creationId xmlns:a16="http://schemas.microsoft.com/office/drawing/2014/main" id="{DC25E88B-6D21-127E-3DF6-DC200AC37462}"/>
+              </a:ext>
+            </a:extLst>
+          </p:cNvPr>
+          <p:cNvSpPr>
+            <a:spLocks noGrp="1"/>
+          </p:cNvSpPr>
+          <p:nvPr>
+            <p:ph type="sldNum" sz="quarter" idx="12"/>
+          </p:nvPr>
+        </p:nvSpPr>
+        <p:spPr>
+          <a:xfrm>
+            <a:off x="11180761" y="299420"/>
+            <a:ext cx="753545" cy="365125"/>
+          </a:xfrm>
+        </p:spPr>
+        <p:txBody>
+          <a:bodyPr/>
+          <a:lstStyle/>
+          <a:p>
+            <a:fld id="{D57F1E4F-1CFF-5643-939E-217C01CDF565}" type="slidenum">
+              <a:rPr lang="en-US" sz="1400" b="1" smtClean="0"/>
+              <a:pPr/>
+              <a:t>2</a:t>
+            </a:fld>
+            <a:endParaRPr lang="en-US" sz="1400" b="1" dirty="0"/>
+          </a:p>
+        </p:txBody>
+      </p:sp>
+      <p:sp>
+        <p:nvSpPr>
+          <p:cNvPr id="3" name="제목 1">
+            <a:extLst>
+              <a:ext uri="{FF2B5EF4-FFF2-40B4-BE49-F238E27FC236}">
+                <a16:creationId xmlns:a16="http://schemas.microsoft.com/office/drawing/2014/main" id="{60151A18-B816-E6A4-DE0E-617FB6906B40}"/>
+              </a:ext>
+            </a:extLst>
+          </p:cNvPr>
+          <p:cNvSpPr txBox="1">
+            <a:spLocks/>
+          </p:cNvSpPr>
+          <p:nvPr/>
+        </p:nvSpPr>
+        <p:spPr>
+          <a:xfrm>
+            <a:off x="475645" y="481983"/>
+            <a:ext cx="10353762" cy="766439"/>
+          </a:xfrm>
+          <a:prstGeom prst="rect">
+            <a:avLst/>
+          </a:prstGeom>
+        </p:spPr>
+        <p:txBody>
+          <a:bodyPr vert="horz" lIns="91440" tIns="45720" rIns="91440" bIns="45720" rtlCol="0" anchor="ctr">
+            <a:normAutofit/>
+          </a:bodyPr>
+          <a:lstStyle>
+            <a:lvl1pPr algn="ctr" defTabSz="914400" rtl="0" eaLnBrk="1" latinLnBrk="1" hangingPunct="1">
+              <a:lnSpc>
+                <a:spcPct val="90000"/>
+              </a:lnSpc>
+              <a:spcBef>
+                <a:spcPct val="0"/>
+              </a:spcBef>
+              <a:buNone/>
+              <a:defRPr sz="3200" kern="1200" cap="all" baseline="0">
+                <a:solidFill>
+                  <a:schemeClr val="tx1"/>
+                </a:solidFill>
+                <a:effectLst/>
+                <a:latin typeface="Batang" panose="02030600000101010101" pitchFamily="18" charset="-127"/>
+                <a:ea typeface="Batang" panose="02030600000101010101" pitchFamily="18" charset="-127"/>
+                <a:cs typeface="+mj-cs"/>
+              </a:defRPr>
+            </a:lvl1pPr>
+          </a:lstStyle>
+          <a:p>
+            <a:pPr algn="l"/>
+            <a:r>
+              <a:rPr lang="en-US" altLang="ko-KR" sz="2800" cap="none" dirty="0">
+                <a:solidFill>
+                  <a:schemeClr val="bg2">
+                    <a:lumMod val="25000"/>
+                  </a:schemeClr>
+                </a:solidFill>
+                <a:latin typeface="D2Coding" panose="020B0609020101020101" pitchFamily="49" charset="-127"/>
+                <a:ea typeface="D2Coding" panose="020B0609020101020101" pitchFamily="49" charset="-127"/>
+                <a:cs typeface="Segoe UI Light" panose="020B0502040204020203" pitchFamily="34" charset="0"/>
+              </a:rPr>
+              <a:t>Motivation</a:t>
+            </a:r>
+            <a:endParaRPr lang="ko-KR" altLang="en-US" sz="2800" cap="none" dirty="0">
+              <a:solidFill>
+                <a:schemeClr val="bg2">
+                  <a:lumMod val="25000"/>
+                </a:schemeClr>
+              </a:solidFill>
+              <a:latin typeface="D2Coding" panose="020B0609020101020101" pitchFamily="49" charset="-127"/>
+              <a:ea typeface="D2Coding" panose="020B0609020101020101" pitchFamily="49" charset="-127"/>
+              <a:cs typeface="Segoe UI Light" panose="020B0502040204020203" pitchFamily="34" charset="0"/>
+            </a:endParaRPr>
+          </a:p>
+        </p:txBody>
+      </p:sp>
+      <p:sp>
+        <p:nvSpPr>
+          <p:cNvPr id="13" name="TextBox 12">
+            <a:extLst>
+              <a:ext uri="{FF2B5EF4-FFF2-40B4-BE49-F238E27FC236}">
+                <a16:creationId xmlns:a16="http://schemas.microsoft.com/office/drawing/2014/main" id="{18F3E3F8-C9F6-B196-98B4-3CC4BD8CE8BE}"/>
+              </a:ext>
+            </a:extLst>
+          </p:cNvPr>
+          <p:cNvSpPr txBox="1"/>
+          <p:nvPr/>
+        </p:nvSpPr>
+        <p:spPr>
+          <a:xfrm>
+            <a:off x="542406" y="1743722"/>
+            <a:ext cx="11173949" cy="3747821"/>
+          </a:xfrm>
+          <a:prstGeom prst="rect">
+            <a:avLst/>
+          </a:prstGeom>
+          <a:noFill/>
+        </p:spPr>
+        <p:txBody>
+          <a:bodyPr wrap="square">
+            <a:spAutoFit/>
+          </a:bodyPr>
+          <a:lstStyle/>
+          <a:p>
+            <a:pPr marL="285750" indent="-285750">
+              <a:lnSpc>
+                <a:spcPct val="150000"/>
+              </a:lnSpc>
+              <a:buFont typeface="Wingdings" panose="05000000000000000000" pitchFamily="2" charset="2"/>
+              <a:buChar char="v"/>
+            </a:pPr>
+            <a:r>
+              <a:rPr lang="en-US" altLang="ko-KR" sz="1600" dirty="0">
+                <a:latin typeface="D2Coding" panose="020B0609020101020101" pitchFamily="49" charset="-127"/>
+                <a:ea typeface="D2Coding" panose="020B0609020101020101" pitchFamily="49" charset="-127"/>
+              </a:rPr>
+              <a:t>AI </a:t>
+            </a:r>
+            <a:r>
+              <a:rPr lang="ko-KR" altLang="en-US" sz="1600" dirty="0">
+                <a:latin typeface="D2Coding" panose="020B0609020101020101" pitchFamily="49" charset="-127"/>
+                <a:ea typeface="D2Coding" panose="020B0609020101020101" pitchFamily="49" charset="-127"/>
+              </a:rPr>
+              <a:t>모델이 최신 정보를 알지 못하는 지식 컷오프 </a:t>
+            </a:r>
+            <a:r>
+              <a:rPr lang="en-US" altLang="ko-KR" sz="1600" dirty="0">
+                <a:latin typeface="D2Coding" panose="020B0609020101020101" pitchFamily="49" charset="-127"/>
+                <a:ea typeface="D2Coding" panose="020B0609020101020101" pitchFamily="49" charset="-127"/>
+              </a:rPr>
+              <a:t>(Knowledge Cutoff):</a:t>
+            </a:r>
+            <a:r>
+              <a:rPr lang="ko-KR" altLang="en-US" sz="1600" dirty="0">
+                <a:latin typeface="D2Coding" panose="020B0609020101020101" pitchFamily="49" charset="-127"/>
+                <a:ea typeface="D2Coding" panose="020B0609020101020101" pitchFamily="49" charset="-127"/>
+              </a:rPr>
+              <a:t> </a:t>
+            </a:r>
+            <a:r>
+              <a:rPr lang="en-US" altLang="ko-KR" sz="1600" dirty="0">
+                <a:latin typeface="D2Coding" panose="020B0609020101020101" pitchFamily="49" charset="-127"/>
+                <a:ea typeface="D2Coding" panose="020B0609020101020101" pitchFamily="49" charset="-127"/>
+              </a:rPr>
+              <a:t>AI </a:t>
+            </a:r>
+            <a:r>
+              <a:rPr lang="ko-KR" altLang="en-US" sz="1600" dirty="0">
+                <a:latin typeface="D2Coding" panose="020B0609020101020101" pitchFamily="49" charset="-127"/>
+                <a:ea typeface="D2Coding" panose="020B0609020101020101" pitchFamily="49" charset="-127"/>
+              </a:rPr>
+              <a:t>모델의 지식이 멈춘 </a:t>
+            </a:r>
+            <a:r>
+              <a:rPr lang="en-US" altLang="ko-KR" sz="1600" dirty="0">
+                <a:latin typeface="D2Coding" panose="020B0609020101020101" pitchFamily="49" charset="-127"/>
+                <a:ea typeface="D2Coding" panose="020B0609020101020101" pitchFamily="49" charset="-127"/>
+              </a:rPr>
+              <a:t>'</a:t>
+            </a:r>
+            <a:r>
+              <a:rPr lang="ko-KR" altLang="en-US" sz="1600" dirty="0">
+                <a:latin typeface="D2Coding" panose="020B0609020101020101" pitchFamily="49" charset="-127"/>
+                <a:ea typeface="D2Coding" panose="020B0609020101020101" pitchFamily="49" charset="-127"/>
+              </a:rPr>
+              <a:t>유통기한</a:t>
+            </a:r>
+            <a:r>
+              <a:rPr lang="en-US" altLang="ko-KR" sz="1600" dirty="0">
+                <a:latin typeface="D2Coding" panose="020B0609020101020101" pitchFamily="49" charset="-127"/>
+                <a:ea typeface="D2Coding" panose="020B0609020101020101" pitchFamily="49" charset="-127"/>
+              </a:rPr>
+              <a:t>' </a:t>
+            </a:r>
+            <a:r>
+              <a:rPr lang="ko-KR" altLang="en-US" sz="1600" dirty="0">
+                <a:latin typeface="D2Coding" panose="020B0609020101020101" pitchFamily="49" charset="-127"/>
+                <a:ea typeface="D2Coding" panose="020B0609020101020101" pitchFamily="49" charset="-127"/>
+              </a:rPr>
+              <a:t>같은 시점</a:t>
+            </a:r>
+            <a:r>
+              <a:rPr lang="en-US" altLang="ko-KR" sz="1600" dirty="0">
+                <a:latin typeface="D2Coding" panose="020B0609020101020101" pitchFamily="49" charset="-127"/>
+                <a:ea typeface="D2Coding" panose="020B0609020101020101" pitchFamily="49" charset="-127"/>
+              </a:rPr>
+              <a:t>(</a:t>
+            </a:r>
+            <a:r>
+              <a:rPr lang="ko-KR" altLang="en-US" sz="1600" dirty="0">
+                <a:latin typeface="D2Coding" panose="020B0609020101020101" pitchFamily="49" charset="-127"/>
+                <a:ea typeface="D2Coding" panose="020B0609020101020101" pitchFamily="49" charset="-127"/>
+              </a:rPr>
+              <a:t>예 </a:t>
+            </a:r>
+            <a:r>
+              <a:rPr lang="en-US" altLang="ko-KR" sz="1600" dirty="0">
+                <a:latin typeface="D2Coding" panose="020B0609020101020101" pitchFamily="49" charset="-127"/>
+                <a:ea typeface="D2Coding" panose="020B0609020101020101" pitchFamily="49" charset="-127"/>
+              </a:rPr>
+              <a:t>: </a:t>
+            </a:r>
+            <a:r>
+              <a:rPr lang="ko-KR" altLang="en-US" sz="1600" dirty="0">
+                <a:latin typeface="D2Coding" panose="020B0609020101020101" pitchFamily="49" charset="-127"/>
+                <a:ea typeface="D2Coding" panose="020B0609020101020101" pitchFamily="49" charset="-127"/>
+              </a:rPr>
+              <a:t>어떤 </a:t>
+            </a:r>
+            <a:r>
+              <a:rPr lang="en-US" altLang="ko-KR" sz="1600" dirty="0">
+                <a:latin typeface="D2Coding" panose="020B0609020101020101" pitchFamily="49" charset="-127"/>
+                <a:ea typeface="D2Coding" panose="020B0609020101020101" pitchFamily="49" charset="-127"/>
+              </a:rPr>
+              <a:t>AI</a:t>
+            </a:r>
+            <a:r>
+              <a:rPr lang="ko-KR" altLang="en-US" sz="1600" dirty="0">
+                <a:latin typeface="D2Coding" panose="020B0609020101020101" pitchFamily="49" charset="-127"/>
+                <a:ea typeface="D2Coding" panose="020B0609020101020101" pitchFamily="49" charset="-127"/>
+              </a:rPr>
+              <a:t>의 지식 컷오프가 </a:t>
+            </a:r>
+            <a:r>
+              <a:rPr lang="en-US" altLang="ko-KR" sz="1600" dirty="0">
+                <a:latin typeface="D2Coding" panose="020B0609020101020101" pitchFamily="49" charset="-127"/>
+                <a:ea typeface="D2Coding" panose="020B0609020101020101" pitchFamily="49" charset="-127"/>
+              </a:rPr>
+              <a:t>2025</a:t>
+            </a:r>
+            <a:r>
+              <a:rPr lang="ko-KR" altLang="en-US" sz="1600" dirty="0">
+                <a:latin typeface="D2Coding" panose="020B0609020101020101" pitchFamily="49" charset="-127"/>
+                <a:ea typeface="D2Coding" panose="020B0609020101020101" pitchFamily="49" charset="-127"/>
+              </a:rPr>
+              <a:t>년 </a:t>
+            </a:r>
+            <a:r>
+              <a:rPr lang="en-US" altLang="ko-KR" sz="1600" dirty="0">
+                <a:latin typeface="D2Coding" panose="020B0609020101020101" pitchFamily="49" charset="-127"/>
+                <a:ea typeface="D2Coding" panose="020B0609020101020101" pitchFamily="49" charset="-127"/>
+              </a:rPr>
+              <a:t>12</a:t>
+            </a:r>
+            <a:r>
+              <a:rPr lang="ko-KR" altLang="en-US" sz="1600" dirty="0">
+                <a:latin typeface="D2Coding" panose="020B0609020101020101" pitchFamily="49" charset="-127"/>
+                <a:ea typeface="D2Coding" panose="020B0609020101020101" pitchFamily="49" charset="-127"/>
+              </a:rPr>
+              <a:t>월이라면</a:t>
+            </a:r>
+            <a:r>
+              <a:rPr lang="en-US" altLang="ko-KR" sz="1600" dirty="0">
+                <a:latin typeface="D2Coding" panose="020B0609020101020101" pitchFamily="49" charset="-127"/>
+                <a:ea typeface="D2Coding" panose="020B0609020101020101" pitchFamily="49" charset="-127"/>
+              </a:rPr>
+              <a:t>, AI</a:t>
+            </a:r>
+            <a:r>
+              <a:rPr lang="ko-KR" altLang="en-US" sz="1600" dirty="0">
+                <a:latin typeface="D2Coding" panose="020B0609020101020101" pitchFamily="49" charset="-127"/>
+                <a:ea typeface="D2Coding" panose="020B0609020101020101" pitchFamily="49" charset="-127"/>
+              </a:rPr>
+              <a:t>는 </a:t>
+            </a:r>
+            <a:r>
+              <a:rPr lang="en-US" altLang="ko-KR" sz="1600" dirty="0">
+                <a:latin typeface="D2Coding" panose="020B0609020101020101" pitchFamily="49" charset="-127"/>
+                <a:ea typeface="D2Coding" panose="020B0609020101020101" pitchFamily="49" charset="-127"/>
+              </a:rPr>
+              <a:t>2026</a:t>
+            </a:r>
+            <a:r>
+              <a:rPr lang="ko-KR" altLang="en-US" sz="1600" dirty="0">
+                <a:latin typeface="D2Coding" panose="020B0609020101020101" pitchFamily="49" charset="-127"/>
+                <a:ea typeface="D2Coding" panose="020B0609020101020101" pitchFamily="49" charset="-127"/>
+              </a:rPr>
+              <a:t>년에 일어난 뉴스나 사건을 알지 못하고 엉뚱한 답변</a:t>
+            </a:r>
+            <a:r>
+              <a:rPr lang="en-US" altLang="ko-KR" sz="1600" dirty="0">
+                <a:latin typeface="D2Coding" panose="020B0609020101020101" pitchFamily="49" charset="-127"/>
+                <a:ea typeface="D2Coding" panose="020B0609020101020101" pitchFamily="49" charset="-127"/>
+              </a:rPr>
+              <a:t>(Hallucination)</a:t>
+            </a:r>
+            <a:r>
+              <a:rPr lang="ko-KR" altLang="en-US" sz="1600" dirty="0">
+                <a:latin typeface="D2Coding" panose="020B0609020101020101" pitchFamily="49" charset="-127"/>
+                <a:ea typeface="D2Coding" panose="020B0609020101020101" pitchFamily="49" charset="-127"/>
+              </a:rPr>
+              <a:t>을 생성</a:t>
+            </a:r>
+            <a:r>
+              <a:rPr lang="en-US" altLang="ko-KR" sz="1600" dirty="0">
+                <a:latin typeface="D2Coding" panose="020B0609020101020101" pitchFamily="49" charset="-127"/>
+                <a:ea typeface="D2Coding" panose="020B0609020101020101" pitchFamily="49" charset="-127"/>
+              </a:rPr>
+              <a:t>(Generate)</a:t>
+            </a:r>
+            <a:r>
+              <a:rPr lang="ko-KR" altLang="en-US" sz="1600" dirty="0">
+                <a:latin typeface="D2Coding" panose="020B0609020101020101" pitchFamily="49" charset="-127"/>
+                <a:ea typeface="D2Coding" panose="020B0609020101020101" pitchFamily="49" charset="-127"/>
+              </a:rPr>
+              <a:t>하게 됨</a:t>
+            </a:r>
+            <a:r>
+              <a:rPr lang="en-US" altLang="ko-KR" sz="1600" dirty="0">
+                <a:latin typeface="D2Coding" panose="020B0609020101020101" pitchFamily="49" charset="-127"/>
+                <a:ea typeface="D2Coding" panose="020B0609020101020101" pitchFamily="49" charset="-127"/>
+              </a:rPr>
+              <a:t>)</a:t>
+            </a:r>
+          </a:p>
+          <a:p>
+            <a:pPr marL="285750" indent="-285750">
+              <a:lnSpc>
+                <a:spcPct val="150000"/>
+              </a:lnSpc>
+              <a:buFont typeface="Wingdings" panose="05000000000000000000" pitchFamily="2" charset="2"/>
+              <a:buChar char="v"/>
+            </a:pPr>
+            <a:endParaRPr lang="en-US" altLang="ko-KR" sz="1600" dirty="0">
+              <a:latin typeface="D2Coding" panose="020B0609020101020101" pitchFamily="49" charset="-127"/>
+              <a:ea typeface="D2Coding" panose="020B0609020101020101" pitchFamily="49" charset="-127"/>
+            </a:endParaRPr>
+          </a:p>
+          <a:p>
+            <a:pPr marL="285750" indent="-285750">
+              <a:lnSpc>
+                <a:spcPct val="150000"/>
+              </a:lnSpc>
+              <a:buFont typeface="Wingdings" panose="05000000000000000000" pitchFamily="2" charset="2"/>
+              <a:buChar char="v"/>
+            </a:pPr>
+            <a:r>
+              <a:rPr lang="ko-KR" altLang="en-US" sz="1600" dirty="0">
+                <a:latin typeface="D2Coding" panose="020B0609020101020101" pitchFamily="49" charset="-127"/>
+                <a:ea typeface="D2Coding" panose="020B0609020101020101" pitchFamily="49" charset="-127"/>
+              </a:rPr>
+              <a:t>데이터가 </a:t>
+            </a:r>
+            <a:r>
+              <a:rPr lang="en-US" altLang="ko-KR" sz="1600" dirty="0">
+                <a:latin typeface="D2Coding" panose="020B0609020101020101" pitchFamily="49" charset="-127"/>
+                <a:ea typeface="D2Coding" panose="020B0609020101020101" pitchFamily="49" charset="-127"/>
+              </a:rPr>
+              <a:t>1~2</a:t>
+            </a:r>
+            <a:r>
+              <a:rPr lang="ko-KR" altLang="en-US" sz="1600" dirty="0">
+                <a:latin typeface="D2Coding" panose="020B0609020101020101" pitchFamily="49" charset="-127"/>
+                <a:ea typeface="D2Coding" panose="020B0609020101020101" pitchFamily="49" charset="-127"/>
+              </a:rPr>
+              <a:t>페이지일 때 질문할 때마다 프롬프트에 그 내용을 통째로 복사</a:t>
+            </a:r>
+            <a:r>
+              <a:rPr lang="en-US" altLang="ko-KR" sz="1600" dirty="0">
+                <a:latin typeface="D2Coding" panose="020B0609020101020101" pitchFamily="49" charset="-127"/>
+                <a:ea typeface="D2Coding" panose="020B0609020101020101" pitchFamily="49" charset="-127"/>
+              </a:rPr>
+              <a:t>·</a:t>
+            </a:r>
+            <a:r>
+              <a:rPr lang="ko-KR" altLang="en-US" sz="1600" dirty="0">
+                <a:latin typeface="D2Coding" panose="020B0609020101020101" pitchFamily="49" charset="-127"/>
+                <a:ea typeface="D2Coding" panose="020B0609020101020101" pitchFamily="49" charset="-127"/>
+              </a:rPr>
+              <a:t>붙여넣기</a:t>
+            </a:r>
+            <a:r>
+              <a:rPr lang="en-US" altLang="ko-KR" sz="1600" dirty="0">
+                <a:latin typeface="D2Coding" panose="020B0609020101020101" pitchFamily="49" charset="-127"/>
+                <a:ea typeface="D2Coding" panose="020B0609020101020101" pitchFamily="49" charset="-127"/>
+              </a:rPr>
+              <a:t>(Context)</a:t>
+            </a:r>
+            <a:r>
+              <a:rPr lang="ko-KR" altLang="en-US" sz="1600" dirty="0">
+                <a:latin typeface="D2Coding" panose="020B0609020101020101" pitchFamily="49" charset="-127"/>
+                <a:ea typeface="D2Coding" panose="020B0609020101020101" pitchFamily="49" charset="-127"/>
+              </a:rPr>
+              <a:t>해서 모델에 넘기면 해결되니 번거로운</a:t>
+            </a:r>
+            <a:r>
+              <a:rPr lang="en-US" altLang="ko-KR" sz="1600" dirty="0">
+                <a:latin typeface="D2Coding" panose="020B0609020101020101" pitchFamily="49" charset="-127"/>
+                <a:ea typeface="D2Coding" panose="020B0609020101020101" pitchFamily="49" charset="-127"/>
+              </a:rPr>
+              <a:t> </a:t>
+            </a:r>
+            <a:r>
+              <a:rPr lang="ko-KR" altLang="en-US" sz="1600" dirty="0">
+                <a:latin typeface="D2Coding" panose="020B0609020101020101" pitchFamily="49" charset="-127"/>
+                <a:ea typeface="D2Coding" panose="020B0609020101020101" pitchFamily="49" charset="-127"/>
+              </a:rPr>
+              <a:t>것 이외에는 기술적 고민이나 복잡한 아키텍처가 전혀 필요 없지만</a:t>
+            </a:r>
+            <a:r>
+              <a:rPr lang="en-US" altLang="ko-KR" sz="1600" dirty="0">
+                <a:latin typeface="D2Coding" panose="020B0609020101020101" pitchFamily="49" charset="-127"/>
+                <a:ea typeface="D2Coding" panose="020B0609020101020101" pitchFamily="49" charset="-127"/>
+              </a:rPr>
+              <a:t>,</a:t>
+            </a:r>
+          </a:p>
+          <a:p>
+            <a:pPr marL="285750" indent="-285750">
+              <a:lnSpc>
+                <a:spcPct val="150000"/>
+              </a:lnSpc>
+              <a:buFont typeface="Wingdings" panose="05000000000000000000" pitchFamily="2" charset="2"/>
+              <a:buChar char="v"/>
+            </a:pPr>
+            <a:endParaRPr lang="en-US" altLang="ko-KR" sz="1600" dirty="0">
+              <a:latin typeface="D2Coding" panose="020B0609020101020101" pitchFamily="49" charset="-127"/>
+              <a:ea typeface="D2Coding" panose="020B0609020101020101" pitchFamily="49" charset="-127"/>
+            </a:endParaRPr>
+          </a:p>
+          <a:p>
+            <a:pPr marL="285750" indent="-285750">
+              <a:lnSpc>
+                <a:spcPct val="150000"/>
+              </a:lnSpc>
+              <a:buFont typeface="Wingdings" panose="05000000000000000000" pitchFamily="2" charset="2"/>
+              <a:buChar char="v"/>
+            </a:pPr>
+            <a:r>
+              <a:rPr lang="ko-KR" altLang="en-US" sz="1600" dirty="0">
+                <a:latin typeface="D2Coding" panose="020B0609020101020101" pitchFamily="49" charset="-127"/>
+                <a:ea typeface="D2Coding" panose="020B0609020101020101" pitchFamily="49" charset="-127"/>
+              </a:rPr>
+              <a:t>만약 여러분 회사의 방대한 모든 </a:t>
+            </a:r>
+            <a:r>
+              <a:rPr lang="ko-KR" altLang="en-US" sz="1600" dirty="0" err="1">
+                <a:latin typeface="D2Coding" panose="020B0609020101020101" pitchFamily="49" charset="-127"/>
+                <a:ea typeface="D2Coding" panose="020B0609020101020101" pitchFamily="49" charset="-127"/>
+              </a:rPr>
+              <a:t>규정집</a:t>
+            </a:r>
+            <a:r>
+              <a:rPr lang="en-US" altLang="ko-KR" sz="1600" dirty="0">
+                <a:latin typeface="D2Coding" panose="020B0609020101020101" pitchFamily="49" charset="-127"/>
+                <a:ea typeface="D2Coding" panose="020B0609020101020101" pitchFamily="49" charset="-127"/>
+              </a:rPr>
+              <a:t>(Huge Quantity)</a:t>
+            </a:r>
+            <a:r>
+              <a:rPr lang="ko-KR" altLang="en-US" sz="1600" dirty="0">
+                <a:latin typeface="D2Coding" panose="020B0609020101020101" pitchFamily="49" charset="-127"/>
+                <a:ea typeface="D2Coding" panose="020B0609020101020101" pitchFamily="49" charset="-127"/>
+              </a:rPr>
+              <a:t>을 </a:t>
+            </a:r>
+            <a:r>
+              <a:rPr lang="en-US" altLang="ko-KR" sz="1600" dirty="0">
+                <a:latin typeface="D2Coding" panose="020B0609020101020101" pitchFamily="49" charset="-127"/>
+                <a:ea typeface="D2Coding" panose="020B0609020101020101" pitchFamily="49" charset="-127"/>
+              </a:rPr>
+              <a:t>LLM</a:t>
+            </a:r>
+            <a:r>
+              <a:rPr lang="ko-KR" altLang="en-US" sz="1600" dirty="0">
+                <a:latin typeface="D2Coding" panose="020B0609020101020101" pitchFamily="49" charset="-127"/>
+                <a:ea typeface="D2Coding" panose="020B0609020101020101" pitchFamily="49" charset="-127"/>
+              </a:rPr>
+              <a:t>에게 참고하라고 한다면</a:t>
+            </a:r>
+            <a:r>
+              <a:rPr lang="en-US" altLang="ko-KR" sz="1600" dirty="0">
+                <a:latin typeface="D2Coding" panose="020B0609020101020101" pitchFamily="49" charset="-127"/>
+                <a:ea typeface="D2Coding" panose="020B0609020101020101" pitchFamily="49" charset="-127"/>
+              </a:rPr>
+              <a:t>, </a:t>
+            </a:r>
+            <a:r>
+              <a:rPr lang="ko-KR" altLang="en-US" sz="1600" dirty="0">
+                <a:latin typeface="D2Coding" panose="020B0609020101020101" pitchFamily="49" charset="-127"/>
+                <a:ea typeface="D2Coding" panose="020B0609020101020101" pitchFamily="49" charset="-127"/>
+              </a:rPr>
+              <a:t>매번 수천 페이지를 복사해서 붙여 넣을 건가</a:t>
+            </a:r>
+            <a:r>
+              <a:rPr lang="en-US" altLang="ko-KR" sz="1600" dirty="0">
+                <a:latin typeface="D2Coding" panose="020B0609020101020101" pitchFamily="49" charset="-127"/>
+                <a:ea typeface="D2Coding" panose="020B0609020101020101" pitchFamily="49" charset="-127"/>
+              </a:rPr>
+              <a:t>? </a:t>
+            </a:r>
+            <a:r>
+              <a:rPr lang="ko-KR" altLang="en-US" sz="1600" dirty="0">
+                <a:latin typeface="D2Coding" panose="020B0609020101020101" pitchFamily="49" charset="-127"/>
+                <a:ea typeface="D2Coding" panose="020B0609020101020101" pitchFamily="49" charset="-127"/>
+              </a:rPr>
+              <a:t>불가능하죠</a:t>
+            </a:r>
+            <a:r>
+              <a:rPr lang="en-US" altLang="ko-KR" sz="1600" dirty="0">
+                <a:latin typeface="D2Coding" panose="020B0609020101020101" pitchFamily="49" charset="-127"/>
+                <a:ea typeface="D2Coding" panose="020B0609020101020101" pitchFamily="49" charset="-127"/>
+              </a:rPr>
+              <a:t>? </a:t>
+            </a:r>
+            <a:r>
+              <a:rPr lang="ko-KR" altLang="en-US" sz="1600" dirty="0">
+                <a:latin typeface="D2Coding" panose="020B0609020101020101" pitchFamily="49" charset="-127"/>
+                <a:ea typeface="D2Coding" panose="020B0609020101020101" pitchFamily="49" charset="-127"/>
+              </a:rPr>
+              <a:t>그래서 </a:t>
+            </a:r>
+            <a:r>
+              <a:rPr lang="en-US" altLang="ko-KR" sz="1600" dirty="0">
+                <a:latin typeface="D2Coding" panose="020B0609020101020101" pitchFamily="49" charset="-127"/>
+                <a:ea typeface="D2Coding" panose="020B0609020101020101" pitchFamily="49" charset="-127"/>
+              </a:rPr>
+              <a:t>'</a:t>
+            </a:r>
+            <a:r>
+              <a:rPr lang="ko-KR" altLang="en-US" sz="1600" dirty="0">
+                <a:latin typeface="D2Coding" panose="020B0609020101020101" pitchFamily="49" charset="-127"/>
+                <a:ea typeface="D2Coding" panose="020B0609020101020101" pitchFamily="49" charset="-127"/>
+              </a:rPr>
+              <a:t>정답 조각</a:t>
+            </a:r>
+            <a:r>
+              <a:rPr lang="en-US" altLang="ko-KR" sz="1600" dirty="0">
+                <a:latin typeface="D2Coding" panose="020B0609020101020101" pitchFamily="49" charset="-127"/>
+                <a:ea typeface="D2Coding" panose="020B0609020101020101" pitchFamily="49" charset="-127"/>
+              </a:rPr>
+              <a:t>(Chunk)</a:t>
+            </a:r>
+            <a:r>
+              <a:rPr lang="ko-KR" altLang="en-US" sz="1600" dirty="0">
+                <a:latin typeface="D2Coding" panose="020B0609020101020101" pitchFamily="49" charset="-127"/>
+                <a:ea typeface="D2Coding" panose="020B0609020101020101" pitchFamily="49" charset="-127"/>
+              </a:rPr>
+              <a:t> 검색하여 찾아내는 기술</a:t>
+            </a:r>
+            <a:r>
+              <a:rPr lang="en-US" altLang="ko-KR" sz="1600" dirty="0">
+                <a:latin typeface="D2Coding" panose="020B0609020101020101" pitchFamily="49" charset="-127"/>
+                <a:ea typeface="D2Coding" panose="020B0609020101020101" pitchFamily="49" charset="-127"/>
+              </a:rPr>
+              <a:t>'</a:t>
+            </a:r>
+            <a:r>
+              <a:rPr lang="ko-KR" altLang="en-US" sz="1600" dirty="0">
+                <a:latin typeface="D2Coding" panose="020B0609020101020101" pitchFamily="49" charset="-127"/>
+                <a:ea typeface="D2Coding" panose="020B0609020101020101" pitchFamily="49" charset="-127"/>
+              </a:rPr>
+              <a:t>이 필요</a:t>
+            </a:r>
+            <a:endParaRPr lang="en-US" altLang="ko-KR" sz="1600" dirty="0">
+              <a:latin typeface="D2Coding" panose="020B0609020101020101" pitchFamily="49" charset="-127"/>
+              <a:ea typeface="D2Coding" panose="020B0609020101020101" pitchFamily="49" charset="-127"/>
+            </a:endParaRPr>
+          </a:p>
+          <a:p>
+            <a:pPr marL="285750" indent="-285750">
+              <a:lnSpc>
+                <a:spcPct val="150000"/>
+              </a:lnSpc>
+              <a:buFont typeface="Wingdings" panose="05000000000000000000" pitchFamily="2" charset="2"/>
+              <a:buChar char="v"/>
+            </a:pPr>
+            <a:endParaRPr lang="ko-KR" altLang="en-US" sz="1600" dirty="0">
+              <a:latin typeface="D2Coding" panose="020B0609020101020101" pitchFamily="49" charset="-127"/>
+              <a:ea typeface="D2Coding" panose="020B0609020101020101" pitchFamily="49" charset="-127"/>
+            </a:endParaRPr>
+          </a:p>
+        </p:txBody>
+      </p:sp>
+    </p:spTree>
+    <p:extLst>
+      <p:ext uri="{BB962C8B-B14F-4D97-AF65-F5344CB8AC3E}">
+        <p14:creationId xmlns:p14="http://schemas.microsoft.com/office/powerpoint/2010/main" val="2538986326"/>
+      </p:ext>
+    </p:extLst>
+  </p:cSld>
+  <p:clrMapOvr>
+    <a:masterClrMapping/>
+  </p:clrMapOvr>
+</p:sld>
+</file>
+
+<file path=ppt/slides/slide20.xml><?xml version="1.0" encoding="utf-8"?>
 <p:sld xmlns:a="http://schemas.openxmlformats.org/drawingml/2006/main" xmlns:r="http://schemas.openxmlformats.org/officeDocument/2006/relationships" xmlns:p="http://schemas.openxmlformats.org/presentationml/2006/main">
   <p:cSld>
     <p:spTree>
@@ -11529,7 +12796,7 @@
             <a:fld id="{D57F1E4F-1CFF-5643-939E-217C01CDF565}" type="slidenum">
               <a:rPr lang="en-US" sz="1400" b="1" smtClean="0"/>
               <a:pPr/>
-              <a:t>19</a:t>
+              <a:t>20</a:t>
             </a:fld>
             <a:endParaRPr lang="en-US" sz="1400" b="1" dirty="0"/>
           </a:p>
@@ -11548,648 +12815,7 @@
 </p:sld>
 </file>
 
-<file path=ppt/slides/slide2.xml><?xml version="1.0" encoding="utf-8"?>
-<p:sld xmlns:a="http://schemas.openxmlformats.org/drawingml/2006/main" xmlns:r="http://schemas.openxmlformats.org/officeDocument/2006/relationships" xmlns:p="http://schemas.openxmlformats.org/presentationml/2006/main">
-  <p:cSld>
-    <p:spTree>
-      <p:nvGrpSpPr>
-        <p:cNvPr id="1" name="">
-          <a:extLst>
-            <a:ext uri="{FF2B5EF4-FFF2-40B4-BE49-F238E27FC236}">
-              <a16:creationId xmlns:a16="http://schemas.microsoft.com/office/drawing/2014/main" id="{E03667BA-883A-F760-A852-48089498115B}"/>
-            </a:ext>
-          </a:extLst>
-        </p:cNvPr>
-        <p:cNvGrpSpPr/>
-        <p:nvPr/>
-      </p:nvGrpSpPr>
-      <p:grpSpPr>
-        <a:xfrm>
-          <a:off x="0" y="0"/>
-          <a:ext cx="0" cy="0"/>
-          <a:chOff x="0" y="0"/>
-          <a:chExt cx="0" cy="0"/>
-        </a:xfrm>
-      </p:grpSpPr>
-      <p:sp>
-        <p:nvSpPr>
-          <p:cNvPr id="4" name="슬라이드 번호 개체 틀 3">
-            <a:extLst>
-              <a:ext uri="{FF2B5EF4-FFF2-40B4-BE49-F238E27FC236}">
-                <a16:creationId xmlns:a16="http://schemas.microsoft.com/office/drawing/2014/main" id="{DC25E88B-6D21-127E-3DF6-DC200AC37462}"/>
-              </a:ext>
-            </a:extLst>
-          </p:cNvPr>
-          <p:cNvSpPr>
-            <a:spLocks noGrp="1"/>
-          </p:cNvSpPr>
-          <p:nvPr>
-            <p:ph type="sldNum" sz="quarter" idx="12"/>
-          </p:nvPr>
-        </p:nvSpPr>
-        <p:spPr>
-          <a:xfrm>
-            <a:off x="11180761" y="299420"/>
-            <a:ext cx="753545" cy="365125"/>
-          </a:xfrm>
-        </p:spPr>
-        <p:txBody>
-          <a:bodyPr/>
-          <a:lstStyle/>
-          <a:p>
-            <a:fld id="{D57F1E4F-1CFF-5643-939E-217C01CDF565}" type="slidenum">
-              <a:rPr lang="en-US" sz="1400" b="1" smtClean="0"/>
-              <a:pPr/>
-              <a:t>2</a:t>
-            </a:fld>
-            <a:endParaRPr lang="en-US" sz="1400" b="1" dirty="0"/>
-          </a:p>
-        </p:txBody>
-      </p:sp>
-      <p:sp>
-        <p:nvSpPr>
-          <p:cNvPr id="3" name="제목 1">
-            <a:extLst>
-              <a:ext uri="{FF2B5EF4-FFF2-40B4-BE49-F238E27FC236}">
-                <a16:creationId xmlns:a16="http://schemas.microsoft.com/office/drawing/2014/main" id="{60151A18-B816-E6A4-DE0E-617FB6906B40}"/>
-              </a:ext>
-            </a:extLst>
-          </p:cNvPr>
-          <p:cNvSpPr txBox="1">
-            <a:spLocks/>
-          </p:cNvSpPr>
-          <p:nvPr/>
-        </p:nvSpPr>
-        <p:spPr>
-          <a:xfrm>
-            <a:off x="475645" y="481983"/>
-            <a:ext cx="10353762" cy="766439"/>
-          </a:xfrm>
-          <a:prstGeom prst="rect">
-            <a:avLst/>
-          </a:prstGeom>
-        </p:spPr>
-        <p:txBody>
-          <a:bodyPr vert="horz" lIns="91440" tIns="45720" rIns="91440" bIns="45720" rtlCol="0" anchor="ctr">
-            <a:normAutofit/>
-          </a:bodyPr>
-          <a:lstStyle>
-            <a:lvl1pPr algn="ctr" defTabSz="914400" rtl="0" eaLnBrk="1" latinLnBrk="1" hangingPunct="1">
-              <a:lnSpc>
-                <a:spcPct val="90000"/>
-              </a:lnSpc>
-              <a:spcBef>
-                <a:spcPct val="0"/>
-              </a:spcBef>
-              <a:buNone/>
-              <a:defRPr sz="3200" kern="1200" cap="all" baseline="0">
-                <a:solidFill>
-                  <a:schemeClr val="tx1"/>
-                </a:solidFill>
-                <a:effectLst/>
-                <a:latin typeface="Batang" panose="02030600000101010101" pitchFamily="18" charset="-127"/>
-                <a:ea typeface="Batang" panose="02030600000101010101" pitchFamily="18" charset="-127"/>
-                <a:cs typeface="+mj-cs"/>
-              </a:defRPr>
-            </a:lvl1pPr>
-          </a:lstStyle>
-          <a:p>
-            <a:pPr algn="l"/>
-            <a:r>
-              <a:rPr lang="en-US" altLang="ko-KR" sz="2800" cap="none" dirty="0">
-                <a:solidFill>
-                  <a:schemeClr val="bg2">
-                    <a:lumMod val="25000"/>
-                  </a:schemeClr>
-                </a:solidFill>
-                <a:latin typeface="D2Coding" panose="020B0609020101020101" pitchFamily="49" charset="-127"/>
-                <a:ea typeface="D2Coding" panose="020B0609020101020101" pitchFamily="49" charset="-127"/>
-                <a:cs typeface="Segoe UI Light" panose="020B0502040204020203" pitchFamily="34" charset="0"/>
-              </a:rPr>
-              <a:t>Motivation</a:t>
-            </a:r>
-            <a:endParaRPr lang="ko-KR" altLang="en-US" sz="2800" cap="none" dirty="0">
-              <a:solidFill>
-                <a:schemeClr val="bg2">
-                  <a:lumMod val="25000"/>
-                </a:schemeClr>
-              </a:solidFill>
-              <a:latin typeface="D2Coding" panose="020B0609020101020101" pitchFamily="49" charset="-127"/>
-              <a:ea typeface="D2Coding" panose="020B0609020101020101" pitchFamily="49" charset="-127"/>
-              <a:cs typeface="Segoe UI Light" panose="020B0502040204020203" pitchFamily="34" charset="0"/>
-            </a:endParaRPr>
-          </a:p>
-        </p:txBody>
-      </p:sp>
-      <p:sp>
-        <p:nvSpPr>
-          <p:cNvPr id="13" name="TextBox 12">
-            <a:extLst>
-              <a:ext uri="{FF2B5EF4-FFF2-40B4-BE49-F238E27FC236}">
-                <a16:creationId xmlns:a16="http://schemas.microsoft.com/office/drawing/2014/main" id="{18F3E3F8-C9F6-B196-98B4-3CC4BD8CE8BE}"/>
-              </a:ext>
-            </a:extLst>
-          </p:cNvPr>
-          <p:cNvSpPr txBox="1"/>
-          <p:nvPr/>
-        </p:nvSpPr>
-        <p:spPr>
-          <a:xfrm>
-            <a:off x="542406" y="1743722"/>
-            <a:ext cx="11173949" cy="3747821"/>
-          </a:xfrm>
-          <a:prstGeom prst="rect">
-            <a:avLst/>
-          </a:prstGeom>
-          <a:noFill/>
-        </p:spPr>
-        <p:txBody>
-          <a:bodyPr wrap="square">
-            <a:spAutoFit/>
-          </a:bodyPr>
-          <a:lstStyle/>
-          <a:p>
-            <a:pPr marL="285750" indent="-285750">
-              <a:lnSpc>
-                <a:spcPct val="150000"/>
-              </a:lnSpc>
-              <a:buFont typeface="Wingdings" panose="05000000000000000000" pitchFamily="2" charset="2"/>
-              <a:buChar char="v"/>
-            </a:pPr>
-            <a:r>
-              <a:rPr lang="en-US" altLang="ko-KR" sz="1600" dirty="0">
-                <a:latin typeface="D2Coding" panose="020B0609020101020101" pitchFamily="49" charset="-127"/>
-                <a:ea typeface="D2Coding" panose="020B0609020101020101" pitchFamily="49" charset="-127"/>
-              </a:rPr>
-              <a:t>AI </a:t>
-            </a:r>
-            <a:r>
-              <a:rPr lang="ko-KR" altLang="en-US" sz="1600" dirty="0">
-                <a:latin typeface="D2Coding" panose="020B0609020101020101" pitchFamily="49" charset="-127"/>
-                <a:ea typeface="D2Coding" panose="020B0609020101020101" pitchFamily="49" charset="-127"/>
-              </a:rPr>
-              <a:t>모델이 최신 정보를 알지 못하는 지식 컷오프 </a:t>
-            </a:r>
-            <a:r>
-              <a:rPr lang="en-US" altLang="ko-KR" sz="1600" dirty="0">
-                <a:latin typeface="D2Coding" panose="020B0609020101020101" pitchFamily="49" charset="-127"/>
-                <a:ea typeface="D2Coding" panose="020B0609020101020101" pitchFamily="49" charset="-127"/>
-              </a:rPr>
-              <a:t>(Knowledge Cutoff):</a:t>
-            </a:r>
-            <a:r>
-              <a:rPr lang="ko-KR" altLang="en-US" sz="1600" dirty="0">
-                <a:latin typeface="D2Coding" panose="020B0609020101020101" pitchFamily="49" charset="-127"/>
-                <a:ea typeface="D2Coding" panose="020B0609020101020101" pitchFamily="49" charset="-127"/>
-              </a:rPr>
-              <a:t> </a:t>
-            </a:r>
-            <a:r>
-              <a:rPr lang="en-US" altLang="ko-KR" sz="1600" dirty="0">
-                <a:latin typeface="D2Coding" panose="020B0609020101020101" pitchFamily="49" charset="-127"/>
-                <a:ea typeface="D2Coding" panose="020B0609020101020101" pitchFamily="49" charset="-127"/>
-              </a:rPr>
-              <a:t>AI </a:t>
-            </a:r>
-            <a:r>
-              <a:rPr lang="ko-KR" altLang="en-US" sz="1600" dirty="0">
-                <a:latin typeface="D2Coding" panose="020B0609020101020101" pitchFamily="49" charset="-127"/>
-                <a:ea typeface="D2Coding" panose="020B0609020101020101" pitchFamily="49" charset="-127"/>
-              </a:rPr>
-              <a:t>모델의 지식이 멈춘 </a:t>
-            </a:r>
-            <a:r>
-              <a:rPr lang="en-US" altLang="ko-KR" sz="1600" dirty="0">
-                <a:latin typeface="D2Coding" panose="020B0609020101020101" pitchFamily="49" charset="-127"/>
-                <a:ea typeface="D2Coding" panose="020B0609020101020101" pitchFamily="49" charset="-127"/>
-              </a:rPr>
-              <a:t>'</a:t>
-            </a:r>
-            <a:r>
-              <a:rPr lang="ko-KR" altLang="en-US" sz="1600" dirty="0">
-                <a:latin typeface="D2Coding" panose="020B0609020101020101" pitchFamily="49" charset="-127"/>
-                <a:ea typeface="D2Coding" panose="020B0609020101020101" pitchFamily="49" charset="-127"/>
-              </a:rPr>
-              <a:t>유통기한</a:t>
-            </a:r>
-            <a:r>
-              <a:rPr lang="en-US" altLang="ko-KR" sz="1600" dirty="0">
-                <a:latin typeface="D2Coding" panose="020B0609020101020101" pitchFamily="49" charset="-127"/>
-                <a:ea typeface="D2Coding" panose="020B0609020101020101" pitchFamily="49" charset="-127"/>
-              </a:rPr>
-              <a:t>' </a:t>
-            </a:r>
-            <a:r>
-              <a:rPr lang="ko-KR" altLang="en-US" sz="1600" dirty="0">
-                <a:latin typeface="D2Coding" panose="020B0609020101020101" pitchFamily="49" charset="-127"/>
-                <a:ea typeface="D2Coding" panose="020B0609020101020101" pitchFamily="49" charset="-127"/>
-              </a:rPr>
-              <a:t>같은 시점으로</a:t>
-            </a:r>
-            <a:r>
-              <a:rPr lang="en-US" altLang="ko-KR" sz="1600" dirty="0">
-                <a:latin typeface="D2Coding" panose="020B0609020101020101" pitchFamily="49" charset="-127"/>
-                <a:ea typeface="D2Coding" panose="020B0609020101020101" pitchFamily="49" charset="-127"/>
-              </a:rPr>
-              <a:t> </a:t>
-            </a:r>
-            <a:r>
-              <a:rPr lang="ko-KR" altLang="en-US" sz="1600" dirty="0">
-                <a:latin typeface="D2Coding" panose="020B0609020101020101" pitchFamily="49" charset="-127"/>
-                <a:ea typeface="D2Coding" panose="020B0609020101020101" pitchFamily="49" charset="-127"/>
-              </a:rPr>
-              <a:t>예를 들어 어떤 </a:t>
-            </a:r>
-            <a:r>
-              <a:rPr lang="en-US" altLang="ko-KR" sz="1600" dirty="0">
-                <a:latin typeface="D2Coding" panose="020B0609020101020101" pitchFamily="49" charset="-127"/>
-                <a:ea typeface="D2Coding" panose="020B0609020101020101" pitchFamily="49" charset="-127"/>
-              </a:rPr>
-              <a:t>AI</a:t>
-            </a:r>
-            <a:r>
-              <a:rPr lang="ko-KR" altLang="en-US" sz="1600" dirty="0">
-                <a:latin typeface="D2Coding" panose="020B0609020101020101" pitchFamily="49" charset="-127"/>
-                <a:ea typeface="D2Coding" panose="020B0609020101020101" pitchFamily="49" charset="-127"/>
-              </a:rPr>
-              <a:t>의 지식 컷오프가 </a:t>
-            </a:r>
-            <a:r>
-              <a:rPr lang="en-US" altLang="ko-KR" sz="1600" dirty="0">
-                <a:latin typeface="D2Coding" panose="020B0609020101020101" pitchFamily="49" charset="-127"/>
-                <a:ea typeface="D2Coding" panose="020B0609020101020101" pitchFamily="49" charset="-127"/>
-              </a:rPr>
-              <a:t>2025</a:t>
-            </a:r>
-            <a:r>
-              <a:rPr lang="ko-KR" altLang="en-US" sz="1600" dirty="0">
-                <a:latin typeface="D2Coding" panose="020B0609020101020101" pitchFamily="49" charset="-127"/>
-                <a:ea typeface="D2Coding" panose="020B0609020101020101" pitchFamily="49" charset="-127"/>
-              </a:rPr>
-              <a:t>년 </a:t>
-            </a:r>
-            <a:r>
-              <a:rPr lang="en-US" altLang="ko-KR" sz="1600" dirty="0">
-                <a:latin typeface="D2Coding" panose="020B0609020101020101" pitchFamily="49" charset="-127"/>
-                <a:ea typeface="D2Coding" panose="020B0609020101020101" pitchFamily="49" charset="-127"/>
-              </a:rPr>
-              <a:t>12</a:t>
-            </a:r>
-            <a:r>
-              <a:rPr lang="ko-KR" altLang="en-US" sz="1600" dirty="0">
-                <a:latin typeface="D2Coding" panose="020B0609020101020101" pitchFamily="49" charset="-127"/>
-                <a:ea typeface="D2Coding" panose="020B0609020101020101" pitchFamily="49" charset="-127"/>
-              </a:rPr>
-              <a:t>월이라면</a:t>
-            </a:r>
-            <a:r>
-              <a:rPr lang="en-US" altLang="ko-KR" sz="1600" dirty="0">
-                <a:latin typeface="D2Coding" panose="020B0609020101020101" pitchFamily="49" charset="-127"/>
-                <a:ea typeface="D2Coding" panose="020B0609020101020101" pitchFamily="49" charset="-127"/>
-              </a:rPr>
-              <a:t>, AI</a:t>
-            </a:r>
-            <a:r>
-              <a:rPr lang="ko-KR" altLang="en-US" sz="1600" dirty="0">
-                <a:latin typeface="D2Coding" panose="020B0609020101020101" pitchFamily="49" charset="-127"/>
-                <a:ea typeface="D2Coding" panose="020B0609020101020101" pitchFamily="49" charset="-127"/>
-              </a:rPr>
-              <a:t>는 </a:t>
-            </a:r>
-            <a:r>
-              <a:rPr lang="en-US" altLang="ko-KR" sz="1600" dirty="0">
-                <a:latin typeface="D2Coding" panose="020B0609020101020101" pitchFamily="49" charset="-127"/>
-                <a:ea typeface="D2Coding" panose="020B0609020101020101" pitchFamily="49" charset="-127"/>
-              </a:rPr>
-              <a:t>2026</a:t>
-            </a:r>
-            <a:r>
-              <a:rPr lang="ko-KR" altLang="en-US" sz="1600" dirty="0">
-                <a:latin typeface="D2Coding" panose="020B0609020101020101" pitchFamily="49" charset="-127"/>
-                <a:ea typeface="D2Coding" panose="020B0609020101020101" pitchFamily="49" charset="-127"/>
-              </a:rPr>
-              <a:t>년에 일어난 뉴스나 사건을 알지 못하고 엉뚱한 답변</a:t>
-            </a:r>
-            <a:r>
-              <a:rPr lang="en-US" altLang="ko-KR" sz="1600" dirty="0">
-                <a:latin typeface="D2Coding" panose="020B0609020101020101" pitchFamily="49" charset="-127"/>
-                <a:ea typeface="D2Coding" panose="020B0609020101020101" pitchFamily="49" charset="-127"/>
-              </a:rPr>
-              <a:t>(Hallucination)</a:t>
-            </a:r>
-            <a:r>
-              <a:rPr lang="ko-KR" altLang="en-US" sz="1600" dirty="0">
-                <a:latin typeface="D2Coding" panose="020B0609020101020101" pitchFamily="49" charset="-127"/>
-                <a:ea typeface="D2Coding" panose="020B0609020101020101" pitchFamily="49" charset="-127"/>
-              </a:rPr>
-              <a:t>을 생성</a:t>
-            </a:r>
-            <a:r>
-              <a:rPr lang="en-US" altLang="ko-KR" sz="1600" dirty="0">
-                <a:latin typeface="D2Coding" panose="020B0609020101020101" pitchFamily="49" charset="-127"/>
-                <a:ea typeface="D2Coding" panose="020B0609020101020101" pitchFamily="49" charset="-127"/>
-              </a:rPr>
-              <a:t>(Generate)</a:t>
-            </a:r>
-            <a:r>
-              <a:rPr lang="ko-KR" altLang="en-US" sz="1600" dirty="0">
-                <a:latin typeface="D2Coding" panose="020B0609020101020101" pitchFamily="49" charset="-127"/>
-                <a:ea typeface="D2Coding" panose="020B0609020101020101" pitchFamily="49" charset="-127"/>
-              </a:rPr>
-              <a:t>하게 됨</a:t>
-            </a:r>
-            <a:endParaRPr lang="en-US" altLang="ko-KR" sz="1600" dirty="0">
-              <a:latin typeface="D2Coding" panose="020B0609020101020101" pitchFamily="49" charset="-127"/>
-              <a:ea typeface="D2Coding" panose="020B0609020101020101" pitchFamily="49" charset="-127"/>
-            </a:endParaRPr>
-          </a:p>
-          <a:p>
-            <a:pPr marL="285750" indent="-285750">
-              <a:lnSpc>
-                <a:spcPct val="150000"/>
-              </a:lnSpc>
-              <a:buFont typeface="Wingdings" panose="05000000000000000000" pitchFamily="2" charset="2"/>
-              <a:buChar char="v"/>
-            </a:pPr>
-            <a:endParaRPr lang="en-US" altLang="ko-KR" sz="1600" dirty="0">
-              <a:latin typeface="D2Coding" panose="020B0609020101020101" pitchFamily="49" charset="-127"/>
-              <a:ea typeface="D2Coding" panose="020B0609020101020101" pitchFamily="49" charset="-127"/>
-            </a:endParaRPr>
-          </a:p>
-          <a:p>
-            <a:pPr marL="285750" indent="-285750">
-              <a:lnSpc>
-                <a:spcPct val="150000"/>
-              </a:lnSpc>
-              <a:buFont typeface="Wingdings" panose="05000000000000000000" pitchFamily="2" charset="2"/>
-              <a:buChar char="v"/>
-            </a:pPr>
-            <a:r>
-              <a:rPr lang="ko-KR" altLang="en-US" sz="1600" dirty="0">
-                <a:latin typeface="D2Coding" panose="020B0609020101020101" pitchFamily="49" charset="-127"/>
-                <a:ea typeface="D2Coding" panose="020B0609020101020101" pitchFamily="49" charset="-127"/>
-              </a:rPr>
-              <a:t>데이터가 </a:t>
-            </a:r>
-            <a:r>
-              <a:rPr lang="ko-KR" altLang="en-US" sz="1600" dirty="0" err="1">
-                <a:latin typeface="D2Coding" panose="020B0609020101020101" pitchFamily="49" charset="-127"/>
-                <a:ea typeface="D2Coding" panose="020B0609020101020101" pitchFamily="49" charset="-127"/>
-              </a:rPr>
-              <a:t>데이터가</a:t>
-            </a:r>
-            <a:r>
-              <a:rPr lang="ko-KR" altLang="en-US" sz="1600" dirty="0">
-                <a:latin typeface="D2Coding" panose="020B0609020101020101" pitchFamily="49" charset="-127"/>
-                <a:ea typeface="D2Coding" panose="020B0609020101020101" pitchFamily="49" charset="-127"/>
-              </a:rPr>
-              <a:t> </a:t>
-            </a:r>
-            <a:r>
-              <a:rPr lang="en-US" altLang="ko-KR" sz="1600" dirty="0">
-                <a:latin typeface="D2Coding" panose="020B0609020101020101" pitchFamily="49" charset="-127"/>
-                <a:ea typeface="D2Coding" panose="020B0609020101020101" pitchFamily="49" charset="-127"/>
-              </a:rPr>
-              <a:t>1~2</a:t>
-            </a:r>
-            <a:r>
-              <a:rPr lang="ko-KR" altLang="en-US" sz="1600" dirty="0">
-                <a:latin typeface="D2Coding" panose="020B0609020101020101" pitchFamily="49" charset="-127"/>
-                <a:ea typeface="D2Coding" panose="020B0609020101020101" pitchFamily="49" charset="-127"/>
-              </a:rPr>
-              <a:t>페이지일 때 질문할 때마다 프롬프트에 그 내용을 통째로 복사</a:t>
-            </a:r>
-            <a:r>
-              <a:rPr lang="en-US" altLang="ko-KR" sz="1600" dirty="0">
-                <a:latin typeface="D2Coding" panose="020B0609020101020101" pitchFamily="49" charset="-127"/>
-                <a:ea typeface="D2Coding" panose="020B0609020101020101" pitchFamily="49" charset="-127"/>
-              </a:rPr>
-              <a:t>·</a:t>
-            </a:r>
-            <a:r>
-              <a:rPr lang="ko-KR" altLang="en-US" sz="1600" dirty="0">
-                <a:latin typeface="D2Coding" panose="020B0609020101020101" pitchFamily="49" charset="-127"/>
-                <a:ea typeface="D2Coding" panose="020B0609020101020101" pitchFamily="49" charset="-127"/>
-              </a:rPr>
-              <a:t>붙여넣기</a:t>
-            </a:r>
-            <a:r>
-              <a:rPr lang="en-US" altLang="ko-KR" sz="1600" dirty="0">
-                <a:latin typeface="D2Coding" panose="020B0609020101020101" pitchFamily="49" charset="-127"/>
-                <a:ea typeface="D2Coding" panose="020B0609020101020101" pitchFamily="49" charset="-127"/>
-              </a:rPr>
-              <a:t>(Context)</a:t>
-            </a:r>
-            <a:r>
-              <a:rPr lang="ko-KR" altLang="en-US" sz="1600" dirty="0">
-                <a:latin typeface="D2Coding" panose="020B0609020101020101" pitchFamily="49" charset="-127"/>
-                <a:ea typeface="D2Coding" panose="020B0609020101020101" pitchFamily="49" charset="-127"/>
-              </a:rPr>
-              <a:t>해서 모델에 넘기면 해결되니 번거로운</a:t>
-            </a:r>
-            <a:r>
-              <a:rPr lang="en-US" altLang="ko-KR" sz="1600" dirty="0">
-                <a:latin typeface="D2Coding" panose="020B0609020101020101" pitchFamily="49" charset="-127"/>
-                <a:ea typeface="D2Coding" panose="020B0609020101020101" pitchFamily="49" charset="-127"/>
-              </a:rPr>
-              <a:t> </a:t>
-            </a:r>
-            <a:r>
-              <a:rPr lang="ko-KR" altLang="en-US" sz="1600" dirty="0">
-                <a:latin typeface="D2Coding" panose="020B0609020101020101" pitchFamily="49" charset="-127"/>
-                <a:ea typeface="D2Coding" panose="020B0609020101020101" pitchFamily="49" charset="-127"/>
-              </a:rPr>
-              <a:t>것 이외에는 기술적 고민이나 복잡한 아키텍처가 전혀 필요 없지만</a:t>
-            </a:r>
-            <a:r>
-              <a:rPr lang="en-US" altLang="ko-KR" sz="1600" dirty="0">
-                <a:latin typeface="D2Coding" panose="020B0609020101020101" pitchFamily="49" charset="-127"/>
-                <a:ea typeface="D2Coding" panose="020B0609020101020101" pitchFamily="49" charset="-127"/>
-              </a:rPr>
-              <a:t>,</a:t>
-            </a:r>
-          </a:p>
-          <a:p>
-            <a:pPr marL="285750" indent="-285750">
-              <a:lnSpc>
-                <a:spcPct val="150000"/>
-              </a:lnSpc>
-              <a:buFont typeface="Wingdings" panose="05000000000000000000" pitchFamily="2" charset="2"/>
-              <a:buChar char="v"/>
-            </a:pPr>
-            <a:endParaRPr lang="en-US" altLang="ko-KR" sz="1600" dirty="0">
-              <a:latin typeface="D2Coding" panose="020B0609020101020101" pitchFamily="49" charset="-127"/>
-              <a:ea typeface="D2Coding" panose="020B0609020101020101" pitchFamily="49" charset="-127"/>
-            </a:endParaRPr>
-          </a:p>
-          <a:p>
-            <a:pPr marL="285750" indent="-285750">
-              <a:lnSpc>
-                <a:spcPct val="150000"/>
-              </a:lnSpc>
-              <a:buFont typeface="Wingdings" panose="05000000000000000000" pitchFamily="2" charset="2"/>
-              <a:buChar char="v"/>
-            </a:pPr>
-            <a:r>
-              <a:rPr lang="ko-KR" altLang="en-US" sz="1600" dirty="0">
-                <a:latin typeface="D2Coding" panose="020B0609020101020101" pitchFamily="49" charset="-127"/>
-                <a:ea typeface="D2Coding" panose="020B0609020101020101" pitchFamily="49" charset="-127"/>
-              </a:rPr>
-              <a:t>만약 여러분 회사의 방대한 모든 </a:t>
-            </a:r>
-            <a:r>
-              <a:rPr lang="ko-KR" altLang="en-US" sz="1600" dirty="0" err="1">
-                <a:latin typeface="D2Coding" panose="020B0609020101020101" pitchFamily="49" charset="-127"/>
-                <a:ea typeface="D2Coding" panose="020B0609020101020101" pitchFamily="49" charset="-127"/>
-              </a:rPr>
-              <a:t>규정집</a:t>
-            </a:r>
-            <a:r>
-              <a:rPr lang="en-US" altLang="ko-KR" sz="1600" dirty="0">
-                <a:latin typeface="D2Coding" panose="020B0609020101020101" pitchFamily="49" charset="-127"/>
-                <a:ea typeface="D2Coding" panose="020B0609020101020101" pitchFamily="49" charset="-127"/>
-              </a:rPr>
-              <a:t>(Huge Quantity)</a:t>
-            </a:r>
-            <a:r>
-              <a:rPr lang="ko-KR" altLang="en-US" sz="1600" dirty="0">
-                <a:latin typeface="D2Coding" panose="020B0609020101020101" pitchFamily="49" charset="-127"/>
-                <a:ea typeface="D2Coding" panose="020B0609020101020101" pitchFamily="49" charset="-127"/>
-              </a:rPr>
-              <a:t>을 </a:t>
-            </a:r>
-            <a:r>
-              <a:rPr lang="en-US" altLang="ko-KR" sz="1600" dirty="0">
-                <a:latin typeface="D2Coding" panose="020B0609020101020101" pitchFamily="49" charset="-127"/>
-                <a:ea typeface="D2Coding" panose="020B0609020101020101" pitchFamily="49" charset="-127"/>
-              </a:rPr>
-              <a:t>LLM</a:t>
-            </a:r>
-            <a:r>
-              <a:rPr lang="ko-KR" altLang="en-US" sz="1600" dirty="0">
-                <a:latin typeface="D2Coding" panose="020B0609020101020101" pitchFamily="49" charset="-127"/>
-                <a:ea typeface="D2Coding" panose="020B0609020101020101" pitchFamily="49" charset="-127"/>
-              </a:rPr>
-              <a:t>에게 참고하라고 한다면</a:t>
-            </a:r>
-            <a:r>
-              <a:rPr lang="en-US" altLang="ko-KR" sz="1600" dirty="0">
-                <a:latin typeface="D2Coding" panose="020B0609020101020101" pitchFamily="49" charset="-127"/>
-                <a:ea typeface="D2Coding" panose="020B0609020101020101" pitchFamily="49" charset="-127"/>
-              </a:rPr>
-              <a:t>, </a:t>
-            </a:r>
-            <a:r>
-              <a:rPr lang="ko-KR" altLang="en-US" sz="1600" dirty="0">
-                <a:latin typeface="D2Coding" panose="020B0609020101020101" pitchFamily="49" charset="-127"/>
-                <a:ea typeface="D2Coding" panose="020B0609020101020101" pitchFamily="49" charset="-127"/>
-              </a:rPr>
-              <a:t>매번 수천 페이지를 복사해서 붙여 넣을 건가</a:t>
-            </a:r>
-            <a:r>
-              <a:rPr lang="en-US" altLang="ko-KR" sz="1600" dirty="0">
-                <a:latin typeface="D2Coding" panose="020B0609020101020101" pitchFamily="49" charset="-127"/>
-                <a:ea typeface="D2Coding" panose="020B0609020101020101" pitchFamily="49" charset="-127"/>
-              </a:rPr>
-              <a:t>? </a:t>
-            </a:r>
-            <a:r>
-              <a:rPr lang="ko-KR" altLang="en-US" sz="1600" dirty="0">
-                <a:latin typeface="D2Coding" panose="020B0609020101020101" pitchFamily="49" charset="-127"/>
-                <a:ea typeface="D2Coding" panose="020B0609020101020101" pitchFamily="49" charset="-127"/>
-              </a:rPr>
-              <a:t>불가능하죠</a:t>
-            </a:r>
-            <a:r>
-              <a:rPr lang="en-US" altLang="ko-KR" sz="1600" dirty="0">
-                <a:latin typeface="D2Coding" panose="020B0609020101020101" pitchFamily="49" charset="-127"/>
-                <a:ea typeface="D2Coding" panose="020B0609020101020101" pitchFamily="49" charset="-127"/>
-              </a:rPr>
-              <a:t>? </a:t>
-            </a:r>
-            <a:r>
-              <a:rPr lang="ko-KR" altLang="en-US" sz="1600" dirty="0">
-                <a:latin typeface="D2Coding" panose="020B0609020101020101" pitchFamily="49" charset="-127"/>
-                <a:ea typeface="D2Coding" panose="020B0609020101020101" pitchFamily="49" charset="-127"/>
-              </a:rPr>
-              <a:t>그래서 </a:t>
-            </a:r>
-            <a:r>
-              <a:rPr lang="en-US" altLang="ko-KR" sz="1600" dirty="0">
-                <a:latin typeface="D2Coding" panose="020B0609020101020101" pitchFamily="49" charset="-127"/>
-                <a:ea typeface="D2Coding" panose="020B0609020101020101" pitchFamily="49" charset="-127"/>
-              </a:rPr>
-              <a:t>'</a:t>
-            </a:r>
-            <a:r>
-              <a:rPr lang="ko-KR" altLang="en-US" sz="1600" dirty="0">
-                <a:latin typeface="D2Coding" panose="020B0609020101020101" pitchFamily="49" charset="-127"/>
-                <a:ea typeface="D2Coding" panose="020B0609020101020101" pitchFamily="49" charset="-127"/>
-              </a:rPr>
-              <a:t>정답 조각</a:t>
-            </a:r>
-            <a:r>
-              <a:rPr lang="en-US" altLang="ko-KR" sz="1600" dirty="0">
-                <a:latin typeface="D2Coding" panose="020B0609020101020101" pitchFamily="49" charset="-127"/>
-                <a:ea typeface="D2Coding" panose="020B0609020101020101" pitchFamily="49" charset="-127"/>
-              </a:rPr>
-              <a:t>(Chunk)</a:t>
-            </a:r>
-            <a:r>
-              <a:rPr lang="ko-KR" altLang="en-US" sz="1600" dirty="0">
-                <a:latin typeface="D2Coding" panose="020B0609020101020101" pitchFamily="49" charset="-127"/>
-                <a:ea typeface="D2Coding" panose="020B0609020101020101" pitchFamily="49" charset="-127"/>
-              </a:rPr>
-              <a:t> 고르기 기술</a:t>
-            </a:r>
-            <a:r>
-              <a:rPr lang="en-US" altLang="ko-KR" sz="1600" dirty="0">
-                <a:latin typeface="D2Coding" panose="020B0609020101020101" pitchFamily="49" charset="-127"/>
-                <a:ea typeface="D2Coding" panose="020B0609020101020101" pitchFamily="49" charset="-127"/>
-              </a:rPr>
-              <a:t>'</a:t>
-            </a:r>
-            <a:r>
-              <a:rPr lang="ko-KR" altLang="en-US" sz="1600" dirty="0">
-                <a:latin typeface="D2Coding" panose="020B0609020101020101" pitchFamily="49" charset="-127"/>
-                <a:ea typeface="D2Coding" panose="020B0609020101020101" pitchFamily="49" charset="-127"/>
-              </a:rPr>
-              <a:t>이 필요</a:t>
-            </a:r>
-            <a:endParaRPr lang="en-US" altLang="ko-KR" sz="1600" dirty="0">
-              <a:latin typeface="D2Coding" panose="020B0609020101020101" pitchFamily="49" charset="-127"/>
-              <a:ea typeface="D2Coding" panose="020B0609020101020101" pitchFamily="49" charset="-127"/>
-            </a:endParaRPr>
-          </a:p>
-          <a:p>
-            <a:pPr marL="285750" indent="-285750">
-              <a:lnSpc>
-                <a:spcPct val="150000"/>
-              </a:lnSpc>
-              <a:buFont typeface="Wingdings" panose="05000000000000000000" pitchFamily="2" charset="2"/>
-              <a:buChar char="v"/>
-            </a:pPr>
-            <a:endParaRPr lang="ko-KR" altLang="en-US" sz="1600" dirty="0">
-              <a:latin typeface="D2Coding" panose="020B0609020101020101" pitchFamily="49" charset="-127"/>
-              <a:ea typeface="D2Coding" panose="020B0609020101020101" pitchFamily="49" charset="-127"/>
-            </a:endParaRPr>
-          </a:p>
-        </p:txBody>
-      </p:sp>
-    </p:spTree>
-    <p:extLst>
-      <p:ext uri="{BB962C8B-B14F-4D97-AF65-F5344CB8AC3E}">
-        <p14:creationId xmlns:p14="http://schemas.microsoft.com/office/powerpoint/2010/main" val="2538986326"/>
-      </p:ext>
-    </p:extLst>
-  </p:cSld>
-  <p:clrMapOvr>
-    <a:masterClrMapping/>
-  </p:clrMapOvr>
-</p:sld>
-</file>
-
-<file path=ppt/slides/slide20.xml><?xml version="1.0" encoding="utf-8"?>
+<file path=ppt/slides/slide21.xml><?xml version="1.0" encoding="utf-8"?>
 <p:sld xmlns:a="http://schemas.openxmlformats.org/drawingml/2006/main" xmlns:r="http://schemas.openxmlformats.org/officeDocument/2006/relationships" xmlns:p="http://schemas.openxmlformats.org/presentationml/2006/main">
   <p:cSld>
     <p:spTree>
@@ -12993,7 +13619,7 @@
             <a:fld id="{D57F1E4F-1CFF-5643-939E-217C01CDF565}" type="slidenum">
               <a:rPr lang="en-US" sz="1400" b="1" smtClean="0"/>
               <a:pPr/>
-              <a:t>20</a:t>
+              <a:t>21</a:t>
             </a:fld>
             <a:endParaRPr lang="en-US" sz="1400" b="1" dirty="0"/>
           </a:p>
@@ -13012,7 +13638,7 @@
 </p:sld>
 </file>
 
-<file path=ppt/slides/slide21.xml><?xml version="1.0" encoding="utf-8"?>
+<file path=ppt/slides/slide22.xml><?xml version="1.0" encoding="utf-8"?>
 <p:sld xmlns:a="http://schemas.openxmlformats.org/drawingml/2006/main" xmlns:r="http://schemas.openxmlformats.org/officeDocument/2006/relationships" xmlns:p="http://schemas.openxmlformats.org/presentationml/2006/main">
   <p:cSld>
     <p:spTree>
@@ -13277,7 +13903,7 @@
             <a:fld id="{D57F1E4F-1CFF-5643-939E-217C01CDF565}" type="slidenum">
               <a:rPr lang="en-US" sz="1400" b="1" smtClean="0"/>
               <a:pPr/>
-              <a:t>21</a:t>
+              <a:t>22</a:t>
             </a:fld>
             <a:endParaRPr lang="en-US" sz="1400" b="1" dirty="0"/>
           </a:p>
@@ -13296,7 +13922,7 @@
 </p:sld>
 </file>
 
-<file path=ppt/slides/slide22.xml><?xml version="1.0" encoding="utf-8"?>
+<file path=ppt/slides/slide23.xml><?xml version="1.0" encoding="utf-8"?>
 <p:sld xmlns:a="http://schemas.openxmlformats.org/drawingml/2006/main" xmlns:r="http://schemas.openxmlformats.org/officeDocument/2006/relationships" xmlns:p="http://schemas.openxmlformats.org/presentationml/2006/main">
   <p:cSld>
     <p:spTree>
@@ -14174,7 +14800,7 @@
             <a:fld id="{D57F1E4F-1CFF-5643-939E-217C01CDF565}" type="slidenum">
               <a:rPr lang="en-US" sz="1400" b="1" smtClean="0"/>
               <a:pPr/>
-              <a:t>22</a:t>
+              <a:t>23</a:t>
             </a:fld>
             <a:endParaRPr lang="en-US" sz="1400" b="1" dirty="0"/>
           </a:p>
@@ -14193,7 +14819,7 @@
 </p:sld>
 </file>
 
-<file path=ppt/slides/slide23.xml><?xml version="1.0" encoding="utf-8"?>
+<file path=ppt/slides/slide24.xml><?xml version="1.0" encoding="utf-8"?>
 <p:sld xmlns:a="http://schemas.openxmlformats.org/drawingml/2006/main" xmlns:r="http://schemas.openxmlformats.org/officeDocument/2006/relationships" xmlns:p="http://schemas.openxmlformats.org/presentationml/2006/main">
   <p:cSld>
     <p:spTree>
@@ -14552,7 +15178,7 @@
             <a:fld id="{D57F1E4F-1CFF-5643-939E-217C01CDF565}" type="slidenum">
               <a:rPr lang="en-US" sz="1400" b="1" smtClean="0"/>
               <a:pPr/>
-              <a:t>23</a:t>
+              <a:t>24</a:t>
             </a:fld>
             <a:endParaRPr lang="en-US" sz="1400" b="1" dirty="0"/>
           </a:p>
@@ -14654,7 +15280,33 @@
                 <a:ea typeface="D2Coding" panose="020B0609020101020101" pitchFamily="49" charset="-127"/>
                 <a:cs typeface="Segoe UI Light" panose="020B0502040204020203" pitchFamily="34" charset="0"/>
               </a:rPr>
-              <a:t>Why RAG?</a:t>
+              <a:t>What is RAG(Retrieval</a:t>
+            </a:r>
+            <a:r>
+              <a:rPr lang="ko-KR" altLang="en-US" sz="2800" cap="none" dirty="0">
+                <a:solidFill>
+                  <a:schemeClr val="bg2">
+                    <a:lumMod val="25000"/>
+                  </a:schemeClr>
+                </a:solidFill>
+                <a:latin typeface="D2Coding" panose="020B0609020101020101" pitchFamily="49" charset="-127"/>
+                <a:ea typeface="D2Coding" panose="020B0609020101020101" pitchFamily="49" charset="-127"/>
+                <a:cs typeface="Segoe UI Light" panose="020B0502040204020203" pitchFamily="34" charset="0"/>
+              </a:rPr>
+              <a:t> </a:t>
+            </a:r>
+            <a:r>
+              <a:rPr lang="en-US" altLang="ko-KR" sz="2800" cap="none" dirty="0">
+                <a:solidFill>
+                  <a:schemeClr val="bg2">
+                    <a:lumMod val="25000"/>
+                  </a:schemeClr>
+                </a:solidFill>
+                <a:latin typeface="D2Coding" panose="020B0609020101020101" pitchFamily="49" charset="-127"/>
+                <a:ea typeface="D2Coding" panose="020B0609020101020101" pitchFamily="49" charset="-127"/>
+                <a:cs typeface="Segoe UI Light" panose="020B0502040204020203" pitchFamily="34" charset="0"/>
+              </a:rPr>
+              <a:t>Augmented Generation)?</a:t>
             </a:r>
             <a:endParaRPr lang="ko-KR" altLang="en-US" sz="2800" cap="none" dirty="0">
               <a:solidFill>
@@ -14683,13 +15335,19 @@
         </p:nvSpPr>
         <p:spPr>
           <a:xfrm>
-            <a:off x="667267" y="1248422"/>
-            <a:ext cx="9076807" cy="1296317"/>
+            <a:off x="581025" y="1314948"/>
+            <a:ext cx="10972800" cy="1296317"/>
           </a:xfrm>
           <a:prstGeom prst="rect">
             <a:avLst/>
           </a:prstGeom>
           <a:noFill/>
+          <a:ln>
+            <a:solidFill>
+              <a:schemeClr val="tx1"/>
+            </a:solidFill>
+            <a:prstDash val="dash"/>
+          </a:ln>
         </p:spPr>
         <p:txBody>
           <a:bodyPr wrap="square">
@@ -14704,6 +15362,9 @@
             </a:pPr>
             <a:r>
               <a:rPr lang="ko-KR" altLang="en-US" b="1" dirty="0">
+                <a:solidFill>
+                  <a:srgbClr val="FF0000"/>
+                </a:solidFill>
                 <a:latin typeface="D2Coding" panose="020B0609020101020101" pitchFamily="49" charset="-127"/>
                 <a:ea typeface="D2Coding" panose="020B0609020101020101" pitchFamily="49" charset="-127"/>
               </a:rPr>
@@ -14711,6 +15372,9 @@
             </a:r>
             <a:r>
               <a:rPr lang="en-US" altLang="ko-KR" b="1" dirty="0">
+                <a:solidFill>
+                  <a:srgbClr val="FF0000"/>
+                </a:solidFill>
                 <a:latin typeface="D2Coding" panose="020B0609020101020101" pitchFamily="49" charset="-127"/>
                 <a:ea typeface="D2Coding" panose="020B0609020101020101" pitchFamily="49" charset="-127"/>
               </a:rPr>
@@ -14718,12 +15382,18 @@
             </a:r>
             <a:r>
               <a:rPr lang="ko-KR" altLang="en-US" dirty="0">
+                <a:solidFill>
+                  <a:srgbClr val="FF0000"/>
+                </a:solidFill>
                 <a:latin typeface="D2Coding" panose="020B0609020101020101" pitchFamily="49" charset="-127"/>
                 <a:ea typeface="D2Coding" panose="020B0609020101020101" pitchFamily="49" charset="-127"/>
               </a:rPr>
               <a:t> </a:t>
             </a:r>
             <a:endParaRPr lang="en-US" altLang="ko-KR" sz="1600" i="1" dirty="0">
+              <a:solidFill>
+                <a:srgbClr val="FF0000"/>
+              </a:solidFill>
               <a:latin typeface="D2Coding" panose="020B0609020101020101" pitchFamily="49" charset="-127"/>
               <a:ea typeface="D2Coding" panose="020B0609020101020101" pitchFamily="49" charset="-127"/>
             </a:endParaRPr>
@@ -14849,12 +15519,17 @@
         <p:spPr>
           <a:xfrm>
             <a:off x="581025" y="3515916"/>
-            <a:ext cx="10972800" cy="2732158"/>
+            <a:ext cx="10972800" cy="1208664"/>
           </a:xfrm>
           <a:prstGeom prst="rect">
             <a:avLst/>
           </a:prstGeom>
           <a:noFill/>
+          <a:ln>
+            <a:solidFill>
+              <a:schemeClr val="tx1"/>
+            </a:solidFill>
+          </a:ln>
         </p:spPr>
         <p:txBody>
           <a:bodyPr wrap="square">
@@ -14933,135 +15608,6 @@
                 <a:ea typeface="D2Coding" panose="020B0609020101020101" pitchFamily="49" charset="-127"/>
               </a:rPr>
               <a:t> 만드는 과정)</a:t>
-            </a:r>
-          </a:p>
-          <a:p>
-            <a:pPr marL="342900" indent="-342900">
-              <a:lnSpc>
-                <a:spcPct val="150000"/>
-              </a:lnSpc>
-              <a:buFont typeface="+mj-lt"/>
-              <a:buAutoNum type="arabicPeriod"/>
-            </a:pPr>
-            <a:endParaRPr lang="ko-KR" altLang="en-US" sz="1600" dirty="0">
-              <a:latin typeface="D2Coding" panose="020B0609020101020101" pitchFamily="49" charset="-127"/>
-              <a:ea typeface="D2Coding" panose="020B0609020101020101" pitchFamily="49" charset="-127"/>
-            </a:endParaRPr>
-          </a:p>
-          <a:p>
-            <a:pPr marL="342900" indent="-342900">
-              <a:lnSpc>
-                <a:spcPct val="150000"/>
-              </a:lnSpc>
-              <a:buFont typeface="+mj-lt"/>
-              <a:buAutoNum type="arabicPeriod"/>
-            </a:pPr>
-            <a:r>
-              <a:rPr lang="ko-KR" altLang="en-US" b="1" dirty="0">
-                <a:latin typeface="D2Coding" panose="020B0609020101020101" pitchFamily="49" charset="-127"/>
-                <a:ea typeface="D2Coding" panose="020B0609020101020101" pitchFamily="49" charset="-127"/>
-              </a:rPr>
-              <a:t>검색 및 활용 (</a:t>
-            </a:r>
-            <a:r>
-              <a:rPr lang="ko-KR" altLang="en-US" b="1" dirty="0" err="1">
-                <a:latin typeface="D2Coding" panose="020B0609020101020101" pitchFamily="49" charset="-127"/>
-                <a:ea typeface="D2Coding" panose="020B0609020101020101" pitchFamily="49" charset="-127"/>
-              </a:rPr>
-              <a:t>Retrieving</a:t>
-            </a:r>
-            <a:r>
-              <a:rPr lang="ko-KR" altLang="en-US" b="1" dirty="0">
-                <a:latin typeface="D2Coding" panose="020B0609020101020101" pitchFamily="49" charset="-127"/>
-                <a:ea typeface="D2Coding" panose="020B0609020101020101" pitchFamily="49" charset="-127"/>
-              </a:rPr>
-              <a:t> &amp; </a:t>
-            </a:r>
-            <a:r>
-              <a:rPr lang="ko-KR" altLang="en-US" b="1" dirty="0" err="1">
-                <a:latin typeface="D2Coding" panose="020B0609020101020101" pitchFamily="49" charset="-127"/>
-                <a:ea typeface="D2Coding" panose="020B0609020101020101" pitchFamily="49" charset="-127"/>
-              </a:rPr>
-              <a:t>Generation</a:t>
-            </a:r>
-            <a:r>
-              <a:rPr lang="ko-KR" altLang="en-US" b="1" dirty="0">
-                <a:latin typeface="D2Coding" panose="020B0609020101020101" pitchFamily="49" charset="-127"/>
-                <a:ea typeface="D2Coding" panose="020B0609020101020101" pitchFamily="49" charset="-127"/>
-              </a:rPr>
-              <a:t>)</a:t>
-            </a:r>
-          </a:p>
-          <a:p>
-            <a:pPr marL="800100" lvl="1" indent="-342900">
-              <a:lnSpc>
-                <a:spcPct val="150000"/>
-              </a:lnSpc>
-              <a:buFont typeface="Wingdings" panose="05000000000000000000" pitchFamily="2" charset="2"/>
-              <a:buChar char="v"/>
-            </a:pPr>
-            <a:r>
-              <a:rPr lang="ko-KR" altLang="en-US" sz="1600" dirty="0">
-                <a:latin typeface="D2Coding" panose="020B0609020101020101" pitchFamily="49" charset="-127"/>
-                <a:ea typeface="D2Coding" panose="020B0609020101020101" pitchFamily="49" charset="-127"/>
-              </a:rPr>
-              <a:t>사용자가 질문을 던지면, 1단계에서 만든 인덱스에서 가장 관련성 높은 데이터 조각을 찾아내어(</a:t>
-            </a:r>
-            <a:r>
-              <a:rPr lang="ko-KR" altLang="en-US" sz="1600" dirty="0" err="1">
-                <a:latin typeface="D2Coding" panose="020B0609020101020101" pitchFamily="49" charset="-127"/>
-                <a:ea typeface="D2Coding" panose="020B0609020101020101" pitchFamily="49" charset="-127"/>
-              </a:rPr>
-              <a:t>Retrieve</a:t>
-            </a:r>
-            <a:r>
-              <a:rPr lang="ko-KR" altLang="en-US" sz="1600" dirty="0">
-                <a:latin typeface="D2Coding" panose="020B0609020101020101" pitchFamily="49" charset="-127"/>
-                <a:ea typeface="D2Coding" panose="020B0609020101020101" pitchFamily="49" charset="-127"/>
-              </a:rPr>
-              <a:t>) </a:t>
-            </a:r>
-            <a:r>
-              <a:rPr lang="ko-KR" altLang="en-US" sz="1600" dirty="0" err="1">
-                <a:latin typeface="D2Coding" panose="020B0609020101020101" pitchFamily="49" charset="-127"/>
-                <a:ea typeface="D2Coding" panose="020B0609020101020101" pitchFamily="49" charset="-127"/>
-              </a:rPr>
-              <a:t>LLM에게</a:t>
-            </a:r>
-            <a:r>
-              <a:rPr lang="ko-KR" altLang="en-US" sz="1600" dirty="0">
-                <a:latin typeface="D2Coding" panose="020B0609020101020101" pitchFamily="49" charset="-127"/>
-                <a:ea typeface="D2Coding" panose="020B0609020101020101" pitchFamily="49" charset="-127"/>
-              </a:rPr>
-              <a:t> 컨텍스트(</a:t>
-            </a:r>
-            <a:r>
-              <a:rPr lang="ko-KR" altLang="en-US" sz="1600" dirty="0" err="1">
-                <a:latin typeface="D2Coding" panose="020B0609020101020101" pitchFamily="49" charset="-127"/>
-                <a:ea typeface="D2Coding" panose="020B0609020101020101" pitchFamily="49" charset="-127"/>
-              </a:rPr>
-              <a:t>Context</a:t>
-            </a:r>
-            <a:r>
-              <a:rPr lang="ko-KR" altLang="en-US" sz="1600" dirty="0">
-                <a:latin typeface="D2Coding" panose="020B0609020101020101" pitchFamily="49" charset="-127"/>
-                <a:ea typeface="D2Coding" panose="020B0609020101020101" pitchFamily="49" charset="-127"/>
-              </a:rPr>
-              <a:t>)로 제공하여 정확한 답변을 생성(</a:t>
-            </a:r>
-            <a:r>
-              <a:rPr lang="ko-KR" altLang="en-US" sz="1600" dirty="0" err="1">
-                <a:latin typeface="D2Coding" panose="020B0609020101020101" pitchFamily="49" charset="-127"/>
-                <a:ea typeface="D2Coding" panose="020B0609020101020101" pitchFamily="49" charset="-127"/>
-              </a:rPr>
-              <a:t>Generate</a:t>
-            </a:r>
-            <a:r>
-              <a:rPr lang="ko-KR" altLang="en-US" sz="1600" dirty="0">
-                <a:latin typeface="D2Coding" panose="020B0609020101020101" pitchFamily="49" charset="-127"/>
-                <a:ea typeface="D2Coding" panose="020B0609020101020101" pitchFamily="49" charset="-127"/>
-              </a:rPr>
-              <a:t>)하게 만드는 과정</a:t>
             </a:r>
           </a:p>
         </p:txBody>
@@ -15213,7 +15759,7 @@
         </p:nvSpPr>
         <p:spPr>
           <a:xfrm>
-            <a:off x="4933950" y="2677791"/>
+            <a:off x="5054023" y="2739563"/>
             <a:ext cx="714375" cy="705073"/>
           </a:xfrm>
           <a:prstGeom prst="downArrow">
@@ -15245,6 +15791,161 @@
           <a:p>
             <a:pPr algn="ctr"/>
             <a:endParaRPr lang="ko-KR" altLang="en-US"/>
+          </a:p>
+        </p:txBody>
+      </p:sp>
+      <p:sp>
+        <p:nvSpPr>
+          <p:cNvPr id="7" name="TextBox 6">
+            <a:extLst>
+              <a:ext uri="{FF2B5EF4-FFF2-40B4-BE49-F238E27FC236}">
+                <a16:creationId xmlns:a16="http://schemas.microsoft.com/office/drawing/2014/main" id="{1A50B413-DE57-FE96-7DF4-8AC6171D6CC5}"/>
+              </a:ext>
+            </a:extLst>
+          </p:cNvPr>
+          <p:cNvSpPr txBox="1"/>
+          <p:nvPr/>
+        </p:nvSpPr>
+        <p:spPr>
+          <a:xfrm>
+            <a:off x="581025" y="5085787"/>
+            <a:ext cx="10972800" cy="1208664"/>
+          </a:xfrm>
+          <a:prstGeom prst="rect">
+            <a:avLst/>
+          </a:prstGeom>
+          <a:noFill/>
+          <a:ln>
+            <a:solidFill>
+              <a:schemeClr val="tx1"/>
+            </a:solidFill>
+          </a:ln>
+        </p:spPr>
+        <p:txBody>
+          <a:bodyPr wrap="square">
+            <a:spAutoFit/>
+          </a:bodyPr>
+          <a:lstStyle/>
+          <a:p>
+            <a:pPr>
+              <a:lnSpc>
+                <a:spcPct val="150000"/>
+              </a:lnSpc>
+            </a:pPr>
+            <a:r>
+              <a:rPr lang="en-US" altLang="ko-KR" b="1" dirty="0">
+                <a:latin typeface="D2Coding" panose="020B0609020101020101" pitchFamily="49" charset="-127"/>
+                <a:ea typeface="D2Coding" panose="020B0609020101020101" pitchFamily="49" charset="-127"/>
+              </a:rPr>
+              <a:t>2. </a:t>
+            </a:r>
+            <a:r>
+              <a:rPr lang="ko-KR" altLang="en-US" b="1" dirty="0">
+                <a:latin typeface="D2Coding" panose="020B0609020101020101" pitchFamily="49" charset="-127"/>
+                <a:ea typeface="D2Coding" panose="020B0609020101020101" pitchFamily="49" charset="-127"/>
+              </a:rPr>
+              <a:t>검색 및 활용 (</a:t>
+            </a:r>
+            <a:r>
+              <a:rPr lang="ko-KR" altLang="en-US" b="1" dirty="0" err="1">
+                <a:latin typeface="D2Coding" panose="020B0609020101020101" pitchFamily="49" charset="-127"/>
+                <a:ea typeface="D2Coding" panose="020B0609020101020101" pitchFamily="49" charset="-127"/>
+              </a:rPr>
+              <a:t>Retrieving</a:t>
+            </a:r>
+            <a:r>
+              <a:rPr lang="ko-KR" altLang="en-US" b="1" dirty="0">
+                <a:latin typeface="D2Coding" panose="020B0609020101020101" pitchFamily="49" charset="-127"/>
+                <a:ea typeface="D2Coding" panose="020B0609020101020101" pitchFamily="49" charset="-127"/>
+              </a:rPr>
+              <a:t> &amp; </a:t>
+            </a:r>
+            <a:r>
+              <a:rPr lang="ko-KR" altLang="en-US" b="1" dirty="0" err="1">
+                <a:latin typeface="D2Coding" panose="020B0609020101020101" pitchFamily="49" charset="-127"/>
+                <a:ea typeface="D2Coding" panose="020B0609020101020101" pitchFamily="49" charset="-127"/>
+              </a:rPr>
+              <a:t>Generation</a:t>
+            </a:r>
+            <a:r>
+              <a:rPr lang="ko-KR" altLang="en-US" b="1" dirty="0">
+                <a:latin typeface="D2Coding" panose="020B0609020101020101" pitchFamily="49" charset="-127"/>
+                <a:ea typeface="D2Coding" panose="020B0609020101020101" pitchFamily="49" charset="-127"/>
+              </a:rPr>
+              <a:t>)</a:t>
+            </a:r>
+          </a:p>
+          <a:p>
+            <a:pPr marL="800100" lvl="1" indent="-342900">
+              <a:lnSpc>
+                <a:spcPct val="150000"/>
+              </a:lnSpc>
+              <a:buFont typeface="Wingdings" panose="05000000000000000000" pitchFamily="2" charset="2"/>
+              <a:buChar char="v"/>
+            </a:pPr>
+            <a:r>
+              <a:rPr lang="ko-KR" altLang="en-US" sz="1600" dirty="0">
+                <a:latin typeface="D2Coding" panose="020B0609020101020101" pitchFamily="49" charset="-127"/>
+                <a:ea typeface="D2Coding" panose="020B0609020101020101" pitchFamily="49" charset="-127"/>
+              </a:rPr>
+              <a:t>사용자가 질문을 던지면, 1단계에서 만든 인덱스에서 가장 관련성 높은 데이터 조각을 찾아내어(</a:t>
+            </a:r>
+            <a:r>
+              <a:rPr lang="ko-KR" altLang="en-US" sz="1600" dirty="0" err="1">
+                <a:latin typeface="D2Coding" panose="020B0609020101020101" pitchFamily="49" charset="-127"/>
+                <a:ea typeface="D2Coding" panose="020B0609020101020101" pitchFamily="49" charset="-127"/>
+              </a:rPr>
+              <a:t>Retrieve</a:t>
+            </a:r>
+            <a:r>
+              <a:rPr lang="ko-KR" altLang="en-US" sz="1600" dirty="0">
+                <a:latin typeface="D2Coding" panose="020B0609020101020101" pitchFamily="49" charset="-127"/>
+                <a:ea typeface="D2Coding" panose="020B0609020101020101" pitchFamily="49" charset="-127"/>
+              </a:rPr>
+              <a:t>) </a:t>
+            </a:r>
+            <a:r>
+              <a:rPr lang="ko-KR" altLang="en-US" sz="1600" dirty="0" err="1">
+                <a:latin typeface="D2Coding" panose="020B0609020101020101" pitchFamily="49" charset="-127"/>
+                <a:ea typeface="D2Coding" panose="020B0609020101020101" pitchFamily="49" charset="-127"/>
+              </a:rPr>
+              <a:t>LLM에게</a:t>
+            </a:r>
+            <a:r>
+              <a:rPr lang="ko-KR" altLang="en-US" sz="1600" dirty="0">
+                <a:latin typeface="D2Coding" panose="020B0609020101020101" pitchFamily="49" charset="-127"/>
+                <a:ea typeface="D2Coding" panose="020B0609020101020101" pitchFamily="49" charset="-127"/>
+              </a:rPr>
+              <a:t> 컨텍스트(</a:t>
+            </a:r>
+            <a:r>
+              <a:rPr lang="ko-KR" altLang="en-US" sz="1600" dirty="0" err="1">
+                <a:latin typeface="D2Coding" panose="020B0609020101020101" pitchFamily="49" charset="-127"/>
+                <a:ea typeface="D2Coding" panose="020B0609020101020101" pitchFamily="49" charset="-127"/>
+              </a:rPr>
+              <a:t>Context</a:t>
+            </a:r>
+            <a:r>
+              <a:rPr lang="ko-KR" altLang="en-US" sz="1600" dirty="0">
+                <a:latin typeface="D2Coding" panose="020B0609020101020101" pitchFamily="49" charset="-127"/>
+                <a:ea typeface="D2Coding" panose="020B0609020101020101" pitchFamily="49" charset="-127"/>
+              </a:rPr>
+              <a:t>)로 제공하여 정확한 답변을 생성(</a:t>
+            </a:r>
+            <a:r>
+              <a:rPr lang="ko-KR" altLang="en-US" sz="1600" dirty="0" err="1">
+                <a:latin typeface="D2Coding" panose="020B0609020101020101" pitchFamily="49" charset="-127"/>
+                <a:ea typeface="D2Coding" panose="020B0609020101020101" pitchFamily="49" charset="-127"/>
+              </a:rPr>
+              <a:t>Generate</a:t>
+            </a:r>
+            <a:r>
+              <a:rPr lang="ko-KR" altLang="en-US" sz="1600" dirty="0">
+                <a:latin typeface="D2Coding" panose="020B0609020101020101" pitchFamily="49" charset="-127"/>
+                <a:ea typeface="D2Coding" panose="020B0609020101020101" pitchFamily="49" charset="-127"/>
+              </a:rPr>
+              <a:t>)하게 만드는 과정</a:t>
+            </a:r>
           </a:p>
         </p:txBody>
       </p:sp>
@@ -15344,7 +16045,7 @@
                 <a:ea typeface="D2Coding" panose="020B0609020101020101" pitchFamily="49" charset="-127"/>
                 <a:cs typeface="Segoe UI Light" panose="020B0502040204020203" pitchFamily="34" charset="0"/>
               </a:rPr>
-              <a:t>Basic RAG Pipeline</a:t>
+              <a:t>Basic RAG Pipeline(n8n)</a:t>
             </a:r>
             <a:endParaRPr lang="ko-KR" altLang="en-US" sz="2800" cap="none" dirty="0">
               <a:solidFill>
@@ -15404,36 +16105,6 @@
           </a:p>
         </p:txBody>
       </p:sp>
-      <p:pic>
-        <p:nvPicPr>
-          <p:cNvPr id="7" name="그림 6">
-            <a:extLst>
-              <a:ext uri="{FF2B5EF4-FFF2-40B4-BE49-F238E27FC236}">
-                <a16:creationId xmlns:a16="http://schemas.microsoft.com/office/drawing/2014/main" id="{B2E58D4C-0BCB-5478-FA2D-48173632AD56}"/>
-              </a:ext>
-            </a:extLst>
-          </p:cNvPr>
-          <p:cNvPicPr>
-            <a:picLocks noChangeAspect="1"/>
-          </p:cNvPicPr>
-          <p:nvPr/>
-        </p:nvPicPr>
-        <p:blipFill>
-          <a:blip r:embed="rId2"/>
-          <a:stretch>
-            <a:fillRect/>
-          </a:stretch>
-        </p:blipFill>
-        <p:spPr>
-          <a:xfrm>
-            <a:off x="656731" y="1391684"/>
-            <a:ext cx="10353763" cy="4827139"/>
-          </a:xfrm>
-          <a:prstGeom prst="rect">
-            <a:avLst/>
-          </a:prstGeom>
-        </p:spPr>
-      </p:pic>
       <p:sp>
         <p:nvSpPr>
           <p:cNvPr id="6" name="슬라이드 번호 개체 틀 3">
@@ -15567,6 +16238,348 @@
           </a:p>
         </p:txBody>
       </p:sp>
+      <p:pic>
+        <p:nvPicPr>
+          <p:cNvPr id="5" name="그림 4">
+            <a:extLst>
+              <a:ext uri="{FF2B5EF4-FFF2-40B4-BE49-F238E27FC236}">
+                <a16:creationId xmlns:a16="http://schemas.microsoft.com/office/drawing/2014/main" id="{D3827101-F0C2-25E4-3B0B-CE2FAA2F44EC}"/>
+              </a:ext>
+            </a:extLst>
+          </p:cNvPr>
+          <p:cNvPicPr>
+            <a:picLocks noChangeAspect="1"/>
+          </p:cNvPicPr>
+          <p:nvPr/>
+        </p:nvPicPr>
+        <p:blipFill>
+          <a:blip r:embed="rId2"/>
+          <a:stretch>
+            <a:fillRect/>
+          </a:stretch>
+        </p:blipFill>
+        <p:spPr>
+          <a:xfrm>
+            <a:off x="601538" y="1673180"/>
+            <a:ext cx="5415583" cy="3487851"/>
+          </a:xfrm>
+          <a:prstGeom prst="rect">
+            <a:avLst/>
+          </a:prstGeom>
+          <a:ln>
+            <a:solidFill>
+              <a:schemeClr val="tx1"/>
+            </a:solidFill>
+          </a:ln>
+        </p:spPr>
+      </p:pic>
+      <p:pic>
+        <p:nvPicPr>
+          <p:cNvPr id="9" name="그림 8">
+            <a:extLst>
+              <a:ext uri="{FF2B5EF4-FFF2-40B4-BE49-F238E27FC236}">
+                <a16:creationId xmlns:a16="http://schemas.microsoft.com/office/drawing/2014/main" id="{4CA8CA3F-0BA8-7058-572D-DF72F70FE99B}"/>
+              </a:ext>
+            </a:extLst>
+          </p:cNvPr>
+          <p:cNvPicPr>
+            <a:picLocks noChangeAspect="1"/>
+          </p:cNvPicPr>
+          <p:nvPr/>
+        </p:nvPicPr>
+        <p:blipFill>
+          <a:blip r:embed="rId3"/>
+          <a:stretch>
+            <a:fillRect/>
+          </a:stretch>
+        </p:blipFill>
+        <p:spPr>
+          <a:xfrm>
+            <a:off x="1099943" y="4469448"/>
+            <a:ext cx="2056700" cy="1827471"/>
+          </a:xfrm>
+          <a:prstGeom prst="rect">
+            <a:avLst/>
+          </a:prstGeom>
+          <a:ln>
+            <a:solidFill>
+              <a:schemeClr val="tx1"/>
+            </a:solidFill>
+            <a:prstDash val="dash"/>
+          </a:ln>
+        </p:spPr>
+      </p:pic>
+      <p:pic>
+        <p:nvPicPr>
+          <p:cNvPr id="12" name="그림 11">
+            <a:extLst>
+              <a:ext uri="{FF2B5EF4-FFF2-40B4-BE49-F238E27FC236}">
+                <a16:creationId xmlns:a16="http://schemas.microsoft.com/office/drawing/2014/main" id="{D75E726F-7750-95A9-91C5-11D89363412A}"/>
+              </a:ext>
+            </a:extLst>
+          </p:cNvPr>
+          <p:cNvPicPr>
+            <a:picLocks noChangeAspect="1"/>
+          </p:cNvPicPr>
+          <p:nvPr/>
+        </p:nvPicPr>
+        <p:blipFill>
+          <a:blip r:embed="rId4"/>
+          <a:stretch>
+            <a:fillRect/>
+          </a:stretch>
+        </p:blipFill>
+        <p:spPr>
+          <a:xfrm>
+            <a:off x="6373839" y="1626393"/>
+            <a:ext cx="5445400" cy="3926682"/>
+          </a:xfrm>
+          <a:prstGeom prst="rect">
+            <a:avLst/>
+          </a:prstGeom>
+          <a:ln>
+            <a:solidFill>
+              <a:schemeClr val="tx1"/>
+            </a:solidFill>
+          </a:ln>
+        </p:spPr>
+      </p:pic>
+      <p:pic>
+        <p:nvPicPr>
+          <p:cNvPr id="16" name="그림 15">
+            <a:extLst>
+              <a:ext uri="{FF2B5EF4-FFF2-40B4-BE49-F238E27FC236}">
+                <a16:creationId xmlns:a16="http://schemas.microsoft.com/office/drawing/2014/main" id="{A5F5304C-B287-E814-9659-8227EE0BF02C}"/>
+              </a:ext>
+            </a:extLst>
+          </p:cNvPr>
+          <p:cNvPicPr>
+            <a:picLocks noChangeAspect="1"/>
+          </p:cNvPicPr>
+          <p:nvPr/>
+        </p:nvPicPr>
+        <p:blipFill>
+          <a:blip r:embed="rId5"/>
+          <a:stretch>
+            <a:fillRect/>
+          </a:stretch>
+        </p:blipFill>
+        <p:spPr>
+          <a:xfrm>
+            <a:off x="4882116" y="4469448"/>
+            <a:ext cx="3981575" cy="2184635"/>
+          </a:xfrm>
+          <a:prstGeom prst="rect">
+            <a:avLst/>
+          </a:prstGeom>
+          <a:ln>
+            <a:solidFill>
+              <a:schemeClr val="tx1"/>
+            </a:solidFill>
+            <a:prstDash val="dash"/>
+          </a:ln>
+        </p:spPr>
+      </p:pic>
+      <p:sp>
+        <p:nvSpPr>
+          <p:cNvPr id="18" name="TextBox 17">
+            <a:extLst>
+              <a:ext uri="{FF2B5EF4-FFF2-40B4-BE49-F238E27FC236}">
+                <a16:creationId xmlns:a16="http://schemas.microsoft.com/office/drawing/2014/main" id="{DC7FE9EB-4427-4FA4-602F-DA6D9493F167}"/>
+              </a:ext>
+            </a:extLst>
+          </p:cNvPr>
+          <p:cNvSpPr txBox="1"/>
+          <p:nvPr/>
+        </p:nvSpPr>
+        <p:spPr>
+          <a:xfrm>
+            <a:off x="591714" y="1358310"/>
+            <a:ext cx="5435230" cy="307777"/>
+          </a:xfrm>
+          <a:prstGeom prst="rect">
+            <a:avLst/>
+          </a:prstGeom>
+          <a:solidFill>
+            <a:schemeClr val="tx1"/>
+          </a:solidFill>
+        </p:spPr>
+        <p:txBody>
+          <a:bodyPr wrap="square">
+            <a:spAutoFit/>
+          </a:bodyPr>
+          <a:lstStyle/>
+          <a:p>
+            <a:r>
+              <a:rPr lang="ko-KR" altLang="en-US" sz="1400" b="1" dirty="0" err="1">
+                <a:solidFill>
+                  <a:schemeClr val="bg1"/>
+                </a:solidFill>
+                <a:latin typeface="D2Coding" panose="020B0609020101020101" pitchFamily="49" charset="-127"/>
+                <a:ea typeface="D2Coding" panose="020B0609020101020101" pitchFamily="49" charset="-127"/>
+              </a:rPr>
+              <a:t>Indexing</a:t>
+            </a:r>
+            <a:endParaRPr lang="ko-KR" altLang="en-US" sz="1400" dirty="0">
+              <a:solidFill>
+                <a:schemeClr val="bg1"/>
+              </a:solidFill>
+            </a:endParaRPr>
+          </a:p>
+        </p:txBody>
+      </p:sp>
+      <p:sp>
+        <p:nvSpPr>
+          <p:cNvPr id="20" name="TextBox 19">
+            <a:extLst>
+              <a:ext uri="{FF2B5EF4-FFF2-40B4-BE49-F238E27FC236}">
+                <a16:creationId xmlns:a16="http://schemas.microsoft.com/office/drawing/2014/main" id="{E014E712-A679-3AF7-B73D-B33F39395820}"/>
+              </a:ext>
+            </a:extLst>
+          </p:cNvPr>
+          <p:cNvSpPr txBox="1"/>
+          <p:nvPr/>
+        </p:nvSpPr>
+        <p:spPr>
+          <a:xfrm>
+            <a:off x="6361904" y="1337662"/>
+            <a:ext cx="5468145" cy="307777"/>
+          </a:xfrm>
+          <a:prstGeom prst="rect">
+            <a:avLst/>
+          </a:prstGeom>
+          <a:solidFill>
+            <a:schemeClr val="tx1"/>
+          </a:solidFill>
+        </p:spPr>
+        <p:txBody>
+          <a:bodyPr wrap="square">
+            <a:spAutoFit/>
+          </a:bodyPr>
+          <a:lstStyle/>
+          <a:p>
+            <a:r>
+              <a:rPr lang="ko-KR" altLang="en-US" sz="1400" b="1" dirty="0" err="1">
+                <a:solidFill>
+                  <a:schemeClr val="bg1"/>
+                </a:solidFill>
+                <a:latin typeface="D2Coding" panose="020B0609020101020101" pitchFamily="49" charset="-127"/>
+                <a:ea typeface="D2Coding" panose="020B0609020101020101" pitchFamily="49" charset="-127"/>
+              </a:rPr>
+              <a:t>Retrieving</a:t>
+            </a:r>
+            <a:r>
+              <a:rPr lang="ko-KR" altLang="en-US" sz="1400" b="1" dirty="0">
+                <a:solidFill>
+                  <a:schemeClr val="bg1"/>
+                </a:solidFill>
+                <a:latin typeface="D2Coding" panose="020B0609020101020101" pitchFamily="49" charset="-127"/>
+                <a:ea typeface="D2Coding" panose="020B0609020101020101" pitchFamily="49" charset="-127"/>
+              </a:rPr>
+              <a:t> &amp; </a:t>
+            </a:r>
+            <a:r>
+              <a:rPr lang="ko-KR" altLang="en-US" sz="1400" b="1" dirty="0" err="1">
+                <a:solidFill>
+                  <a:schemeClr val="bg1"/>
+                </a:solidFill>
+                <a:latin typeface="D2Coding" panose="020B0609020101020101" pitchFamily="49" charset="-127"/>
+                <a:ea typeface="D2Coding" panose="020B0609020101020101" pitchFamily="49" charset="-127"/>
+              </a:rPr>
+              <a:t>Generation</a:t>
+            </a:r>
+            <a:endParaRPr lang="ko-KR" altLang="en-US" sz="1400" dirty="0">
+              <a:solidFill>
+                <a:schemeClr val="bg1"/>
+              </a:solidFill>
+            </a:endParaRPr>
+          </a:p>
+        </p:txBody>
+      </p:sp>
+      <p:cxnSp>
+        <p:nvCxnSpPr>
+          <p:cNvPr id="22" name="직선 화살표 연결선 21">
+            <a:extLst>
+              <a:ext uri="{FF2B5EF4-FFF2-40B4-BE49-F238E27FC236}">
+                <a16:creationId xmlns:a16="http://schemas.microsoft.com/office/drawing/2014/main" id="{DD69997C-A46F-DBD9-CB4B-EC0228F8FB64}"/>
+              </a:ext>
+            </a:extLst>
+          </p:cNvPr>
+          <p:cNvCxnSpPr/>
+          <p:nvPr/>
+        </p:nvCxnSpPr>
+        <p:spPr>
+          <a:xfrm>
+            <a:off x="3295650" y="4953000"/>
+            <a:ext cx="0" cy="1295400"/>
+          </a:xfrm>
+          <a:prstGeom prst="straightConnector1">
+            <a:avLst/>
+          </a:prstGeom>
+          <a:ln w="28575">
+            <a:solidFill>
+              <a:schemeClr val="accent5"/>
+            </a:solidFill>
+            <a:tailEnd type="triangle"/>
+          </a:ln>
+        </p:spPr>
+        <p:style>
+          <a:lnRef idx="1">
+            <a:schemeClr val="dk1"/>
+          </a:lnRef>
+          <a:fillRef idx="0">
+            <a:schemeClr val="dk1"/>
+          </a:fillRef>
+          <a:effectRef idx="0">
+            <a:schemeClr val="dk1"/>
+          </a:effectRef>
+          <a:fontRef idx="minor">
+            <a:schemeClr val="tx1"/>
+          </a:fontRef>
+        </p:style>
+      </p:cxnSp>
+      <p:cxnSp>
+        <p:nvCxnSpPr>
+          <p:cNvPr id="23" name="직선 화살표 연결선 22">
+            <a:extLst>
+              <a:ext uri="{FF2B5EF4-FFF2-40B4-BE49-F238E27FC236}">
+                <a16:creationId xmlns:a16="http://schemas.microsoft.com/office/drawing/2014/main" id="{E6A41BB1-ADA6-18C5-86B4-F53017FBB59C}"/>
+              </a:ext>
+            </a:extLst>
+          </p:cNvPr>
+          <p:cNvCxnSpPr/>
+          <p:nvPr/>
+        </p:nvCxnSpPr>
+        <p:spPr>
+          <a:xfrm>
+            <a:off x="8968466" y="5095875"/>
+            <a:ext cx="0" cy="1295400"/>
+          </a:xfrm>
+          <a:prstGeom prst="straightConnector1">
+            <a:avLst/>
+          </a:prstGeom>
+          <a:ln w="28575">
+            <a:solidFill>
+              <a:schemeClr val="accent5"/>
+            </a:solidFill>
+            <a:tailEnd type="triangle"/>
+          </a:ln>
+        </p:spPr>
+        <p:style>
+          <a:lnRef idx="1">
+            <a:schemeClr val="dk1"/>
+          </a:lnRef>
+          <a:fillRef idx="0">
+            <a:schemeClr val="dk1"/>
+          </a:fillRef>
+          <a:effectRef idx="0">
+            <a:schemeClr val="dk1"/>
+          </a:effectRef>
+          <a:fontRef idx="minor">
+            <a:schemeClr val="tx1"/>
+          </a:fontRef>
+        </p:style>
+      </p:cxnSp>
     </p:spTree>
     <p:extLst>
       <p:ext uri="{BB962C8B-B14F-4D97-AF65-F5344CB8AC3E}">
@@ -15581,6 +16594,325 @@
 </file>
 
 <file path=ppt/slides/slide5.xml><?xml version="1.0" encoding="utf-8"?>
+<p:sld xmlns:a="http://schemas.openxmlformats.org/drawingml/2006/main" xmlns:r="http://schemas.openxmlformats.org/officeDocument/2006/relationships" xmlns:p="http://schemas.openxmlformats.org/presentationml/2006/main">
+  <p:cSld>
+    <p:spTree>
+      <p:nvGrpSpPr>
+        <p:cNvPr id="1" name="">
+          <a:extLst>
+            <a:ext uri="{FF2B5EF4-FFF2-40B4-BE49-F238E27FC236}">
+              <a16:creationId xmlns:a16="http://schemas.microsoft.com/office/drawing/2014/main" id="{486E65DD-071B-790C-AE28-462DDB0FDD4C}"/>
+            </a:ext>
+          </a:extLst>
+        </p:cNvPr>
+        <p:cNvGrpSpPr/>
+        <p:nvPr/>
+      </p:nvGrpSpPr>
+      <p:grpSpPr>
+        <a:xfrm>
+          <a:off x="0" y="0"/>
+          <a:ext cx="0" cy="0"/>
+          <a:chOff x="0" y="0"/>
+          <a:chExt cx="0" cy="0"/>
+        </a:xfrm>
+      </p:grpSpPr>
+      <p:sp>
+        <p:nvSpPr>
+          <p:cNvPr id="3" name="제목 1">
+            <a:extLst>
+              <a:ext uri="{FF2B5EF4-FFF2-40B4-BE49-F238E27FC236}">
+                <a16:creationId xmlns:a16="http://schemas.microsoft.com/office/drawing/2014/main" id="{7ECE603A-D598-A6F9-7675-2D3840BBD7AD}"/>
+              </a:ext>
+            </a:extLst>
+          </p:cNvPr>
+          <p:cNvSpPr txBox="1">
+            <a:spLocks/>
+          </p:cNvSpPr>
+          <p:nvPr/>
+        </p:nvSpPr>
+        <p:spPr>
+          <a:xfrm>
+            <a:off x="475645" y="481983"/>
+            <a:ext cx="10353762" cy="766439"/>
+          </a:xfrm>
+          <a:prstGeom prst="rect">
+            <a:avLst/>
+          </a:prstGeom>
+        </p:spPr>
+        <p:txBody>
+          <a:bodyPr vert="horz" lIns="91440" tIns="45720" rIns="91440" bIns="45720" rtlCol="0" anchor="ctr">
+            <a:normAutofit/>
+          </a:bodyPr>
+          <a:lstStyle>
+            <a:lvl1pPr algn="ctr" defTabSz="914400" rtl="0" eaLnBrk="1" latinLnBrk="1" hangingPunct="1">
+              <a:lnSpc>
+                <a:spcPct val="90000"/>
+              </a:lnSpc>
+              <a:spcBef>
+                <a:spcPct val="0"/>
+              </a:spcBef>
+              <a:buNone/>
+              <a:defRPr sz="3200" kern="1200" cap="all" baseline="0">
+                <a:solidFill>
+                  <a:schemeClr val="tx1"/>
+                </a:solidFill>
+                <a:effectLst/>
+                <a:latin typeface="Batang" panose="02030600000101010101" pitchFamily="18" charset="-127"/>
+                <a:ea typeface="Batang" panose="02030600000101010101" pitchFamily="18" charset="-127"/>
+                <a:cs typeface="+mj-cs"/>
+              </a:defRPr>
+            </a:lvl1pPr>
+          </a:lstStyle>
+          <a:p>
+            <a:pPr algn="l"/>
+            <a:r>
+              <a:rPr lang="en-US" altLang="ko-KR" sz="2800" cap="none" dirty="0">
+                <a:solidFill>
+                  <a:schemeClr val="bg2">
+                    <a:lumMod val="25000"/>
+                  </a:schemeClr>
+                </a:solidFill>
+                <a:latin typeface="D2Coding" panose="020B0609020101020101" pitchFamily="49" charset="-127"/>
+                <a:ea typeface="D2Coding" panose="020B0609020101020101" pitchFamily="49" charset="-127"/>
+                <a:cs typeface="Segoe UI Light" panose="020B0502040204020203" pitchFamily="34" charset="0"/>
+              </a:rPr>
+              <a:t>Basic RAG Pipeline</a:t>
+            </a:r>
+            <a:endParaRPr lang="ko-KR" altLang="en-US" sz="2800" cap="none" dirty="0">
+              <a:solidFill>
+                <a:schemeClr val="bg2">
+                  <a:lumMod val="25000"/>
+                </a:schemeClr>
+              </a:solidFill>
+              <a:latin typeface="D2Coding" panose="020B0609020101020101" pitchFamily="49" charset="-127"/>
+              <a:ea typeface="D2Coding" panose="020B0609020101020101" pitchFamily="49" charset="-127"/>
+              <a:cs typeface="Segoe UI Light" panose="020B0502040204020203" pitchFamily="34" charset="0"/>
+            </a:endParaRPr>
+          </a:p>
+        </p:txBody>
+      </p:sp>
+      <p:sp>
+        <p:nvSpPr>
+          <p:cNvPr id="2" name="AutoShape 2">
+            <a:extLst>
+              <a:ext uri="{FF2B5EF4-FFF2-40B4-BE49-F238E27FC236}">
+                <a16:creationId xmlns:a16="http://schemas.microsoft.com/office/drawing/2014/main" id="{C43BEA39-484F-40A5-D0AB-09F82CC158CA}"/>
+              </a:ext>
+            </a:extLst>
+          </p:cNvPr>
+          <p:cNvSpPr>
+            <a:spLocks noChangeAspect="1" noChangeArrowheads="1"/>
+          </p:cNvSpPr>
+          <p:nvPr/>
+        </p:nvSpPr>
+        <p:spPr bwMode="auto">
+          <a:xfrm>
+            <a:off x="5943600" y="3276600"/>
+            <a:ext cx="304800" cy="304800"/>
+          </a:xfrm>
+          <a:prstGeom prst="rect">
+            <a:avLst/>
+          </a:prstGeom>
+          <a:noFill/>
+          <a:extLst>
+            <a:ext uri="{909E8E84-426E-40DD-AFC4-6F175D3DCCD1}">
+              <a14:hiddenFill xmlns:a14="http://schemas.microsoft.com/office/drawing/2010/main">
+                <a:solidFill>
+                  <a:srgbClr val="FFFFFF"/>
+                </a:solidFill>
+              </a14:hiddenFill>
+            </a:ext>
+          </a:extLst>
+        </p:spPr>
+        <p:txBody>
+          <a:bodyPr vert="horz" wrap="square" lIns="91440" tIns="45720" rIns="91440" bIns="45720" numCol="1" anchor="t" anchorCtr="0" compatLnSpc="1">
+            <a:prstTxWarp prst="textNoShape">
+              <a:avLst/>
+            </a:prstTxWarp>
+          </a:bodyPr>
+          <a:lstStyle/>
+          <a:p>
+            <a:endParaRPr lang="ko-KR" altLang="en-US"/>
+          </a:p>
+        </p:txBody>
+      </p:sp>
+      <p:pic>
+        <p:nvPicPr>
+          <p:cNvPr id="7" name="그림 6">
+            <a:extLst>
+              <a:ext uri="{FF2B5EF4-FFF2-40B4-BE49-F238E27FC236}">
+                <a16:creationId xmlns:a16="http://schemas.microsoft.com/office/drawing/2014/main" id="{D760482D-DFF4-0422-618A-C023A3D8AA9F}"/>
+              </a:ext>
+            </a:extLst>
+          </p:cNvPr>
+          <p:cNvPicPr>
+            <a:picLocks noChangeAspect="1"/>
+          </p:cNvPicPr>
+          <p:nvPr/>
+        </p:nvPicPr>
+        <p:blipFill>
+          <a:blip r:embed="rId2"/>
+          <a:stretch>
+            <a:fillRect/>
+          </a:stretch>
+        </p:blipFill>
+        <p:spPr>
+          <a:xfrm>
+            <a:off x="656731" y="1391684"/>
+            <a:ext cx="10353763" cy="4827139"/>
+          </a:xfrm>
+          <a:prstGeom prst="rect">
+            <a:avLst/>
+          </a:prstGeom>
+        </p:spPr>
+      </p:pic>
+      <p:sp>
+        <p:nvSpPr>
+          <p:cNvPr id="6" name="슬라이드 번호 개체 틀 3">
+            <a:extLst>
+              <a:ext uri="{FF2B5EF4-FFF2-40B4-BE49-F238E27FC236}">
+                <a16:creationId xmlns:a16="http://schemas.microsoft.com/office/drawing/2014/main" id="{B9CFCECD-BA53-9882-BF47-5B74A7BED6EC}"/>
+              </a:ext>
+            </a:extLst>
+          </p:cNvPr>
+          <p:cNvSpPr txBox="1">
+            <a:spLocks/>
+          </p:cNvSpPr>
+          <p:nvPr/>
+        </p:nvSpPr>
+        <p:spPr>
+          <a:xfrm>
+            <a:off x="11180761" y="299420"/>
+            <a:ext cx="753545" cy="365125"/>
+          </a:xfrm>
+          <a:prstGeom prst="rect">
+            <a:avLst/>
+          </a:prstGeom>
+        </p:spPr>
+        <p:txBody>
+          <a:bodyPr vert="horz" lIns="91440" tIns="45720" rIns="91440" bIns="45720" rtlCol="0" anchor="ctr"/>
+          <a:lstStyle>
+            <a:defPPr rtl="0">
+              <a:defRPr lang="ko-KR"/>
+            </a:defPPr>
+            <a:lvl1pPr marL="0" algn="r" defTabSz="914400" rtl="0" eaLnBrk="1" latinLnBrk="0" hangingPunct="1">
+              <a:defRPr sz="1200" kern="1200" baseline="0">
+                <a:solidFill>
+                  <a:schemeClr val="tx1">
+                    <a:lumMod val="65000"/>
+                    <a:lumOff val="35000"/>
+                  </a:schemeClr>
+                </a:solidFill>
+                <a:latin typeface="맑은 고딕" panose="020B0503020000020004" pitchFamily="50" charset="-127"/>
+                <a:ea typeface="맑은 고딕" panose="020B0503020000020004" pitchFamily="50" charset="-127"/>
+                <a:cs typeface="+mn-cs"/>
+              </a:defRPr>
+            </a:lvl1pPr>
+            <a:lvl2pPr marL="457200" algn="l" defTabSz="914400" rtl="0" eaLnBrk="1" latinLnBrk="0" hangingPunct="1">
+              <a:defRPr sz="1800" kern="1200">
+                <a:solidFill>
+                  <a:schemeClr val="tx1"/>
+                </a:solidFill>
+                <a:latin typeface="+mn-lt"/>
+                <a:ea typeface="+mn-ea"/>
+                <a:cs typeface="+mn-cs"/>
+              </a:defRPr>
+            </a:lvl2pPr>
+            <a:lvl3pPr marL="914400" algn="l" defTabSz="914400" rtl="0" eaLnBrk="1" latinLnBrk="0" hangingPunct="1">
+              <a:defRPr sz="1800" kern="1200">
+                <a:solidFill>
+                  <a:schemeClr val="tx1"/>
+                </a:solidFill>
+                <a:latin typeface="+mn-lt"/>
+                <a:ea typeface="+mn-ea"/>
+                <a:cs typeface="+mn-cs"/>
+              </a:defRPr>
+            </a:lvl3pPr>
+            <a:lvl4pPr marL="1371600" algn="l" defTabSz="914400" rtl="0" eaLnBrk="1" latinLnBrk="0" hangingPunct="1">
+              <a:defRPr sz="1800" kern="1200">
+                <a:solidFill>
+                  <a:schemeClr val="tx1"/>
+                </a:solidFill>
+                <a:latin typeface="+mn-lt"/>
+                <a:ea typeface="+mn-ea"/>
+                <a:cs typeface="+mn-cs"/>
+              </a:defRPr>
+            </a:lvl4pPr>
+            <a:lvl5pPr marL="1828800" algn="l" defTabSz="914400" rtl="0" eaLnBrk="1" latinLnBrk="0" hangingPunct="1">
+              <a:defRPr sz="1800" kern="1200">
+                <a:solidFill>
+                  <a:schemeClr val="tx1"/>
+                </a:solidFill>
+                <a:latin typeface="+mn-lt"/>
+                <a:ea typeface="+mn-ea"/>
+                <a:cs typeface="+mn-cs"/>
+              </a:defRPr>
+            </a:lvl5pPr>
+            <a:lvl6pPr marL="2286000" algn="l" defTabSz="914400" rtl="0" eaLnBrk="1" latinLnBrk="0" hangingPunct="1">
+              <a:defRPr sz="1800" kern="1200">
+                <a:solidFill>
+                  <a:schemeClr val="tx1"/>
+                </a:solidFill>
+                <a:latin typeface="+mn-lt"/>
+                <a:ea typeface="+mn-ea"/>
+                <a:cs typeface="+mn-cs"/>
+              </a:defRPr>
+            </a:lvl6pPr>
+            <a:lvl7pPr marL="2743200" algn="l" defTabSz="914400" rtl="0" eaLnBrk="1" latinLnBrk="0" hangingPunct="1">
+              <a:defRPr sz="1800" kern="1200">
+                <a:solidFill>
+                  <a:schemeClr val="tx1"/>
+                </a:solidFill>
+                <a:latin typeface="+mn-lt"/>
+                <a:ea typeface="+mn-ea"/>
+                <a:cs typeface="+mn-cs"/>
+              </a:defRPr>
+            </a:lvl7pPr>
+            <a:lvl8pPr marL="3200400" algn="l" defTabSz="914400" rtl="0" eaLnBrk="1" latinLnBrk="0" hangingPunct="1">
+              <a:defRPr sz="1800" kern="1200">
+                <a:solidFill>
+                  <a:schemeClr val="tx1"/>
+                </a:solidFill>
+                <a:latin typeface="+mn-lt"/>
+                <a:ea typeface="+mn-ea"/>
+                <a:cs typeface="+mn-cs"/>
+              </a:defRPr>
+            </a:lvl8pPr>
+            <a:lvl9pPr marL="3657600" algn="l" defTabSz="914400" rtl="0" eaLnBrk="1" latinLnBrk="0" hangingPunct="1">
+              <a:defRPr sz="1800" kern="1200">
+                <a:solidFill>
+                  <a:schemeClr val="tx1"/>
+                </a:solidFill>
+                <a:latin typeface="+mn-lt"/>
+                <a:ea typeface="+mn-ea"/>
+                <a:cs typeface="+mn-cs"/>
+              </a:defRPr>
+            </a:lvl9pPr>
+          </a:lstStyle>
+          <a:p>
+            <a:fld id="{D57F1E4F-1CFF-5643-939E-217C01CDF565}" type="slidenum">
+              <a:rPr lang="en-US" sz="1400" b="1" smtClean="0"/>
+              <a:pPr/>
+              <a:t>5</a:t>
+            </a:fld>
+            <a:endParaRPr lang="en-US" sz="1400" b="1" dirty="0"/>
+          </a:p>
+        </p:txBody>
+      </p:sp>
+    </p:spTree>
+    <p:extLst>
+      <p:ext uri="{BB962C8B-B14F-4D97-AF65-F5344CB8AC3E}">
+        <p14:creationId xmlns:p14="http://schemas.microsoft.com/office/powerpoint/2010/main" val="1040038635"/>
+      </p:ext>
+    </p:extLst>
+  </p:cSld>
+  <p:clrMapOvr>
+    <a:masterClrMapping/>
+  </p:clrMapOvr>
+</p:sld>
+</file>
+
+<file path=ppt/slides/slide6.xml><?xml version="1.0" encoding="utf-8"?>
 <p:sld xmlns:a="http://schemas.openxmlformats.org/drawingml/2006/main" xmlns:r="http://schemas.openxmlformats.org/officeDocument/2006/relationships" xmlns:p="http://schemas.openxmlformats.org/presentationml/2006/main">
   <p:cSld>
     <p:spTree>
@@ -15937,7 +17269,7 @@
             <a:fld id="{D57F1E4F-1CFF-5643-939E-217C01CDF565}" type="slidenum">
               <a:rPr lang="en-US" sz="1400" b="1" smtClean="0"/>
               <a:pPr/>
-              <a:t>5</a:t>
+              <a:t>6</a:t>
             </a:fld>
             <a:endParaRPr lang="en-US" sz="1400" b="1" dirty="0"/>
           </a:p>
@@ -15956,7 +17288,7 @@
 </p:sld>
 </file>
 
-<file path=ppt/slides/slide6.xml><?xml version="1.0" encoding="utf-8"?>
+<file path=ppt/slides/slide7.xml><?xml version="1.0" encoding="utf-8"?>
 <p:sld xmlns:a="http://schemas.openxmlformats.org/drawingml/2006/main" xmlns:r="http://schemas.openxmlformats.org/officeDocument/2006/relationships" xmlns:p="http://schemas.openxmlformats.org/presentationml/2006/main">
   <p:cSld>
     <p:spTree>
@@ -16283,7 +17615,7 @@
             <a:fld id="{D57F1E4F-1CFF-5643-939E-217C01CDF565}" type="slidenum">
               <a:rPr lang="en-US" sz="1400" b="1" smtClean="0"/>
               <a:pPr/>
-              <a:t>6</a:t>
+              <a:t>7</a:t>
             </a:fld>
             <a:endParaRPr lang="en-US" sz="1400" b="1" dirty="0"/>
           </a:p>
@@ -17615,7 +18947,7 @@
 </p:sld>
 </file>
 
-<file path=ppt/slides/slide7.xml><?xml version="1.0" encoding="utf-8"?>
+<file path=ppt/slides/slide8.xml><?xml version="1.0" encoding="utf-8"?>
 <p:sld xmlns:a="http://schemas.openxmlformats.org/drawingml/2006/main" xmlns:r="http://schemas.openxmlformats.org/officeDocument/2006/relationships" xmlns:p="http://schemas.openxmlformats.org/presentationml/2006/main">
   <p:cSld>
     <p:spTree>
@@ -17958,7 +19290,7 @@
             <a:fld id="{D57F1E4F-1CFF-5643-939E-217C01CDF565}" type="slidenum">
               <a:rPr lang="en-US" sz="1400" b="1" smtClean="0"/>
               <a:pPr/>
-              <a:t>7</a:t>
+              <a:t>8</a:t>
             </a:fld>
             <a:endParaRPr lang="en-US" sz="1400" b="1" dirty="0"/>
           </a:p>
@@ -17977,7 +19309,7 @@
 </p:sld>
 </file>
 
-<file path=ppt/slides/slide8.xml><?xml version="1.0" encoding="utf-8"?>
+<file path=ppt/slides/slide9.xml><?xml version="1.0" encoding="utf-8"?>
 <p:sld xmlns:a="http://schemas.openxmlformats.org/drawingml/2006/main" xmlns:r="http://schemas.openxmlformats.org/officeDocument/2006/relationships" xmlns:p="http://schemas.openxmlformats.org/presentationml/2006/main">
   <p:cSld>
     <p:spTree>
@@ -18290,7 +19622,7 @@
             <a:fld id="{D57F1E4F-1CFF-5643-939E-217C01CDF565}" type="slidenum">
               <a:rPr lang="en-US" sz="1400" b="1" smtClean="0"/>
               <a:pPr/>
-              <a:t>8</a:t>
+              <a:t>9</a:t>
             </a:fld>
             <a:endParaRPr lang="en-US" sz="1400" b="1" dirty="0"/>
           </a:p>
@@ -19590,580 +20922,6 @@
     <p:extLst>
       <p:ext uri="{BB962C8B-B14F-4D97-AF65-F5344CB8AC3E}">
         <p14:creationId xmlns:p14="http://schemas.microsoft.com/office/powerpoint/2010/main" val="1543604122"/>
-      </p:ext>
-    </p:extLst>
-  </p:cSld>
-  <p:clrMapOvr>
-    <a:masterClrMapping/>
-  </p:clrMapOvr>
-</p:sld>
-</file>
-
-<file path=ppt/slides/slide9.xml><?xml version="1.0" encoding="utf-8"?>
-<p:sld xmlns:a="http://schemas.openxmlformats.org/drawingml/2006/main" xmlns:r="http://schemas.openxmlformats.org/officeDocument/2006/relationships" xmlns:p="http://schemas.openxmlformats.org/presentationml/2006/main">
-  <p:cSld>
-    <p:spTree>
-      <p:nvGrpSpPr>
-        <p:cNvPr id="1" name="">
-          <a:extLst>
-            <a:ext uri="{FF2B5EF4-FFF2-40B4-BE49-F238E27FC236}">
-              <a16:creationId xmlns:a16="http://schemas.microsoft.com/office/drawing/2014/main" id="{AE06AADB-16FD-D031-093A-078B9B45A5A7}"/>
-            </a:ext>
-          </a:extLst>
-        </p:cNvPr>
-        <p:cNvGrpSpPr/>
-        <p:nvPr/>
-      </p:nvGrpSpPr>
-      <p:grpSpPr>
-        <a:xfrm>
-          <a:off x="0" y="0"/>
-          <a:ext cx="0" cy="0"/>
-          <a:chOff x="0" y="0"/>
-          <a:chExt cx="0" cy="0"/>
-        </a:xfrm>
-      </p:grpSpPr>
-      <p:sp>
-        <p:nvSpPr>
-          <p:cNvPr id="3" name="제목 1">
-            <a:extLst>
-              <a:ext uri="{FF2B5EF4-FFF2-40B4-BE49-F238E27FC236}">
-                <a16:creationId xmlns:a16="http://schemas.microsoft.com/office/drawing/2014/main" id="{9FF27C86-F5A7-56AC-6B7D-6AB573A8361D}"/>
-              </a:ext>
-            </a:extLst>
-          </p:cNvPr>
-          <p:cNvSpPr txBox="1">
-            <a:spLocks/>
-          </p:cNvSpPr>
-          <p:nvPr/>
-        </p:nvSpPr>
-        <p:spPr>
-          <a:xfrm>
-            <a:off x="475645" y="481983"/>
-            <a:ext cx="10353762" cy="766439"/>
-          </a:xfrm>
-          <a:prstGeom prst="rect">
-            <a:avLst/>
-          </a:prstGeom>
-        </p:spPr>
-        <p:txBody>
-          <a:bodyPr vert="horz" lIns="91440" tIns="45720" rIns="91440" bIns="45720" rtlCol="0" anchor="ctr">
-            <a:normAutofit/>
-          </a:bodyPr>
-          <a:lstStyle>
-            <a:lvl1pPr algn="ctr" defTabSz="914400" rtl="0" eaLnBrk="1" latinLnBrk="1" hangingPunct="1">
-              <a:lnSpc>
-                <a:spcPct val="90000"/>
-              </a:lnSpc>
-              <a:spcBef>
-                <a:spcPct val="0"/>
-              </a:spcBef>
-              <a:buNone/>
-              <a:defRPr sz="3200" kern="1200" cap="all" baseline="0">
-                <a:solidFill>
-                  <a:schemeClr val="tx1"/>
-                </a:solidFill>
-                <a:effectLst/>
-                <a:latin typeface="Batang" panose="02030600000101010101" pitchFamily="18" charset="-127"/>
-                <a:ea typeface="Batang" panose="02030600000101010101" pitchFamily="18" charset="-127"/>
-                <a:cs typeface="+mj-cs"/>
-              </a:defRPr>
-            </a:lvl1pPr>
-          </a:lstStyle>
-          <a:p>
-            <a:pPr algn="l"/>
-            <a:r>
-              <a:rPr lang="en-US" altLang="ko-KR" sz="2800" cap="none" dirty="0">
-                <a:solidFill>
-                  <a:schemeClr val="bg2">
-                    <a:lumMod val="25000"/>
-                  </a:schemeClr>
-                </a:solidFill>
-                <a:latin typeface="D2Coding" panose="020B0609020101020101" pitchFamily="49" charset="-127"/>
-                <a:ea typeface="D2Coding" panose="020B0609020101020101" pitchFamily="49" charset="-127"/>
-                <a:cs typeface="Segoe UI Light" panose="020B0502040204020203" pitchFamily="34" charset="0"/>
-              </a:rPr>
-              <a:t>The Goal: Picking Relevant Context for LLMs</a:t>
-            </a:r>
-            <a:endParaRPr lang="ko-KR" altLang="en-US" sz="2800" cap="none" dirty="0">
-              <a:solidFill>
-                <a:schemeClr val="bg2">
-                  <a:lumMod val="25000"/>
-                </a:schemeClr>
-              </a:solidFill>
-              <a:latin typeface="D2Coding" panose="020B0609020101020101" pitchFamily="49" charset="-127"/>
-              <a:ea typeface="D2Coding" panose="020B0609020101020101" pitchFamily="49" charset="-127"/>
-              <a:cs typeface="Segoe UI Light" panose="020B0502040204020203" pitchFamily="34" charset="0"/>
-            </a:endParaRPr>
-          </a:p>
-        </p:txBody>
-      </p:sp>
-      <p:sp>
-        <p:nvSpPr>
-          <p:cNvPr id="6" name="TextBox 5">
-            <a:extLst>
-              <a:ext uri="{FF2B5EF4-FFF2-40B4-BE49-F238E27FC236}">
-                <a16:creationId xmlns:a16="http://schemas.microsoft.com/office/drawing/2014/main" id="{ADDE27A3-7BCD-B963-0B8B-1E167166F732}"/>
-              </a:ext>
-            </a:extLst>
-          </p:cNvPr>
-          <p:cNvSpPr txBox="1"/>
-          <p:nvPr/>
-        </p:nvSpPr>
-        <p:spPr>
-          <a:xfrm>
-            <a:off x="609600" y="1248422"/>
-            <a:ext cx="10972800" cy="793166"/>
-          </a:xfrm>
-          <a:prstGeom prst="rect">
-            <a:avLst/>
-          </a:prstGeom>
-          <a:noFill/>
-        </p:spPr>
-        <p:txBody>
-          <a:bodyPr wrap="square">
-            <a:spAutoFit/>
-          </a:bodyPr>
-          <a:lstStyle/>
-          <a:p>
-            <a:pPr marL="285750" indent="-285750">
-              <a:lnSpc>
-                <a:spcPct val="150000"/>
-              </a:lnSpc>
-              <a:buFont typeface="Wingdings" panose="05000000000000000000" pitchFamily="2" charset="2"/>
-              <a:buChar char="v"/>
-            </a:pPr>
-            <a:r>
-              <a:rPr lang="en-US" altLang="ko-KR" sz="1600" b="1" dirty="0">
-                <a:latin typeface="D2Coding" panose="020B0609020101020101" pitchFamily="49" charset="-127"/>
-                <a:ea typeface="D2Coding" panose="020B0609020101020101" pitchFamily="49" charset="-127"/>
-              </a:rPr>
-              <a:t>Ingestion</a:t>
-            </a:r>
-            <a:r>
-              <a:rPr lang="en-US" altLang="ko-KR" sz="1600" dirty="0">
-                <a:latin typeface="D2Coding" panose="020B0609020101020101" pitchFamily="49" charset="-127"/>
-                <a:ea typeface="D2Coding" panose="020B0609020101020101" pitchFamily="49" charset="-127"/>
-              </a:rPr>
-              <a:t> is simply the process of converting your documents into numbers that computers can understand and analyze, and storing them in a special type of database for efficient retrieval. </a:t>
-            </a:r>
-            <a:endParaRPr lang="ko-KR" altLang="en-US" sz="1600" b="1" dirty="0">
-              <a:latin typeface="D2Coding" panose="020B0609020101020101" pitchFamily="49" charset="-127"/>
-              <a:ea typeface="D2Coding" panose="020B0609020101020101" pitchFamily="49" charset="-127"/>
-            </a:endParaRPr>
-          </a:p>
-        </p:txBody>
-      </p:sp>
-      <p:pic>
-        <p:nvPicPr>
-          <p:cNvPr id="5" name="그림 4">
-            <a:extLst>
-              <a:ext uri="{FF2B5EF4-FFF2-40B4-BE49-F238E27FC236}">
-                <a16:creationId xmlns:a16="http://schemas.microsoft.com/office/drawing/2014/main" id="{F642E58B-10CC-8E33-F868-76BDE8BDD9F4}"/>
-              </a:ext>
-            </a:extLst>
-          </p:cNvPr>
-          <p:cNvPicPr>
-            <a:picLocks noChangeAspect="1"/>
-          </p:cNvPicPr>
-          <p:nvPr/>
-        </p:nvPicPr>
-        <p:blipFill>
-          <a:blip r:embed="rId2"/>
-          <a:stretch>
-            <a:fillRect/>
-          </a:stretch>
-        </p:blipFill>
-        <p:spPr>
-          <a:xfrm>
-            <a:off x="686318" y="2714624"/>
-            <a:ext cx="7639100" cy="2676525"/>
-          </a:xfrm>
-          <a:prstGeom prst="rect">
-            <a:avLst/>
-          </a:prstGeom>
-          <a:ln>
-            <a:solidFill>
-              <a:schemeClr val="tx1"/>
-            </a:solidFill>
-          </a:ln>
-        </p:spPr>
-      </p:pic>
-      <p:sp>
-        <p:nvSpPr>
-          <p:cNvPr id="8" name="TextBox 7">
-            <a:extLst>
-              <a:ext uri="{FF2B5EF4-FFF2-40B4-BE49-F238E27FC236}">
-                <a16:creationId xmlns:a16="http://schemas.microsoft.com/office/drawing/2014/main" id="{7C4036C3-6CE1-9412-61CB-8AA26EABCFD4}"/>
-              </a:ext>
-            </a:extLst>
-          </p:cNvPr>
-          <p:cNvSpPr txBox="1"/>
-          <p:nvPr/>
-        </p:nvSpPr>
-        <p:spPr>
-          <a:xfrm>
-            <a:off x="8458199" y="2714625"/>
-            <a:ext cx="3324225" cy="2833981"/>
-          </a:xfrm>
-          <a:prstGeom prst="rect">
-            <a:avLst/>
-          </a:prstGeom>
-          <a:noFill/>
-          <a:ln>
-            <a:solidFill>
-              <a:schemeClr val="tx1"/>
-            </a:solidFill>
-          </a:ln>
-        </p:spPr>
-        <p:txBody>
-          <a:bodyPr wrap="square">
-            <a:spAutoFit/>
-          </a:bodyPr>
-          <a:lstStyle/>
-          <a:p>
-            <a:pPr marL="342900" indent="-342900">
-              <a:lnSpc>
-                <a:spcPct val="150000"/>
-              </a:lnSpc>
-              <a:buAutoNum type="arabicPeriod"/>
-            </a:pPr>
-            <a:r>
-              <a:rPr lang="en-US" altLang="ko-KR" sz="1200" dirty="0">
-                <a:latin typeface="D2Coding" panose="020B0609020101020101" pitchFamily="49" charset="-127"/>
-                <a:ea typeface="D2Coding" panose="020B0609020101020101" pitchFamily="49" charset="-127"/>
-              </a:rPr>
-              <a:t>Extract the text from the document. </a:t>
-            </a:r>
-          </a:p>
-          <a:p>
-            <a:pPr marL="342900" indent="-342900">
-              <a:lnSpc>
-                <a:spcPct val="150000"/>
-              </a:lnSpc>
-              <a:buAutoNum type="arabicPeriod"/>
-            </a:pPr>
-            <a:r>
-              <a:rPr lang="en-US" altLang="ko-KR" sz="1200" dirty="0">
-                <a:latin typeface="D2Coding" panose="020B0609020101020101" pitchFamily="49" charset="-127"/>
-                <a:ea typeface="D2Coding" panose="020B0609020101020101" pitchFamily="49" charset="-127"/>
-              </a:rPr>
-              <a:t>Split the text into manageable chunks. </a:t>
-            </a:r>
-          </a:p>
-          <a:p>
-            <a:pPr marL="342900" indent="-342900">
-              <a:lnSpc>
-                <a:spcPct val="150000"/>
-              </a:lnSpc>
-              <a:buAutoNum type="arabicPeriod"/>
-            </a:pPr>
-            <a:r>
-              <a:rPr lang="en-US" altLang="ko-KR" sz="1200" dirty="0">
-                <a:latin typeface="D2Coding" panose="020B0609020101020101" pitchFamily="49" charset="-127"/>
-                <a:ea typeface="D2Coding" panose="020B0609020101020101" pitchFamily="49" charset="-127"/>
-              </a:rPr>
-              <a:t>Convert the text into numbers that computers can understand. </a:t>
-            </a:r>
-          </a:p>
-          <a:p>
-            <a:pPr marL="342900" indent="-342900">
-              <a:lnSpc>
-                <a:spcPct val="150000"/>
-              </a:lnSpc>
-              <a:buAutoNum type="arabicPeriod"/>
-            </a:pPr>
-            <a:r>
-              <a:rPr lang="en-US" altLang="ko-KR" sz="1200" dirty="0">
-                <a:latin typeface="D2Coding" panose="020B0609020101020101" pitchFamily="49" charset="-127"/>
-                <a:ea typeface="D2Coding" panose="020B0609020101020101" pitchFamily="49" charset="-127"/>
-              </a:rPr>
-              <a:t>Store these number representations of your text somewhere that makes it easy and fast to retrieve the relevant sections of your document to answer a given question.</a:t>
-            </a:r>
-            <a:endParaRPr lang="ko-KR" altLang="en-US" sz="1200" dirty="0">
-              <a:latin typeface="D2Coding" panose="020B0609020101020101" pitchFamily="49" charset="-127"/>
-              <a:ea typeface="D2Coding" panose="020B0609020101020101" pitchFamily="49" charset="-127"/>
-            </a:endParaRPr>
-          </a:p>
-        </p:txBody>
-      </p:sp>
-      <p:sp>
-        <p:nvSpPr>
-          <p:cNvPr id="9" name="TextBox 8">
-            <a:extLst>
-              <a:ext uri="{FF2B5EF4-FFF2-40B4-BE49-F238E27FC236}">
-                <a16:creationId xmlns:a16="http://schemas.microsoft.com/office/drawing/2014/main" id="{270870DB-7FC7-C2F1-AC9D-0DCF09FD92E6}"/>
-              </a:ext>
-            </a:extLst>
-          </p:cNvPr>
-          <p:cNvSpPr txBox="1"/>
-          <p:nvPr/>
-        </p:nvSpPr>
-        <p:spPr>
-          <a:xfrm>
-            <a:off x="885826" y="2905780"/>
-            <a:ext cx="1428749" cy="523220"/>
-          </a:xfrm>
-          <a:prstGeom prst="rect">
-            <a:avLst/>
-          </a:prstGeom>
-          <a:noFill/>
-        </p:spPr>
-        <p:txBody>
-          <a:bodyPr wrap="square" rtlCol="0">
-            <a:spAutoFit/>
-          </a:bodyPr>
-          <a:lstStyle/>
-          <a:p>
-            <a:r>
-              <a:rPr lang="en-US" altLang="ko-KR" sz="1400" dirty="0">
-                <a:solidFill>
-                  <a:srgbClr val="00B0F0"/>
-                </a:solidFill>
-                <a:latin typeface="D2Coding" panose="020B0609020101020101" pitchFamily="49" charset="-127"/>
-                <a:ea typeface="D2Coding" panose="020B0609020101020101" pitchFamily="49" charset="-127"/>
-                <a:hlinkClick r:id="rId3">
-                  <a:extLst>
-                    <a:ext uri="{A12FA001-AC4F-418D-AE19-62706E023703}">
-                      <ahyp:hlinkClr xmlns:ahyp="http://schemas.microsoft.com/office/drawing/2018/hyperlinkcolor" val="tx"/>
-                    </a:ext>
-                  </a:extLst>
-                </a:hlinkClick>
-              </a:rPr>
-              <a:t>Tesla’s 2022 annual report</a:t>
-            </a:r>
-            <a:endParaRPr lang="ko-KR" altLang="en-US" sz="1400" dirty="0">
-              <a:solidFill>
-                <a:srgbClr val="00B0F0"/>
-              </a:solidFill>
-              <a:latin typeface="D2Coding" panose="020B0609020101020101" pitchFamily="49" charset="-127"/>
-              <a:ea typeface="D2Coding" panose="020B0609020101020101" pitchFamily="49" charset="-127"/>
-            </a:endParaRPr>
-          </a:p>
-        </p:txBody>
-      </p:sp>
-      <p:sp>
-        <p:nvSpPr>
-          <p:cNvPr id="12" name="TextBox 11">
-            <a:extLst>
-              <a:ext uri="{FF2B5EF4-FFF2-40B4-BE49-F238E27FC236}">
-                <a16:creationId xmlns:a16="http://schemas.microsoft.com/office/drawing/2014/main" id="{A17C5159-309F-23EC-ADB3-6FAB4DCD08BE}"/>
-              </a:ext>
-            </a:extLst>
-          </p:cNvPr>
-          <p:cNvSpPr txBox="1"/>
-          <p:nvPr/>
-        </p:nvSpPr>
-        <p:spPr>
-          <a:xfrm>
-            <a:off x="1112771" y="5788190"/>
-            <a:ext cx="4295775" cy="338554"/>
-          </a:xfrm>
-          <a:prstGeom prst="rect">
-            <a:avLst/>
-          </a:prstGeom>
-          <a:solidFill>
-            <a:schemeClr val="tx1"/>
-          </a:solidFill>
-        </p:spPr>
-        <p:txBody>
-          <a:bodyPr wrap="square">
-            <a:spAutoFit/>
-          </a:bodyPr>
-          <a:lstStyle/>
-          <a:p>
-            <a:r>
-              <a:rPr lang="en-US" altLang="ko-KR" sz="1600" dirty="0">
-                <a:solidFill>
-                  <a:schemeClr val="bg1"/>
-                </a:solidFill>
-                <a:latin typeface="D2Coding" panose="020B0609020101020101" pitchFamily="49" charset="-127"/>
-                <a:ea typeface="D2Coding" panose="020B0609020101020101" pitchFamily="49" charset="-127"/>
-              </a:rPr>
-              <a:t>“What key risks did Tesla face in 2022?”</a:t>
-            </a:r>
-            <a:endParaRPr lang="ko-KR" altLang="en-US" sz="1600" dirty="0">
-              <a:solidFill>
-                <a:schemeClr val="bg1"/>
-              </a:solidFill>
-              <a:latin typeface="D2Coding" panose="020B0609020101020101" pitchFamily="49" charset="-127"/>
-              <a:ea typeface="D2Coding" panose="020B0609020101020101" pitchFamily="49" charset="-127"/>
-            </a:endParaRPr>
-          </a:p>
-        </p:txBody>
-      </p:sp>
-      <p:pic>
-        <p:nvPicPr>
-          <p:cNvPr id="14" name="그래픽 13" descr="웹 디자인">
-            <a:extLst>
-              <a:ext uri="{FF2B5EF4-FFF2-40B4-BE49-F238E27FC236}">
-                <a16:creationId xmlns:a16="http://schemas.microsoft.com/office/drawing/2014/main" id="{2390334E-00AF-997C-7435-855CCD58A09D}"/>
-              </a:ext>
-            </a:extLst>
-          </p:cNvPr>
-          <p:cNvPicPr>
-            <a:picLocks noChangeAspect="1"/>
-          </p:cNvPicPr>
-          <p:nvPr/>
-        </p:nvPicPr>
-        <p:blipFill>
-          <a:blip r:embed="rId4">
-            <a:extLst>
-              <a:ext uri="{96DAC541-7B7A-43D3-8B79-37D633B846F1}">
-                <asvg:svgBlip xmlns:asvg="http://schemas.microsoft.com/office/drawing/2016/SVG/main" r:embed="rId5"/>
-              </a:ext>
-            </a:extLst>
-          </a:blip>
-          <a:stretch>
-            <a:fillRect/>
-          </a:stretch>
-        </p:blipFill>
-        <p:spPr>
-          <a:xfrm>
-            <a:off x="569184" y="5686662"/>
-            <a:ext cx="543335" cy="543335"/>
-          </a:xfrm>
-          <a:prstGeom prst="rect">
-            <a:avLst/>
-          </a:prstGeom>
-        </p:spPr>
-      </p:pic>
-      <p:sp>
-        <p:nvSpPr>
-          <p:cNvPr id="2" name="슬라이드 번호 개체 틀 3">
-            <a:extLst>
-              <a:ext uri="{FF2B5EF4-FFF2-40B4-BE49-F238E27FC236}">
-                <a16:creationId xmlns:a16="http://schemas.microsoft.com/office/drawing/2014/main" id="{0164DB67-877E-2766-2071-AB2439A1502F}"/>
-              </a:ext>
-            </a:extLst>
-          </p:cNvPr>
-          <p:cNvSpPr txBox="1">
-            <a:spLocks/>
-          </p:cNvSpPr>
-          <p:nvPr/>
-        </p:nvSpPr>
-        <p:spPr>
-          <a:xfrm>
-            <a:off x="11180761" y="299420"/>
-            <a:ext cx="753545" cy="365125"/>
-          </a:xfrm>
-          <a:prstGeom prst="rect">
-            <a:avLst/>
-          </a:prstGeom>
-        </p:spPr>
-        <p:txBody>
-          <a:bodyPr vert="horz" lIns="91440" tIns="45720" rIns="91440" bIns="45720" rtlCol="0" anchor="ctr"/>
-          <a:lstStyle>
-            <a:defPPr rtl="0">
-              <a:defRPr lang="ko-KR"/>
-            </a:defPPr>
-            <a:lvl1pPr marL="0" algn="r" defTabSz="914400" rtl="0" eaLnBrk="1" latinLnBrk="0" hangingPunct="1">
-              <a:defRPr sz="1200" kern="1200" baseline="0">
-                <a:solidFill>
-                  <a:schemeClr val="tx1">
-                    <a:lumMod val="65000"/>
-                    <a:lumOff val="35000"/>
-                  </a:schemeClr>
-                </a:solidFill>
-                <a:latin typeface="맑은 고딕" panose="020B0503020000020004" pitchFamily="50" charset="-127"/>
-                <a:ea typeface="맑은 고딕" panose="020B0503020000020004" pitchFamily="50" charset="-127"/>
-                <a:cs typeface="+mn-cs"/>
-              </a:defRPr>
-            </a:lvl1pPr>
-            <a:lvl2pPr marL="457200" algn="l" defTabSz="914400" rtl="0" eaLnBrk="1" latinLnBrk="0" hangingPunct="1">
-              <a:defRPr sz="1800" kern="1200">
-                <a:solidFill>
-                  <a:schemeClr val="tx1"/>
-                </a:solidFill>
-                <a:latin typeface="+mn-lt"/>
-                <a:ea typeface="+mn-ea"/>
-                <a:cs typeface="+mn-cs"/>
-              </a:defRPr>
-            </a:lvl2pPr>
-            <a:lvl3pPr marL="914400" algn="l" defTabSz="914400" rtl="0" eaLnBrk="1" latinLnBrk="0" hangingPunct="1">
-              <a:defRPr sz="1800" kern="1200">
-                <a:solidFill>
-                  <a:schemeClr val="tx1"/>
-                </a:solidFill>
-                <a:latin typeface="+mn-lt"/>
-                <a:ea typeface="+mn-ea"/>
-                <a:cs typeface="+mn-cs"/>
-              </a:defRPr>
-            </a:lvl3pPr>
-            <a:lvl4pPr marL="1371600" algn="l" defTabSz="914400" rtl="0" eaLnBrk="1" latinLnBrk="0" hangingPunct="1">
-              <a:defRPr sz="1800" kern="1200">
-                <a:solidFill>
-                  <a:schemeClr val="tx1"/>
-                </a:solidFill>
-                <a:latin typeface="+mn-lt"/>
-                <a:ea typeface="+mn-ea"/>
-                <a:cs typeface="+mn-cs"/>
-              </a:defRPr>
-            </a:lvl4pPr>
-            <a:lvl5pPr marL="1828800" algn="l" defTabSz="914400" rtl="0" eaLnBrk="1" latinLnBrk="0" hangingPunct="1">
-              <a:defRPr sz="1800" kern="1200">
-                <a:solidFill>
-                  <a:schemeClr val="tx1"/>
-                </a:solidFill>
-                <a:latin typeface="+mn-lt"/>
-                <a:ea typeface="+mn-ea"/>
-                <a:cs typeface="+mn-cs"/>
-              </a:defRPr>
-            </a:lvl5pPr>
-            <a:lvl6pPr marL="2286000" algn="l" defTabSz="914400" rtl="0" eaLnBrk="1" latinLnBrk="0" hangingPunct="1">
-              <a:defRPr sz="1800" kern="1200">
-                <a:solidFill>
-                  <a:schemeClr val="tx1"/>
-                </a:solidFill>
-                <a:latin typeface="+mn-lt"/>
-                <a:ea typeface="+mn-ea"/>
-                <a:cs typeface="+mn-cs"/>
-              </a:defRPr>
-            </a:lvl6pPr>
-            <a:lvl7pPr marL="2743200" algn="l" defTabSz="914400" rtl="0" eaLnBrk="1" latinLnBrk="0" hangingPunct="1">
-              <a:defRPr sz="1800" kern="1200">
-                <a:solidFill>
-                  <a:schemeClr val="tx1"/>
-                </a:solidFill>
-                <a:latin typeface="+mn-lt"/>
-                <a:ea typeface="+mn-ea"/>
-                <a:cs typeface="+mn-cs"/>
-              </a:defRPr>
-            </a:lvl7pPr>
-            <a:lvl8pPr marL="3200400" algn="l" defTabSz="914400" rtl="0" eaLnBrk="1" latinLnBrk="0" hangingPunct="1">
-              <a:defRPr sz="1800" kern="1200">
-                <a:solidFill>
-                  <a:schemeClr val="tx1"/>
-                </a:solidFill>
-                <a:latin typeface="+mn-lt"/>
-                <a:ea typeface="+mn-ea"/>
-                <a:cs typeface="+mn-cs"/>
-              </a:defRPr>
-            </a:lvl8pPr>
-            <a:lvl9pPr marL="3657600" algn="l" defTabSz="914400" rtl="0" eaLnBrk="1" latinLnBrk="0" hangingPunct="1">
-              <a:defRPr sz="1800" kern="1200">
-                <a:solidFill>
-                  <a:schemeClr val="tx1"/>
-                </a:solidFill>
-                <a:latin typeface="+mn-lt"/>
-                <a:ea typeface="+mn-ea"/>
-                <a:cs typeface="+mn-cs"/>
-              </a:defRPr>
-            </a:lvl9pPr>
-          </a:lstStyle>
-          <a:p>
-            <a:fld id="{D57F1E4F-1CFF-5643-939E-217C01CDF565}" type="slidenum">
-              <a:rPr lang="en-US" sz="1400" b="1" smtClean="0"/>
-              <a:pPr/>
-              <a:t>9</a:t>
-            </a:fld>
-            <a:endParaRPr lang="en-US" sz="1400" b="1" dirty="0"/>
-          </a:p>
-        </p:txBody>
-      </p:sp>
-    </p:spTree>
-    <p:extLst>
-      <p:ext uri="{BB962C8B-B14F-4D97-AF65-F5344CB8AC3E}">
-        <p14:creationId xmlns:p14="http://schemas.microsoft.com/office/powerpoint/2010/main" val="4151685094"/>
       </p:ext>
     </p:extLst>
   </p:cSld>

--- a/ppts/CHAPTER 2 RAG Part I_Indexing Your Data.pptx
+++ b/ppts/CHAPTER 2 RAG Part I_Indexing Your Data.pptx
@@ -5,10 +5,10 @@
     <p:sldMasterId id="2147483660" r:id="rId1"/>
   </p:sldMasterIdLst>
   <p:notesMasterIdLst>
-    <p:notesMasterId r:id="rId26"/>
+    <p:notesMasterId r:id="rId36"/>
   </p:notesMasterIdLst>
   <p:handoutMasterIdLst>
-    <p:handoutMasterId r:id="rId27"/>
+    <p:handoutMasterId r:id="rId37"/>
   </p:handoutMasterIdLst>
   <p:sldIdLst>
     <p:sldId id="256" r:id="rId2"/>
@@ -35,6 +35,16 @@
     <p:sldId id="1150" r:id="rId23"/>
     <p:sldId id="1151" r:id="rId24"/>
     <p:sldId id="1152" r:id="rId25"/>
+    <p:sldId id="1161" r:id="rId26"/>
+    <p:sldId id="1162" r:id="rId27"/>
+    <p:sldId id="1169" r:id="rId28"/>
+    <p:sldId id="1164" r:id="rId29"/>
+    <p:sldId id="1167" r:id="rId30"/>
+    <p:sldId id="1163" r:id="rId31"/>
+    <p:sldId id="1166" r:id="rId32"/>
+    <p:sldId id="1168" r:id="rId33"/>
+    <p:sldId id="1165" r:id="rId34"/>
+    <p:sldId id="1170" r:id="rId35"/>
   </p:sldIdLst>
   <p:sldSz cx="12192000" cy="6858000"/>
   <p:notesSz cx="6858000" cy="9144000"/>
@@ -166,6 +176,16 @@
             <p14:sldId id="1150"/>
             <p14:sldId id="1151"/>
             <p14:sldId id="1152"/>
+            <p14:sldId id="1161"/>
+            <p14:sldId id="1162"/>
+            <p14:sldId id="1169"/>
+            <p14:sldId id="1164"/>
+            <p14:sldId id="1167"/>
+            <p14:sldId id="1163"/>
+            <p14:sldId id="1166"/>
+            <p14:sldId id="1168"/>
+            <p14:sldId id="1165"/>
+            <p14:sldId id="1170"/>
           </p14:sldIdLst>
         </p14:section>
         <p14:section name="자세한 정보" id="{2CC34DB2-6590-42C0-AD4B-A04C6060184E}">
@@ -290,7 +310,7 @@
                 <a:latin typeface="맑은 고딕" panose="020B0503020000020004" pitchFamily="50" charset="-127"/>
                 <a:ea typeface="맑은 고딕" panose="020B0503020000020004" pitchFamily="50" charset="-127"/>
               </a:rPr>
-              <a:t>2026-09-23</a:t>
+              <a:t>2026-10-12</a:t>
             </a:fld>
             <a:endParaRPr lang="ko-KR" altLang="en-US">
               <a:latin typeface="맑은 고딕" panose="020B0503020000020004" pitchFamily="50" charset="-127"/>
@@ -476,7 +496,7 @@
           <a:p>
             <a:fld id="{43E1C3DD-4A19-441D-907C-380838DB51C4}" type="datetime1">
               <a:rPr lang="ko-KR" altLang="en-US" noProof="0" smtClean="0"/>
-              <a:t>2026-09-23</a:t>
+              <a:t>2026-10-12</a:t>
             </a:fld>
             <a:endParaRPr lang="ko-KR" altLang="en-US" noProof="0"/>
           </a:p>
@@ -856,6 +876,130 @@
 </p:notes>
 </file>
 
+<file path=ppt/notesSlides/notesSlide2.xml><?xml version="1.0" encoding="utf-8"?>
+<p:notes xmlns:a="http://schemas.openxmlformats.org/drawingml/2006/main" xmlns:r="http://schemas.openxmlformats.org/officeDocument/2006/relationships" xmlns:p="http://schemas.openxmlformats.org/presentationml/2006/main">
+  <p:cSld>
+    <p:spTree>
+      <p:nvGrpSpPr>
+        <p:cNvPr id="1" name="">
+          <a:extLst>
+            <a:ext uri="{FF2B5EF4-FFF2-40B4-BE49-F238E27FC236}">
+              <a16:creationId xmlns:a16="http://schemas.microsoft.com/office/drawing/2014/main" id="{38A04285-A33B-A36F-0082-9FF5329D3DF1}"/>
+            </a:ext>
+          </a:extLst>
+        </p:cNvPr>
+        <p:cNvGrpSpPr/>
+        <p:nvPr/>
+      </p:nvGrpSpPr>
+      <p:grpSpPr>
+        <a:xfrm>
+          <a:off x="0" y="0"/>
+          <a:ext cx="0" cy="0"/>
+          <a:chOff x="0" y="0"/>
+          <a:chExt cx="0" cy="0"/>
+        </a:xfrm>
+      </p:grpSpPr>
+      <p:sp>
+        <p:nvSpPr>
+          <p:cNvPr id="2" name="슬라이드 이미지 개체 틀 1">
+            <a:extLst>
+              <a:ext uri="{FF2B5EF4-FFF2-40B4-BE49-F238E27FC236}">
+                <a16:creationId xmlns:a16="http://schemas.microsoft.com/office/drawing/2014/main" id="{EDB6BFC8-6BA6-F707-1E37-58EBC01E6AB5}"/>
+              </a:ext>
+            </a:extLst>
+          </p:cNvPr>
+          <p:cNvSpPr>
+            <a:spLocks noGrp="1" noRot="1" noChangeAspect="1"/>
+          </p:cNvSpPr>
+          <p:nvPr>
+            <p:ph type="sldImg"/>
+          </p:nvPr>
+        </p:nvSpPr>
+        <p:spPr>
+          <a:xfrm>
+            <a:off x="685800" y="1143000"/>
+            <a:ext cx="5486400" cy="3086100"/>
+          </a:xfrm>
+        </p:spPr>
+      </p:sp>
+      <p:sp>
+        <p:nvSpPr>
+          <p:cNvPr id="3" name="슬라이드 노트 개체 틀 2">
+            <a:extLst>
+              <a:ext uri="{FF2B5EF4-FFF2-40B4-BE49-F238E27FC236}">
+                <a16:creationId xmlns:a16="http://schemas.microsoft.com/office/drawing/2014/main" id="{3593A03B-D60C-E412-404C-8DF1EDAEDD1F}"/>
+              </a:ext>
+            </a:extLst>
+          </p:cNvPr>
+          <p:cNvSpPr>
+            <a:spLocks noGrp="1"/>
+          </p:cNvSpPr>
+          <p:nvPr>
+            <p:ph type="body" idx="1"/>
+          </p:nvPr>
+        </p:nvSpPr>
+        <p:spPr/>
+        <p:txBody>
+          <a:bodyPr rtlCol="0"/>
+          <a:lstStyle/>
+          <a:p>
+            <a:pPr rtl="0"/>
+            <a:endParaRPr lang="ko-KR" altLang="en-US">
+              <a:latin typeface="맑은 고딕" panose="020B0503020000020004" pitchFamily="50" charset="-127"/>
+              <a:ea typeface="맑은 고딕" panose="020B0503020000020004" pitchFamily="50" charset="-127"/>
+            </a:endParaRPr>
+          </a:p>
+        </p:txBody>
+      </p:sp>
+      <p:sp>
+        <p:nvSpPr>
+          <p:cNvPr id="4" name="슬라이드 번호 개체 틀 3">
+            <a:extLst>
+              <a:ext uri="{FF2B5EF4-FFF2-40B4-BE49-F238E27FC236}">
+                <a16:creationId xmlns:a16="http://schemas.microsoft.com/office/drawing/2014/main" id="{67A52AE6-1882-8C43-4724-70B3D93930FC}"/>
+              </a:ext>
+            </a:extLst>
+          </p:cNvPr>
+          <p:cNvSpPr>
+            <a:spLocks noGrp="1"/>
+          </p:cNvSpPr>
+          <p:nvPr>
+            <p:ph type="sldNum" sz="quarter" idx="10"/>
+          </p:nvPr>
+        </p:nvSpPr>
+        <p:spPr/>
+        <p:txBody>
+          <a:bodyPr rtlCol="0"/>
+          <a:lstStyle/>
+          <a:p>
+            <a:pPr rtl="0"/>
+            <a:fld id="{DF61EA0F-A667-4B49-8422-0062BC55E249}" type="slidenum">
+              <a:rPr lang="en-US" altLang="ko-KR" smtClean="0">
+                <a:latin typeface="맑은 고딕" panose="020B0503020000020004" pitchFamily="50" charset="-127"/>
+                <a:ea typeface="맑은 고딕" panose="020B0503020000020004" pitchFamily="50" charset="-127"/>
+              </a:rPr>
+              <a:t>25</a:t>
+            </a:fld>
+            <a:endParaRPr lang="ko-KR" altLang="en-US">
+              <a:latin typeface="맑은 고딕" panose="020B0503020000020004" pitchFamily="50" charset="-127"/>
+              <a:ea typeface="맑은 고딕" panose="020B0503020000020004" pitchFamily="50" charset="-127"/>
+            </a:endParaRPr>
+          </a:p>
+        </p:txBody>
+      </p:sp>
+    </p:spTree>
+    <p:extLst>
+      <p:ext uri="{BB962C8B-B14F-4D97-AF65-F5344CB8AC3E}">
+        <p14:creationId xmlns:p14="http://schemas.microsoft.com/office/powerpoint/2010/main" val="3525143445"/>
+      </p:ext>
+    </p:extLst>
+  </p:cSld>
+  <p:clrMapOvr>
+    <a:masterClrMapping/>
+  </p:clrMapOvr>
+</p:notes>
+</file>
+
 <file path=ppt/slideLayouts/slideLayout1.xml><?xml version="1.0" encoding="utf-8"?>
 <p:sldLayout xmlns:a="http://schemas.openxmlformats.org/drawingml/2006/main" xmlns:r="http://schemas.openxmlformats.org/officeDocument/2006/relationships" xmlns:p="http://schemas.openxmlformats.org/presentationml/2006/main" preserve="1" userDrawn="1">
   <p:cSld name="제목 슬라이드">
@@ -1324,7 +1468,7 @@
           <a:p>
             <a:fld id="{990475B5-67CA-4281-BDCA-DA943C3C8EB3}" type="datetime1">
               <a:rPr lang="ko-KR" altLang="en-US" noProof="0" smtClean="0"/>
-              <a:t>2026-09-23</a:t>
+              <a:t>2026-10-12</a:t>
             </a:fld>
             <a:endParaRPr lang="ko-KR" altLang="en-US" noProof="0"/>
           </a:p>
@@ -1978,7 +2122,7 @@
           <a:p>
             <a:fld id="{48A87A34-81AB-432B-8DAE-1953F412C126}" type="datetimeFigureOut">
               <a:rPr lang="en-US" smtClean="0"/>
-              <a:t>9/23/2026</a:t>
+              <a:t>10/12/2026</a:t>
             </a:fld>
             <a:endParaRPr lang="en-US" dirty="0"/>
           </a:p>
@@ -2274,7 +2418,7 @@
           <a:p>
             <a:fld id="{C655C81E-72E7-4D05-94B5-F45B321A525D}" type="datetime1">
               <a:rPr lang="ko-KR" altLang="en-US" noProof="0" smtClean="0"/>
-              <a:t>2026-09-23</a:t>
+              <a:t>2026-10-12</a:t>
             </a:fld>
             <a:endParaRPr lang="ko-KR" altLang="en-US" noProof="0" dirty="0">
               <a:latin typeface="맑은 고딕" panose="020B0503020000020004" pitchFamily="50" charset="-127"/>
@@ -3419,10 +3563,10 @@
           <p:nvPr/>
         </p:nvPicPr>
         <p:blipFill>
-          <a:blip>
+          <a:blip r:embed="rId3">
             <a:extLst>
               <a:ext uri="{96DAC541-7B7A-43D3-8B79-37D633B846F1}">
-                <asvg:svgBlip xmlns:asvg="http://schemas.microsoft.com/office/drawing/2016/SVG/main" r:embed="rId3"/>
+                <asvg:svgBlip xmlns:asvg="http://schemas.microsoft.com/office/drawing/2016/SVG/main" r:embed="rId4"/>
               </a:ext>
             </a:extLst>
           </a:blip>
@@ -3655,7 +3799,7 @@
                 </a:solidFill>
                 <a:latin typeface="D2Coding" panose="020B0609020101020101" pitchFamily="49" charset="-127"/>
                 <a:ea typeface="D2Coding" panose="020B0609020101020101" pitchFamily="49" charset="-127"/>
-                <a:hlinkClick r:id="rId4">
+                <a:hlinkClick r:id="rId5">
                   <a:extLst>
                     <a:ext uri="{A12FA001-AC4F-418D-AE19-62706E023703}">
                       <ahyp:hlinkClr xmlns:ahyp="http://schemas.microsoft.com/office/drawing/2018/hyperlinkcolor" val="tx"/>
@@ -4140,10 +4284,10 @@
           <p:nvPr/>
         </p:nvPicPr>
         <p:blipFill>
-          <a:blip>
+          <a:blip r:embed="rId4">
             <a:extLst>
               <a:ext uri="{96DAC541-7B7A-43D3-8B79-37D633B846F1}">
-                <asvg:svgBlip xmlns:asvg="http://schemas.microsoft.com/office/drawing/2016/SVG/main" r:embed="rId4"/>
+                <asvg:svgBlip xmlns:asvg="http://schemas.microsoft.com/office/drawing/2016/SVG/main" r:embed="rId5"/>
               </a:ext>
             </a:extLst>
           </a:blip>
@@ -6186,10 +6330,10 @@
           <p:nvPr/>
         </p:nvPicPr>
         <p:blipFill>
-          <a:blip>
+          <a:blip r:embed="rId2">
             <a:extLst>
               <a:ext uri="{96DAC541-7B7A-43D3-8B79-37D633B846F1}">
-                <asvg:svgBlip xmlns:asvg="http://schemas.microsoft.com/office/drawing/2016/SVG/main" r:embed="rId2"/>
+                <asvg:svgBlip xmlns:asvg="http://schemas.microsoft.com/office/drawing/2016/SVG/main" r:embed="rId3"/>
               </a:ext>
             </a:extLst>
           </a:blip>
@@ -6394,10 +6538,10 @@
           <p:nvPr/>
         </p:nvPicPr>
         <p:blipFill>
-          <a:blip>
+          <a:blip r:embed="rId2">
             <a:extLst>
               <a:ext uri="{96DAC541-7B7A-43D3-8B79-37D633B846F1}">
-                <asvg:svgBlip xmlns:asvg="http://schemas.microsoft.com/office/drawing/2016/SVG/main" r:embed="rId2"/>
+                <asvg:svgBlip xmlns:asvg="http://schemas.microsoft.com/office/drawing/2016/SVG/main" r:embed="rId3"/>
               </a:ext>
             </a:extLst>
           </a:blip>
@@ -6430,10 +6574,10 @@
           <p:nvPr/>
         </p:nvPicPr>
         <p:blipFill>
-          <a:blip>
+          <a:blip r:embed="rId2">
             <a:extLst>
               <a:ext uri="{96DAC541-7B7A-43D3-8B79-37D633B846F1}">
-                <asvg:svgBlip xmlns:asvg="http://schemas.microsoft.com/office/drawing/2016/SVG/main" r:embed="rId2"/>
+                <asvg:svgBlip xmlns:asvg="http://schemas.microsoft.com/office/drawing/2016/SVG/main" r:embed="rId3"/>
               </a:ext>
             </a:extLst>
           </a:blip>
@@ -11323,10 +11467,10 @@
           <p:nvPr/>
         </p:nvPicPr>
         <p:blipFill>
-          <a:blip>
+          <a:blip r:embed="rId3">
             <a:extLst>
               <a:ext uri="{96DAC541-7B7A-43D3-8B79-37D633B846F1}">
-                <asvg:svgBlip xmlns:asvg="http://schemas.microsoft.com/office/drawing/2016/SVG/main" r:embed="rId3"/>
+                <asvg:svgBlip xmlns:asvg="http://schemas.microsoft.com/office/drawing/2016/SVG/main" r:embed="rId4"/>
               </a:ext>
             </a:extLst>
           </a:blip>
@@ -11462,10 +11606,10 @@
           <p:nvPr/>
         </p:nvPicPr>
         <p:blipFill>
-          <a:blip>
+          <a:blip r:embed="rId3">
             <a:extLst>
               <a:ext uri="{96DAC541-7B7A-43D3-8B79-37D633B846F1}">
-                <asvg:svgBlip xmlns:asvg="http://schemas.microsoft.com/office/drawing/2016/SVG/main" r:embed="rId3"/>
+                <asvg:svgBlip xmlns:asvg="http://schemas.microsoft.com/office/drawing/2016/SVG/main" r:embed="rId4"/>
               </a:ext>
             </a:extLst>
           </a:blip>
@@ -15197,6 +15341,1495 @@
 </p:sld>
 </file>
 
+<file path=ppt/slides/slide25.xml><?xml version="1.0" encoding="utf-8"?>
+<p:sld xmlns:a="http://schemas.openxmlformats.org/drawingml/2006/main" xmlns:r="http://schemas.openxmlformats.org/officeDocument/2006/relationships" xmlns:p="http://schemas.openxmlformats.org/presentationml/2006/main">
+  <p:cSld>
+    <p:spTree>
+      <p:nvGrpSpPr>
+        <p:cNvPr id="1" name="">
+          <a:extLst>
+            <a:ext uri="{FF2B5EF4-FFF2-40B4-BE49-F238E27FC236}">
+              <a16:creationId xmlns:a16="http://schemas.microsoft.com/office/drawing/2014/main" id="{AF4ECA4C-CC8C-D144-7D64-BDE9F82CB44F}"/>
+            </a:ext>
+          </a:extLst>
+        </p:cNvPr>
+        <p:cNvGrpSpPr/>
+        <p:nvPr/>
+      </p:nvGrpSpPr>
+      <p:grpSpPr>
+        <a:xfrm>
+          <a:off x="0" y="0"/>
+          <a:ext cx="0" cy="0"/>
+          <a:chOff x="0" y="0"/>
+          <a:chExt cx="0" cy="0"/>
+        </a:xfrm>
+      </p:grpSpPr>
+      <p:sp>
+        <p:nvSpPr>
+          <p:cNvPr id="2" name="제목 1">
+            <a:extLst>
+              <a:ext uri="{FF2B5EF4-FFF2-40B4-BE49-F238E27FC236}">
+                <a16:creationId xmlns:a16="http://schemas.microsoft.com/office/drawing/2014/main" id="{5DD7D5F8-B881-C5B3-0369-D2FFD6B9C2E6}"/>
+              </a:ext>
+            </a:extLst>
+          </p:cNvPr>
+          <p:cNvSpPr>
+            <a:spLocks noGrp="1"/>
+          </p:cNvSpPr>
+          <p:nvPr>
+            <p:ph type="ctrTitle"/>
+          </p:nvPr>
+        </p:nvSpPr>
+        <p:spPr>
+          <a:xfrm>
+            <a:off x="838199" y="1164324"/>
+            <a:ext cx="10934701" cy="2387600"/>
+          </a:xfrm>
+        </p:spPr>
+        <p:txBody>
+          <a:bodyPr rtlCol="0" anchor="ctr" anchorCtr="0">
+            <a:normAutofit/>
+          </a:bodyPr>
+          <a:lstStyle/>
+          <a:p>
+            <a:r>
+              <a:rPr lang="en-US" altLang="ko-KR" sz="4400" dirty="0">
+                <a:solidFill>
+                  <a:schemeClr val="bg1"/>
+                </a:solidFill>
+                <a:latin typeface="D2Coding" panose="020B0609020101020101" pitchFamily="49" charset="-127"/>
+                <a:ea typeface="D2Coding" panose="020B0609020101020101" pitchFamily="49" charset="-127"/>
+              </a:rPr>
+              <a:t>Mongo</a:t>
+            </a:r>
+            <a:r>
+              <a:rPr lang="ko-KR" altLang="en-US" sz="4400" dirty="0">
+                <a:solidFill>
+                  <a:schemeClr val="bg1"/>
+                </a:solidFill>
+                <a:latin typeface="D2Coding" panose="020B0609020101020101" pitchFamily="49" charset="-127"/>
+                <a:ea typeface="D2Coding" panose="020B0609020101020101" pitchFamily="49" charset="-127"/>
+              </a:rPr>
+              <a:t> </a:t>
+            </a:r>
+            <a:r>
+              <a:rPr lang="en-US" altLang="ko-KR" sz="4400" dirty="0">
+                <a:solidFill>
+                  <a:schemeClr val="bg1"/>
+                </a:solidFill>
+                <a:latin typeface="D2Coding" panose="020B0609020101020101" pitchFamily="49" charset="-127"/>
+                <a:ea typeface="D2Coding" panose="020B0609020101020101" pitchFamily="49" charset="-127"/>
+              </a:rPr>
+              <a:t>DB</a:t>
+            </a:r>
+            <a:endParaRPr lang="ko-KR" altLang="en-US" sz="4400" dirty="0">
+              <a:solidFill>
+                <a:schemeClr val="bg1"/>
+              </a:solidFill>
+              <a:latin typeface="D2Coding" panose="020B0609020101020101" pitchFamily="49" charset="-127"/>
+              <a:ea typeface="D2Coding" panose="020B0609020101020101" pitchFamily="49" charset="-127"/>
+            </a:endParaRPr>
+          </a:p>
+        </p:txBody>
+      </p:sp>
+    </p:spTree>
+    <p:extLst>
+      <p:ext uri="{BB962C8B-B14F-4D97-AF65-F5344CB8AC3E}">
+        <p14:creationId xmlns:p14="http://schemas.microsoft.com/office/powerpoint/2010/main" val="3485304591"/>
+      </p:ext>
+    </p:extLst>
+  </p:cSld>
+  <p:clrMapOvr>
+    <a:masterClrMapping/>
+  </p:clrMapOvr>
+</p:sld>
+</file>
+
+<file path=ppt/slides/slide26.xml><?xml version="1.0" encoding="utf-8"?>
+<p:sld xmlns:a="http://schemas.openxmlformats.org/drawingml/2006/main" xmlns:r="http://schemas.openxmlformats.org/officeDocument/2006/relationships" xmlns:p="http://schemas.openxmlformats.org/presentationml/2006/main">
+  <p:cSld>
+    <p:spTree>
+      <p:nvGrpSpPr>
+        <p:cNvPr id="1" name="">
+          <a:extLst>
+            <a:ext uri="{FF2B5EF4-FFF2-40B4-BE49-F238E27FC236}">
+              <a16:creationId xmlns:a16="http://schemas.microsoft.com/office/drawing/2014/main" id="{637004DF-8890-FB55-22E0-1E6D990C850A}"/>
+            </a:ext>
+          </a:extLst>
+        </p:cNvPr>
+        <p:cNvGrpSpPr/>
+        <p:nvPr/>
+      </p:nvGrpSpPr>
+      <p:grpSpPr>
+        <a:xfrm>
+          <a:off x="0" y="0"/>
+          <a:ext cx="0" cy="0"/>
+          <a:chOff x="0" y="0"/>
+          <a:chExt cx="0" cy="0"/>
+        </a:xfrm>
+      </p:grpSpPr>
+      <p:sp>
+        <p:nvSpPr>
+          <p:cNvPr id="3" name="제목 1">
+            <a:extLst>
+              <a:ext uri="{FF2B5EF4-FFF2-40B4-BE49-F238E27FC236}">
+                <a16:creationId xmlns:a16="http://schemas.microsoft.com/office/drawing/2014/main" id="{80AC5760-F2BC-D894-5ED0-014C66BE0EF7}"/>
+              </a:ext>
+            </a:extLst>
+          </p:cNvPr>
+          <p:cNvSpPr txBox="1">
+            <a:spLocks/>
+          </p:cNvSpPr>
+          <p:nvPr/>
+        </p:nvSpPr>
+        <p:spPr>
+          <a:xfrm>
+            <a:off x="475645" y="481983"/>
+            <a:ext cx="10353762" cy="766439"/>
+          </a:xfrm>
+          <a:prstGeom prst="rect">
+            <a:avLst/>
+          </a:prstGeom>
+        </p:spPr>
+        <p:txBody>
+          <a:bodyPr vert="horz" lIns="91440" tIns="45720" rIns="91440" bIns="45720" rtlCol="0" anchor="ctr">
+            <a:normAutofit/>
+          </a:bodyPr>
+          <a:lstStyle>
+            <a:lvl1pPr algn="ctr" defTabSz="914400" rtl="0" eaLnBrk="1" latinLnBrk="1" hangingPunct="1">
+              <a:lnSpc>
+                <a:spcPct val="90000"/>
+              </a:lnSpc>
+              <a:spcBef>
+                <a:spcPct val="0"/>
+              </a:spcBef>
+              <a:buNone/>
+              <a:defRPr sz="3200" kern="1200" cap="all" baseline="0">
+                <a:solidFill>
+                  <a:schemeClr val="tx1"/>
+                </a:solidFill>
+                <a:effectLst/>
+                <a:latin typeface="Batang" panose="02030600000101010101" pitchFamily="18" charset="-127"/>
+                <a:ea typeface="Batang" panose="02030600000101010101" pitchFamily="18" charset="-127"/>
+                <a:cs typeface="+mj-cs"/>
+              </a:defRPr>
+            </a:lvl1pPr>
+          </a:lstStyle>
+          <a:p>
+            <a:pPr algn="l"/>
+            <a:r>
+              <a:rPr lang="en-US" altLang="ko-KR" sz="2800" cap="none" dirty="0">
+                <a:solidFill>
+                  <a:schemeClr val="bg2">
+                    <a:lumMod val="25000"/>
+                  </a:schemeClr>
+                </a:solidFill>
+                <a:latin typeface="D2Coding" panose="020B0609020101020101" pitchFamily="49" charset="-127"/>
+                <a:ea typeface="D2Coding" panose="020B0609020101020101" pitchFamily="49" charset="-127"/>
+                <a:cs typeface="Segoe UI Light" panose="020B0502040204020203" pitchFamily="34" charset="0"/>
+              </a:rPr>
+              <a:t>MongoDB vs. RDBMS</a:t>
+            </a:r>
+            <a:endParaRPr lang="ko-KR" altLang="en-US" sz="2800" cap="none" dirty="0">
+              <a:solidFill>
+                <a:schemeClr val="bg2">
+                  <a:lumMod val="25000"/>
+                </a:schemeClr>
+              </a:solidFill>
+              <a:latin typeface="D2Coding" panose="020B0609020101020101" pitchFamily="49" charset="-127"/>
+              <a:ea typeface="D2Coding" panose="020B0609020101020101" pitchFamily="49" charset="-127"/>
+              <a:cs typeface="Segoe UI Light" panose="020B0502040204020203" pitchFamily="34" charset="0"/>
+            </a:endParaRPr>
+          </a:p>
+        </p:txBody>
+      </p:sp>
+      <p:sp>
+        <p:nvSpPr>
+          <p:cNvPr id="2" name="슬라이드 번호 개체 틀 3">
+            <a:extLst>
+              <a:ext uri="{FF2B5EF4-FFF2-40B4-BE49-F238E27FC236}">
+                <a16:creationId xmlns:a16="http://schemas.microsoft.com/office/drawing/2014/main" id="{6C401979-8A86-EC88-C237-FE2FF2368573}"/>
+              </a:ext>
+            </a:extLst>
+          </p:cNvPr>
+          <p:cNvSpPr>
+            <a:spLocks noGrp="1"/>
+          </p:cNvSpPr>
+          <p:nvPr>
+            <p:ph type="sldNum" sz="quarter" idx="12"/>
+          </p:nvPr>
+        </p:nvSpPr>
+        <p:spPr>
+          <a:xfrm>
+            <a:off x="11180761" y="299420"/>
+            <a:ext cx="753545" cy="365125"/>
+          </a:xfrm>
+        </p:spPr>
+        <p:txBody>
+          <a:bodyPr/>
+          <a:lstStyle/>
+          <a:p>
+            <a:fld id="{D57F1E4F-1CFF-5643-939E-217C01CDF565}" type="slidenum">
+              <a:rPr lang="en-US" sz="1400" b="1" smtClean="0"/>
+              <a:pPr/>
+              <a:t>26</a:t>
+            </a:fld>
+            <a:endParaRPr lang="en-US" sz="1400" b="1" dirty="0"/>
+          </a:p>
+        </p:txBody>
+      </p:sp>
+      <p:pic>
+        <p:nvPicPr>
+          <p:cNvPr id="1026" name="Picture 2" descr="mongoDB에 대하여">
+            <a:extLst>
+              <a:ext uri="{FF2B5EF4-FFF2-40B4-BE49-F238E27FC236}">
+                <a16:creationId xmlns:a16="http://schemas.microsoft.com/office/drawing/2014/main" id="{D2C4BFA8-296B-715F-7857-DB8CF95C65D5}"/>
+              </a:ext>
+            </a:extLst>
+          </p:cNvPr>
+          <p:cNvPicPr>
+            <a:picLocks noChangeAspect="1" noChangeArrowheads="1"/>
+          </p:cNvPicPr>
+          <p:nvPr/>
+        </p:nvPicPr>
+        <p:blipFill>
+          <a:blip r:embed="rId2">
+            <a:extLst>
+              <a:ext uri="{28A0092B-C50C-407E-A947-70E740481C1C}">
+                <a14:useLocalDpi xmlns:a14="http://schemas.microsoft.com/office/drawing/2010/main" val="0"/>
+              </a:ext>
+            </a:extLst>
+          </a:blip>
+          <a:srcRect/>
+          <a:stretch>
+            <a:fillRect/>
+          </a:stretch>
+        </p:blipFill>
+        <p:spPr bwMode="auto">
+          <a:xfrm>
+            <a:off x="4162424" y="2181224"/>
+            <a:ext cx="6443663" cy="4295775"/>
+          </a:xfrm>
+          <a:prstGeom prst="rect">
+            <a:avLst/>
+          </a:prstGeom>
+          <a:noFill/>
+          <a:ln>
+            <a:solidFill>
+              <a:schemeClr val="tx1"/>
+            </a:solidFill>
+          </a:ln>
+          <a:extLst>
+            <a:ext uri="{909E8E84-426E-40DD-AFC4-6F175D3DCCD1}">
+              <a14:hiddenFill xmlns:a14="http://schemas.microsoft.com/office/drawing/2010/main">
+                <a:solidFill>
+                  <a:srgbClr val="FFFFFF"/>
+                </a:solidFill>
+              </a14:hiddenFill>
+            </a:ext>
+          </a:extLst>
+        </p:spPr>
+      </p:pic>
+      <p:sp>
+        <p:nvSpPr>
+          <p:cNvPr id="9" name="AutoShape 4" descr="MongoDB vs Relational Database">
+            <a:extLst>
+              <a:ext uri="{FF2B5EF4-FFF2-40B4-BE49-F238E27FC236}">
+                <a16:creationId xmlns:a16="http://schemas.microsoft.com/office/drawing/2014/main" id="{76BF07E9-4DFB-2214-FD03-5DA59159AC63}"/>
+              </a:ext>
+            </a:extLst>
+          </p:cNvPr>
+          <p:cNvSpPr>
+            <a:spLocks noChangeAspect="1" noChangeArrowheads="1"/>
+          </p:cNvSpPr>
+          <p:nvPr/>
+        </p:nvSpPr>
+        <p:spPr bwMode="auto">
+          <a:xfrm>
+            <a:off x="5943600" y="3276600"/>
+            <a:ext cx="304800" cy="304800"/>
+          </a:xfrm>
+          <a:prstGeom prst="rect">
+            <a:avLst/>
+          </a:prstGeom>
+          <a:noFill/>
+          <a:extLst>
+            <a:ext uri="{909E8E84-426E-40DD-AFC4-6F175D3DCCD1}">
+              <a14:hiddenFill xmlns:a14="http://schemas.microsoft.com/office/drawing/2010/main">
+                <a:solidFill>
+                  <a:srgbClr val="FFFFFF"/>
+                </a:solidFill>
+              </a14:hiddenFill>
+            </a:ext>
+          </a:extLst>
+        </p:spPr>
+        <p:txBody>
+          <a:bodyPr vert="horz" wrap="square" lIns="91440" tIns="45720" rIns="91440" bIns="45720" numCol="1" anchor="t" anchorCtr="0" compatLnSpc="1">
+            <a:prstTxWarp prst="textNoShape">
+              <a:avLst/>
+            </a:prstTxWarp>
+          </a:bodyPr>
+          <a:lstStyle/>
+          <a:p>
+            <a:endParaRPr lang="ko-KR" altLang="en-US"/>
+          </a:p>
+        </p:txBody>
+      </p:sp>
+      <p:pic>
+        <p:nvPicPr>
+          <p:cNvPr id="11" name="그림 10">
+            <a:extLst>
+              <a:ext uri="{FF2B5EF4-FFF2-40B4-BE49-F238E27FC236}">
+                <a16:creationId xmlns:a16="http://schemas.microsoft.com/office/drawing/2014/main" id="{BC3E8CBD-896A-FCFE-A12A-DFE0C37ADE72}"/>
+              </a:ext>
+            </a:extLst>
+          </p:cNvPr>
+          <p:cNvPicPr>
+            <a:picLocks noChangeAspect="1"/>
+          </p:cNvPicPr>
+          <p:nvPr/>
+        </p:nvPicPr>
+        <p:blipFill>
+          <a:blip r:embed="rId3"/>
+          <a:stretch>
+            <a:fillRect/>
+          </a:stretch>
+        </p:blipFill>
+        <p:spPr>
+          <a:xfrm>
+            <a:off x="700088" y="1371599"/>
+            <a:ext cx="2770238" cy="2527917"/>
+          </a:xfrm>
+          <a:prstGeom prst="rect">
+            <a:avLst/>
+          </a:prstGeom>
+          <a:ln>
+            <a:solidFill>
+              <a:schemeClr val="tx1"/>
+            </a:solidFill>
+          </a:ln>
+        </p:spPr>
+      </p:pic>
+    </p:spTree>
+    <p:extLst>
+      <p:ext uri="{BB962C8B-B14F-4D97-AF65-F5344CB8AC3E}">
+        <p14:creationId xmlns:p14="http://schemas.microsoft.com/office/powerpoint/2010/main" val="3679228709"/>
+      </p:ext>
+    </p:extLst>
+  </p:cSld>
+  <p:clrMapOvr>
+    <a:masterClrMapping/>
+  </p:clrMapOvr>
+</p:sld>
+</file>
+
+<file path=ppt/slides/slide27.xml><?xml version="1.0" encoding="utf-8"?>
+<p:sld xmlns:a="http://schemas.openxmlformats.org/drawingml/2006/main" xmlns:r="http://schemas.openxmlformats.org/officeDocument/2006/relationships" xmlns:p="http://schemas.openxmlformats.org/presentationml/2006/main">
+  <p:cSld>
+    <p:spTree>
+      <p:nvGrpSpPr>
+        <p:cNvPr id="1" name="">
+          <a:extLst>
+            <a:ext uri="{FF2B5EF4-FFF2-40B4-BE49-F238E27FC236}">
+              <a16:creationId xmlns:a16="http://schemas.microsoft.com/office/drawing/2014/main" id="{39AA4331-4E98-F817-2DF2-298120FBE52B}"/>
+            </a:ext>
+          </a:extLst>
+        </p:cNvPr>
+        <p:cNvGrpSpPr/>
+        <p:nvPr/>
+      </p:nvGrpSpPr>
+      <p:grpSpPr>
+        <a:xfrm>
+          <a:off x="0" y="0"/>
+          <a:ext cx="0" cy="0"/>
+          <a:chOff x="0" y="0"/>
+          <a:chExt cx="0" cy="0"/>
+        </a:xfrm>
+      </p:grpSpPr>
+      <p:pic>
+        <p:nvPicPr>
+          <p:cNvPr id="6" name="그림 5">
+            <a:extLst>
+              <a:ext uri="{FF2B5EF4-FFF2-40B4-BE49-F238E27FC236}">
+                <a16:creationId xmlns:a16="http://schemas.microsoft.com/office/drawing/2014/main" id="{C5E447E5-C75A-891F-FCB6-9B28D2400691}"/>
+              </a:ext>
+            </a:extLst>
+          </p:cNvPr>
+          <p:cNvPicPr>
+            <a:picLocks noChangeAspect="1"/>
+          </p:cNvPicPr>
+          <p:nvPr/>
+        </p:nvPicPr>
+        <p:blipFill>
+          <a:blip r:embed="rId2"/>
+          <a:stretch>
+            <a:fillRect/>
+          </a:stretch>
+        </p:blipFill>
+        <p:spPr>
+          <a:xfrm>
+            <a:off x="2841635" y="2333625"/>
+            <a:ext cx="8712795" cy="4224955"/>
+          </a:xfrm>
+          <a:prstGeom prst="rect">
+            <a:avLst/>
+          </a:prstGeom>
+          <a:ln>
+            <a:solidFill>
+              <a:schemeClr val="tx1"/>
+            </a:solidFill>
+          </a:ln>
+        </p:spPr>
+      </p:pic>
+      <p:sp>
+        <p:nvSpPr>
+          <p:cNvPr id="3" name="제목 1">
+            <a:extLst>
+              <a:ext uri="{FF2B5EF4-FFF2-40B4-BE49-F238E27FC236}">
+                <a16:creationId xmlns:a16="http://schemas.microsoft.com/office/drawing/2014/main" id="{0CB0D656-3459-226A-DEE5-6FA5F413C4A4}"/>
+              </a:ext>
+            </a:extLst>
+          </p:cNvPr>
+          <p:cNvSpPr txBox="1">
+            <a:spLocks/>
+          </p:cNvSpPr>
+          <p:nvPr/>
+        </p:nvSpPr>
+        <p:spPr>
+          <a:xfrm>
+            <a:off x="475645" y="481983"/>
+            <a:ext cx="10353762" cy="766439"/>
+          </a:xfrm>
+          <a:prstGeom prst="rect">
+            <a:avLst/>
+          </a:prstGeom>
+        </p:spPr>
+        <p:txBody>
+          <a:bodyPr vert="horz" lIns="91440" tIns="45720" rIns="91440" bIns="45720" rtlCol="0" anchor="ctr">
+            <a:normAutofit/>
+          </a:bodyPr>
+          <a:lstStyle>
+            <a:lvl1pPr algn="ctr" defTabSz="914400" rtl="0" eaLnBrk="1" latinLnBrk="1" hangingPunct="1">
+              <a:lnSpc>
+                <a:spcPct val="90000"/>
+              </a:lnSpc>
+              <a:spcBef>
+                <a:spcPct val="0"/>
+              </a:spcBef>
+              <a:buNone/>
+              <a:defRPr sz="3200" kern="1200" cap="all" baseline="0">
+                <a:solidFill>
+                  <a:schemeClr val="tx1"/>
+                </a:solidFill>
+                <a:effectLst/>
+                <a:latin typeface="Batang" panose="02030600000101010101" pitchFamily="18" charset="-127"/>
+                <a:ea typeface="Batang" panose="02030600000101010101" pitchFamily="18" charset="-127"/>
+                <a:cs typeface="+mj-cs"/>
+              </a:defRPr>
+            </a:lvl1pPr>
+          </a:lstStyle>
+          <a:p>
+            <a:pPr algn="l"/>
+            <a:r>
+              <a:rPr lang="en-US" altLang="ko-KR" sz="2800" dirty="0">
+                <a:latin typeface="D2Coding" panose="020B0609020101020101" pitchFamily="49" charset="-127"/>
+                <a:ea typeface="D2Coding" panose="020B0609020101020101" pitchFamily="49" charset="-127"/>
+              </a:rPr>
+              <a:t>Step 1. </a:t>
+            </a:r>
+            <a:r>
+              <a:rPr lang="en-US" altLang="ko-KR" sz="2800" cap="none" dirty="0" err="1">
+                <a:solidFill>
+                  <a:schemeClr val="bg2">
+                    <a:lumMod val="25000"/>
+                  </a:schemeClr>
+                </a:solidFill>
+                <a:latin typeface="D2Coding" panose="020B0609020101020101" pitchFamily="49" charset="-127"/>
+                <a:ea typeface="D2Coding" panose="020B0609020101020101" pitchFamily="49" charset="-127"/>
+                <a:cs typeface="Segoe UI Light" panose="020B0502040204020203" pitchFamily="34" charset="0"/>
+              </a:rPr>
+              <a:t>Cluste</a:t>
+            </a:r>
+            <a:r>
+              <a:rPr lang="en-US" altLang="ko-KR" sz="2800" cap="none" dirty="0">
+                <a:solidFill>
+                  <a:schemeClr val="bg2">
+                    <a:lumMod val="25000"/>
+                  </a:schemeClr>
+                </a:solidFill>
+                <a:latin typeface="D2Coding" panose="020B0609020101020101" pitchFamily="49" charset="-127"/>
+                <a:ea typeface="D2Coding" panose="020B0609020101020101" pitchFamily="49" charset="-127"/>
+                <a:cs typeface="Segoe UI Light" panose="020B0502040204020203" pitchFamily="34" charset="0"/>
+              </a:rPr>
+              <a:t> 0 Free </a:t>
+            </a:r>
+            <a:r>
+              <a:rPr lang="ko-KR" altLang="en-US" sz="2800" cap="none" dirty="0">
+                <a:solidFill>
+                  <a:schemeClr val="bg2">
+                    <a:lumMod val="25000"/>
+                  </a:schemeClr>
+                </a:solidFill>
+                <a:latin typeface="D2Coding" panose="020B0609020101020101" pitchFamily="49" charset="-127"/>
+                <a:ea typeface="D2Coding" panose="020B0609020101020101" pitchFamily="49" charset="-127"/>
+                <a:cs typeface="Segoe UI Light" panose="020B0502040204020203" pitchFamily="34" charset="0"/>
+              </a:rPr>
+              <a:t>계정 생성</a:t>
+            </a:r>
+          </a:p>
+        </p:txBody>
+      </p:sp>
+      <p:sp>
+        <p:nvSpPr>
+          <p:cNvPr id="2" name="슬라이드 번호 개체 틀 3">
+            <a:extLst>
+              <a:ext uri="{FF2B5EF4-FFF2-40B4-BE49-F238E27FC236}">
+                <a16:creationId xmlns:a16="http://schemas.microsoft.com/office/drawing/2014/main" id="{9A8B1AFF-06C0-D651-908D-DF7EF948D999}"/>
+              </a:ext>
+            </a:extLst>
+          </p:cNvPr>
+          <p:cNvSpPr>
+            <a:spLocks noGrp="1"/>
+          </p:cNvSpPr>
+          <p:nvPr>
+            <p:ph type="sldNum" sz="quarter" idx="12"/>
+          </p:nvPr>
+        </p:nvSpPr>
+        <p:spPr>
+          <a:xfrm>
+            <a:off x="11180761" y="299420"/>
+            <a:ext cx="753545" cy="365125"/>
+          </a:xfrm>
+        </p:spPr>
+        <p:txBody>
+          <a:bodyPr/>
+          <a:lstStyle/>
+          <a:p>
+            <a:fld id="{D57F1E4F-1CFF-5643-939E-217C01CDF565}" type="slidenum">
+              <a:rPr lang="en-US" sz="1400" b="1" smtClean="0"/>
+              <a:pPr/>
+              <a:t>27</a:t>
+            </a:fld>
+            <a:endParaRPr lang="en-US" sz="1400" b="1" dirty="0"/>
+          </a:p>
+        </p:txBody>
+      </p:sp>
+      <p:pic>
+        <p:nvPicPr>
+          <p:cNvPr id="8" name="그림 7">
+            <a:extLst>
+              <a:ext uri="{FF2B5EF4-FFF2-40B4-BE49-F238E27FC236}">
+                <a16:creationId xmlns:a16="http://schemas.microsoft.com/office/drawing/2014/main" id="{1F2F5E51-FA45-F91A-8698-79BF1A9A598D}"/>
+              </a:ext>
+            </a:extLst>
+          </p:cNvPr>
+          <p:cNvPicPr>
+            <a:picLocks noChangeAspect="1"/>
+          </p:cNvPicPr>
+          <p:nvPr/>
+        </p:nvPicPr>
+        <p:blipFill>
+          <a:blip r:embed="rId3"/>
+          <a:stretch>
+            <a:fillRect/>
+          </a:stretch>
+        </p:blipFill>
+        <p:spPr>
+          <a:xfrm>
+            <a:off x="637570" y="1378128"/>
+            <a:ext cx="6439458" cy="1539373"/>
+          </a:xfrm>
+          <a:prstGeom prst="rect">
+            <a:avLst/>
+          </a:prstGeom>
+          <a:ln>
+            <a:solidFill>
+              <a:schemeClr val="tx1"/>
+            </a:solidFill>
+          </a:ln>
+        </p:spPr>
+      </p:pic>
+    </p:spTree>
+    <p:extLst>
+      <p:ext uri="{BB962C8B-B14F-4D97-AF65-F5344CB8AC3E}">
+        <p14:creationId xmlns:p14="http://schemas.microsoft.com/office/powerpoint/2010/main" val="3923690015"/>
+      </p:ext>
+    </p:extLst>
+  </p:cSld>
+  <p:clrMapOvr>
+    <a:masterClrMapping/>
+  </p:clrMapOvr>
+</p:sld>
+</file>
+
+<file path=ppt/slides/slide28.xml><?xml version="1.0" encoding="utf-8"?>
+<p:sld xmlns:a="http://schemas.openxmlformats.org/drawingml/2006/main" xmlns:r="http://schemas.openxmlformats.org/officeDocument/2006/relationships" xmlns:p="http://schemas.openxmlformats.org/presentationml/2006/main">
+  <p:cSld>
+    <p:spTree>
+      <p:nvGrpSpPr>
+        <p:cNvPr id="1" name="">
+          <a:extLst>
+            <a:ext uri="{FF2B5EF4-FFF2-40B4-BE49-F238E27FC236}">
+              <a16:creationId xmlns:a16="http://schemas.microsoft.com/office/drawing/2014/main" id="{F3C12E37-61B6-A3B1-9835-8BA00ACFEDE1}"/>
+            </a:ext>
+          </a:extLst>
+        </p:cNvPr>
+        <p:cNvGrpSpPr/>
+        <p:nvPr/>
+      </p:nvGrpSpPr>
+      <p:grpSpPr>
+        <a:xfrm>
+          <a:off x="0" y="0"/>
+          <a:ext cx="0" cy="0"/>
+          <a:chOff x="0" y="0"/>
+          <a:chExt cx="0" cy="0"/>
+        </a:xfrm>
+      </p:grpSpPr>
+      <p:sp>
+        <p:nvSpPr>
+          <p:cNvPr id="3" name="제목 1">
+            <a:extLst>
+              <a:ext uri="{FF2B5EF4-FFF2-40B4-BE49-F238E27FC236}">
+                <a16:creationId xmlns:a16="http://schemas.microsoft.com/office/drawing/2014/main" id="{34BA29E0-35A1-2386-EE10-DD9EE2407484}"/>
+              </a:ext>
+            </a:extLst>
+          </p:cNvPr>
+          <p:cNvSpPr txBox="1">
+            <a:spLocks/>
+          </p:cNvSpPr>
+          <p:nvPr/>
+        </p:nvSpPr>
+        <p:spPr>
+          <a:xfrm>
+            <a:off x="475645" y="481983"/>
+            <a:ext cx="10353762" cy="766439"/>
+          </a:xfrm>
+          <a:prstGeom prst="rect">
+            <a:avLst/>
+          </a:prstGeom>
+        </p:spPr>
+        <p:txBody>
+          <a:bodyPr vert="horz" lIns="91440" tIns="45720" rIns="91440" bIns="45720" rtlCol="0" anchor="ctr">
+            <a:normAutofit/>
+          </a:bodyPr>
+          <a:lstStyle>
+            <a:lvl1pPr algn="ctr" defTabSz="914400" rtl="0" eaLnBrk="1" latinLnBrk="1" hangingPunct="1">
+              <a:lnSpc>
+                <a:spcPct val="90000"/>
+              </a:lnSpc>
+              <a:spcBef>
+                <a:spcPct val="0"/>
+              </a:spcBef>
+              <a:buNone/>
+              <a:defRPr sz="3200" kern="1200" cap="all" baseline="0">
+                <a:solidFill>
+                  <a:schemeClr val="tx1"/>
+                </a:solidFill>
+                <a:effectLst/>
+                <a:latin typeface="Batang" panose="02030600000101010101" pitchFamily="18" charset="-127"/>
+                <a:ea typeface="Batang" panose="02030600000101010101" pitchFamily="18" charset="-127"/>
+                <a:cs typeface="+mj-cs"/>
+              </a:defRPr>
+            </a:lvl1pPr>
+          </a:lstStyle>
+          <a:p>
+            <a:pPr algn="l"/>
+            <a:r>
+              <a:rPr lang="en-US" altLang="ko-KR" sz="2800" dirty="0">
+                <a:latin typeface="D2Coding" panose="020B0609020101020101" pitchFamily="49" charset="-127"/>
+                <a:ea typeface="D2Coding" panose="020B0609020101020101" pitchFamily="49" charset="-127"/>
+              </a:rPr>
+              <a:t>Step 2. </a:t>
+            </a:r>
+            <a:r>
+              <a:rPr lang="ko-KR" altLang="en-US" sz="2800" dirty="0">
+                <a:latin typeface="D2Coding" panose="020B0609020101020101" pitchFamily="49" charset="-127"/>
+                <a:ea typeface="D2Coding" panose="020B0609020101020101" pitchFamily="49" charset="-127"/>
+              </a:rPr>
+              <a:t>로컬에서 연결할 </a:t>
+            </a:r>
+            <a:r>
+              <a:rPr lang="en-US" altLang="ko-KR" sz="2800" dirty="0" err="1">
+                <a:latin typeface="D2Coding" panose="020B0609020101020101" pitchFamily="49" charset="-127"/>
+                <a:ea typeface="D2Coding" panose="020B0609020101020101" pitchFamily="49" charset="-127"/>
+              </a:rPr>
+              <a:t>url</a:t>
+            </a:r>
+            <a:r>
+              <a:rPr lang="en-US" altLang="ko-KR" sz="2800" dirty="0">
+                <a:latin typeface="D2Coding" panose="020B0609020101020101" pitchFamily="49" charset="-127"/>
+                <a:ea typeface="D2Coding" panose="020B0609020101020101" pitchFamily="49" charset="-127"/>
+              </a:rPr>
+              <a:t> </a:t>
+            </a:r>
+            <a:r>
+              <a:rPr lang="ko-KR" altLang="en-US" sz="2800" dirty="0">
+                <a:latin typeface="D2Coding" panose="020B0609020101020101" pitchFamily="49" charset="-127"/>
+                <a:ea typeface="D2Coding" panose="020B0609020101020101" pitchFamily="49" charset="-127"/>
+              </a:rPr>
+              <a:t>확인</a:t>
+            </a:r>
+            <a:endParaRPr lang="ko-KR" altLang="en-US" sz="2800" cap="none" dirty="0">
+              <a:solidFill>
+                <a:schemeClr val="bg2">
+                  <a:lumMod val="25000"/>
+                </a:schemeClr>
+              </a:solidFill>
+              <a:latin typeface="D2Coding" panose="020B0609020101020101" pitchFamily="49" charset="-127"/>
+              <a:ea typeface="D2Coding" panose="020B0609020101020101" pitchFamily="49" charset="-127"/>
+              <a:cs typeface="Segoe UI Light" panose="020B0502040204020203" pitchFamily="34" charset="0"/>
+            </a:endParaRPr>
+          </a:p>
+        </p:txBody>
+      </p:sp>
+      <p:sp>
+        <p:nvSpPr>
+          <p:cNvPr id="2" name="슬라이드 번호 개체 틀 3">
+            <a:extLst>
+              <a:ext uri="{FF2B5EF4-FFF2-40B4-BE49-F238E27FC236}">
+                <a16:creationId xmlns:a16="http://schemas.microsoft.com/office/drawing/2014/main" id="{C2E8B872-367B-7EC5-F107-5720F4AB4767}"/>
+              </a:ext>
+            </a:extLst>
+          </p:cNvPr>
+          <p:cNvSpPr>
+            <a:spLocks noGrp="1"/>
+          </p:cNvSpPr>
+          <p:nvPr>
+            <p:ph type="sldNum" sz="quarter" idx="12"/>
+          </p:nvPr>
+        </p:nvSpPr>
+        <p:spPr>
+          <a:xfrm>
+            <a:off x="11180761" y="299420"/>
+            <a:ext cx="753545" cy="365125"/>
+          </a:xfrm>
+        </p:spPr>
+        <p:txBody>
+          <a:bodyPr/>
+          <a:lstStyle/>
+          <a:p>
+            <a:fld id="{D57F1E4F-1CFF-5643-939E-217C01CDF565}" type="slidenum">
+              <a:rPr lang="en-US" sz="1400" b="1" smtClean="0"/>
+              <a:pPr/>
+              <a:t>28</a:t>
+            </a:fld>
+            <a:endParaRPr lang="en-US" sz="1400" b="1" dirty="0"/>
+          </a:p>
+        </p:txBody>
+      </p:sp>
+      <p:pic>
+        <p:nvPicPr>
+          <p:cNvPr id="5" name="그림 4">
+            <a:extLst>
+              <a:ext uri="{FF2B5EF4-FFF2-40B4-BE49-F238E27FC236}">
+                <a16:creationId xmlns:a16="http://schemas.microsoft.com/office/drawing/2014/main" id="{AD7C328A-73D3-DE14-6912-50910D2A4461}"/>
+              </a:ext>
+            </a:extLst>
+          </p:cNvPr>
+          <p:cNvPicPr>
+            <a:picLocks noChangeAspect="1"/>
+          </p:cNvPicPr>
+          <p:nvPr/>
+        </p:nvPicPr>
+        <p:blipFill>
+          <a:blip r:embed="rId2"/>
+          <a:stretch>
+            <a:fillRect/>
+          </a:stretch>
+        </p:blipFill>
+        <p:spPr>
+          <a:xfrm>
+            <a:off x="795826" y="1478040"/>
+            <a:ext cx="8967300" cy="4636719"/>
+          </a:xfrm>
+          <a:prstGeom prst="rect">
+            <a:avLst/>
+          </a:prstGeom>
+          <a:ln>
+            <a:solidFill>
+              <a:schemeClr val="tx1"/>
+            </a:solidFill>
+          </a:ln>
+        </p:spPr>
+      </p:pic>
+      <p:sp>
+        <p:nvSpPr>
+          <p:cNvPr id="10" name="직사각형 9">
+            <a:extLst>
+              <a:ext uri="{FF2B5EF4-FFF2-40B4-BE49-F238E27FC236}">
+                <a16:creationId xmlns:a16="http://schemas.microsoft.com/office/drawing/2014/main" id="{9C76D057-4526-2874-D974-9EA6EF61897C}"/>
+              </a:ext>
+            </a:extLst>
+          </p:cNvPr>
+          <p:cNvSpPr/>
+          <p:nvPr/>
+        </p:nvSpPr>
+        <p:spPr>
+          <a:xfrm>
+            <a:off x="3209926" y="2666999"/>
+            <a:ext cx="571500" cy="333375"/>
+          </a:xfrm>
+          <a:prstGeom prst="rect">
+            <a:avLst/>
+          </a:prstGeom>
+          <a:noFill/>
+          <a:ln w="38100">
+            <a:solidFill>
+              <a:srgbClr val="FF0000"/>
+            </a:solidFill>
+          </a:ln>
+        </p:spPr>
+        <p:style>
+          <a:lnRef idx="2">
+            <a:schemeClr val="accent1">
+              <a:shade val="15000"/>
+            </a:schemeClr>
+          </a:lnRef>
+          <a:fillRef idx="1">
+            <a:schemeClr val="accent1"/>
+          </a:fillRef>
+          <a:effectRef idx="0">
+            <a:schemeClr val="accent1"/>
+          </a:effectRef>
+          <a:fontRef idx="minor">
+            <a:schemeClr val="lt1"/>
+          </a:fontRef>
+        </p:style>
+        <p:txBody>
+          <a:bodyPr rtlCol="0" anchor="ctr"/>
+          <a:lstStyle/>
+          <a:p>
+            <a:pPr algn="ctr"/>
+            <a:endParaRPr lang="ko-KR" altLang="en-US"/>
+          </a:p>
+        </p:txBody>
+      </p:sp>
+      <p:sp>
+        <p:nvSpPr>
+          <p:cNvPr id="11" name="직사각형 10">
+            <a:extLst>
+              <a:ext uri="{FF2B5EF4-FFF2-40B4-BE49-F238E27FC236}">
+                <a16:creationId xmlns:a16="http://schemas.microsoft.com/office/drawing/2014/main" id="{7563B121-9D19-9DD7-7088-7AB5369FBAC9}"/>
+              </a:ext>
+            </a:extLst>
+          </p:cNvPr>
+          <p:cNvSpPr/>
+          <p:nvPr/>
+        </p:nvSpPr>
+        <p:spPr>
+          <a:xfrm>
+            <a:off x="742950" y="2409825"/>
+            <a:ext cx="1704975" cy="266700"/>
+          </a:xfrm>
+          <a:prstGeom prst="rect">
+            <a:avLst/>
+          </a:prstGeom>
+          <a:noFill/>
+          <a:ln w="38100">
+            <a:solidFill>
+              <a:srgbClr val="FF0000"/>
+            </a:solidFill>
+          </a:ln>
+        </p:spPr>
+        <p:style>
+          <a:lnRef idx="2">
+            <a:schemeClr val="accent1">
+              <a:shade val="15000"/>
+            </a:schemeClr>
+          </a:lnRef>
+          <a:fillRef idx="1">
+            <a:schemeClr val="accent1"/>
+          </a:fillRef>
+          <a:effectRef idx="0">
+            <a:schemeClr val="accent1"/>
+          </a:effectRef>
+          <a:fontRef idx="minor">
+            <a:schemeClr val="lt1"/>
+          </a:fontRef>
+        </p:style>
+        <p:txBody>
+          <a:bodyPr rtlCol="0" anchor="ctr"/>
+          <a:lstStyle/>
+          <a:p>
+            <a:pPr algn="ctr"/>
+            <a:endParaRPr lang="ko-KR" altLang="en-US"/>
+          </a:p>
+        </p:txBody>
+      </p:sp>
+    </p:spTree>
+    <p:extLst>
+      <p:ext uri="{BB962C8B-B14F-4D97-AF65-F5344CB8AC3E}">
+        <p14:creationId xmlns:p14="http://schemas.microsoft.com/office/powerpoint/2010/main" val="2563623923"/>
+      </p:ext>
+    </p:extLst>
+  </p:cSld>
+  <p:clrMapOvr>
+    <a:masterClrMapping/>
+  </p:clrMapOvr>
+</p:sld>
+</file>
+
+<file path=ppt/slides/slide29.xml><?xml version="1.0" encoding="utf-8"?>
+<p:sld xmlns:a="http://schemas.openxmlformats.org/drawingml/2006/main" xmlns:r="http://schemas.openxmlformats.org/officeDocument/2006/relationships" xmlns:p="http://schemas.openxmlformats.org/presentationml/2006/main">
+  <p:cSld>
+    <p:spTree>
+      <p:nvGrpSpPr>
+        <p:cNvPr id="1" name="">
+          <a:extLst>
+            <a:ext uri="{FF2B5EF4-FFF2-40B4-BE49-F238E27FC236}">
+              <a16:creationId xmlns:a16="http://schemas.microsoft.com/office/drawing/2014/main" id="{3F18B791-3E61-0C54-DD20-2C5BAFD4BBF6}"/>
+            </a:ext>
+          </a:extLst>
+        </p:cNvPr>
+        <p:cNvGrpSpPr/>
+        <p:nvPr/>
+      </p:nvGrpSpPr>
+      <p:grpSpPr>
+        <a:xfrm>
+          <a:off x="0" y="0"/>
+          <a:ext cx="0" cy="0"/>
+          <a:chOff x="0" y="0"/>
+          <a:chExt cx="0" cy="0"/>
+        </a:xfrm>
+      </p:grpSpPr>
+      <p:sp>
+        <p:nvSpPr>
+          <p:cNvPr id="3" name="제목 1">
+            <a:extLst>
+              <a:ext uri="{FF2B5EF4-FFF2-40B4-BE49-F238E27FC236}">
+                <a16:creationId xmlns:a16="http://schemas.microsoft.com/office/drawing/2014/main" id="{A8C5A3EF-6741-1122-85C2-00C130673836}"/>
+              </a:ext>
+            </a:extLst>
+          </p:cNvPr>
+          <p:cNvSpPr txBox="1">
+            <a:spLocks/>
+          </p:cNvSpPr>
+          <p:nvPr/>
+        </p:nvSpPr>
+        <p:spPr>
+          <a:xfrm>
+            <a:off x="475645" y="481983"/>
+            <a:ext cx="10353762" cy="766439"/>
+          </a:xfrm>
+          <a:prstGeom prst="rect">
+            <a:avLst/>
+          </a:prstGeom>
+        </p:spPr>
+        <p:txBody>
+          <a:bodyPr vert="horz" lIns="91440" tIns="45720" rIns="91440" bIns="45720" rtlCol="0" anchor="ctr">
+            <a:normAutofit/>
+          </a:bodyPr>
+          <a:lstStyle>
+            <a:lvl1pPr algn="ctr" defTabSz="914400" rtl="0" eaLnBrk="1" latinLnBrk="1" hangingPunct="1">
+              <a:lnSpc>
+                <a:spcPct val="90000"/>
+              </a:lnSpc>
+              <a:spcBef>
+                <a:spcPct val="0"/>
+              </a:spcBef>
+              <a:buNone/>
+              <a:defRPr sz="3200" kern="1200" cap="all" baseline="0">
+                <a:solidFill>
+                  <a:schemeClr val="tx1"/>
+                </a:solidFill>
+                <a:effectLst/>
+                <a:latin typeface="Batang" panose="02030600000101010101" pitchFamily="18" charset="-127"/>
+                <a:ea typeface="Batang" panose="02030600000101010101" pitchFamily="18" charset="-127"/>
+                <a:cs typeface="+mj-cs"/>
+              </a:defRPr>
+            </a:lvl1pPr>
+          </a:lstStyle>
+          <a:p>
+            <a:pPr algn="l"/>
+            <a:r>
+              <a:rPr lang="en-US" altLang="ko-KR" sz="2800" dirty="0">
+                <a:latin typeface="D2Coding" panose="020B0609020101020101" pitchFamily="49" charset="-127"/>
+                <a:ea typeface="D2Coding" panose="020B0609020101020101" pitchFamily="49" charset="-127"/>
+              </a:rPr>
+              <a:t>Step 2. </a:t>
+            </a:r>
+            <a:r>
+              <a:rPr lang="ko-KR" altLang="en-US" sz="2800" dirty="0">
+                <a:latin typeface="D2Coding" panose="020B0609020101020101" pitchFamily="49" charset="-127"/>
+                <a:ea typeface="D2Coding" panose="020B0609020101020101" pitchFamily="49" charset="-127"/>
+              </a:rPr>
+              <a:t>로컬에서 연결할 </a:t>
+            </a:r>
+            <a:r>
+              <a:rPr lang="en-US" altLang="ko-KR" sz="2800" dirty="0" err="1">
+                <a:latin typeface="D2Coding" panose="020B0609020101020101" pitchFamily="49" charset="-127"/>
+                <a:ea typeface="D2Coding" panose="020B0609020101020101" pitchFamily="49" charset="-127"/>
+              </a:rPr>
+              <a:t>url</a:t>
+            </a:r>
+            <a:r>
+              <a:rPr lang="en-US" altLang="ko-KR" sz="2800" dirty="0">
+                <a:latin typeface="D2Coding" panose="020B0609020101020101" pitchFamily="49" charset="-127"/>
+                <a:ea typeface="D2Coding" panose="020B0609020101020101" pitchFamily="49" charset="-127"/>
+              </a:rPr>
+              <a:t> </a:t>
+            </a:r>
+            <a:r>
+              <a:rPr lang="ko-KR" altLang="en-US" sz="2800" dirty="0">
+                <a:latin typeface="D2Coding" panose="020B0609020101020101" pitchFamily="49" charset="-127"/>
+                <a:ea typeface="D2Coding" panose="020B0609020101020101" pitchFamily="49" charset="-127"/>
+              </a:rPr>
+              <a:t>확인</a:t>
+            </a:r>
+            <a:endParaRPr lang="ko-KR" altLang="en-US" sz="2800" cap="none" dirty="0">
+              <a:solidFill>
+                <a:schemeClr val="bg2">
+                  <a:lumMod val="25000"/>
+                </a:schemeClr>
+              </a:solidFill>
+              <a:latin typeface="D2Coding" panose="020B0609020101020101" pitchFamily="49" charset="-127"/>
+              <a:ea typeface="D2Coding" panose="020B0609020101020101" pitchFamily="49" charset="-127"/>
+              <a:cs typeface="Segoe UI Light" panose="020B0502040204020203" pitchFamily="34" charset="0"/>
+            </a:endParaRPr>
+          </a:p>
+        </p:txBody>
+      </p:sp>
+      <p:sp>
+        <p:nvSpPr>
+          <p:cNvPr id="2" name="슬라이드 번호 개체 틀 3">
+            <a:extLst>
+              <a:ext uri="{FF2B5EF4-FFF2-40B4-BE49-F238E27FC236}">
+                <a16:creationId xmlns:a16="http://schemas.microsoft.com/office/drawing/2014/main" id="{0554591E-8CCD-2B65-C1F2-FFC1C9F7E180}"/>
+              </a:ext>
+            </a:extLst>
+          </p:cNvPr>
+          <p:cNvSpPr>
+            <a:spLocks noGrp="1"/>
+          </p:cNvSpPr>
+          <p:nvPr>
+            <p:ph type="sldNum" sz="quarter" idx="12"/>
+          </p:nvPr>
+        </p:nvSpPr>
+        <p:spPr>
+          <a:xfrm>
+            <a:off x="11180761" y="299420"/>
+            <a:ext cx="753545" cy="365125"/>
+          </a:xfrm>
+        </p:spPr>
+        <p:txBody>
+          <a:bodyPr/>
+          <a:lstStyle/>
+          <a:p>
+            <a:fld id="{D57F1E4F-1CFF-5643-939E-217C01CDF565}" type="slidenum">
+              <a:rPr lang="en-US" sz="1400" b="1" smtClean="0"/>
+              <a:pPr/>
+              <a:t>29</a:t>
+            </a:fld>
+            <a:endParaRPr lang="en-US" sz="1400" b="1" dirty="0"/>
+          </a:p>
+        </p:txBody>
+      </p:sp>
+      <p:pic>
+        <p:nvPicPr>
+          <p:cNvPr id="7" name="그림 6">
+            <a:extLst>
+              <a:ext uri="{FF2B5EF4-FFF2-40B4-BE49-F238E27FC236}">
+                <a16:creationId xmlns:a16="http://schemas.microsoft.com/office/drawing/2014/main" id="{F3E5A94F-C094-593A-51B8-FD711D14FA77}"/>
+              </a:ext>
+            </a:extLst>
+          </p:cNvPr>
+          <p:cNvPicPr>
+            <a:picLocks noChangeAspect="1"/>
+          </p:cNvPicPr>
+          <p:nvPr/>
+        </p:nvPicPr>
+        <p:blipFill>
+          <a:blip r:embed="rId2"/>
+          <a:stretch>
+            <a:fillRect/>
+          </a:stretch>
+        </p:blipFill>
+        <p:spPr>
+          <a:xfrm>
+            <a:off x="668413" y="1396238"/>
+            <a:ext cx="4752539" cy="4979779"/>
+          </a:xfrm>
+          <a:prstGeom prst="rect">
+            <a:avLst/>
+          </a:prstGeom>
+          <a:ln>
+            <a:solidFill>
+              <a:schemeClr val="tx1"/>
+            </a:solidFill>
+          </a:ln>
+        </p:spPr>
+      </p:pic>
+      <p:pic>
+        <p:nvPicPr>
+          <p:cNvPr id="9" name="그림 8">
+            <a:extLst>
+              <a:ext uri="{FF2B5EF4-FFF2-40B4-BE49-F238E27FC236}">
+                <a16:creationId xmlns:a16="http://schemas.microsoft.com/office/drawing/2014/main" id="{78D1B53B-DE15-BE81-4F08-E28625AB271D}"/>
+              </a:ext>
+            </a:extLst>
+          </p:cNvPr>
+          <p:cNvPicPr>
+            <a:picLocks noChangeAspect="1"/>
+          </p:cNvPicPr>
+          <p:nvPr/>
+        </p:nvPicPr>
+        <p:blipFill>
+          <a:blip r:embed="rId3"/>
+          <a:stretch>
+            <a:fillRect/>
+          </a:stretch>
+        </p:blipFill>
+        <p:spPr>
+          <a:xfrm>
+            <a:off x="6174187" y="1396238"/>
+            <a:ext cx="4536850" cy="4979779"/>
+          </a:xfrm>
+          <a:prstGeom prst="rect">
+            <a:avLst/>
+          </a:prstGeom>
+          <a:ln>
+            <a:solidFill>
+              <a:schemeClr val="tx1"/>
+            </a:solidFill>
+          </a:ln>
+        </p:spPr>
+      </p:pic>
+      <p:sp>
+        <p:nvSpPr>
+          <p:cNvPr id="4" name="직사각형 3">
+            <a:extLst>
+              <a:ext uri="{FF2B5EF4-FFF2-40B4-BE49-F238E27FC236}">
+                <a16:creationId xmlns:a16="http://schemas.microsoft.com/office/drawing/2014/main" id="{3C4D7246-F24B-AA99-4519-C71AC07B7164}"/>
+              </a:ext>
+            </a:extLst>
+          </p:cNvPr>
+          <p:cNvSpPr/>
+          <p:nvPr/>
+        </p:nvSpPr>
+        <p:spPr>
+          <a:xfrm>
+            <a:off x="668413" y="2543174"/>
+            <a:ext cx="4846562" cy="600076"/>
+          </a:xfrm>
+          <a:prstGeom prst="rect">
+            <a:avLst/>
+          </a:prstGeom>
+          <a:noFill/>
+          <a:ln w="38100">
+            <a:solidFill>
+              <a:srgbClr val="FF0000"/>
+            </a:solidFill>
+          </a:ln>
+        </p:spPr>
+        <p:style>
+          <a:lnRef idx="2">
+            <a:schemeClr val="accent1">
+              <a:shade val="15000"/>
+            </a:schemeClr>
+          </a:lnRef>
+          <a:fillRef idx="1">
+            <a:schemeClr val="accent1"/>
+          </a:fillRef>
+          <a:effectRef idx="0">
+            <a:schemeClr val="accent1"/>
+          </a:effectRef>
+          <a:fontRef idx="minor">
+            <a:schemeClr val="lt1"/>
+          </a:fontRef>
+        </p:style>
+        <p:txBody>
+          <a:bodyPr rtlCol="0" anchor="ctr"/>
+          <a:lstStyle/>
+          <a:p>
+            <a:pPr algn="ctr"/>
+            <a:endParaRPr lang="ko-KR" altLang="en-US"/>
+          </a:p>
+        </p:txBody>
+      </p:sp>
+      <p:sp>
+        <p:nvSpPr>
+          <p:cNvPr id="6" name="직사각형 5">
+            <a:extLst>
+              <a:ext uri="{FF2B5EF4-FFF2-40B4-BE49-F238E27FC236}">
+                <a16:creationId xmlns:a16="http://schemas.microsoft.com/office/drawing/2014/main" id="{9B2CF6D5-3F50-E3E7-DF09-3806223BFBD7}"/>
+              </a:ext>
+            </a:extLst>
+          </p:cNvPr>
+          <p:cNvSpPr/>
+          <p:nvPr/>
+        </p:nvSpPr>
+        <p:spPr>
+          <a:xfrm>
+            <a:off x="5971415" y="4686299"/>
+            <a:ext cx="4857991" cy="371476"/>
+          </a:xfrm>
+          <a:prstGeom prst="rect">
+            <a:avLst/>
+          </a:prstGeom>
+          <a:noFill/>
+          <a:ln w="38100">
+            <a:solidFill>
+              <a:srgbClr val="FF0000"/>
+            </a:solidFill>
+          </a:ln>
+        </p:spPr>
+        <p:style>
+          <a:lnRef idx="2">
+            <a:schemeClr val="accent1">
+              <a:shade val="15000"/>
+            </a:schemeClr>
+          </a:lnRef>
+          <a:fillRef idx="1">
+            <a:schemeClr val="accent1"/>
+          </a:fillRef>
+          <a:effectRef idx="0">
+            <a:schemeClr val="accent1"/>
+          </a:effectRef>
+          <a:fontRef idx="minor">
+            <a:schemeClr val="lt1"/>
+          </a:fontRef>
+        </p:style>
+        <p:txBody>
+          <a:bodyPr rtlCol="0" anchor="ctr"/>
+          <a:lstStyle/>
+          <a:p>
+            <a:pPr algn="ctr"/>
+            <a:endParaRPr lang="ko-KR" altLang="en-US"/>
+          </a:p>
+        </p:txBody>
+      </p:sp>
+      <p:sp>
+        <p:nvSpPr>
+          <p:cNvPr id="11" name="설명선: 굽은 선 10">
+            <a:extLst>
+              <a:ext uri="{FF2B5EF4-FFF2-40B4-BE49-F238E27FC236}">
+                <a16:creationId xmlns:a16="http://schemas.microsoft.com/office/drawing/2014/main" id="{419F74B0-BFA2-0A0D-B8E2-D2B009760601}"/>
+              </a:ext>
+            </a:extLst>
+          </p:cNvPr>
+          <p:cNvSpPr/>
+          <p:nvPr/>
+        </p:nvSpPr>
+        <p:spPr>
+          <a:xfrm>
+            <a:off x="7620000" y="5205591"/>
+            <a:ext cx="4114800" cy="1042809"/>
+          </a:xfrm>
+          <a:prstGeom prst="borderCallout2">
+            <a:avLst>
+              <a:gd name="adj1" fmla="val 18750"/>
+              <a:gd name="adj2" fmla="val -8333"/>
+              <a:gd name="adj3" fmla="val 18750"/>
+              <a:gd name="adj4" fmla="val -16667"/>
+              <a:gd name="adj5" fmla="val -29689"/>
+              <a:gd name="adj6" fmla="val -22721"/>
+            </a:avLst>
+          </a:prstGeom>
+          <a:solidFill>
+            <a:schemeClr val="tx1"/>
+          </a:solidFill>
+          <a:ln>
+            <a:headEnd type="none" w="med" len="med"/>
+            <a:tailEnd type="triangle" w="med" len="med"/>
+          </a:ln>
+        </p:spPr>
+        <p:style>
+          <a:lnRef idx="2">
+            <a:schemeClr val="accent1">
+              <a:shade val="15000"/>
+            </a:schemeClr>
+          </a:lnRef>
+          <a:fillRef idx="1">
+            <a:schemeClr val="accent1"/>
+          </a:fillRef>
+          <a:effectRef idx="0">
+            <a:schemeClr val="accent1"/>
+          </a:effectRef>
+          <a:fontRef idx="minor">
+            <a:schemeClr val="lt1"/>
+          </a:fontRef>
+        </p:style>
+        <p:txBody>
+          <a:bodyPr rtlCol="0" anchor="ctr"/>
+          <a:lstStyle/>
+          <a:p>
+            <a:pPr algn="ctr"/>
+            <a:r>
+              <a:rPr lang="en-US" altLang="ko-KR" sz="1200" dirty="0">
+                <a:solidFill>
+                  <a:schemeClr val="bg1"/>
+                </a:solidFill>
+                <a:latin typeface="D2Coding" panose="020B0609020101020101" pitchFamily="49" charset="-127"/>
+                <a:ea typeface="D2Coding" panose="020B0609020101020101" pitchFamily="49" charset="-127"/>
+              </a:rPr>
+              <a:t>python</a:t>
+            </a:r>
+            <a:r>
+              <a:rPr lang="ko-KR" altLang="en-US" sz="1200" dirty="0">
+                <a:solidFill>
+                  <a:schemeClr val="bg1"/>
+                </a:solidFill>
+                <a:latin typeface="D2Coding" panose="020B0609020101020101" pitchFamily="49" charset="-127"/>
+                <a:ea typeface="D2Coding" panose="020B0609020101020101" pitchFamily="49" charset="-127"/>
+              </a:rPr>
+              <a:t> 코드에서 접속할 </a:t>
+            </a:r>
+            <a:r>
+              <a:rPr lang="en-US" altLang="ko-KR" sz="1200" dirty="0" err="1">
+                <a:solidFill>
+                  <a:schemeClr val="bg1"/>
+                </a:solidFill>
+                <a:latin typeface="D2Coding" panose="020B0609020101020101" pitchFamily="49" charset="-127"/>
+                <a:ea typeface="D2Coding" panose="020B0609020101020101" pitchFamily="49" charset="-127"/>
+              </a:rPr>
+              <a:t>url</a:t>
+            </a:r>
+            <a:r>
+              <a:rPr lang="ko-KR" altLang="en-US" sz="1200" dirty="0">
+                <a:solidFill>
+                  <a:schemeClr val="bg1"/>
+                </a:solidFill>
+                <a:latin typeface="D2Coding" panose="020B0609020101020101" pitchFamily="49" charset="-127"/>
+                <a:ea typeface="D2Coding" panose="020B0609020101020101" pitchFamily="49" charset="-127"/>
+              </a:rPr>
+              <a:t>로 </a:t>
+            </a:r>
+            <a:r>
+              <a:rPr lang="en-US" altLang="ko-KR" sz="1200" dirty="0">
+                <a:solidFill>
+                  <a:schemeClr val="bg1"/>
+                </a:solidFill>
+                <a:latin typeface="D2Coding" panose="020B0609020101020101" pitchFamily="49" charset="-127"/>
+                <a:ea typeface="D2Coding" panose="020B0609020101020101" pitchFamily="49" charset="-127"/>
+              </a:rPr>
+              <a:t>DB</a:t>
+            </a:r>
+            <a:r>
+              <a:rPr lang="ko-KR" altLang="en-US" sz="1200" dirty="0">
+                <a:solidFill>
+                  <a:schemeClr val="bg1"/>
+                </a:solidFill>
+                <a:latin typeface="D2Coding" panose="020B0609020101020101" pitchFamily="49" charset="-127"/>
+                <a:ea typeface="D2Coding" panose="020B0609020101020101" pitchFamily="49" charset="-127"/>
+              </a:rPr>
+              <a:t> 사용자 계정과 암호는 이대로 놔두고 코드에서</a:t>
+            </a:r>
+            <a:r>
+              <a:rPr lang="en-US" altLang="ko-KR" sz="1200" dirty="0">
+                <a:solidFill>
+                  <a:schemeClr val="bg1"/>
+                </a:solidFill>
+                <a:latin typeface="D2Coding" panose="020B0609020101020101" pitchFamily="49" charset="-127"/>
+                <a:ea typeface="D2Coding" panose="020B0609020101020101" pitchFamily="49" charset="-127"/>
+              </a:rPr>
+              <a:t> </a:t>
+            </a:r>
+            <a:r>
+              <a:rPr lang="ko-KR" altLang="en-US" sz="1200" dirty="0">
+                <a:solidFill>
+                  <a:schemeClr val="bg1"/>
+                </a:solidFill>
+                <a:latin typeface="D2Coding" panose="020B0609020101020101" pitchFamily="49" charset="-127"/>
+                <a:ea typeface="D2Coding" panose="020B0609020101020101" pitchFamily="49" charset="-127"/>
+              </a:rPr>
+              <a:t>설정 </a:t>
+            </a:r>
+            <a:r>
+              <a:rPr lang="en-US" altLang="ko-KR" sz="1200" dirty="0">
+                <a:solidFill>
+                  <a:schemeClr val="bg1"/>
+                </a:solidFill>
+                <a:latin typeface="D2Coding" panose="020B0609020101020101" pitchFamily="49" charset="-127"/>
+                <a:ea typeface="D2Coding" panose="020B0609020101020101" pitchFamily="49" charset="-127"/>
+              </a:rPr>
+              <a:t> </a:t>
+            </a:r>
+          </a:p>
+          <a:p>
+            <a:pPr algn="ctr"/>
+            <a:r>
+              <a:rPr lang="en-US" altLang="ko-KR" sz="1100" dirty="0">
+                <a:latin typeface="D2Coding" panose="020B0609020101020101" pitchFamily="49" charset="-127"/>
+                <a:ea typeface="D2Coding" panose="020B0609020101020101" pitchFamily="49" charset="-127"/>
+              </a:rPr>
+              <a:t>MONGO_URI = "</a:t>
+            </a:r>
+            <a:r>
+              <a:rPr lang="en-US" altLang="ko-KR" sz="1100" dirty="0" err="1">
+                <a:latin typeface="D2Coding" panose="020B0609020101020101" pitchFamily="49" charset="-127"/>
+                <a:ea typeface="D2Coding" panose="020B0609020101020101" pitchFamily="49" charset="-127"/>
+              </a:rPr>
+              <a:t>mongodb+srv</a:t>
+            </a:r>
+            <a:r>
+              <a:rPr lang="en-US" altLang="ko-KR" sz="1100" dirty="0">
+                <a:latin typeface="D2Coding" panose="020B0609020101020101" pitchFamily="49" charset="-127"/>
+                <a:ea typeface="D2Coding" panose="020B0609020101020101" pitchFamily="49" charset="-127"/>
+              </a:rPr>
+              <a:t>://ancestorcho30:1024@cluster0.bbz7on7.mongodb.net/?</a:t>
+            </a:r>
+            <a:r>
+              <a:rPr lang="en-US" altLang="ko-KR" sz="1100" dirty="0" err="1">
+                <a:latin typeface="D2Coding" panose="020B0609020101020101" pitchFamily="49" charset="-127"/>
+                <a:ea typeface="D2Coding" panose="020B0609020101020101" pitchFamily="49" charset="-127"/>
+              </a:rPr>
+              <a:t>retryWrites</a:t>
+            </a:r>
+            <a:r>
+              <a:rPr lang="en-US" altLang="ko-KR" sz="1100" dirty="0">
+                <a:latin typeface="D2Coding" panose="020B0609020101020101" pitchFamily="49" charset="-127"/>
+                <a:ea typeface="D2Coding" panose="020B0609020101020101" pitchFamily="49" charset="-127"/>
+              </a:rPr>
+              <a:t>=</a:t>
+            </a:r>
+            <a:r>
+              <a:rPr lang="en-US" altLang="ko-KR" sz="1100" dirty="0" err="1">
+                <a:latin typeface="D2Coding" panose="020B0609020101020101" pitchFamily="49" charset="-127"/>
+                <a:ea typeface="D2Coding" panose="020B0609020101020101" pitchFamily="49" charset="-127"/>
+              </a:rPr>
+              <a:t>true&amp;w</a:t>
+            </a:r>
+            <a:r>
+              <a:rPr lang="en-US" altLang="ko-KR" sz="1100" dirty="0">
+                <a:latin typeface="D2Coding" panose="020B0609020101020101" pitchFamily="49" charset="-127"/>
+                <a:ea typeface="D2Coding" panose="020B0609020101020101" pitchFamily="49" charset="-127"/>
+              </a:rPr>
+              <a:t>=</a:t>
+            </a:r>
+            <a:r>
+              <a:rPr lang="en-US" altLang="ko-KR" sz="1100" dirty="0" err="1">
+                <a:latin typeface="D2Coding" panose="020B0609020101020101" pitchFamily="49" charset="-127"/>
+                <a:ea typeface="D2Coding" panose="020B0609020101020101" pitchFamily="49" charset="-127"/>
+              </a:rPr>
+              <a:t>majority&amp;appName</a:t>
+            </a:r>
+            <a:r>
+              <a:rPr lang="en-US" altLang="ko-KR" sz="1100" dirty="0">
+                <a:latin typeface="D2Coding" panose="020B0609020101020101" pitchFamily="49" charset="-127"/>
+                <a:ea typeface="D2Coding" panose="020B0609020101020101" pitchFamily="49" charset="-127"/>
+              </a:rPr>
+              <a:t>=Cluster0"</a:t>
+            </a:r>
+            <a:endParaRPr lang="en-US" altLang="ko-KR" sz="1400" dirty="0">
+              <a:latin typeface="D2Coding" panose="020B0609020101020101" pitchFamily="49" charset="-127"/>
+              <a:ea typeface="D2Coding" panose="020B0609020101020101" pitchFamily="49" charset="-127"/>
+            </a:endParaRPr>
+          </a:p>
+        </p:txBody>
+      </p:sp>
+    </p:spTree>
+    <p:extLst>
+      <p:ext uri="{BB962C8B-B14F-4D97-AF65-F5344CB8AC3E}">
+        <p14:creationId xmlns:p14="http://schemas.microsoft.com/office/powerpoint/2010/main" val="74701567"/>
+      </p:ext>
+    </p:extLst>
+  </p:cSld>
+  <p:clrMapOvr>
+    <a:masterClrMapping/>
+  </p:clrMapOvr>
+</p:sld>
+</file>
+
 <file path=ppt/slides/slide3.xml><?xml version="1.0" encoding="utf-8"?>
 <p:sld xmlns:a="http://schemas.openxmlformats.org/drawingml/2006/main" xmlns:r="http://schemas.openxmlformats.org/officeDocument/2006/relationships" xmlns:p="http://schemas.openxmlformats.org/presentationml/2006/main">
   <p:cSld>
@@ -15953,6 +17586,3351 @@
     <p:extLst>
       <p:ext uri="{BB962C8B-B14F-4D97-AF65-F5344CB8AC3E}">
         <p14:creationId xmlns:p14="http://schemas.microsoft.com/office/powerpoint/2010/main" val="1435850910"/>
+      </p:ext>
+    </p:extLst>
+  </p:cSld>
+  <p:clrMapOvr>
+    <a:masterClrMapping/>
+  </p:clrMapOvr>
+</p:sld>
+</file>
+
+<file path=ppt/slides/slide30.xml><?xml version="1.0" encoding="utf-8"?>
+<p:sld xmlns:a="http://schemas.openxmlformats.org/drawingml/2006/main" xmlns:r="http://schemas.openxmlformats.org/officeDocument/2006/relationships" xmlns:p="http://schemas.openxmlformats.org/presentationml/2006/main">
+  <p:cSld>
+    <p:spTree>
+      <p:nvGrpSpPr>
+        <p:cNvPr id="1" name="">
+          <a:extLst>
+            <a:ext uri="{FF2B5EF4-FFF2-40B4-BE49-F238E27FC236}">
+              <a16:creationId xmlns:a16="http://schemas.microsoft.com/office/drawing/2014/main" id="{FE47FEC2-21F9-7E64-517A-41C42F7D86BD}"/>
+            </a:ext>
+          </a:extLst>
+        </p:cNvPr>
+        <p:cNvGrpSpPr/>
+        <p:nvPr/>
+      </p:nvGrpSpPr>
+      <p:grpSpPr>
+        <a:xfrm>
+          <a:off x="0" y="0"/>
+          <a:ext cx="0" cy="0"/>
+          <a:chOff x="0" y="0"/>
+          <a:chExt cx="0" cy="0"/>
+        </a:xfrm>
+      </p:grpSpPr>
+      <p:sp>
+        <p:nvSpPr>
+          <p:cNvPr id="3" name="제목 1">
+            <a:extLst>
+              <a:ext uri="{FF2B5EF4-FFF2-40B4-BE49-F238E27FC236}">
+                <a16:creationId xmlns:a16="http://schemas.microsoft.com/office/drawing/2014/main" id="{724F049A-644A-BAE4-12AD-CB05C4F1CB13}"/>
+              </a:ext>
+            </a:extLst>
+          </p:cNvPr>
+          <p:cNvSpPr txBox="1">
+            <a:spLocks/>
+          </p:cNvSpPr>
+          <p:nvPr/>
+        </p:nvSpPr>
+        <p:spPr>
+          <a:xfrm>
+            <a:off x="475645" y="481983"/>
+            <a:ext cx="10353762" cy="766439"/>
+          </a:xfrm>
+          <a:prstGeom prst="rect">
+            <a:avLst/>
+          </a:prstGeom>
+        </p:spPr>
+        <p:txBody>
+          <a:bodyPr vert="horz" lIns="91440" tIns="45720" rIns="91440" bIns="45720" rtlCol="0" anchor="ctr">
+            <a:normAutofit/>
+          </a:bodyPr>
+          <a:lstStyle>
+            <a:lvl1pPr algn="ctr" defTabSz="914400" rtl="0" eaLnBrk="1" latinLnBrk="1" hangingPunct="1">
+              <a:lnSpc>
+                <a:spcPct val="90000"/>
+              </a:lnSpc>
+              <a:spcBef>
+                <a:spcPct val="0"/>
+              </a:spcBef>
+              <a:buNone/>
+              <a:defRPr sz="3200" kern="1200" cap="all" baseline="0">
+                <a:solidFill>
+                  <a:schemeClr val="tx1"/>
+                </a:solidFill>
+                <a:effectLst/>
+                <a:latin typeface="Batang" panose="02030600000101010101" pitchFamily="18" charset="-127"/>
+                <a:ea typeface="Batang" panose="02030600000101010101" pitchFamily="18" charset="-127"/>
+                <a:cs typeface="+mj-cs"/>
+              </a:defRPr>
+            </a:lvl1pPr>
+          </a:lstStyle>
+          <a:p>
+            <a:pPr algn="l"/>
+            <a:r>
+              <a:rPr lang="en-US" altLang="ko-KR" sz="2800" dirty="0">
+                <a:latin typeface="D2Coding" panose="020B0609020101020101" pitchFamily="49" charset="-127"/>
+                <a:ea typeface="D2Coding" panose="020B0609020101020101" pitchFamily="49" charset="-127"/>
+              </a:rPr>
+              <a:t>Step 3. </a:t>
+            </a:r>
+            <a:r>
+              <a:rPr lang="ko-KR" altLang="en-US" sz="2800" dirty="0">
+                <a:latin typeface="D2Coding" panose="020B0609020101020101" pitchFamily="49" charset="-127"/>
+                <a:ea typeface="D2Coding" panose="020B0609020101020101" pitchFamily="49" charset="-127"/>
+              </a:rPr>
+              <a:t>로컬에서 연결할 </a:t>
+            </a:r>
+            <a:r>
+              <a:rPr lang="en-US" altLang="ko-KR" sz="2800" dirty="0" err="1">
+                <a:latin typeface="D2Coding" panose="020B0609020101020101" pitchFamily="49" charset="-127"/>
+                <a:ea typeface="D2Coding" panose="020B0609020101020101" pitchFamily="49" charset="-127"/>
+              </a:rPr>
+              <a:t>url</a:t>
+            </a:r>
+            <a:r>
+              <a:rPr lang="ko-KR" altLang="en-US" sz="2800" dirty="0">
+                <a:latin typeface="D2Coding" panose="020B0609020101020101" pitchFamily="49" charset="-127"/>
+                <a:ea typeface="D2Coding" panose="020B0609020101020101" pitchFamily="49" charset="-127"/>
+              </a:rPr>
+              <a:t>의 </a:t>
+            </a:r>
+            <a:r>
+              <a:rPr lang="en-US" altLang="ko-KR" sz="2800" dirty="0">
+                <a:latin typeface="D2Coding" panose="020B0609020101020101" pitchFamily="49" charset="-127"/>
+                <a:ea typeface="D2Coding" panose="020B0609020101020101" pitchFamily="49" charset="-127"/>
+              </a:rPr>
+              <a:t>DB </a:t>
+            </a:r>
+            <a:r>
+              <a:rPr lang="ko-KR" altLang="en-US" sz="2800" dirty="0">
+                <a:latin typeface="D2Coding" panose="020B0609020101020101" pitchFamily="49" charset="-127"/>
+                <a:ea typeface="D2Coding" panose="020B0609020101020101" pitchFamily="49" charset="-127"/>
+              </a:rPr>
+              <a:t>접속</a:t>
+            </a:r>
+            <a:r>
+              <a:rPr lang="en-US" altLang="ko-KR" sz="2800" dirty="0">
+                <a:latin typeface="D2Coding" panose="020B0609020101020101" pitchFamily="49" charset="-127"/>
+                <a:ea typeface="D2Coding" panose="020B0609020101020101" pitchFamily="49" charset="-127"/>
+              </a:rPr>
+              <a:t> </a:t>
+            </a:r>
+            <a:r>
+              <a:rPr lang="ko-KR" altLang="en-US" sz="2800" dirty="0">
+                <a:latin typeface="D2Coding" panose="020B0609020101020101" pitchFamily="49" charset="-127"/>
+                <a:ea typeface="D2Coding" panose="020B0609020101020101" pitchFamily="49" charset="-127"/>
+              </a:rPr>
+              <a:t>계정 및 암호 생성</a:t>
+            </a:r>
+            <a:endParaRPr lang="ko-KR" altLang="en-US" sz="2800" cap="none" dirty="0">
+              <a:solidFill>
+                <a:schemeClr val="bg2">
+                  <a:lumMod val="25000"/>
+                </a:schemeClr>
+              </a:solidFill>
+              <a:latin typeface="D2Coding" panose="020B0609020101020101" pitchFamily="49" charset="-127"/>
+              <a:ea typeface="D2Coding" panose="020B0609020101020101" pitchFamily="49" charset="-127"/>
+              <a:cs typeface="Segoe UI Light" panose="020B0502040204020203" pitchFamily="34" charset="0"/>
+            </a:endParaRPr>
+          </a:p>
+        </p:txBody>
+      </p:sp>
+      <p:sp>
+        <p:nvSpPr>
+          <p:cNvPr id="2" name="슬라이드 번호 개체 틀 3">
+            <a:extLst>
+              <a:ext uri="{FF2B5EF4-FFF2-40B4-BE49-F238E27FC236}">
+                <a16:creationId xmlns:a16="http://schemas.microsoft.com/office/drawing/2014/main" id="{E7488D36-93EE-DD96-2FD9-DE2C687ED7C5}"/>
+              </a:ext>
+            </a:extLst>
+          </p:cNvPr>
+          <p:cNvSpPr>
+            <a:spLocks noGrp="1"/>
+          </p:cNvSpPr>
+          <p:nvPr>
+            <p:ph type="sldNum" sz="quarter" idx="12"/>
+          </p:nvPr>
+        </p:nvSpPr>
+        <p:spPr>
+          <a:xfrm>
+            <a:off x="11180761" y="299420"/>
+            <a:ext cx="753545" cy="365125"/>
+          </a:xfrm>
+        </p:spPr>
+        <p:txBody>
+          <a:bodyPr/>
+          <a:lstStyle/>
+          <a:p>
+            <a:fld id="{D57F1E4F-1CFF-5643-939E-217C01CDF565}" type="slidenum">
+              <a:rPr lang="en-US" sz="1400" b="1" smtClean="0"/>
+              <a:pPr/>
+              <a:t>30</a:t>
+            </a:fld>
+            <a:endParaRPr lang="en-US" sz="1400" b="1" dirty="0"/>
+          </a:p>
+        </p:txBody>
+      </p:sp>
+      <p:pic>
+        <p:nvPicPr>
+          <p:cNvPr id="5" name="그림 4">
+            <a:extLst>
+              <a:ext uri="{FF2B5EF4-FFF2-40B4-BE49-F238E27FC236}">
+                <a16:creationId xmlns:a16="http://schemas.microsoft.com/office/drawing/2014/main" id="{A91A2EA9-916D-5951-4060-769B68426B84}"/>
+              </a:ext>
+            </a:extLst>
+          </p:cNvPr>
+          <p:cNvPicPr>
+            <a:picLocks noChangeAspect="1"/>
+          </p:cNvPicPr>
+          <p:nvPr/>
+        </p:nvPicPr>
+        <p:blipFill>
+          <a:blip r:embed="rId2"/>
+          <a:stretch>
+            <a:fillRect/>
+          </a:stretch>
+        </p:blipFill>
+        <p:spPr>
+          <a:xfrm>
+            <a:off x="2207435" y="1759973"/>
+            <a:ext cx="8784415" cy="4716972"/>
+          </a:xfrm>
+          <a:prstGeom prst="rect">
+            <a:avLst/>
+          </a:prstGeom>
+          <a:ln>
+            <a:solidFill>
+              <a:schemeClr val="tx1"/>
+            </a:solidFill>
+          </a:ln>
+        </p:spPr>
+      </p:pic>
+      <p:pic>
+        <p:nvPicPr>
+          <p:cNvPr id="7" name="그림 6">
+            <a:extLst>
+              <a:ext uri="{FF2B5EF4-FFF2-40B4-BE49-F238E27FC236}">
+                <a16:creationId xmlns:a16="http://schemas.microsoft.com/office/drawing/2014/main" id="{15DBEE64-E997-6249-D777-3DF81DA64978}"/>
+              </a:ext>
+            </a:extLst>
+          </p:cNvPr>
+          <p:cNvPicPr>
+            <a:picLocks noChangeAspect="1"/>
+          </p:cNvPicPr>
+          <p:nvPr/>
+        </p:nvPicPr>
+        <p:blipFill>
+          <a:blip r:embed="rId3"/>
+          <a:stretch>
+            <a:fillRect/>
+          </a:stretch>
+        </p:blipFill>
+        <p:spPr>
+          <a:xfrm>
+            <a:off x="3692406" y="2075762"/>
+            <a:ext cx="7299444" cy="1699797"/>
+          </a:xfrm>
+          <a:prstGeom prst="rect">
+            <a:avLst/>
+          </a:prstGeom>
+          <a:ln>
+            <a:solidFill>
+              <a:schemeClr val="tx1"/>
+            </a:solidFill>
+          </a:ln>
+        </p:spPr>
+      </p:pic>
+      <p:sp>
+        <p:nvSpPr>
+          <p:cNvPr id="9" name="직사각형 8">
+            <a:extLst>
+              <a:ext uri="{FF2B5EF4-FFF2-40B4-BE49-F238E27FC236}">
+                <a16:creationId xmlns:a16="http://schemas.microsoft.com/office/drawing/2014/main" id="{B1B073F6-C494-2892-E8C5-39904C091B1F}"/>
+              </a:ext>
+            </a:extLst>
+          </p:cNvPr>
+          <p:cNvSpPr/>
+          <p:nvPr/>
+        </p:nvSpPr>
+        <p:spPr>
+          <a:xfrm>
+            <a:off x="1973339" y="6004541"/>
+            <a:ext cx="1855712" cy="234334"/>
+          </a:xfrm>
+          <a:prstGeom prst="rect">
+            <a:avLst/>
+          </a:prstGeom>
+          <a:noFill/>
+          <a:ln w="38100">
+            <a:solidFill>
+              <a:srgbClr val="FF0000"/>
+            </a:solidFill>
+          </a:ln>
+        </p:spPr>
+        <p:style>
+          <a:lnRef idx="2">
+            <a:schemeClr val="accent1">
+              <a:shade val="15000"/>
+            </a:schemeClr>
+          </a:lnRef>
+          <a:fillRef idx="1">
+            <a:schemeClr val="accent1"/>
+          </a:fillRef>
+          <a:effectRef idx="0">
+            <a:schemeClr val="accent1"/>
+          </a:effectRef>
+          <a:fontRef idx="minor">
+            <a:schemeClr val="lt1"/>
+          </a:fontRef>
+        </p:style>
+        <p:txBody>
+          <a:bodyPr rtlCol="0" anchor="ctr"/>
+          <a:lstStyle/>
+          <a:p>
+            <a:pPr algn="ctr"/>
+            <a:endParaRPr lang="ko-KR" altLang="en-US"/>
+          </a:p>
+        </p:txBody>
+      </p:sp>
+      <p:sp>
+        <p:nvSpPr>
+          <p:cNvPr id="10" name="직사각형 9">
+            <a:extLst>
+              <a:ext uri="{FF2B5EF4-FFF2-40B4-BE49-F238E27FC236}">
+                <a16:creationId xmlns:a16="http://schemas.microsoft.com/office/drawing/2014/main" id="{614D477B-5A39-4330-B8C8-2A994DDCD437}"/>
+              </a:ext>
+            </a:extLst>
+          </p:cNvPr>
+          <p:cNvSpPr/>
+          <p:nvPr/>
+        </p:nvSpPr>
+        <p:spPr>
+          <a:xfrm>
+            <a:off x="9376465" y="2691326"/>
+            <a:ext cx="1855712" cy="234334"/>
+          </a:xfrm>
+          <a:prstGeom prst="rect">
+            <a:avLst/>
+          </a:prstGeom>
+          <a:noFill/>
+          <a:ln w="38100">
+            <a:solidFill>
+              <a:srgbClr val="FF0000"/>
+            </a:solidFill>
+          </a:ln>
+        </p:spPr>
+        <p:style>
+          <a:lnRef idx="2">
+            <a:schemeClr val="accent1">
+              <a:shade val="15000"/>
+            </a:schemeClr>
+          </a:lnRef>
+          <a:fillRef idx="1">
+            <a:schemeClr val="accent1"/>
+          </a:fillRef>
+          <a:effectRef idx="0">
+            <a:schemeClr val="accent1"/>
+          </a:effectRef>
+          <a:fontRef idx="minor">
+            <a:schemeClr val="lt1"/>
+          </a:fontRef>
+        </p:style>
+        <p:txBody>
+          <a:bodyPr rtlCol="0" anchor="ctr"/>
+          <a:lstStyle/>
+          <a:p>
+            <a:pPr algn="ctr"/>
+            <a:endParaRPr lang="ko-KR" altLang="en-US"/>
+          </a:p>
+        </p:txBody>
+      </p:sp>
+      <p:sp>
+        <p:nvSpPr>
+          <p:cNvPr id="11" name="TextBox 10">
+            <a:extLst>
+              <a:ext uri="{FF2B5EF4-FFF2-40B4-BE49-F238E27FC236}">
+                <a16:creationId xmlns:a16="http://schemas.microsoft.com/office/drawing/2014/main" id="{CE6E3655-902D-BB73-2D74-1165908629D7}"/>
+              </a:ext>
+            </a:extLst>
+          </p:cNvPr>
+          <p:cNvSpPr txBox="1"/>
+          <p:nvPr/>
+        </p:nvSpPr>
+        <p:spPr>
+          <a:xfrm>
+            <a:off x="6367955" y="4054971"/>
+            <a:ext cx="4857991" cy="1077218"/>
+          </a:xfrm>
+          <a:prstGeom prst="rect">
+            <a:avLst/>
+          </a:prstGeom>
+          <a:solidFill>
+            <a:srgbClr val="76E3FF"/>
+          </a:solidFill>
+        </p:spPr>
+        <p:txBody>
+          <a:bodyPr wrap="square">
+            <a:spAutoFit/>
+          </a:bodyPr>
+          <a:lstStyle/>
+          <a:p>
+            <a:pPr>
+              <a:buNone/>
+            </a:pPr>
+            <a:r>
+              <a:rPr lang="en-US" altLang="ko-KR" sz="1600" b="0" dirty="0">
+                <a:effectLst/>
+                <a:latin typeface="D2Coding" panose="020B0609020101020101" pitchFamily="49" charset="-127"/>
+                <a:ea typeface="D2Coding" panose="020B0609020101020101" pitchFamily="49" charset="-127"/>
+              </a:rPr>
+              <a:t>MONGO_URI = "</a:t>
+            </a:r>
+            <a:r>
+              <a:rPr lang="en-US" altLang="ko-KR" sz="1600" b="0" dirty="0" err="1">
+                <a:effectLst/>
+                <a:latin typeface="D2Coding" panose="020B0609020101020101" pitchFamily="49" charset="-127"/>
+                <a:ea typeface="D2Coding" panose="020B0609020101020101" pitchFamily="49" charset="-127"/>
+              </a:rPr>
+              <a:t>mongodb+srv</a:t>
+            </a:r>
+            <a:r>
+              <a:rPr lang="en-US" altLang="ko-KR" sz="1600" b="0" dirty="0">
+                <a:effectLst/>
+                <a:latin typeface="D2Coding" panose="020B0609020101020101" pitchFamily="49" charset="-127"/>
+                <a:ea typeface="D2Coding" panose="020B0609020101020101" pitchFamily="49" charset="-127"/>
+              </a:rPr>
+              <a:t>://ancestorcho30:1024@cluster0.bbz7on7.mongodb.net/?</a:t>
+            </a:r>
+            <a:r>
+              <a:rPr lang="en-US" altLang="ko-KR" sz="1600" b="0" dirty="0" err="1">
+                <a:effectLst/>
+                <a:latin typeface="D2Coding" panose="020B0609020101020101" pitchFamily="49" charset="-127"/>
+                <a:ea typeface="D2Coding" panose="020B0609020101020101" pitchFamily="49" charset="-127"/>
+              </a:rPr>
+              <a:t>retryWrites</a:t>
+            </a:r>
+            <a:r>
+              <a:rPr lang="en-US" altLang="ko-KR" sz="1600" b="0" dirty="0">
+                <a:effectLst/>
+                <a:latin typeface="D2Coding" panose="020B0609020101020101" pitchFamily="49" charset="-127"/>
+                <a:ea typeface="D2Coding" panose="020B0609020101020101" pitchFamily="49" charset="-127"/>
+              </a:rPr>
+              <a:t>=</a:t>
+            </a:r>
+            <a:r>
+              <a:rPr lang="en-US" altLang="ko-KR" sz="1600" b="0" dirty="0" err="1">
+                <a:effectLst/>
+                <a:latin typeface="D2Coding" panose="020B0609020101020101" pitchFamily="49" charset="-127"/>
+                <a:ea typeface="D2Coding" panose="020B0609020101020101" pitchFamily="49" charset="-127"/>
+              </a:rPr>
+              <a:t>true&amp;w</a:t>
+            </a:r>
+            <a:r>
+              <a:rPr lang="en-US" altLang="ko-KR" sz="1600" b="0" dirty="0">
+                <a:effectLst/>
+                <a:latin typeface="D2Coding" panose="020B0609020101020101" pitchFamily="49" charset="-127"/>
+                <a:ea typeface="D2Coding" panose="020B0609020101020101" pitchFamily="49" charset="-127"/>
+              </a:rPr>
+              <a:t>=</a:t>
+            </a:r>
+            <a:r>
+              <a:rPr lang="en-US" altLang="ko-KR" sz="1600" b="0" dirty="0" err="1">
+                <a:effectLst/>
+                <a:latin typeface="D2Coding" panose="020B0609020101020101" pitchFamily="49" charset="-127"/>
+                <a:ea typeface="D2Coding" panose="020B0609020101020101" pitchFamily="49" charset="-127"/>
+              </a:rPr>
+              <a:t>majority&amp;appName</a:t>
+            </a:r>
+            <a:r>
+              <a:rPr lang="en-US" altLang="ko-KR" sz="1600" b="0" dirty="0">
+                <a:effectLst/>
+                <a:latin typeface="D2Coding" panose="020B0609020101020101" pitchFamily="49" charset="-127"/>
+                <a:ea typeface="D2Coding" panose="020B0609020101020101" pitchFamily="49" charset="-127"/>
+              </a:rPr>
+              <a:t>=Cluster0"</a:t>
+            </a:r>
+          </a:p>
+        </p:txBody>
+      </p:sp>
+      <p:sp>
+        <p:nvSpPr>
+          <p:cNvPr id="12" name="직사각형 11">
+            <a:extLst>
+              <a:ext uri="{FF2B5EF4-FFF2-40B4-BE49-F238E27FC236}">
+                <a16:creationId xmlns:a16="http://schemas.microsoft.com/office/drawing/2014/main" id="{0D7668CF-079F-AFB6-FD61-D0BF33AC121E}"/>
+              </a:ext>
+            </a:extLst>
+          </p:cNvPr>
+          <p:cNvSpPr/>
+          <p:nvPr/>
+        </p:nvSpPr>
+        <p:spPr>
+          <a:xfrm>
+            <a:off x="7962900" y="4339698"/>
+            <a:ext cx="1847850" cy="289452"/>
+          </a:xfrm>
+          <a:prstGeom prst="rect">
+            <a:avLst/>
+          </a:prstGeom>
+          <a:noFill/>
+          <a:ln w="38100">
+            <a:solidFill>
+              <a:srgbClr val="FF0000"/>
+            </a:solidFill>
+          </a:ln>
+        </p:spPr>
+        <p:style>
+          <a:lnRef idx="2">
+            <a:schemeClr val="accent1">
+              <a:shade val="15000"/>
+            </a:schemeClr>
+          </a:lnRef>
+          <a:fillRef idx="1">
+            <a:schemeClr val="accent1"/>
+          </a:fillRef>
+          <a:effectRef idx="0">
+            <a:schemeClr val="accent1"/>
+          </a:effectRef>
+          <a:fontRef idx="minor">
+            <a:schemeClr val="lt1"/>
+          </a:fontRef>
+        </p:style>
+        <p:txBody>
+          <a:bodyPr rtlCol="0" anchor="ctr"/>
+          <a:lstStyle/>
+          <a:p>
+            <a:pPr algn="ctr"/>
+            <a:endParaRPr lang="ko-KR" altLang="en-US"/>
+          </a:p>
+        </p:txBody>
+      </p:sp>
+      <p:sp>
+        <p:nvSpPr>
+          <p:cNvPr id="13" name="직사각형 12">
+            <a:extLst>
+              <a:ext uri="{FF2B5EF4-FFF2-40B4-BE49-F238E27FC236}">
+                <a16:creationId xmlns:a16="http://schemas.microsoft.com/office/drawing/2014/main" id="{C8F22055-6D01-D41B-0AEA-CA6A9AD75553}"/>
+              </a:ext>
+            </a:extLst>
+          </p:cNvPr>
+          <p:cNvSpPr/>
+          <p:nvPr/>
+        </p:nvSpPr>
+        <p:spPr>
+          <a:xfrm>
+            <a:off x="4791555" y="3335049"/>
+            <a:ext cx="1855712" cy="234334"/>
+          </a:xfrm>
+          <a:prstGeom prst="rect">
+            <a:avLst/>
+          </a:prstGeom>
+          <a:noFill/>
+          <a:ln w="38100">
+            <a:solidFill>
+              <a:srgbClr val="FF0000"/>
+            </a:solidFill>
+          </a:ln>
+        </p:spPr>
+        <p:style>
+          <a:lnRef idx="2">
+            <a:schemeClr val="accent1">
+              <a:shade val="15000"/>
+            </a:schemeClr>
+          </a:lnRef>
+          <a:fillRef idx="1">
+            <a:schemeClr val="accent1"/>
+          </a:fillRef>
+          <a:effectRef idx="0">
+            <a:schemeClr val="accent1"/>
+          </a:effectRef>
+          <a:fontRef idx="minor">
+            <a:schemeClr val="lt1"/>
+          </a:fontRef>
+        </p:style>
+        <p:txBody>
+          <a:bodyPr rtlCol="0" anchor="ctr"/>
+          <a:lstStyle/>
+          <a:p>
+            <a:pPr algn="ctr"/>
+            <a:endParaRPr lang="ko-KR" altLang="en-US"/>
+          </a:p>
+        </p:txBody>
+      </p:sp>
+    </p:spTree>
+    <p:extLst>
+      <p:ext uri="{BB962C8B-B14F-4D97-AF65-F5344CB8AC3E}">
+        <p14:creationId xmlns:p14="http://schemas.microsoft.com/office/powerpoint/2010/main" val="3211608299"/>
+      </p:ext>
+    </p:extLst>
+  </p:cSld>
+  <p:clrMapOvr>
+    <a:masterClrMapping/>
+  </p:clrMapOvr>
+</p:sld>
+</file>
+
+<file path=ppt/slides/slide31.xml><?xml version="1.0" encoding="utf-8"?>
+<p:sld xmlns:a="http://schemas.openxmlformats.org/drawingml/2006/main" xmlns:r="http://schemas.openxmlformats.org/officeDocument/2006/relationships" xmlns:p="http://schemas.openxmlformats.org/presentationml/2006/main">
+  <p:cSld>
+    <p:spTree>
+      <p:nvGrpSpPr>
+        <p:cNvPr id="1" name="">
+          <a:extLst>
+            <a:ext uri="{FF2B5EF4-FFF2-40B4-BE49-F238E27FC236}">
+              <a16:creationId xmlns:a16="http://schemas.microsoft.com/office/drawing/2014/main" id="{5509D7D1-3DA2-EB37-1EFE-60293AC1ECF0}"/>
+            </a:ext>
+          </a:extLst>
+        </p:cNvPr>
+        <p:cNvGrpSpPr/>
+        <p:nvPr/>
+      </p:nvGrpSpPr>
+      <p:grpSpPr>
+        <a:xfrm>
+          <a:off x="0" y="0"/>
+          <a:ext cx="0" cy="0"/>
+          <a:chOff x="0" y="0"/>
+          <a:chExt cx="0" cy="0"/>
+        </a:xfrm>
+      </p:grpSpPr>
+      <p:sp>
+        <p:nvSpPr>
+          <p:cNvPr id="3" name="제목 1">
+            <a:extLst>
+              <a:ext uri="{FF2B5EF4-FFF2-40B4-BE49-F238E27FC236}">
+                <a16:creationId xmlns:a16="http://schemas.microsoft.com/office/drawing/2014/main" id="{96B0FB59-FBC8-0A93-221A-40F9D57AD621}"/>
+              </a:ext>
+            </a:extLst>
+          </p:cNvPr>
+          <p:cNvSpPr txBox="1">
+            <a:spLocks/>
+          </p:cNvSpPr>
+          <p:nvPr/>
+        </p:nvSpPr>
+        <p:spPr>
+          <a:xfrm>
+            <a:off x="475645" y="481983"/>
+            <a:ext cx="10353762" cy="766439"/>
+          </a:xfrm>
+          <a:prstGeom prst="rect">
+            <a:avLst/>
+          </a:prstGeom>
+        </p:spPr>
+        <p:txBody>
+          <a:bodyPr vert="horz" lIns="91440" tIns="45720" rIns="91440" bIns="45720" rtlCol="0" anchor="ctr">
+            <a:normAutofit/>
+          </a:bodyPr>
+          <a:lstStyle>
+            <a:lvl1pPr algn="ctr" defTabSz="914400" rtl="0" eaLnBrk="1" latinLnBrk="1" hangingPunct="1">
+              <a:lnSpc>
+                <a:spcPct val="90000"/>
+              </a:lnSpc>
+              <a:spcBef>
+                <a:spcPct val="0"/>
+              </a:spcBef>
+              <a:buNone/>
+              <a:defRPr sz="3200" kern="1200" cap="all" baseline="0">
+                <a:solidFill>
+                  <a:schemeClr val="tx1"/>
+                </a:solidFill>
+                <a:effectLst/>
+                <a:latin typeface="Batang" panose="02030600000101010101" pitchFamily="18" charset="-127"/>
+                <a:ea typeface="Batang" panose="02030600000101010101" pitchFamily="18" charset="-127"/>
+                <a:cs typeface="+mj-cs"/>
+              </a:defRPr>
+            </a:lvl1pPr>
+          </a:lstStyle>
+          <a:p>
+            <a:pPr algn="l"/>
+            <a:r>
+              <a:rPr lang="en-US" altLang="ko-KR" sz="2800" dirty="0">
+                <a:latin typeface="D2Coding" panose="020B0609020101020101" pitchFamily="49" charset="-127"/>
+                <a:ea typeface="D2Coding" panose="020B0609020101020101" pitchFamily="49" charset="-127"/>
+              </a:rPr>
+              <a:t>Step 4. </a:t>
+            </a:r>
+            <a:r>
+              <a:rPr lang="ko-KR" altLang="en-US" sz="2800" dirty="0">
+                <a:latin typeface="D2Coding" panose="020B0609020101020101" pitchFamily="49" charset="-127"/>
+                <a:ea typeface="D2Coding" panose="020B0609020101020101" pitchFamily="49" charset="-127"/>
+              </a:rPr>
+              <a:t>고정</a:t>
+            </a:r>
+            <a:r>
+              <a:rPr lang="en-US" altLang="ko-KR" sz="2800" dirty="0">
+                <a:latin typeface="D2Coding" panose="020B0609020101020101" pitchFamily="49" charset="-127"/>
+                <a:ea typeface="D2Coding" panose="020B0609020101020101" pitchFamily="49" charset="-127"/>
+              </a:rPr>
+              <a:t> IP</a:t>
+            </a:r>
+            <a:r>
+              <a:rPr lang="ko-KR" altLang="en-US" sz="2800" dirty="0">
+                <a:latin typeface="D2Coding" panose="020B0609020101020101" pitchFamily="49" charset="-127"/>
+                <a:ea typeface="D2Coding" panose="020B0609020101020101" pitchFamily="49" charset="-127"/>
+              </a:rPr>
+              <a:t> 생성</a:t>
+            </a:r>
+            <a:endParaRPr lang="ko-KR" altLang="en-US" sz="2800" cap="none" dirty="0">
+              <a:solidFill>
+                <a:schemeClr val="bg2">
+                  <a:lumMod val="25000"/>
+                </a:schemeClr>
+              </a:solidFill>
+              <a:latin typeface="D2Coding" panose="020B0609020101020101" pitchFamily="49" charset="-127"/>
+              <a:ea typeface="D2Coding" panose="020B0609020101020101" pitchFamily="49" charset="-127"/>
+              <a:cs typeface="Segoe UI Light" panose="020B0502040204020203" pitchFamily="34" charset="0"/>
+            </a:endParaRPr>
+          </a:p>
+        </p:txBody>
+      </p:sp>
+      <p:sp>
+        <p:nvSpPr>
+          <p:cNvPr id="2" name="슬라이드 번호 개체 틀 3">
+            <a:extLst>
+              <a:ext uri="{FF2B5EF4-FFF2-40B4-BE49-F238E27FC236}">
+                <a16:creationId xmlns:a16="http://schemas.microsoft.com/office/drawing/2014/main" id="{00578510-32A1-4AD7-CFBD-F865A5F33868}"/>
+              </a:ext>
+            </a:extLst>
+          </p:cNvPr>
+          <p:cNvSpPr>
+            <a:spLocks noGrp="1"/>
+          </p:cNvSpPr>
+          <p:nvPr>
+            <p:ph type="sldNum" sz="quarter" idx="12"/>
+          </p:nvPr>
+        </p:nvSpPr>
+        <p:spPr>
+          <a:xfrm>
+            <a:off x="11180761" y="299420"/>
+            <a:ext cx="753545" cy="365125"/>
+          </a:xfrm>
+        </p:spPr>
+        <p:txBody>
+          <a:bodyPr/>
+          <a:lstStyle/>
+          <a:p>
+            <a:fld id="{D57F1E4F-1CFF-5643-939E-217C01CDF565}" type="slidenum">
+              <a:rPr lang="en-US" sz="1400" b="1" smtClean="0"/>
+              <a:pPr/>
+              <a:t>31</a:t>
+            </a:fld>
+            <a:endParaRPr lang="en-US" sz="1400" b="1" dirty="0"/>
+          </a:p>
+        </p:txBody>
+      </p:sp>
+      <p:pic>
+        <p:nvPicPr>
+          <p:cNvPr id="5" name="그림 4">
+            <a:extLst>
+              <a:ext uri="{FF2B5EF4-FFF2-40B4-BE49-F238E27FC236}">
+                <a16:creationId xmlns:a16="http://schemas.microsoft.com/office/drawing/2014/main" id="{A4A89CA8-73B5-D7D1-BB9D-7318026AA3E6}"/>
+              </a:ext>
+            </a:extLst>
+          </p:cNvPr>
+          <p:cNvPicPr>
+            <a:picLocks noChangeAspect="1"/>
+          </p:cNvPicPr>
+          <p:nvPr/>
+        </p:nvPicPr>
+        <p:blipFill>
+          <a:blip r:embed="rId2"/>
+          <a:stretch>
+            <a:fillRect/>
+          </a:stretch>
+        </p:blipFill>
+        <p:spPr>
+          <a:xfrm>
+            <a:off x="2207435" y="1759973"/>
+            <a:ext cx="8784415" cy="4716972"/>
+          </a:xfrm>
+          <a:prstGeom prst="rect">
+            <a:avLst/>
+          </a:prstGeom>
+          <a:ln>
+            <a:solidFill>
+              <a:schemeClr val="tx1"/>
+            </a:solidFill>
+          </a:ln>
+        </p:spPr>
+      </p:pic>
+      <p:pic>
+        <p:nvPicPr>
+          <p:cNvPr id="6" name="그림 5">
+            <a:extLst>
+              <a:ext uri="{FF2B5EF4-FFF2-40B4-BE49-F238E27FC236}">
+                <a16:creationId xmlns:a16="http://schemas.microsoft.com/office/drawing/2014/main" id="{1B4582BB-6B5B-B895-BF55-1D551D4D144B}"/>
+              </a:ext>
+            </a:extLst>
+          </p:cNvPr>
+          <p:cNvPicPr>
+            <a:picLocks noChangeAspect="1"/>
+          </p:cNvPicPr>
+          <p:nvPr/>
+        </p:nvPicPr>
+        <p:blipFill>
+          <a:blip r:embed="rId3"/>
+          <a:stretch>
+            <a:fillRect/>
+          </a:stretch>
+        </p:blipFill>
+        <p:spPr>
+          <a:xfrm>
+            <a:off x="3640007" y="2106823"/>
+            <a:ext cx="7361368" cy="1746765"/>
+          </a:xfrm>
+          <a:prstGeom prst="rect">
+            <a:avLst/>
+          </a:prstGeom>
+          <a:ln>
+            <a:solidFill>
+              <a:schemeClr val="tx1"/>
+            </a:solidFill>
+          </a:ln>
+        </p:spPr>
+      </p:pic>
+      <p:sp>
+        <p:nvSpPr>
+          <p:cNvPr id="8" name="직사각형 7">
+            <a:extLst>
+              <a:ext uri="{FF2B5EF4-FFF2-40B4-BE49-F238E27FC236}">
+                <a16:creationId xmlns:a16="http://schemas.microsoft.com/office/drawing/2014/main" id="{8694AD70-3E36-CFCB-C7F1-55D2F7219315}"/>
+              </a:ext>
+            </a:extLst>
+          </p:cNvPr>
+          <p:cNvSpPr/>
+          <p:nvPr/>
+        </p:nvSpPr>
+        <p:spPr>
+          <a:xfrm>
+            <a:off x="1973339" y="6004541"/>
+            <a:ext cx="1855712" cy="234334"/>
+          </a:xfrm>
+          <a:prstGeom prst="rect">
+            <a:avLst/>
+          </a:prstGeom>
+          <a:noFill/>
+          <a:ln w="38100">
+            <a:solidFill>
+              <a:srgbClr val="FF0000"/>
+            </a:solidFill>
+          </a:ln>
+        </p:spPr>
+        <p:style>
+          <a:lnRef idx="2">
+            <a:schemeClr val="accent1">
+              <a:shade val="15000"/>
+            </a:schemeClr>
+          </a:lnRef>
+          <a:fillRef idx="1">
+            <a:schemeClr val="accent1"/>
+          </a:fillRef>
+          <a:effectRef idx="0">
+            <a:schemeClr val="accent1"/>
+          </a:effectRef>
+          <a:fontRef idx="minor">
+            <a:schemeClr val="lt1"/>
+          </a:fontRef>
+        </p:style>
+        <p:txBody>
+          <a:bodyPr rtlCol="0" anchor="ctr"/>
+          <a:lstStyle/>
+          <a:p>
+            <a:pPr algn="ctr"/>
+            <a:endParaRPr lang="ko-KR" altLang="en-US"/>
+          </a:p>
+        </p:txBody>
+      </p:sp>
+      <p:sp>
+        <p:nvSpPr>
+          <p:cNvPr id="9" name="직사각형 8">
+            <a:extLst>
+              <a:ext uri="{FF2B5EF4-FFF2-40B4-BE49-F238E27FC236}">
+                <a16:creationId xmlns:a16="http://schemas.microsoft.com/office/drawing/2014/main" id="{010DF467-8824-2193-CC27-05461F957CEA}"/>
+              </a:ext>
+            </a:extLst>
+          </p:cNvPr>
+          <p:cNvSpPr/>
+          <p:nvPr/>
+        </p:nvSpPr>
+        <p:spPr>
+          <a:xfrm>
+            <a:off x="9370234" y="2691103"/>
+            <a:ext cx="1855712" cy="234334"/>
+          </a:xfrm>
+          <a:prstGeom prst="rect">
+            <a:avLst/>
+          </a:prstGeom>
+          <a:noFill/>
+          <a:ln w="38100">
+            <a:solidFill>
+              <a:srgbClr val="FF0000"/>
+            </a:solidFill>
+          </a:ln>
+        </p:spPr>
+        <p:style>
+          <a:lnRef idx="2">
+            <a:schemeClr val="accent1">
+              <a:shade val="15000"/>
+            </a:schemeClr>
+          </a:lnRef>
+          <a:fillRef idx="1">
+            <a:schemeClr val="accent1"/>
+          </a:fillRef>
+          <a:effectRef idx="0">
+            <a:schemeClr val="accent1"/>
+          </a:effectRef>
+          <a:fontRef idx="minor">
+            <a:schemeClr val="lt1"/>
+          </a:fontRef>
+        </p:style>
+        <p:txBody>
+          <a:bodyPr rtlCol="0" anchor="ctr"/>
+          <a:lstStyle/>
+          <a:p>
+            <a:pPr algn="ctr"/>
+            <a:endParaRPr lang="ko-KR" altLang="en-US"/>
+          </a:p>
+        </p:txBody>
+      </p:sp>
+      <p:sp>
+        <p:nvSpPr>
+          <p:cNvPr id="10" name="직사각형 9">
+            <a:extLst>
+              <a:ext uri="{FF2B5EF4-FFF2-40B4-BE49-F238E27FC236}">
+                <a16:creationId xmlns:a16="http://schemas.microsoft.com/office/drawing/2014/main" id="{6D634284-9CA2-85E7-7FE9-F885D010DCCE}"/>
+              </a:ext>
+            </a:extLst>
+          </p:cNvPr>
+          <p:cNvSpPr/>
+          <p:nvPr/>
+        </p:nvSpPr>
+        <p:spPr>
+          <a:xfrm>
+            <a:off x="4743930" y="3556939"/>
+            <a:ext cx="1855712" cy="234334"/>
+          </a:xfrm>
+          <a:prstGeom prst="rect">
+            <a:avLst/>
+          </a:prstGeom>
+          <a:noFill/>
+          <a:ln w="38100">
+            <a:solidFill>
+              <a:srgbClr val="FF0000"/>
+            </a:solidFill>
+          </a:ln>
+        </p:spPr>
+        <p:style>
+          <a:lnRef idx="2">
+            <a:schemeClr val="accent1">
+              <a:shade val="15000"/>
+            </a:schemeClr>
+          </a:lnRef>
+          <a:fillRef idx="1">
+            <a:schemeClr val="accent1"/>
+          </a:fillRef>
+          <a:effectRef idx="0">
+            <a:schemeClr val="accent1"/>
+          </a:effectRef>
+          <a:fontRef idx="minor">
+            <a:schemeClr val="lt1"/>
+          </a:fontRef>
+        </p:style>
+        <p:txBody>
+          <a:bodyPr rtlCol="0" anchor="ctr"/>
+          <a:lstStyle/>
+          <a:p>
+            <a:pPr algn="ctr"/>
+            <a:endParaRPr lang="ko-KR" altLang="en-US"/>
+          </a:p>
+        </p:txBody>
+      </p:sp>
+      <p:sp>
+        <p:nvSpPr>
+          <p:cNvPr id="11" name="설명선: 굽은 선 10">
+            <a:extLst>
+              <a:ext uri="{FF2B5EF4-FFF2-40B4-BE49-F238E27FC236}">
+                <a16:creationId xmlns:a16="http://schemas.microsoft.com/office/drawing/2014/main" id="{19BE90E5-BE07-3359-A66F-031948433148}"/>
+              </a:ext>
+            </a:extLst>
+          </p:cNvPr>
+          <p:cNvSpPr/>
+          <p:nvPr/>
+        </p:nvSpPr>
+        <p:spPr>
+          <a:xfrm>
+            <a:off x="7320691" y="4200439"/>
+            <a:ext cx="4395059" cy="365126"/>
+          </a:xfrm>
+          <a:prstGeom prst="borderCallout2">
+            <a:avLst>
+              <a:gd name="adj1" fmla="val 18750"/>
+              <a:gd name="adj2" fmla="val -8333"/>
+              <a:gd name="adj3" fmla="val 18750"/>
+              <a:gd name="adj4" fmla="val -16667"/>
+              <a:gd name="adj5" fmla="val -103674"/>
+              <a:gd name="adj6" fmla="val -29665"/>
+            </a:avLst>
+          </a:prstGeom>
+          <a:solidFill>
+            <a:schemeClr val="tx1"/>
+          </a:solidFill>
+          <a:ln>
+            <a:headEnd type="none" w="med" len="med"/>
+            <a:tailEnd type="triangle" w="med" len="med"/>
+          </a:ln>
+        </p:spPr>
+        <p:style>
+          <a:lnRef idx="2">
+            <a:schemeClr val="accent1">
+              <a:shade val="15000"/>
+            </a:schemeClr>
+          </a:lnRef>
+          <a:fillRef idx="1">
+            <a:schemeClr val="accent1"/>
+          </a:fillRef>
+          <a:effectRef idx="0">
+            <a:schemeClr val="accent1"/>
+          </a:effectRef>
+          <a:fontRef idx="minor">
+            <a:schemeClr val="lt1"/>
+          </a:fontRef>
+        </p:style>
+        <p:txBody>
+          <a:bodyPr rtlCol="0" anchor="ctr"/>
+          <a:lstStyle/>
+          <a:p>
+            <a:pPr algn="ctr"/>
+            <a:r>
+              <a:rPr lang="ko-KR" altLang="en-US" sz="1600" dirty="0">
+                <a:solidFill>
+                  <a:schemeClr val="bg1"/>
+                </a:solidFill>
+                <a:latin typeface="D2Coding" panose="020B0609020101020101" pitchFamily="49" charset="-127"/>
+                <a:ea typeface="D2Coding" panose="020B0609020101020101" pitchFamily="49" charset="-127"/>
+              </a:rPr>
+              <a:t>고정 </a:t>
+            </a:r>
+            <a:r>
+              <a:rPr lang="en-US" altLang="ko-KR" sz="1600" dirty="0">
+                <a:solidFill>
+                  <a:schemeClr val="bg1"/>
+                </a:solidFill>
+                <a:latin typeface="D2Coding" panose="020B0609020101020101" pitchFamily="49" charset="-127"/>
+                <a:ea typeface="D2Coding" panose="020B0609020101020101" pitchFamily="49" charset="-127"/>
+              </a:rPr>
+              <a:t>IP </a:t>
+            </a:r>
+            <a:r>
+              <a:rPr lang="ko-KR" altLang="en-US" sz="1600" dirty="0">
+                <a:solidFill>
+                  <a:schemeClr val="bg1"/>
+                </a:solidFill>
+                <a:latin typeface="D2Coding" panose="020B0609020101020101" pitchFamily="49" charset="-127"/>
+                <a:ea typeface="D2Coding" panose="020B0609020101020101" pitchFamily="49" charset="-127"/>
+              </a:rPr>
+              <a:t>주소</a:t>
+            </a:r>
+            <a:r>
+              <a:rPr lang="en-US" altLang="ko-KR" sz="1600" dirty="0">
+                <a:solidFill>
+                  <a:schemeClr val="bg1"/>
+                </a:solidFill>
+                <a:latin typeface="D2Coding" panose="020B0609020101020101" pitchFamily="49" charset="-127"/>
+                <a:ea typeface="D2Coding" panose="020B0609020101020101" pitchFamily="49" charset="-127"/>
+              </a:rPr>
+              <a:t>(0.0.0.0/0)</a:t>
+            </a:r>
+            <a:r>
+              <a:rPr lang="ko-KR" altLang="en-US" sz="1600" dirty="0">
+                <a:solidFill>
+                  <a:schemeClr val="bg1"/>
+                </a:solidFill>
+                <a:latin typeface="D2Coding" panose="020B0609020101020101" pitchFamily="49" charset="-127"/>
+                <a:ea typeface="D2Coding" panose="020B0609020101020101" pitchFamily="49" charset="-127"/>
+              </a:rPr>
+              <a:t>을 만들어서 접속</a:t>
+            </a:r>
+          </a:p>
+        </p:txBody>
+      </p:sp>
+      <p:sp>
+        <p:nvSpPr>
+          <p:cNvPr id="12" name="설명선: 굽은 선 11">
+            <a:extLst>
+              <a:ext uri="{FF2B5EF4-FFF2-40B4-BE49-F238E27FC236}">
+                <a16:creationId xmlns:a16="http://schemas.microsoft.com/office/drawing/2014/main" id="{6BECAC80-1972-380F-5851-306DC93CCD55}"/>
+              </a:ext>
+            </a:extLst>
+          </p:cNvPr>
+          <p:cNvSpPr/>
+          <p:nvPr/>
+        </p:nvSpPr>
+        <p:spPr>
+          <a:xfrm>
+            <a:off x="6380567" y="2364100"/>
+            <a:ext cx="3286125" cy="392000"/>
+          </a:xfrm>
+          <a:prstGeom prst="borderCallout2">
+            <a:avLst>
+              <a:gd name="adj1" fmla="val 18750"/>
+              <a:gd name="adj2" fmla="val -8333"/>
+              <a:gd name="adj3" fmla="val 18750"/>
+              <a:gd name="adj4" fmla="val -16667"/>
+              <a:gd name="adj5" fmla="val 276500"/>
+              <a:gd name="adj6" fmla="val -36522"/>
+            </a:avLst>
+          </a:prstGeom>
+          <a:solidFill>
+            <a:schemeClr val="tx1"/>
+          </a:solidFill>
+          <a:ln>
+            <a:headEnd type="none" w="med" len="med"/>
+            <a:tailEnd type="triangle" w="med" len="med"/>
+          </a:ln>
+        </p:spPr>
+        <p:style>
+          <a:lnRef idx="2">
+            <a:schemeClr val="accent1">
+              <a:shade val="15000"/>
+            </a:schemeClr>
+          </a:lnRef>
+          <a:fillRef idx="1">
+            <a:schemeClr val="accent1"/>
+          </a:fillRef>
+          <a:effectRef idx="0">
+            <a:schemeClr val="accent1"/>
+          </a:effectRef>
+          <a:fontRef idx="minor">
+            <a:schemeClr val="lt1"/>
+          </a:fontRef>
+        </p:style>
+        <p:txBody>
+          <a:bodyPr rtlCol="0" anchor="ctr"/>
+          <a:lstStyle/>
+          <a:p>
+            <a:pPr algn="ctr"/>
+            <a:r>
+              <a:rPr lang="ko-KR" altLang="en-US" sz="1600" dirty="0">
+                <a:solidFill>
+                  <a:schemeClr val="bg1"/>
+                </a:solidFill>
+                <a:latin typeface="D2Coding" panose="020B0609020101020101" pitchFamily="49" charset="-127"/>
+                <a:ea typeface="D2Coding" panose="020B0609020101020101" pitchFamily="49" charset="-127"/>
+              </a:rPr>
+              <a:t>로컬 </a:t>
+            </a:r>
+            <a:r>
+              <a:rPr lang="en-US" altLang="ko-KR" sz="1600" dirty="0">
+                <a:solidFill>
+                  <a:schemeClr val="bg1"/>
+                </a:solidFill>
+                <a:latin typeface="D2Coding" panose="020B0609020101020101" pitchFamily="49" charset="-127"/>
+                <a:ea typeface="D2Coding" panose="020B0609020101020101" pitchFamily="49" charset="-127"/>
+              </a:rPr>
+              <a:t>Host </a:t>
+            </a:r>
+            <a:r>
+              <a:rPr lang="ko-KR" altLang="en-US" sz="1600" dirty="0">
+                <a:solidFill>
+                  <a:schemeClr val="bg1"/>
+                </a:solidFill>
+                <a:latin typeface="D2Coding" panose="020B0609020101020101" pitchFamily="49" charset="-127"/>
+                <a:ea typeface="D2Coding" panose="020B0609020101020101" pitchFamily="49" charset="-127"/>
+              </a:rPr>
+              <a:t>유동 </a:t>
+            </a:r>
+            <a:r>
+              <a:rPr lang="en-US" altLang="ko-KR" sz="1600" dirty="0">
+                <a:solidFill>
+                  <a:schemeClr val="bg1"/>
+                </a:solidFill>
+                <a:latin typeface="D2Coding" panose="020B0609020101020101" pitchFamily="49" charset="-127"/>
+                <a:ea typeface="D2Coding" panose="020B0609020101020101" pitchFamily="49" charset="-127"/>
+              </a:rPr>
+              <a:t>IP </a:t>
+            </a:r>
+            <a:r>
+              <a:rPr lang="ko-KR" altLang="en-US" sz="1600" dirty="0">
+                <a:solidFill>
+                  <a:schemeClr val="bg1"/>
+                </a:solidFill>
+                <a:latin typeface="D2Coding" panose="020B0609020101020101" pitchFamily="49" charset="-127"/>
+                <a:ea typeface="D2Coding" panose="020B0609020101020101" pitchFamily="49" charset="-127"/>
+              </a:rPr>
+              <a:t>주소</a:t>
+            </a:r>
+          </a:p>
+        </p:txBody>
+      </p:sp>
+    </p:spTree>
+    <p:extLst>
+      <p:ext uri="{BB962C8B-B14F-4D97-AF65-F5344CB8AC3E}">
+        <p14:creationId xmlns:p14="http://schemas.microsoft.com/office/powerpoint/2010/main" val="90698801"/>
+      </p:ext>
+    </p:extLst>
+  </p:cSld>
+  <p:clrMapOvr>
+    <a:masterClrMapping/>
+  </p:clrMapOvr>
+</p:sld>
+</file>
+
+<file path=ppt/slides/slide32.xml><?xml version="1.0" encoding="utf-8"?>
+<p:sld xmlns:a="http://schemas.openxmlformats.org/drawingml/2006/main" xmlns:r="http://schemas.openxmlformats.org/officeDocument/2006/relationships" xmlns:p="http://schemas.openxmlformats.org/presentationml/2006/main">
+  <p:cSld>
+    <p:spTree>
+      <p:nvGrpSpPr>
+        <p:cNvPr id="1" name="">
+          <a:extLst>
+            <a:ext uri="{FF2B5EF4-FFF2-40B4-BE49-F238E27FC236}">
+              <a16:creationId xmlns:a16="http://schemas.microsoft.com/office/drawing/2014/main" id="{E73DE0CF-154F-3C47-AF7F-A13CE96DF6E3}"/>
+            </a:ext>
+          </a:extLst>
+        </p:cNvPr>
+        <p:cNvGrpSpPr/>
+        <p:nvPr/>
+      </p:nvGrpSpPr>
+      <p:grpSpPr>
+        <a:xfrm>
+          <a:off x="0" y="0"/>
+          <a:ext cx="0" cy="0"/>
+          <a:chOff x="0" y="0"/>
+          <a:chExt cx="0" cy="0"/>
+        </a:xfrm>
+      </p:grpSpPr>
+      <p:sp>
+        <p:nvSpPr>
+          <p:cNvPr id="3" name="제목 1">
+            <a:extLst>
+              <a:ext uri="{FF2B5EF4-FFF2-40B4-BE49-F238E27FC236}">
+                <a16:creationId xmlns:a16="http://schemas.microsoft.com/office/drawing/2014/main" id="{233766BF-0536-E590-7032-124A7A5175E3}"/>
+              </a:ext>
+            </a:extLst>
+          </p:cNvPr>
+          <p:cNvSpPr txBox="1">
+            <a:spLocks/>
+          </p:cNvSpPr>
+          <p:nvPr/>
+        </p:nvSpPr>
+        <p:spPr>
+          <a:xfrm>
+            <a:off x="475645" y="481983"/>
+            <a:ext cx="10353762" cy="766439"/>
+          </a:xfrm>
+          <a:prstGeom prst="rect">
+            <a:avLst/>
+          </a:prstGeom>
+        </p:spPr>
+        <p:txBody>
+          <a:bodyPr vert="horz" lIns="91440" tIns="45720" rIns="91440" bIns="45720" rtlCol="0" anchor="ctr">
+            <a:normAutofit/>
+          </a:bodyPr>
+          <a:lstStyle>
+            <a:lvl1pPr algn="ctr" defTabSz="914400" rtl="0" eaLnBrk="1" latinLnBrk="1" hangingPunct="1">
+              <a:lnSpc>
+                <a:spcPct val="90000"/>
+              </a:lnSpc>
+              <a:spcBef>
+                <a:spcPct val="0"/>
+              </a:spcBef>
+              <a:buNone/>
+              <a:defRPr sz="3200" kern="1200" cap="all" baseline="0">
+                <a:solidFill>
+                  <a:schemeClr val="tx1"/>
+                </a:solidFill>
+                <a:effectLst/>
+                <a:latin typeface="Batang" panose="02030600000101010101" pitchFamily="18" charset="-127"/>
+                <a:ea typeface="Batang" panose="02030600000101010101" pitchFamily="18" charset="-127"/>
+                <a:cs typeface="+mj-cs"/>
+              </a:defRPr>
+            </a:lvl1pPr>
+          </a:lstStyle>
+          <a:p>
+            <a:pPr algn="l"/>
+            <a:r>
+              <a:rPr lang="en-US" altLang="ko-KR" sz="2800" cap="none" dirty="0" err="1">
+                <a:solidFill>
+                  <a:schemeClr val="bg2">
+                    <a:lumMod val="25000"/>
+                  </a:schemeClr>
+                </a:solidFill>
+                <a:latin typeface="D2Coding" panose="020B0609020101020101" pitchFamily="49" charset="-127"/>
+                <a:ea typeface="D2Coding" panose="020B0609020101020101" pitchFamily="49" charset="-127"/>
+                <a:cs typeface="Segoe UI Light" panose="020B0502040204020203" pitchFamily="34" charset="0"/>
+              </a:rPr>
+              <a:t>Colab</a:t>
+            </a:r>
+            <a:r>
+              <a:rPr lang="en-US" altLang="ko-KR" sz="2800" cap="none" dirty="0">
+                <a:solidFill>
+                  <a:schemeClr val="bg2">
+                    <a:lumMod val="25000"/>
+                  </a:schemeClr>
+                </a:solidFill>
+                <a:latin typeface="D2Coding" panose="020B0609020101020101" pitchFamily="49" charset="-127"/>
+                <a:ea typeface="D2Coding" panose="020B0609020101020101" pitchFamily="49" charset="-127"/>
+                <a:cs typeface="Segoe UI Light" panose="020B0502040204020203" pitchFamily="34" charset="0"/>
+              </a:rPr>
+              <a:t> &amp; MongoDB</a:t>
+            </a:r>
+            <a:endParaRPr lang="ko-KR" altLang="en-US" sz="2800" cap="none" dirty="0">
+              <a:solidFill>
+                <a:schemeClr val="bg2">
+                  <a:lumMod val="25000"/>
+                </a:schemeClr>
+              </a:solidFill>
+              <a:latin typeface="D2Coding" panose="020B0609020101020101" pitchFamily="49" charset="-127"/>
+              <a:ea typeface="D2Coding" panose="020B0609020101020101" pitchFamily="49" charset="-127"/>
+              <a:cs typeface="Segoe UI Light" panose="020B0502040204020203" pitchFamily="34" charset="0"/>
+            </a:endParaRPr>
+          </a:p>
+        </p:txBody>
+      </p:sp>
+      <p:sp>
+        <p:nvSpPr>
+          <p:cNvPr id="2" name="슬라이드 번호 개체 틀 3">
+            <a:extLst>
+              <a:ext uri="{FF2B5EF4-FFF2-40B4-BE49-F238E27FC236}">
+                <a16:creationId xmlns:a16="http://schemas.microsoft.com/office/drawing/2014/main" id="{C3906DEC-B0AB-259F-983E-2B5E3D6D19E1}"/>
+              </a:ext>
+            </a:extLst>
+          </p:cNvPr>
+          <p:cNvSpPr>
+            <a:spLocks noGrp="1"/>
+          </p:cNvSpPr>
+          <p:nvPr>
+            <p:ph type="sldNum" sz="quarter" idx="12"/>
+          </p:nvPr>
+        </p:nvSpPr>
+        <p:spPr>
+          <a:xfrm>
+            <a:off x="11180761" y="299420"/>
+            <a:ext cx="753545" cy="365125"/>
+          </a:xfrm>
+        </p:spPr>
+        <p:txBody>
+          <a:bodyPr/>
+          <a:lstStyle/>
+          <a:p>
+            <a:fld id="{D57F1E4F-1CFF-5643-939E-217C01CDF565}" type="slidenum">
+              <a:rPr lang="en-US" sz="1400" b="1" smtClean="0"/>
+              <a:pPr/>
+              <a:t>32</a:t>
+            </a:fld>
+            <a:endParaRPr lang="en-US" sz="1400" b="1" dirty="0"/>
+          </a:p>
+        </p:txBody>
+      </p:sp>
+      <p:sp>
+        <p:nvSpPr>
+          <p:cNvPr id="5" name="TextBox 4">
+            <a:extLst>
+              <a:ext uri="{FF2B5EF4-FFF2-40B4-BE49-F238E27FC236}">
+                <a16:creationId xmlns:a16="http://schemas.microsoft.com/office/drawing/2014/main" id="{4D89A6DA-7B77-9555-B31D-D64CC447B6B5}"/>
+              </a:ext>
+            </a:extLst>
+          </p:cNvPr>
+          <p:cNvSpPr txBox="1"/>
+          <p:nvPr/>
+        </p:nvSpPr>
+        <p:spPr>
+          <a:xfrm>
+            <a:off x="667268" y="1384918"/>
+            <a:ext cx="11058525" cy="5047536"/>
+          </a:xfrm>
+          <a:prstGeom prst="rect">
+            <a:avLst/>
+          </a:prstGeom>
+          <a:solidFill>
+            <a:srgbClr val="76E3FF"/>
+          </a:solidFill>
+        </p:spPr>
+        <p:txBody>
+          <a:bodyPr wrap="square">
+            <a:spAutoFit/>
+          </a:bodyPr>
+          <a:lstStyle/>
+          <a:p>
+            <a:pPr>
+              <a:buNone/>
+            </a:pPr>
+            <a:r>
+              <a:rPr lang="en-US" altLang="ko-KR" sz="1400" b="0" dirty="0">
+                <a:effectLst/>
+                <a:latin typeface="D2Coding" panose="020B0609020101020101" pitchFamily="49" charset="-127"/>
+                <a:ea typeface="D2Coding" panose="020B0609020101020101" pitchFamily="49" charset="-127"/>
+              </a:rPr>
+              <a:t>from datetime import datetime</a:t>
+            </a:r>
+          </a:p>
+          <a:p>
+            <a:pPr>
+              <a:buNone/>
+            </a:pPr>
+            <a:r>
+              <a:rPr lang="en-US" altLang="ko-KR" sz="1400" b="0" dirty="0">
+                <a:effectLst/>
+                <a:latin typeface="D2Coding" panose="020B0609020101020101" pitchFamily="49" charset="-127"/>
+                <a:ea typeface="D2Coding" panose="020B0609020101020101" pitchFamily="49" charset="-127"/>
+              </a:rPr>
+              <a:t>import </a:t>
+            </a:r>
+            <a:r>
+              <a:rPr lang="en-US" altLang="ko-KR" sz="1400" b="0" dirty="0" err="1">
+                <a:effectLst/>
+                <a:latin typeface="D2Coding" panose="020B0609020101020101" pitchFamily="49" charset="-127"/>
+                <a:ea typeface="D2Coding" panose="020B0609020101020101" pitchFamily="49" charset="-127"/>
+              </a:rPr>
+              <a:t>certifi</a:t>
+            </a:r>
+            <a:endParaRPr lang="en-US" altLang="ko-KR" sz="1400" b="0" dirty="0">
+              <a:effectLst/>
+              <a:latin typeface="D2Coding" panose="020B0609020101020101" pitchFamily="49" charset="-127"/>
+              <a:ea typeface="D2Coding" panose="020B0609020101020101" pitchFamily="49" charset="-127"/>
+            </a:endParaRPr>
+          </a:p>
+          <a:p>
+            <a:pPr>
+              <a:buNone/>
+            </a:pPr>
+            <a:r>
+              <a:rPr lang="en-US" altLang="ko-KR" sz="1400" b="0" dirty="0">
+                <a:effectLst/>
+                <a:latin typeface="D2Coding" panose="020B0609020101020101" pitchFamily="49" charset="-127"/>
+                <a:ea typeface="D2Coding" panose="020B0609020101020101" pitchFamily="49" charset="-127"/>
+              </a:rPr>
+              <a:t>from faker import Faker</a:t>
+            </a:r>
+          </a:p>
+          <a:p>
+            <a:pPr>
+              <a:buNone/>
+            </a:pPr>
+            <a:r>
+              <a:rPr lang="en-US" altLang="ko-KR" sz="1400" b="0" dirty="0">
+                <a:effectLst/>
+                <a:latin typeface="D2Coding" panose="020B0609020101020101" pitchFamily="49" charset="-127"/>
+                <a:ea typeface="D2Coding" panose="020B0609020101020101" pitchFamily="49" charset="-127"/>
+              </a:rPr>
+              <a:t>from </a:t>
+            </a:r>
+            <a:r>
+              <a:rPr lang="en-US" altLang="ko-KR" sz="1400" b="0" dirty="0" err="1">
+                <a:effectLst/>
+                <a:latin typeface="D2Coding" panose="020B0609020101020101" pitchFamily="49" charset="-127"/>
+                <a:ea typeface="D2Coding" panose="020B0609020101020101" pitchFamily="49" charset="-127"/>
+              </a:rPr>
+              <a:t>pymongo</a:t>
+            </a:r>
+            <a:r>
+              <a:rPr lang="en-US" altLang="ko-KR" sz="1400" b="0" dirty="0">
+                <a:effectLst/>
+                <a:latin typeface="D2Coding" panose="020B0609020101020101" pitchFamily="49" charset="-127"/>
+                <a:ea typeface="D2Coding" panose="020B0609020101020101" pitchFamily="49" charset="-127"/>
+              </a:rPr>
+              <a:t> import </a:t>
+            </a:r>
+            <a:r>
+              <a:rPr lang="en-US" altLang="ko-KR" sz="1400" b="0" dirty="0" err="1">
+                <a:effectLst/>
+                <a:latin typeface="D2Coding" panose="020B0609020101020101" pitchFamily="49" charset="-127"/>
+                <a:ea typeface="D2Coding" panose="020B0609020101020101" pitchFamily="49" charset="-127"/>
+              </a:rPr>
+              <a:t>MongoClient</a:t>
+            </a:r>
+            <a:endParaRPr lang="en-US" altLang="ko-KR" sz="1400" b="0" dirty="0">
+              <a:effectLst/>
+              <a:latin typeface="D2Coding" panose="020B0609020101020101" pitchFamily="49" charset="-127"/>
+              <a:ea typeface="D2Coding" panose="020B0609020101020101" pitchFamily="49" charset="-127"/>
+            </a:endParaRPr>
+          </a:p>
+          <a:p>
+            <a:pPr>
+              <a:buNone/>
+            </a:pPr>
+            <a:r>
+              <a:rPr lang="en-US" altLang="ko-KR" sz="1400" b="0" dirty="0">
+                <a:effectLst/>
+                <a:latin typeface="D2Coding" panose="020B0609020101020101" pitchFamily="49" charset="-127"/>
+                <a:ea typeface="D2Coding" panose="020B0609020101020101" pitchFamily="49" charset="-127"/>
+              </a:rPr>
+              <a:t># ----------------------------------------------------</a:t>
+            </a:r>
+          </a:p>
+          <a:p>
+            <a:pPr>
+              <a:buNone/>
+            </a:pPr>
+            <a:r>
+              <a:rPr lang="en-US" altLang="ko-KR" sz="1400" b="0" dirty="0">
+                <a:effectLst/>
+                <a:latin typeface="D2Coding" panose="020B0609020101020101" pitchFamily="49" charset="-127"/>
+                <a:ea typeface="D2Coding" panose="020B0609020101020101" pitchFamily="49" charset="-127"/>
+              </a:rPr>
+              <a:t># 2. MongoDB Atlas </a:t>
+            </a:r>
+            <a:r>
+              <a:rPr lang="ko-KR" altLang="en-US" sz="1400" b="0" dirty="0">
+                <a:effectLst/>
+                <a:latin typeface="D2Coding" panose="020B0609020101020101" pitchFamily="49" charset="-127"/>
+                <a:ea typeface="D2Coding" panose="020B0609020101020101" pitchFamily="49" charset="-127"/>
+              </a:rPr>
+              <a:t>연결</a:t>
+            </a:r>
+          </a:p>
+          <a:p>
+            <a:pPr>
+              <a:buNone/>
+            </a:pPr>
+            <a:r>
+              <a:rPr lang="en-US" altLang="ko-KR" sz="1400" b="0" dirty="0">
+                <a:effectLst/>
+                <a:latin typeface="D2Coding" panose="020B0609020101020101" pitchFamily="49" charset="-127"/>
+                <a:ea typeface="D2Coding" panose="020B0609020101020101" pitchFamily="49" charset="-127"/>
+              </a:rPr>
+              <a:t># ----------------------------------------------------</a:t>
+            </a:r>
+            <a:endParaRPr lang="ko-KR" altLang="en-US" sz="1400" b="0" dirty="0">
+              <a:effectLst/>
+              <a:latin typeface="D2Coding" panose="020B0609020101020101" pitchFamily="49" charset="-127"/>
+              <a:ea typeface="D2Coding" panose="020B0609020101020101" pitchFamily="49" charset="-127"/>
+            </a:endParaRPr>
+          </a:p>
+          <a:p>
+            <a:pPr>
+              <a:buNone/>
+            </a:pPr>
+            <a:r>
+              <a:rPr lang="en-US" altLang="ko-KR" sz="1400" b="0" dirty="0">
+                <a:effectLst/>
+                <a:latin typeface="D2Coding" panose="020B0609020101020101" pitchFamily="49" charset="-127"/>
+                <a:ea typeface="D2Coding" panose="020B0609020101020101" pitchFamily="49" charset="-127"/>
+              </a:rPr>
+              <a:t>MONGO_URI = "</a:t>
+            </a:r>
+            <a:r>
+              <a:rPr lang="en-US" altLang="ko-KR" sz="1400" b="0" dirty="0" err="1">
+                <a:effectLst/>
+                <a:latin typeface="D2Coding" panose="020B0609020101020101" pitchFamily="49" charset="-127"/>
+                <a:ea typeface="D2Coding" panose="020B0609020101020101" pitchFamily="49" charset="-127"/>
+              </a:rPr>
+              <a:t>mongodb+srv</a:t>
+            </a:r>
+            <a:r>
+              <a:rPr lang="en-US" altLang="ko-KR" sz="1400" b="0" dirty="0">
+                <a:effectLst/>
+                <a:latin typeface="D2Coding" panose="020B0609020101020101" pitchFamily="49" charset="-127"/>
+                <a:ea typeface="D2Coding" panose="020B0609020101020101" pitchFamily="49" charset="-127"/>
+              </a:rPr>
+              <a:t>://ancestorcho30:1024@cluster0.bbz7on7.mongodb.net/?</a:t>
+            </a:r>
+            <a:r>
+              <a:rPr lang="en-US" altLang="ko-KR" sz="1400" b="0" dirty="0" err="1">
+                <a:effectLst/>
+                <a:latin typeface="D2Coding" panose="020B0609020101020101" pitchFamily="49" charset="-127"/>
+                <a:ea typeface="D2Coding" panose="020B0609020101020101" pitchFamily="49" charset="-127"/>
+              </a:rPr>
+              <a:t>retryWrites</a:t>
+            </a:r>
+            <a:r>
+              <a:rPr lang="en-US" altLang="ko-KR" sz="1400" b="0" dirty="0">
+                <a:effectLst/>
+                <a:latin typeface="D2Coding" panose="020B0609020101020101" pitchFamily="49" charset="-127"/>
+                <a:ea typeface="D2Coding" panose="020B0609020101020101" pitchFamily="49" charset="-127"/>
+              </a:rPr>
+              <a:t>=</a:t>
+            </a:r>
+            <a:r>
+              <a:rPr lang="en-US" altLang="ko-KR" sz="1400" b="0" dirty="0" err="1">
+                <a:effectLst/>
+                <a:latin typeface="D2Coding" panose="020B0609020101020101" pitchFamily="49" charset="-127"/>
+                <a:ea typeface="D2Coding" panose="020B0609020101020101" pitchFamily="49" charset="-127"/>
+              </a:rPr>
+              <a:t>true&amp;w</a:t>
+            </a:r>
+            <a:r>
+              <a:rPr lang="en-US" altLang="ko-KR" sz="1400" b="0" dirty="0">
+                <a:effectLst/>
+                <a:latin typeface="D2Coding" panose="020B0609020101020101" pitchFamily="49" charset="-127"/>
+                <a:ea typeface="D2Coding" panose="020B0609020101020101" pitchFamily="49" charset="-127"/>
+              </a:rPr>
+              <a:t>=</a:t>
+            </a:r>
+            <a:r>
+              <a:rPr lang="en-US" altLang="ko-KR" sz="1400" b="0" dirty="0" err="1">
+                <a:effectLst/>
+                <a:latin typeface="D2Coding" panose="020B0609020101020101" pitchFamily="49" charset="-127"/>
+                <a:ea typeface="D2Coding" panose="020B0609020101020101" pitchFamily="49" charset="-127"/>
+              </a:rPr>
+              <a:t>majority&amp;appName</a:t>
+            </a:r>
+            <a:r>
+              <a:rPr lang="en-US" altLang="ko-KR" sz="1400" b="0" dirty="0">
+                <a:effectLst/>
+                <a:latin typeface="D2Coding" panose="020B0609020101020101" pitchFamily="49" charset="-127"/>
+                <a:ea typeface="D2Coding" panose="020B0609020101020101" pitchFamily="49" charset="-127"/>
+              </a:rPr>
+              <a:t>=Cluster0"</a:t>
+            </a:r>
+          </a:p>
+          <a:p>
+            <a:pPr>
+              <a:buNone/>
+            </a:pPr>
+            <a:r>
+              <a:rPr lang="en-US" altLang="ko-KR" sz="1400" b="0" dirty="0">
+                <a:effectLst/>
+                <a:latin typeface="D2Coding" panose="020B0609020101020101" pitchFamily="49" charset="-127"/>
+                <a:ea typeface="D2Coding" panose="020B0609020101020101" pitchFamily="49" charset="-127"/>
+              </a:rPr>
+              <a:t>client = </a:t>
+            </a:r>
+            <a:r>
+              <a:rPr lang="en-US" altLang="ko-KR" sz="1400" b="0" dirty="0" err="1">
+                <a:effectLst/>
+                <a:latin typeface="D2Coding" panose="020B0609020101020101" pitchFamily="49" charset="-127"/>
+                <a:ea typeface="D2Coding" panose="020B0609020101020101" pitchFamily="49" charset="-127"/>
+              </a:rPr>
+              <a:t>MongoClient</a:t>
+            </a:r>
+            <a:r>
+              <a:rPr lang="en-US" altLang="ko-KR" sz="1400" b="0" dirty="0">
+                <a:effectLst/>
+                <a:latin typeface="D2Coding" panose="020B0609020101020101" pitchFamily="49" charset="-127"/>
+                <a:ea typeface="D2Coding" panose="020B0609020101020101" pitchFamily="49" charset="-127"/>
+              </a:rPr>
+              <a:t>(</a:t>
+            </a:r>
+          </a:p>
+          <a:p>
+            <a:pPr>
+              <a:buNone/>
+            </a:pPr>
+            <a:r>
+              <a:rPr lang="en-US" altLang="ko-KR" sz="1400" b="0" dirty="0">
+                <a:effectLst/>
+                <a:latin typeface="D2Coding" panose="020B0609020101020101" pitchFamily="49" charset="-127"/>
+                <a:ea typeface="D2Coding" panose="020B0609020101020101" pitchFamily="49" charset="-127"/>
+              </a:rPr>
+              <a:t>    MONGO_URI,</a:t>
+            </a:r>
+          </a:p>
+          <a:p>
+            <a:pPr>
+              <a:buNone/>
+            </a:pPr>
+            <a:r>
+              <a:rPr lang="en-US" altLang="ko-KR" sz="1400" b="0" dirty="0">
+                <a:effectLst/>
+                <a:latin typeface="D2Coding" panose="020B0609020101020101" pitchFamily="49" charset="-127"/>
+                <a:ea typeface="D2Coding" panose="020B0609020101020101" pitchFamily="49" charset="-127"/>
+              </a:rPr>
+              <a:t>    </a:t>
+            </a:r>
+            <a:r>
+              <a:rPr lang="en-US" altLang="ko-KR" sz="1400" b="0" dirty="0" err="1">
+                <a:effectLst/>
+                <a:latin typeface="D2Coding" panose="020B0609020101020101" pitchFamily="49" charset="-127"/>
+                <a:ea typeface="D2Coding" panose="020B0609020101020101" pitchFamily="49" charset="-127"/>
+              </a:rPr>
+              <a:t>tls</a:t>
+            </a:r>
+            <a:r>
+              <a:rPr lang="en-US" altLang="ko-KR" sz="1400" b="0" dirty="0">
+                <a:effectLst/>
+                <a:latin typeface="D2Coding" panose="020B0609020101020101" pitchFamily="49" charset="-127"/>
+                <a:ea typeface="D2Coding" panose="020B0609020101020101" pitchFamily="49" charset="-127"/>
+              </a:rPr>
+              <a:t>=True,</a:t>
+            </a:r>
+          </a:p>
+          <a:p>
+            <a:pPr>
+              <a:buNone/>
+            </a:pPr>
+            <a:r>
+              <a:rPr lang="en-US" altLang="ko-KR" sz="1400" b="0" dirty="0">
+                <a:effectLst/>
+                <a:latin typeface="D2Coding" panose="020B0609020101020101" pitchFamily="49" charset="-127"/>
+                <a:ea typeface="D2Coding" panose="020B0609020101020101" pitchFamily="49" charset="-127"/>
+              </a:rPr>
+              <a:t>    </a:t>
+            </a:r>
+            <a:r>
+              <a:rPr lang="en-US" altLang="ko-KR" sz="1400" b="0" dirty="0" err="1">
+                <a:effectLst/>
+                <a:latin typeface="D2Coding" panose="020B0609020101020101" pitchFamily="49" charset="-127"/>
+                <a:ea typeface="D2Coding" panose="020B0609020101020101" pitchFamily="49" charset="-127"/>
+              </a:rPr>
+              <a:t>tlsCAFile</a:t>
+            </a:r>
+            <a:r>
+              <a:rPr lang="en-US" altLang="ko-KR" sz="1400" b="0" dirty="0">
+                <a:effectLst/>
+                <a:latin typeface="D2Coding" panose="020B0609020101020101" pitchFamily="49" charset="-127"/>
+                <a:ea typeface="D2Coding" panose="020B0609020101020101" pitchFamily="49" charset="-127"/>
+              </a:rPr>
+              <a:t>=</a:t>
+            </a:r>
+            <a:r>
+              <a:rPr lang="en-US" altLang="ko-KR" sz="1400" b="0" dirty="0" err="1">
+                <a:effectLst/>
+                <a:latin typeface="D2Coding" panose="020B0609020101020101" pitchFamily="49" charset="-127"/>
+                <a:ea typeface="D2Coding" panose="020B0609020101020101" pitchFamily="49" charset="-127"/>
+              </a:rPr>
+              <a:t>certifi.where</a:t>
+            </a:r>
+            <a:r>
+              <a:rPr lang="en-US" altLang="ko-KR" sz="1400" b="0" dirty="0">
+                <a:effectLst/>
+                <a:latin typeface="D2Coding" panose="020B0609020101020101" pitchFamily="49" charset="-127"/>
+                <a:ea typeface="D2Coding" panose="020B0609020101020101" pitchFamily="49" charset="-127"/>
+              </a:rPr>
+              <a:t>(),</a:t>
+            </a:r>
+          </a:p>
+          <a:p>
+            <a:pPr>
+              <a:buNone/>
+            </a:pPr>
+            <a:r>
+              <a:rPr lang="en-US" altLang="ko-KR" sz="1400" b="0" dirty="0">
+                <a:effectLst/>
+                <a:latin typeface="D2Coding" panose="020B0609020101020101" pitchFamily="49" charset="-127"/>
+                <a:ea typeface="D2Coding" panose="020B0609020101020101" pitchFamily="49" charset="-127"/>
+              </a:rPr>
+              <a:t>    </a:t>
+            </a:r>
+            <a:r>
+              <a:rPr lang="en-US" altLang="ko-KR" sz="1400" b="0" dirty="0" err="1">
+                <a:effectLst/>
+                <a:latin typeface="D2Coding" panose="020B0609020101020101" pitchFamily="49" charset="-127"/>
+                <a:ea typeface="D2Coding" panose="020B0609020101020101" pitchFamily="49" charset="-127"/>
+              </a:rPr>
+              <a:t>serverSelectionTimeoutMS</a:t>
+            </a:r>
+            <a:r>
+              <a:rPr lang="en-US" altLang="ko-KR" sz="1400" b="0" dirty="0">
+                <a:effectLst/>
+                <a:latin typeface="D2Coding" panose="020B0609020101020101" pitchFamily="49" charset="-127"/>
+                <a:ea typeface="D2Coding" panose="020B0609020101020101" pitchFamily="49" charset="-127"/>
+              </a:rPr>
+              <a:t>=5000,</a:t>
+            </a:r>
+          </a:p>
+          <a:p>
+            <a:pPr>
+              <a:buNone/>
+            </a:pPr>
+            <a:r>
+              <a:rPr lang="en-US" altLang="ko-KR" sz="1400" b="0" dirty="0">
+                <a:effectLst/>
+                <a:latin typeface="D2Coding" panose="020B0609020101020101" pitchFamily="49" charset="-127"/>
+                <a:ea typeface="D2Coding" panose="020B0609020101020101" pitchFamily="49" charset="-127"/>
+              </a:rPr>
+              <a:t>)</a:t>
+            </a:r>
+            <a:br>
+              <a:rPr lang="en-US" altLang="ko-KR" sz="1400" b="0" dirty="0">
+                <a:effectLst/>
+                <a:latin typeface="D2Coding" panose="020B0609020101020101" pitchFamily="49" charset="-127"/>
+                <a:ea typeface="D2Coding" panose="020B0609020101020101" pitchFamily="49" charset="-127"/>
+              </a:rPr>
+            </a:br>
+            <a:r>
+              <a:rPr lang="en-US" altLang="ko-KR" sz="1400" b="0" dirty="0">
+                <a:effectLst/>
+                <a:latin typeface="D2Coding" panose="020B0609020101020101" pitchFamily="49" charset="-127"/>
+                <a:ea typeface="D2Coding" panose="020B0609020101020101" pitchFamily="49" charset="-127"/>
+              </a:rPr>
+              <a:t># </a:t>
+            </a:r>
+            <a:r>
+              <a:rPr lang="ko-KR" altLang="en-US" sz="1400" b="0" dirty="0">
+                <a:effectLst/>
+                <a:latin typeface="D2Coding" panose="020B0609020101020101" pitchFamily="49" charset="-127"/>
+                <a:ea typeface="D2Coding" panose="020B0609020101020101" pitchFamily="49" charset="-127"/>
+              </a:rPr>
+              <a:t>여기서 지정한 </a:t>
+            </a:r>
+            <a:r>
+              <a:rPr lang="en-US" altLang="ko-KR" sz="1400" b="0" dirty="0">
+                <a:effectLst/>
+                <a:latin typeface="D2Coding" panose="020B0609020101020101" pitchFamily="49" charset="-127"/>
+                <a:ea typeface="D2Coding" panose="020B0609020101020101" pitchFamily="49" charset="-127"/>
+              </a:rPr>
+              <a:t>'</a:t>
+            </a:r>
+            <a:r>
+              <a:rPr lang="en-US" altLang="ko-KR" sz="1400" b="0" dirty="0" err="1">
+                <a:effectLst/>
+                <a:latin typeface="D2Coding" panose="020B0609020101020101" pitchFamily="49" charset="-127"/>
+                <a:ea typeface="D2Coding" panose="020B0609020101020101" pitchFamily="49" charset="-127"/>
+              </a:rPr>
+              <a:t>company_db</a:t>
+            </a:r>
+            <a:r>
+              <a:rPr lang="en-US" altLang="ko-KR" sz="1400" b="0" dirty="0">
+                <a:effectLst/>
+                <a:latin typeface="D2Coding" panose="020B0609020101020101" pitchFamily="49" charset="-127"/>
+                <a:ea typeface="D2Coding" panose="020B0609020101020101" pitchFamily="49" charset="-127"/>
+              </a:rPr>
+              <a:t>'</a:t>
+            </a:r>
+            <a:r>
+              <a:rPr lang="ko-KR" altLang="en-US" sz="1400" b="0" dirty="0">
+                <a:effectLst/>
+                <a:latin typeface="D2Coding" panose="020B0609020101020101" pitchFamily="49" charset="-127"/>
+                <a:ea typeface="D2Coding" panose="020B0609020101020101" pitchFamily="49" charset="-127"/>
+              </a:rPr>
+              <a:t>와 </a:t>
+            </a:r>
+            <a:r>
+              <a:rPr lang="en-US" altLang="ko-KR" sz="1400" b="0" dirty="0">
+                <a:effectLst/>
+                <a:latin typeface="D2Coding" panose="020B0609020101020101" pitchFamily="49" charset="-127"/>
+                <a:ea typeface="D2Coding" panose="020B0609020101020101" pitchFamily="49" charset="-127"/>
+              </a:rPr>
+              <a:t>'employees'</a:t>
+            </a:r>
+            <a:r>
+              <a:rPr lang="ko-KR" altLang="en-US" sz="1400" b="0" dirty="0">
+                <a:effectLst/>
+                <a:latin typeface="D2Coding" panose="020B0609020101020101" pitchFamily="49" charset="-127"/>
+                <a:ea typeface="D2Coding" panose="020B0609020101020101" pitchFamily="49" charset="-127"/>
+              </a:rPr>
+              <a:t>는 데이터가 들어갈 때 자동으로 생성됩니다</a:t>
+            </a:r>
+            <a:r>
+              <a:rPr lang="en-US" altLang="ko-KR" sz="1400" b="0" dirty="0">
+                <a:effectLst/>
+                <a:latin typeface="D2Coding" panose="020B0609020101020101" pitchFamily="49" charset="-127"/>
+                <a:ea typeface="D2Coding" panose="020B0609020101020101" pitchFamily="49" charset="-127"/>
+              </a:rPr>
+              <a:t>!</a:t>
+            </a:r>
+            <a:endParaRPr lang="ko-KR" altLang="en-US" sz="1400" b="0" dirty="0">
+              <a:effectLst/>
+              <a:latin typeface="D2Coding" panose="020B0609020101020101" pitchFamily="49" charset="-127"/>
+              <a:ea typeface="D2Coding" panose="020B0609020101020101" pitchFamily="49" charset="-127"/>
+            </a:endParaRPr>
+          </a:p>
+          <a:p>
+            <a:pPr>
+              <a:buNone/>
+            </a:pPr>
+            <a:r>
+              <a:rPr lang="en-US" altLang="ko-KR" sz="1400" b="0" dirty="0" err="1">
+                <a:effectLst/>
+                <a:latin typeface="D2Coding" panose="020B0609020101020101" pitchFamily="49" charset="-127"/>
+                <a:ea typeface="D2Coding" panose="020B0609020101020101" pitchFamily="49" charset="-127"/>
+              </a:rPr>
+              <a:t>db</a:t>
+            </a:r>
+            <a:r>
+              <a:rPr lang="en-US" altLang="ko-KR" sz="1400" b="0" dirty="0">
+                <a:effectLst/>
+                <a:latin typeface="D2Coding" panose="020B0609020101020101" pitchFamily="49" charset="-127"/>
+                <a:ea typeface="D2Coding" panose="020B0609020101020101" pitchFamily="49" charset="-127"/>
+              </a:rPr>
+              <a:t> = client["</a:t>
+            </a:r>
+            <a:r>
+              <a:rPr lang="en-US" altLang="ko-KR" sz="1400" b="0" dirty="0" err="1">
+                <a:effectLst/>
+                <a:latin typeface="D2Coding" panose="020B0609020101020101" pitchFamily="49" charset="-127"/>
+                <a:ea typeface="D2Coding" panose="020B0609020101020101" pitchFamily="49" charset="-127"/>
+              </a:rPr>
+              <a:t>company_db</a:t>
+            </a:r>
+            <a:r>
+              <a:rPr lang="en-US" altLang="ko-KR" sz="1400" b="0" dirty="0">
+                <a:effectLst/>
+                <a:latin typeface="D2Coding" panose="020B0609020101020101" pitchFamily="49" charset="-127"/>
+                <a:ea typeface="D2Coding" panose="020B0609020101020101" pitchFamily="49" charset="-127"/>
+              </a:rPr>
+              <a:t>"]</a:t>
+            </a:r>
+          </a:p>
+          <a:p>
+            <a:pPr>
+              <a:buNone/>
+            </a:pPr>
+            <a:r>
+              <a:rPr lang="en-US" altLang="ko-KR" sz="1400" b="0" dirty="0">
+                <a:effectLst/>
+                <a:latin typeface="D2Coding" panose="020B0609020101020101" pitchFamily="49" charset="-127"/>
+                <a:ea typeface="D2Coding" panose="020B0609020101020101" pitchFamily="49" charset="-127"/>
+              </a:rPr>
+              <a:t>collection = </a:t>
+            </a:r>
+            <a:r>
+              <a:rPr lang="en-US" altLang="ko-KR" sz="1400" b="0" dirty="0" err="1">
+                <a:effectLst/>
+                <a:latin typeface="D2Coding" panose="020B0609020101020101" pitchFamily="49" charset="-127"/>
+                <a:ea typeface="D2Coding" panose="020B0609020101020101" pitchFamily="49" charset="-127"/>
+              </a:rPr>
+              <a:t>db</a:t>
+            </a:r>
+            <a:r>
+              <a:rPr lang="en-US" altLang="ko-KR" sz="1400" b="0" dirty="0">
+                <a:effectLst/>
+                <a:latin typeface="D2Coding" panose="020B0609020101020101" pitchFamily="49" charset="-127"/>
+                <a:ea typeface="D2Coding" panose="020B0609020101020101" pitchFamily="49" charset="-127"/>
+              </a:rPr>
+              <a:t>["employees"]</a:t>
+            </a:r>
+          </a:p>
+          <a:p>
+            <a:pPr>
+              <a:buNone/>
+            </a:pPr>
+            <a:r>
+              <a:rPr lang="en-US" altLang="ko-KR" sz="1400" b="0" dirty="0">
+                <a:effectLst/>
+                <a:latin typeface="D2Coding" panose="020B0609020101020101" pitchFamily="49" charset="-127"/>
+                <a:ea typeface="D2Coding" panose="020B0609020101020101" pitchFamily="49" charset="-127"/>
+              </a:rPr>
+              <a:t># ----------------------------------------------------</a:t>
+            </a:r>
+          </a:p>
+          <a:p>
+            <a:pPr>
+              <a:buNone/>
+            </a:pPr>
+            <a:r>
+              <a:rPr lang="en-US" altLang="ko-KR" sz="1400" b="0" dirty="0">
+                <a:effectLst/>
+                <a:latin typeface="D2Coding" panose="020B0609020101020101" pitchFamily="49" charset="-127"/>
+                <a:ea typeface="D2Coding" panose="020B0609020101020101" pitchFamily="49" charset="-127"/>
+              </a:rPr>
+              <a:t># 3. Faker</a:t>
+            </a:r>
+            <a:r>
+              <a:rPr lang="ko-KR" altLang="en-US" sz="1400" b="0" dirty="0">
+                <a:effectLst/>
+                <a:latin typeface="D2Coding" panose="020B0609020101020101" pitchFamily="49" charset="-127"/>
+                <a:ea typeface="D2Coding" panose="020B0609020101020101" pitchFamily="49" charset="-127"/>
+              </a:rPr>
+              <a:t>를 이용한 가상 데이터 생성 및 저장</a:t>
+            </a:r>
+          </a:p>
+          <a:p>
+            <a:pPr>
+              <a:buNone/>
+            </a:pPr>
+            <a:r>
+              <a:rPr lang="en-US" altLang="ko-KR" sz="1400" b="0" dirty="0">
+                <a:effectLst/>
+                <a:latin typeface="D2Coding" panose="020B0609020101020101" pitchFamily="49" charset="-127"/>
+                <a:ea typeface="D2Coding" panose="020B0609020101020101" pitchFamily="49" charset="-127"/>
+              </a:rPr>
+              <a:t># ----------------------------------------------------</a:t>
+            </a:r>
+            <a:endParaRPr lang="ko-KR" altLang="en-US" sz="1400" b="0" dirty="0">
+              <a:effectLst/>
+              <a:latin typeface="D2Coding" panose="020B0609020101020101" pitchFamily="49" charset="-127"/>
+              <a:ea typeface="D2Coding" panose="020B0609020101020101" pitchFamily="49" charset="-127"/>
+            </a:endParaRPr>
+          </a:p>
+          <a:p>
+            <a:pPr>
+              <a:buNone/>
+            </a:pPr>
+            <a:r>
+              <a:rPr lang="en-US" altLang="ko-KR" sz="1400" b="0" dirty="0">
+                <a:effectLst/>
+                <a:latin typeface="D2Coding" panose="020B0609020101020101" pitchFamily="49" charset="-127"/>
+                <a:ea typeface="D2Coding" panose="020B0609020101020101" pitchFamily="49" charset="-127"/>
+              </a:rPr>
+              <a:t>fake = Faker("</a:t>
+            </a:r>
+            <a:r>
+              <a:rPr lang="en-US" altLang="ko-KR" sz="1400" b="0" dirty="0" err="1">
+                <a:effectLst/>
+                <a:latin typeface="D2Coding" panose="020B0609020101020101" pitchFamily="49" charset="-127"/>
+                <a:ea typeface="D2Coding" panose="020B0609020101020101" pitchFamily="49" charset="-127"/>
+              </a:rPr>
+              <a:t>ko_KR</a:t>
+            </a:r>
+            <a:r>
+              <a:rPr lang="en-US" altLang="ko-KR" sz="1400" b="0" dirty="0">
+                <a:effectLst/>
+                <a:latin typeface="D2Coding" panose="020B0609020101020101" pitchFamily="49" charset="-127"/>
+                <a:ea typeface="D2Coding" panose="020B0609020101020101" pitchFamily="49" charset="-127"/>
+              </a:rPr>
+              <a:t>")</a:t>
+            </a:r>
+          </a:p>
+          <a:p>
+            <a:pPr>
+              <a:buNone/>
+            </a:pPr>
+            <a:r>
+              <a:rPr lang="en-US" altLang="ko-KR" sz="1400" b="0" dirty="0" err="1">
+                <a:effectLst/>
+                <a:latin typeface="D2Coding" panose="020B0609020101020101" pitchFamily="49" charset="-127"/>
+                <a:ea typeface="D2Coding" panose="020B0609020101020101" pitchFamily="49" charset="-127"/>
+              </a:rPr>
+              <a:t>Faker.seed</a:t>
+            </a:r>
+            <a:r>
+              <a:rPr lang="en-US" altLang="ko-KR" sz="1400" b="0" dirty="0">
+                <a:effectLst/>
+                <a:latin typeface="D2Coding" panose="020B0609020101020101" pitchFamily="49" charset="-127"/>
+                <a:ea typeface="D2Coding" panose="020B0609020101020101" pitchFamily="49" charset="-127"/>
+              </a:rPr>
+              <a:t>(42)</a:t>
+            </a:r>
+          </a:p>
+          <a:p>
+            <a:pPr>
+              <a:buNone/>
+            </a:pPr>
+            <a:r>
+              <a:rPr lang="en-US" altLang="ko-KR" sz="1400" b="0" dirty="0" err="1">
+                <a:effectLst/>
+                <a:latin typeface="D2Coding" panose="020B0609020101020101" pitchFamily="49" charset="-127"/>
+                <a:ea typeface="D2Coding" panose="020B0609020101020101" pitchFamily="49" charset="-127"/>
+              </a:rPr>
+              <a:t>documents_to_insert</a:t>
+            </a:r>
+            <a:r>
+              <a:rPr lang="en-US" altLang="ko-KR" sz="1400" b="0" dirty="0">
+                <a:effectLst/>
+                <a:latin typeface="D2Coding" panose="020B0609020101020101" pitchFamily="49" charset="-127"/>
+                <a:ea typeface="D2Coding" panose="020B0609020101020101" pitchFamily="49" charset="-127"/>
+              </a:rPr>
+              <a:t> = []</a:t>
+            </a:r>
+          </a:p>
+        </p:txBody>
+      </p:sp>
+    </p:spTree>
+    <p:extLst>
+      <p:ext uri="{BB962C8B-B14F-4D97-AF65-F5344CB8AC3E}">
+        <p14:creationId xmlns:p14="http://schemas.microsoft.com/office/powerpoint/2010/main" val="2276835678"/>
+      </p:ext>
+    </p:extLst>
+  </p:cSld>
+  <p:clrMapOvr>
+    <a:masterClrMapping/>
+  </p:clrMapOvr>
+</p:sld>
+</file>
+
+<file path=ppt/slides/slide33.xml><?xml version="1.0" encoding="utf-8"?>
+<p:sld xmlns:a="http://schemas.openxmlformats.org/drawingml/2006/main" xmlns:r="http://schemas.openxmlformats.org/officeDocument/2006/relationships" xmlns:p="http://schemas.openxmlformats.org/presentationml/2006/main">
+  <p:cSld>
+    <p:spTree>
+      <p:nvGrpSpPr>
+        <p:cNvPr id="1" name="">
+          <a:extLst>
+            <a:ext uri="{FF2B5EF4-FFF2-40B4-BE49-F238E27FC236}">
+              <a16:creationId xmlns:a16="http://schemas.microsoft.com/office/drawing/2014/main" id="{BB21656C-C30F-E526-DC3F-0E4F02DE3FA8}"/>
+            </a:ext>
+          </a:extLst>
+        </p:cNvPr>
+        <p:cNvGrpSpPr/>
+        <p:nvPr/>
+      </p:nvGrpSpPr>
+      <p:grpSpPr>
+        <a:xfrm>
+          <a:off x="0" y="0"/>
+          <a:ext cx="0" cy="0"/>
+          <a:chOff x="0" y="0"/>
+          <a:chExt cx="0" cy="0"/>
+        </a:xfrm>
+      </p:grpSpPr>
+      <p:sp>
+        <p:nvSpPr>
+          <p:cNvPr id="3" name="제목 1">
+            <a:extLst>
+              <a:ext uri="{FF2B5EF4-FFF2-40B4-BE49-F238E27FC236}">
+                <a16:creationId xmlns:a16="http://schemas.microsoft.com/office/drawing/2014/main" id="{7B5DAC8E-2520-DB86-AB74-6137C857D46C}"/>
+              </a:ext>
+            </a:extLst>
+          </p:cNvPr>
+          <p:cNvSpPr txBox="1">
+            <a:spLocks/>
+          </p:cNvSpPr>
+          <p:nvPr/>
+        </p:nvSpPr>
+        <p:spPr>
+          <a:xfrm>
+            <a:off x="475645" y="481983"/>
+            <a:ext cx="10353762" cy="766439"/>
+          </a:xfrm>
+          <a:prstGeom prst="rect">
+            <a:avLst/>
+          </a:prstGeom>
+        </p:spPr>
+        <p:txBody>
+          <a:bodyPr vert="horz" lIns="91440" tIns="45720" rIns="91440" bIns="45720" rtlCol="0" anchor="ctr">
+            <a:normAutofit/>
+          </a:bodyPr>
+          <a:lstStyle>
+            <a:lvl1pPr algn="ctr" defTabSz="914400" rtl="0" eaLnBrk="1" latinLnBrk="1" hangingPunct="1">
+              <a:lnSpc>
+                <a:spcPct val="90000"/>
+              </a:lnSpc>
+              <a:spcBef>
+                <a:spcPct val="0"/>
+              </a:spcBef>
+              <a:buNone/>
+              <a:defRPr sz="3200" kern="1200" cap="all" baseline="0">
+                <a:solidFill>
+                  <a:schemeClr val="tx1"/>
+                </a:solidFill>
+                <a:effectLst/>
+                <a:latin typeface="Batang" panose="02030600000101010101" pitchFamily="18" charset="-127"/>
+                <a:ea typeface="Batang" panose="02030600000101010101" pitchFamily="18" charset="-127"/>
+                <a:cs typeface="+mj-cs"/>
+              </a:defRPr>
+            </a:lvl1pPr>
+          </a:lstStyle>
+          <a:p>
+            <a:pPr algn="l"/>
+            <a:r>
+              <a:rPr lang="en-US" altLang="ko-KR" sz="2800" cap="none" dirty="0" err="1">
+                <a:solidFill>
+                  <a:schemeClr val="bg2">
+                    <a:lumMod val="25000"/>
+                  </a:schemeClr>
+                </a:solidFill>
+                <a:latin typeface="D2Coding" panose="020B0609020101020101" pitchFamily="49" charset="-127"/>
+                <a:ea typeface="D2Coding" panose="020B0609020101020101" pitchFamily="49" charset="-127"/>
+                <a:cs typeface="Segoe UI Light" panose="020B0502040204020203" pitchFamily="34" charset="0"/>
+              </a:rPr>
+              <a:t>Colab</a:t>
+            </a:r>
+            <a:r>
+              <a:rPr lang="en-US" altLang="ko-KR" sz="2800" cap="none" dirty="0">
+                <a:solidFill>
+                  <a:schemeClr val="bg2">
+                    <a:lumMod val="25000"/>
+                  </a:schemeClr>
+                </a:solidFill>
+                <a:latin typeface="D2Coding" panose="020B0609020101020101" pitchFamily="49" charset="-127"/>
+                <a:ea typeface="D2Coding" panose="020B0609020101020101" pitchFamily="49" charset="-127"/>
+                <a:cs typeface="Segoe UI Light" panose="020B0502040204020203" pitchFamily="34" charset="0"/>
+              </a:rPr>
+              <a:t> &amp; MongoDB</a:t>
+            </a:r>
+            <a:endParaRPr lang="ko-KR" altLang="en-US" sz="2800" cap="none" dirty="0">
+              <a:solidFill>
+                <a:schemeClr val="bg2">
+                  <a:lumMod val="25000"/>
+                </a:schemeClr>
+              </a:solidFill>
+              <a:latin typeface="D2Coding" panose="020B0609020101020101" pitchFamily="49" charset="-127"/>
+              <a:ea typeface="D2Coding" panose="020B0609020101020101" pitchFamily="49" charset="-127"/>
+              <a:cs typeface="Segoe UI Light" panose="020B0502040204020203" pitchFamily="34" charset="0"/>
+            </a:endParaRPr>
+          </a:p>
+        </p:txBody>
+      </p:sp>
+      <p:sp>
+        <p:nvSpPr>
+          <p:cNvPr id="2" name="슬라이드 번호 개체 틀 3">
+            <a:extLst>
+              <a:ext uri="{FF2B5EF4-FFF2-40B4-BE49-F238E27FC236}">
+                <a16:creationId xmlns:a16="http://schemas.microsoft.com/office/drawing/2014/main" id="{F5986C3E-9879-5D51-6A18-46EAF8402347}"/>
+              </a:ext>
+            </a:extLst>
+          </p:cNvPr>
+          <p:cNvSpPr>
+            <a:spLocks noGrp="1"/>
+          </p:cNvSpPr>
+          <p:nvPr>
+            <p:ph type="sldNum" sz="quarter" idx="12"/>
+          </p:nvPr>
+        </p:nvSpPr>
+        <p:spPr>
+          <a:xfrm>
+            <a:off x="11180761" y="299420"/>
+            <a:ext cx="753545" cy="365125"/>
+          </a:xfrm>
+        </p:spPr>
+        <p:txBody>
+          <a:bodyPr/>
+          <a:lstStyle/>
+          <a:p>
+            <a:fld id="{D57F1E4F-1CFF-5643-939E-217C01CDF565}" type="slidenum">
+              <a:rPr lang="en-US" sz="1400" b="1" smtClean="0"/>
+              <a:pPr/>
+              <a:t>33</a:t>
+            </a:fld>
+            <a:endParaRPr lang="en-US" sz="1400" b="1" dirty="0"/>
+          </a:p>
+        </p:txBody>
+      </p:sp>
+      <p:sp>
+        <p:nvSpPr>
+          <p:cNvPr id="5" name="TextBox 4">
+            <a:extLst>
+              <a:ext uri="{FF2B5EF4-FFF2-40B4-BE49-F238E27FC236}">
+                <a16:creationId xmlns:a16="http://schemas.microsoft.com/office/drawing/2014/main" id="{0DEEBF63-46C0-B74D-4350-07936399143C}"/>
+              </a:ext>
+            </a:extLst>
+          </p:cNvPr>
+          <p:cNvSpPr txBox="1"/>
+          <p:nvPr/>
+        </p:nvSpPr>
+        <p:spPr>
+          <a:xfrm>
+            <a:off x="667268" y="1384918"/>
+            <a:ext cx="11058525" cy="4832092"/>
+          </a:xfrm>
+          <a:prstGeom prst="rect">
+            <a:avLst/>
+          </a:prstGeom>
+          <a:solidFill>
+            <a:srgbClr val="76E3FF"/>
+          </a:solidFill>
+        </p:spPr>
+        <p:txBody>
+          <a:bodyPr wrap="square">
+            <a:spAutoFit/>
+          </a:bodyPr>
+          <a:lstStyle/>
+          <a:p>
+            <a:pPr>
+              <a:buNone/>
+            </a:pPr>
+            <a:r>
+              <a:rPr lang="en-US" altLang="ko-KR" sz="1400" b="0" dirty="0">
+                <a:effectLst/>
+                <a:latin typeface="D2Coding" panose="020B0609020101020101" pitchFamily="49" charset="-127"/>
+                <a:ea typeface="D2Coding" panose="020B0609020101020101" pitchFamily="49" charset="-127"/>
+              </a:rPr>
+              <a:t>for </a:t>
+            </a:r>
+            <a:r>
+              <a:rPr lang="en-US" altLang="ko-KR" sz="1400" b="0" dirty="0" err="1">
+                <a:effectLst/>
+                <a:latin typeface="D2Coding" panose="020B0609020101020101" pitchFamily="49" charset="-127"/>
+                <a:ea typeface="D2Coding" panose="020B0609020101020101" pitchFamily="49" charset="-127"/>
+              </a:rPr>
+              <a:t>i</a:t>
+            </a:r>
+            <a:r>
+              <a:rPr lang="en-US" altLang="ko-KR" sz="1400" b="0" dirty="0">
+                <a:effectLst/>
+                <a:latin typeface="D2Coding" panose="020B0609020101020101" pitchFamily="49" charset="-127"/>
+                <a:ea typeface="D2Coding" panose="020B0609020101020101" pitchFamily="49" charset="-127"/>
+              </a:rPr>
+              <a:t> in range(1, 6):</a:t>
+            </a:r>
+          </a:p>
+          <a:p>
+            <a:pPr>
+              <a:buNone/>
+            </a:pPr>
+            <a:r>
+              <a:rPr lang="en-US" altLang="ko-KR" sz="1400" b="0" dirty="0">
+                <a:effectLst/>
+                <a:latin typeface="D2Coding" panose="020B0609020101020101" pitchFamily="49" charset="-127"/>
+                <a:ea typeface="D2Coding" panose="020B0609020101020101" pitchFamily="49" charset="-127"/>
+              </a:rPr>
+              <a:t>    doc = {</a:t>
+            </a:r>
+          </a:p>
+          <a:p>
+            <a:pPr>
+              <a:buNone/>
+            </a:pPr>
+            <a:r>
+              <a:rPr lang="en-US" altLang="ko-KR" sz="1400" b="0" dirty="0">
+                <a:effectLst/>
+                <a:latin typeface="D2Coding" panose="020B0609020101020101" pitchFamily="49" charset="-127"/>
+                <a:ea typeface="D2Coding" panose="020B0609020101020101" pitchFamily="49" charset="-127"/>
+              </a:rPr>
+              <a:t>        "</a:t>
+            </a:r>
+            <a:r>
+              <a:rPr lang="en-US" altLang="ko-KR" sz="1400" b="0" dirty="0" err="1">
+                <a:effectLst/>
+                <a:latin typeface="D2Coding" panose="020B0609020101020101" pitchFamily="49" charset="-127"/>
+                <a:ea typeface="D2Coding" panose="020B0609020101020101" pitchFamily="49" charset="-127"/>
+              </a:rPr>
+              <a:t>emp_id</a:t>
+            </a:r>
+            <a:r>
+              <a:rPr lang="en-US" altLang="ko-KR" sz="1400" b="0" dirty="0">
+                <a:effectLst/>
+                <a:latin typeface="D2Coding" panose="020B0609020101020101" pitchFamily="49" charset="-127"/>
+                <a:ea typeface="D2Coding" panose="020B0609020101020101" pitchFamily="49" charset="-127"/>
+              </a:rPr>
+              <a:t>": </a:t>
+            </a:r>
+            <a:r>
+              <a:rPr lang="en-US" altLang="ko-KR" sz="1400" b="0" dirty="0" err="1">
+                <a:effectLst/>
+                <a:latin typeface="D2Coding" panose="020B0609020101020101" pitchFamily="49" charset="-127"/>
+                <a:ea typeface="D2Coding" panose="020B0609020101020101" pitchFamily="49" charset="-127"/>
+              </a:rPr>
+              <a:t>i</a:t>
+            </a:r>
+            <a:r>
+              <a:rPr lang="en-US" altLang="ko-KR" sz="1400" b="0" dirty="0">
+                <a:effectLst/>
+                <a:latin typeface="D2Coding" panose="020B0609020101020101" pitchFamily="49" charset="-127"/>
+                <a:ea typeface="D2Coding" panose="020B0609020101020101" pitchFamily="49" charset="-127"/>
+              </a:rPr>
+              <a:t>,</a:t>
+            </a:r>
+          </a:p>
+          <a:p>
+            <a:pPr>
+              <a:buNone/>
+            </a:pPr>
+            <a:r>
+              <a:rPr lang="en-US" altLang="ko-KR" sz="1400" b="0" dirty="0">
+                <a:effectLst/>
+                <a:latin typeface="D2Coding" panose="020B0609020101020101" pitchFamily="49" charset="-127"/>
+                <a:ea typeface="D2Coding" panose="020B0609020101020101" pitchFamily="49" charset="-127"/>
+              </a:rPr>
+              <a:t>        "name": fake.name(),</a:t>
+            </a:r>
+          </a:p>
+          <a:p>
+            <a:pPr>
+              <a:buNone/>
+            </a:pPr>
+            <a:r>
+              <a:rPr lang="en-US" altLang="ko-KR" sz="1400" b="0" dirty="0">
+                <a:effectLst/>
+                <a:latin typeface="D2Coding" panose="020B0609020101020101" pitchFamily="49" charset="-127"/>
+                <a:ea typeface="D2Coding" panose="020B0609020101020101" pitchFamily="49" charset="-127"/>
+              </a:rPr>
+              <a:t>        "job": </a:t>
+            </a:r>
+            <a:r>
+              <a:rPr lang="en-US" altLang="ko-KR" sz="1400" b="0" dirty="0" err="1">
+                <a:effectLst/>
+                <a:latin typeface="D2Coding" panose="020B0609020101020101" pitchFamily="49" charset="-127"/>
+                <a:ea typeface="D2Coding" panose="020B0609020101020101" pitchFamily="49" charset="-127"/>
+              </a:rPr>
+              <a:t>fake.job</a:t>
+            </a:r>
+            <a:r>
+              <a:rPr lang="en-US" altLang="ko-KR" sz="1400" b="0" dirty="0">
+                <a:effectLst/>
+                <a:latin typeface="D2Coding" panose="020B0609020101020101" pitchFamily="49" charset="-127"/>
+                <a:ea typeface="D2Coding" panose="020B0609020101020101" pitchFamily="49" charset="-127"/>
+              </a:rPr>
+              <a:t>(),</a:t>
+            </a:r>
+          </a:p>
+          <a:p>
+            <a:pPr>
+              <a:buNone/>
+            </a:pPr>
+            <a:r>
+              <a:rPr lang="en-US" altLang="ko-KR" sz="1400" b="0" dirty="0">
+                <a:effectLst/>
+                <a:latin typeface="D2Coding" panose="020B0609020101020101" pitchFamily="49" charset="-127"/>
+                <a:ea typeface="D2Coding" panose="020B0609020101020101" pitchFamily="49" charset="-127"/>
+              </a:rPr>
+              <a:t>        "contact": {"email": </a:t>
+            </a:r>
+            <a:r>
+              <a:rPr lang="en-US" altLang="ko-KR" sz="1400" b="0" dirty="0" err="1">
+                <a:effectLst/>
+                <a:latin typeface="D2Coding" panose="020B0609020101020101" pitchFamily="49" charset="-127"/>
+                <a:ea typeface="D2Coding" panose="020B0609020101020101" pitchFamily="49" charset="-127"/>
+              </a:rPr>
+              <a:t>fake.email</a:t>
+            </a:r>
+            <a:r>
+              <a:rPr lang="en-US" altLang="ko-KR" sz="1400" b="0" dirty="0">
+                <a:effectLst/>
+                <a:latin typeface="D2Coding" panose="020B0609020101020101" pitchFamily="49" charset="-127"/>
+                <a:ea typeface="D2Coding" panose="020B0609020101020101" pitchFamily="49" charset="-127"/>
+              </a:rPr>
+              <a:t>(), "phone": </a:t>
+            </a:r>
+            <a:r>
+              <a:rPr lang="en-US" altLang="ko-KR" sz="1400" b="0" dirty="0" err="1">
+                <a:effectLst/>
+                <a:latin typeface="D2Coding" panose="020B0609020101020101" pitchFamily="49" charset="-127"/>
+                <a:ea typeface="D2Coding" panose="020B0609020101020101" pitchFamily="49" charset="-127"/>
+              </a:rPr>
+              <a:t>fake.phone_number</a:t>
+            </a:r>
+            <a:r>
+              <a:rPr lang="en-US" altLang="ko-KR" sz="1400" b="0" dirty="0">
+                <a:effectLst/>
+                <a:latin typeface="D2Coding" panose="020B0609020101020101" pitchFamily="49" charset="-127"/>
+                <a:ea typeface="D2Coding" panose="020B0609020101020101" pitchFamily="49" charset="-127"/>
+              </a:rPr>
+              <a:t>()},</a:t>
+            </a:r>
+          </a:p>
+          <a:p>
+            <a:pPr>
+              <a:buNone/>
+            </a:pPr>
+            <a:r>
+              <a:rPr lang="en-US" altLang="ko-KR" sz="1400" b="0" dirty="0">
+                <a:effectLst/>
+                <a:latin typeface="D2Coding" panose="020B0609020101020101" pitchFamily="49" charset="-127"/>
+                <a:ea typeface="D2Coding" panose="020B0609020101020101" pitchFamily="49" charset="-127"/>
+              </a:rPr>
+              <a:t>        "skills": </a:t>
+            </a:r>
+            <a:r>
+              <a:rPr lang="en-US" altLang="ko-KR" sz="1400" b="0" dirty="0" err="1">
+                <a:effectLst/>
+                <a:latin typeface="D2Coding" panose="020B0609020101020101" pitchFamily="49" charset="-127"/>
+                <a:ea typeface="D2Coding" panose="020B0609020101020101" pitchFamily="49" charset="-127"/>
+              </a:rPr>
+              <a:t>fake.words</a:t>
+            </a:r>
+            <a:r>
+              <a:rPr lang="en-US" altLang="ko-KR" sz="1400" b="0" dirty="0">
+                <a:effectLst/>
+                <a:latin typeface="D2Coding" panose="020B0609020101020101" pitchFamily="49" charset="-127"/>
+                <a:ea typeface="D2Coding" panose="020B0609020101020101" pitchFamily="49" charset="-127"/>
+              </a:rPr>
+              <a:t>(</a:t>
+            </a:r>
+            <a:r>
+              <a:rPr lang="en-US" altLang="ko-KR" sz="1400" b="0" dirty="0" err="1">
+                <a:effectLst/>
+                <a:latin typeface="D2Coding" panose="020B0609020101020101" pitchFamily="49" charset="-127"/>
+                <a:ea typeface="D2Coding" panose="020B0609020101020101" pitchFamily="49" charset="-127"/>
+              </a:rPr>
+              <a:t>nb</a:t>
+            </a:r>
+            <a:r>
+              <a:rPr lang="en-US" altLang="ko-KR" sz="1400" b="0" dirty="0">
+                <a:effectLst/>
+                <a:latin typeface="D2Coding" panose="020B0609020101020101" pitchFamily="49" charset="-127"/>
+                <a:ea typeface="D2Coding" panose="020B0609020101020101" pitchFamily="49" charset="-127"/>
+              </a:rPr>
+              <a:t>=3),</a:t>
+            </a:r>
+          </a:p>
+          <a:p>
+            <a:pPr>
+              <a:buNone/>
+            </a:pPr>
+            <a:r>
+              <a:rPr lang="en-US" altLang="ko-KR" sz="1400" b="0" dirty="0">
+                <a:effectLst/>
+                <a:latin typeface="D2Coding" panose="020B0609020101020101" pitchFamily="49" charset="-127"/>
+                <a:ea typeface="D2Coding" panose="020B0609020101020101" pitchFamily="49" charset="-127"/>
+              </a:rPr>
+              <a:t>        "salary": </a:t>
+            </a:r>
+            <a:r>
+              <a:rPr lang="en-US" altLang="ko-KR" sz="1400" b="0" dirty="0" err="1">
+                <a:effectLst/>
+                <a:latin typeface="D2Coding" panose="020B0609020101020101" pitchFamily="49" charset="-127"/>
+                <a:ea typeface="D2Coding" panose="020B0609020101020101" pitchFamily="49" charset="-127"/>
+              </a:rPr>
+              <a:t>fake.random_int</a:t>
+            </a:r>
+            <a:r>
+              <a:rPr lang="en-US" altLang="ko-KR" sz="1400" b="0" dirty="0">
+                <a:effectLst/>
+                <a:latin typeface="D2Coding" panose="020B0609020101020101" pitchFamily="49" charset="-127"/>
+                <a:ea typeface="D2Coding" panose="020B0609020101020101" pitchFamily="49" charset="-127"/>
+              </a:rPr>
+              <a:t>(min=3000, max=8000, step=100),</a:t>
+            </a:r>
+          </a:p>
+          <a:p>
+            <a:pPr>
+              <a:buNone/>
+            </a:pPr>
+            <a:r>
+              <a:rPr lang="en-US" altLang="ko-KR" sz="1400" b="0" dirty="0">
+                <a:effectLst/>
+                <a:latin typeface="D2Coding" panose="020B0609020101020101" pitchFamily="49" charset="-127"/>
+                <a:ea typeface="D2Coding" panose="020B0609020101020101" pitchFamily="49" charset="-127"/>
+              </a:rPr>
+              <a:t>        "</a:t>
+            </a:r>
+            <a:r>
+              <a:rPr lang="en-US" altLang="ko-KR" sz="1400" b="0" dirty="0" err="1">
+                <a:effectLst/>
+                <a:latin typeface="D2Coding" panose="020B0609020101020101" pitchFamily="49" charset="-127"/>
+                <a:ea typeface="D2Coding" panose="020B0609020101020101" pitchFamily="49" charset="-127"/>
+              </a:rPr>
+              <a:t>created_at</a:t>
+            </a:r>
+            <a:r>
+              <a:rPr lang="en-US" altLang="ko-KR" sz="1400" b="0" dirty="0">
+                <a:effectLst/>
+                <a:latin typeface="D2Coding" panose="020B0609020101020101" pitchFamily="49" charset="-127"/>
+                <a:ea typeface="D2Coding" panose="020B0609020101020101" pitchFamily="49" charset="-127"/>
+              </a:rPr>
+              <a:t>": </a:t>
+            </a:r>
+            <a:r>
+              <a:rPr lang="en-US" altLang="ko-KR" sz="1400" b="0" dirty="0" err="1">
+                <a:effectLst/>
+                <a:latin typeface="D2Coding" panose="020B0609020101020101" pitchFamily="49" charset="-127"/>
+                <a:ea typeface="D2Coding" panose="020B0609020101020101" pitchFamily="49" charset="-127"/>
+              </a:rPr>
+              <a:t>datetime.now</a:t>
+            </a:r>
+            <a:r>
+              <a:rPr lang="en-US" altLang="ko-KR" sz="1400" b="0" dirty="0">
+                <a:effectLst/>
+                <a:latin typeface="D2Coding" panose="020B0609020101020101" pitchFamily="49" charset="-127"/>
+                <a:ea typeface="D2Coding" panose="020B0609020101020101" pitchFamily="49" charset="-127"/>
+              </a:rPr>
+              <a:t>(),</a:t>
+            </a:r>
+          </a:p>
+          <a:p>
+            <a:pPr>
+              <a:buNone/>
+            </a:pPr>
+            <a:r>
+              <a:rPr lang="en-US" altLang="ko-KR" sz="1400" b="0" dirty="0">
+                <a:effectLst/>
+                <a:latin typeface="D2Coding" panose="020B0609020101020101" pitchFamily="49" charset="-127"/>
+                <a:ea typeface="D2Coding" panose="020B0609020101020101" pitchFamily="49" charset="-127"/>
+              </a:rPr>
+              <a:t>    }</a:t>
+            </a:r>
+          </a:p>
+          <a:p>
+            <a:pPr>
+              <a:buNone/>
+            </a:pPr>
+            <a:r>
+              <a:rPr lang="en-US" altLang="ko-KR" sz="1400" b="0" dirty="0">
+                <a:effectLst/>
+                <a:latin typeface="D2Coding" panose="020B0609020101020101" pitchFamily="49" charset="-127"/>
+                <a:ea typeface="D2Coding" panose="020B0609020101020101" pitchFamily="49" charset="-127"/>
+              </a:rPr>
+              <a:t>    </a:t>
+            </a:r>
+            <a:r>
+              <a:rPr lang="en-US" altLang="ko-KR" sz="1400" b="0" dirty="0" err="1">
+                <a:effectLst/>
+                <a:latin typeface="D2Coding" panose="020B0609020101020101" pitchFamily="49" charset="-127"/>
+                <a:ea typeface="D2Coding" panose="020B0609020101020101" pitchFamily="49" charset="-127"/>
+              </a:rPr>
+              <a:t>documents_to_insert.append</a:t>
+            </a:r>
+            <a:r>
+              <a:rPr lang="en-US" altLang="ko-KR" sz="1400" b="0" dirty="0">
+                <a:effectLst/>
+                <a:latin typeface="D2Coding" panose="020B0609020101020101" pitchFamily="49" charset="-127"/>
+                <a:ea typeface="D2Coding" panose="020B0609020101020101" pitchFamily="49" charset="-127"/>
+              </a:rPr>
+              <a:t>(doc)</a:t>
+            </a:r>
+          </a:p>
+          <a:p>
+            <a:pPr>
+              <a:buNone/>
+            </a:pPr>
+            <a:endParaRPr lang="en-US" altLang="ko-KR" sz="1400" b="0" dirty="0">
+              <a:effectLst/>
+              <a:latin typeface="D2Coding" panose="020B0609020101020101" pitchFamily="49" charset="-127"/>
+              <a:ea typeface="D2Coding" panose="020B0609020101020101" pitchFamily="49" charset="-127"/>
+            </a:endParaRPr>
+          </a:p>
+          <a:p>
+            <a:pPr>
+              <a:buNone/>
+            </a:pPr>
+            <a:r>
+              <a:rPr lang="en-US" altLang="ko-KR" sz="1400" b="0" dirty="0">
+                <a:effectLst/>
+                <a:latin typeface="D2Coding" panose="020B0609020101020101" pitchFamily="49" charset="-127"/>
+                <a:ea typeface="D2Coding" panose="020B0609020101020101" pitchFamily="49" charset="-127"/>
+              </a:rPr>
+              <a:t># </a:t>
+            </a:r>
+            <a:r>
+              <a:rPr lang="ko-KR" altLang="en-US" sz="1400" b="0" dirty="0">
+                <a:effectLst/>
+                <a:latin typeface="D2Coding" panose="020B0609020101020101" pitchFamily="49" charset="-127"/>
+                <a:ea typeface="D2Coding" panose="020B0609020101020101" pitchFamily="49" charset="-127"/>
+              </a:rPr>
+              <a:t>데이터 넣기 </a:t>
+            </a:r>
+            <a:r>
+              <a:rPr lang="en-US" altLang="ko-KR" sz="1400" b="0" dirty="0">
+                <a:effectLst/>
+                <a:latin typeface="D2Coding" panose="020B0609020101020101" pitchFamily="49" charset="-127"/>
+                <a:ea typeface="D2Coding" panose="020B0609020101020101" pitchFamily="49" charset="-127"/>
+              </a:rPr>
+              <a:t>(</a:t>
+            </a:r>
+            <a:r>
+              <a:rPr lang="ko-KR" altLang="en-US" sz="1400" b="0" dirty="0">
+                <a:effectLst/>
+                <a:latin typeface="D2Coding" panose="020B0609020101020101" pitchFamily="49" charset="-127"/>
+                <a:ea typeface="D2Coding" panose="020B0609020101020101" pitchFamily="49" charset="-127"/>
+              </a:rPr>
+              <a:t>이 순간 </a:t>
+            </a:r>
+            <a:r>
+              <a:rPr lang="en-US" altLang="ko-KR" sz="1400" b="0" dirty="0">
+                <a:effectLst/>
+                <a:latin typeface="D2Coding" panose="020B0609020101020101" pitchFamily="49" charset="-127"/>
+                <a:ea typeface="D2Coding" panose="020B0609020101020101" pitchFamily="49" charset="-127"/>
+              </a:rPr>
+              <a:t>DB</a:t>
+            </a:r>
+            <a:r>
+              <a:rPr lang="ko-KR" altLang="en-US" sz="1400" b="0" dirty="0">
+                <a:effectLst/>
+                <a:latin typeface="D2Coding" panose="020B0609020101020101" pitchFamily="49" charset="-127"/>
+                <a:ea typeface="D2Coding" panose="020B0609020101020101" pitchFamily="49" charset="-127"/>
+              </a:rPr>
+              <a:t>와 </a:t>
+            </a:r>
+            <a:r>
+              <a:rPr lang="en-US" altLang="ko-KR" sz="1400" b="0" dirty="0">
+                <a:effectLst/>
+                <a:latin typeface="D2Coding" panose="020B0609020101020101" pitchFamily="49" charset="-127"/>
+                <a:ea typeface="D2Coding" panose="020B0609020101020101" pitchFamily="49" charset="-127"/>
+              </a:rPr>
+              <a:t>Collection</a:t>
+            </a:r>
+            <a:r>
+              <a:rPr lang="ko-KR" altLang="en-US" sz="1400" b="0" dirty="0">
+                <a:effectLst/>
+                <a:latin typeface="D2Coding" panose="020B0609020101020101" pitchFamily="49" charset="-127"/>
+                <a:ea typeface="D2Coding" panose="020B0609020101020101" pitchFamily="49" charset="-127"/>
+              </a:rPr>
+              <a:t>이 자동으로 만들어집니다</a:t>
+            </a:r>
+            <a:r>
+              <a:rPr lang="en-US" altLang="ko-KR" sz="1400" b="0" dirty="0">
+                <a:effectLst/>
+                <a:latin typeface="D2Coding" panose="020B0609020101020101" pitchFamily="49" charset="-127"/>
+                <a:ea typeface="D2Coding" panose="020B0609020101020101" pitchFamily="49" charset="-127"/>
+              </a:rPr>
+              <a:t>)</a:t>
+            </a:r>
+            <a:endParaRPr lang="ko-KR" altLang="en-US" sz="1400" b="0" dirty="0">
+              <a:effectLst/>
+              <a:latin typeface="D2Coding" panose="020B0609020101020101" pitchFamily="49" charset="-127"/>
+              <a:ea typeface="D2Coding" panose="020B0609020101020101" pitchFamily="49" charset="-127"/>
+            </a:endParaRPr>
+          </a:p>
+          <a:p>
+            <a:pPr>
+              <a:buNone/>
+            </a:pPr>
+            <a:r>
+              <a:rPr lang="en-US" altLang="ko-KR" sz="1400" b="0" dirty="0">
+                <a:effectLst/>
+                <a:latin typeface="D2Coding" panose="020B0609020101020101" pitchFamily="49" charset="-127"/>
+                <a:ea typeface="D2Coding" panose="020B0609020101020101" pitchFamily="49" charset="-127"/>
+              </a:rPr>
+              <a:t>result = </a:t>
+            </a:r>
+            <a:r>
+              <a:rPr lang="en-US" altLang="ko-KR" sz="1400" b="0" dirty="0" err="1">
+                <a:effectLst/>
+                <a:latin typeface="D2Coding" panose="020B0609020101020101" pitchFamily="49" charset="-127"/>
+                <a:ea typeface="D2Coding" panose="020B0609020101020101" pitchFamily="49" charset="-127"/>
+              </a:rPr>
+              <a:t>collection.insert_many</a:t>
+            </a:r>
+            <a:r>
+              <a:rPr lang="en-US" altLang="ko-KR" sz="1400" b="0" dirty="0">
+                <a:effectLst/>
+                <a:latin typeface="D2Coding" panose="020B0609020101020101" pitchFamily="49" charset="-127"/>
+                <a:ea typeface="D2Coding" panose="020B0609020101020101" pitchFamily="49" charset="-127"/>
+              </a:rPr>
+              <a:t>(</a:t>
+            </a:r>
+            <a:r>
+              <a:rPr lang="en-US" altLang="ko-KR" sz="1400" b="0" dirty="0" err="1">
+                <a:effectLst/>
+                <a:latin typeface="D2Coding" panose="020B0609020101020101" pitchFamily="49" charset="-127"/>
+                <a:ea typeface="D2Coding" panose="020B0609020101020101" pitchFamily="49" charset="-127"/>
+              </a:rPr>
+              <a:t>documents_to_insert</a:t>
+            </a:r>
+            <a:r>
+              <a:rPr lang="en-US" altLang="ko-KR" sz="1400" b="0" dirty="0">
+                <a:effectLst/>
+                <a:latin typeface="D2Coding" panose="020B0609020101020101" pitchFamily="49" charset="-127"/>
+                <a:ea typeface="D2Coding" panose="020B0609020101020101" pitchFamily="49" charset="-127"/>
+              </a:rPr>
+              <a:t>)</a:t>
+            </a:r>
+          </a:p>
+          <a:p>
+            <a:pPr>
+              <a:buNone/>
+            </a:pPr>
+            <a:r>
+              <a:rPr lang="en-US" altLang="ko-KR" sz="1400" b="0" dirty="0">
+                <a:effectLst/>
+                <a:latin typeface="D2Coding" panose="020B0609020101020101" pitchFamily="49" charset="-127"/>
+                <a:ea typeface="D2Coding" panose="020B0609020101020101" pitchFamily="49" charset="-127"/>
+              </a:rPr>
+              <a:t>print(f"</a:t>
+            </a:r>
+            <a:r>
+              <a:rPr lang="ko-KR" altLang="en-US" sz="1400" b="0" dirty="0">
+                <a:effectLst/>
+                <a:latin typeface="D2Coding" panose="020B0609020101020101" pitchFamily="49" charset="-127"/>
+                <a:ea typeface="D2Coding" panose="020B0609020101020101" pitchFamily="49" charset="-127"/>
+              </a:rPr>
+              <a:t>🎉 데이터베이스 재생성 및 데이터 저장 성공</a:t>
+            </a:r>
+            <a:r>
+              <a:rPr lang="en-US" altLang="ko-KR" sz="1400" b="0" dirty="0">
+                <a:effectLst/>
+                <a:latin typeface="D2Coding" panose="020B0609020101020101" pitchFamily="49" charset="-127"/>
+                <a:ea typeface="D2Coding" panose="020B0609020101020101" pitchFamily="49" charset="-127"/>
+              </a:rPr>
+              <a:t>! ({</a:t>
+            </a:r>
+            <a:r>
+              <a:rPr lang="en-US" altLang="ko-KR" sz="1400" b="0" dirty="0" err="1">
+                <a:effectLst/>
+                <a:latin typeface="D2Coding" panose="020B0609020101020101" pitchFamily="49" charset="-127"/>
+                <a:ea typeface="D2Coding" panose="020B0609020101020101" pitchFamily="49" charset="-127"/>
+              </a:rPr>
+              <a:t>len</a:t>
+            </a:r>
+            <a:r>
+              <a:rPr lang="en-US" altLang="ko-KR" sz="1400" b="0" dirty="0">
+                <a:effectLst/>
+                <a:latin typeface="D2Coding" panose="020B0609020101020101" pitchFamily="49" charset="-127"/>
+                <a:ea typeface="D2Coding" panose="020B0609020101020101" pitchFamily="49" charset="-127"/>
+              </a:rPr>
+              <a:t>(</a:t>
+            </a:r>
+            <a:r>
+              <a:rPr lang="en-US" altLang="ko-KR" sz="1400" b="0" dirty="0" err="1">
+                <a:effectLst/>
+                <a:latin typeface="D2Coding" panose="020B0609020101020101" pitchFamily="49" charset="-127"/>
+                <a:ea typeface="D2Coding" panose="020B0609020101020101" pitchFamily="49" charset="-127"/>
+              </a:rPr>
+              <a:t>result.inserted_ids</a:t>
+            </a:r>
+            <a:r>
+              <a:rPr lang="en-US" altLang="ko-KR" sz="1400" b="0" dirty="0">
+                <a:effectLst/>
+                <a:latin typeface="D2Coding" panose="020B0609020101020101" pitchFamily="49" charset="-127"/>
+                <a:ea typeface="D2Coding" panose="020B0609020101020101" pitchFamily="49" charset="-127"/>
+              </a:rPr>
+              <a:t>)}</a:t>
+            </a:r>
+            <a:r>
+              <a:rPr lang="ko-KR" altLang="en-US" sz="1400" b="0" dirty="0">
+                <a:effectLst/>
+                <a:latin typeface="D2Coding" panose="020B0609020101020101" pitchFamily="49" charset="-127"/>
+                <a:ea typeface="D2Coding" panose="020B0609020101020101" pitchFamily="49" charset="-127"/>
+              </a:rPr>
+              <a:t>개 저장됨</a:t>
+            </a:r>
+            <a:r>
+              <a:rPr lang="en-US" altLang="ko-KR" sz="1400" b="0" dirty="0">
+                <a:effectLst/>
+                <a:latin typeface="D2Coding" panose="020B0609020101020101" pitchFamily="49" charset="-127"/>
+                <a:ea typeface="D2Coding" panose="020B0609020101020101" pitchFamily="49" charset="-127"/>
+              </a:rPr>
+              <a:t>)\n")</a:t>
+            </a:r>
+          </a:p>
+          <a:p>
+            <a:pPr>
+              <a:buNone/>
+            </a:pPr>
+            <a:endParaRPr lang="en-US" altLang="ko-KR" sz="1400" b="0" dirty="0">
+              <a:effectLst/>
+              <a:latin typeface="D2Coding" panose="020B0609020101020101" pitchFamily="49" charset="-127"/>
+              <a:ea typeface="D2Coding" panose="020B0609020101020101" pitchFamily="49" charset="-127"/>
+            </a:endParaRPr>
+          </a:p>
+          <a:p>
+            <a:pPr>
+              <a:buNone/>
+            </a:pPr>
+            <a:r>
+              <a:rPr lang="en-US" altLang="ko-KR" sz="1400" b="0" dirty="0">
+                <a:effectLst/>
+                <a:latin typeface="D2Coding" panose="020B0609020101020101" pitchFamily="49" charset="-127"/>
+                <a:ea typeface="D2Coding" panose="020B0609020101020101" pitchFamily="49" charset="-127"/>
+              </a:rPr>
+              <a:t># ----------------------------------------------------</a:t>
+            </a:r>
+          </a:p>
+          <a:p>
+            <a:pPr>
+              <a:buNone/>
+            </a:pPr>
+            <a:r>
+              <a:rPr lang="en-US" altLang="ko-KR" sz="1400" b="0" dirty="0">
+                <a:effectLst/>
+                <a:latin typeface="D2Coding" panose="020B0609020101020101" pitchFamily="49" charset="-127"/>
+                <a:ea typeface="D2Coding" panose="020B0609020101020101" pitchFamily="49" charset="-127"/>
+              </a:rPr>
+              <a:t># 4. </a:t>
+            </a:r>
+            <a:r>
+              <a:rPr lang="ko-KR" altLang="en-US" sz="1400" b="0" dirty="0">
+                <a:effectLst/>
+                <a:latin typeface="D2Coding" panose="020B0609020101020101" pitchFamily="49" charset="-127"/>
+                <a:ea typeface="D2Coding" panose="020B0609020101020101" pitchFamily="49" charset="-127"/>
+              </a:rPr>
+              <a:t>저장된 데이터 조회</a:t>
+            </a:r>
+          </a:p>
+          <a:p>
+            <a:pPr>
+              <a:buNone/>
+            </a:pPr>
+            <a:r>
+              <a:rPr lang="en-US" altLang="ko-KR" sz="1400" b="0" dirty="0">
+                <a:effectLst/>
+                <a:latin typeface="D2Coding" panose="020B0609020101020101" pitchFamily="49" charset="-127"/>
+                <a:ea typeface="D2Coding" panose="020B0609020101020101" pitchFamily="49" charset="-127"/>
+              </a:rPr>
+              <a:t># ----------------------------------------------------</a:t>
+            </a:r>
+            <a:endParaRPr lang="ko-KR" altLang="en-US" sz="1400" b="0" dirty="0">
+              <a:effectLst/>
+              <a:latin typeface="D2Coding" panose="020B0609020101020101" pitchFamily="49" charset="-127"/>
+              <a:ea typeface="D2Coding" panose="020B0609020101020101" pitchFamily="49" charset="-127"/>
+            </a:endParaRPr>
+          </a:p>
+          <a:p>
+            <a:pPr>
+              <a:buNone/>
+            </a:pPr>
+            <a:r>
+              <a:rPr lang="en-US" altLang="ko-KR" sz="1400" b="0" dirty="0">
+                <a:effectLst/>
+                <a:latin typeface="D2Coding" panose="020B0609020101020101" pitchFamily="49" charset="-127"/>
+                <a:ea typeface="D2Coding" panose="020B0609020101020101" pitchFamily="49" charset="-127"/>
+              </a:rPr>
+              <a:t>print("=== </a:t>
+            </a:r>
+            <a:r>
+              <a:rPr lang="ko-KR" altLang="en-US" sz="1400" b="0" dirty="0">
+                <a:effectLst/>
+                <a:latin typeface="D2Coding" panose="020B0609020101020101" pitchFamily="49" charset="-127"/>
+                <a:ea typeface="D2Coding" panose="020B0609020101020101" pitchFamily="49" charset="-127"/>
+              </a:rPr>
+              <a:t>저장된 데이터 확인 </a:t>
+            </a:r>
+            <a:r>
+              <a:rPr lang="en-US" altLang="ko-KR" sz="1400" b="0" dirty="0">
+                <a:effectLst/>
+                <a:latin typeface="D2Coding" panose="020B0609020101020101" pitchFamily="49" charset="-127"/>
+                <a:ea typeface="D2Coding" panose="020B0609020101020101" pitchFamily="49" charset="-127"/>
+              </a:rPr>
+              <a:t>===")</a:t>
+            </a:r>
+            <a:endParaRPr lang="ko-KR" altLang="en-US" sz="1400" b="0" dirty="0">
+              <a:effectLst/>
+              <a:latin typeface="D2Coding" panose="020B0609020101020101" pitchFamily="49" charset="-127"/>
+              <a:ea typeface="D2Coding" panose="020B0609020101020101" pitchFamily="49" charset="-127"/>
+            </a:endParaRPr>
+          </a:p>
+          <a:p>
+            <a:pPr>
+              <a:buNone/>
+            </a:pPr>
+            <a:r>
+              <a:rPr lang="en-US" altLang="ko-KR" sz="1400" b="0" dirty="0">
+                <a:effectLst/>
+                <a:latin typeface="D2Coding" panose="020B0609020101020101" pitchFamily="49" charset="-127"/>
+                <a:ea typeface="D2Coding" panose="020B0609020101020101" pitchFamily="49" charset="-127"/>
+              </a:rPr>
+              <a:t>for doc in </a:t>
+            </a:r>
+            <a:r>
+              <a:rPr lang="en-US" altLang="ko-KR" sz="1400" b="0" dirty="0" err="1">
+                <a:effectLst/>
+                <a:latin typeface="D2Coding" panose="020B0609020101020101" pitchFamily="49" charset="-127"/>
+                <a:ea typeface="D2Coding" panose="020B0609020101020101" pitchFamily="49" charset="-127"/>
+              </a:rPr>
+              <a:t>collection.find</a:t>
+            </a:r>
+            <a:r>
+              <a:rPr lang="en-US" altLang="ko-KR" sz="1400" b="0" dirty="0">
+                <a:effectLst/>
+                <a:latin typeface="D2Coding" panose="020B0609020101020101" pitchFamily="49" charset="-127"/>
+                <a:ea typeface="D2Coding" panose="020B0609020101020101" pitchFamily="49" charset="-127"/>
+              </a:rPr>
+              <a:t>():</a:t>
+            </a:r>
+          </a:p>
+          <a:p>
+            <a:pPr>
+              <a:buNone/>
+            </a:pPr>
+            <a:r>
+              <a:rPr lang="en-US" altLang="ko-KR" sz="1400" b="0" dirty="0">
+                <a:effectLst/>
+                <a:latin typeface="D2Coding" panose="020B0609020101020101" pitchFamily="49" charset="-127"/>
+                <a:ea typeface="D2Coding" panose="020B0609020101020101" pitchFamily="49" charset="-127"/>
+              </a:rPr>
+              <a:t>    print(doc)</a:t>
+            </a:r>
+          </a:p>
+        </p:txBody>
+      </p:sp>
+    </p:spTree>
+    <p:extLst>
+      <p:ext uri="{BB962C8B-B14F-4D97-AF65-F5344CB8AC3E}">
+        <p14:creationId xmlns:p14="http://schemas.microsoft.com/office/powerpoint/2010/main" val="2115643320"/>
+      </p:ext>
+    </p:extLst>
+  </p:cSld>
+  <p:clrMapOvr>
+    <a:masterClrMapping/>
+  </p:clrMapOvr>
+</p:sld>
+</file>
+
+<file path=ppt/slides/slide34.xml><?xml version="1.0" encoding="utf-8"?>
+<p:sld xmlns:a="http://schemas.openxmlformats.org/drawingml/2006/main" xmlns:r="http://schemas.openxmlformats.org/officeDocument/2006/relationships" xmlns:p="http://schemas.openxmlformats.org/presentationml/2006/main">
+  <p:cSld>
+    <p:spTree>
+      <p:nvGrpSpPr>
+        <p:cNvPr id="1" name="">
+          <a:extLst>
+            <a:ext uri="{FF2B5EF4-FFF2-40B4-BE49-F238E27FC236}">
+              <a16:creationId xmlns:a16="http://schemas.microsoft.com/office/drawing/2014/main" id="{A7D41861-5F46-8C80-C60F-B01BCA334F44}"/>
+            </a:ext>
+          </a:extLst>
+        </p:cNvPr>
+        <p:cNvGrpSpPr/>
+        <p:nvPr/>
+      </p:nvGrpSpPr>
+      <p:grpSpPr>
+        <a:xfrm>
+          <a:off x="0" y="0"/>
+          <a:ext cx="0" cy="0"/>
+          <a:chOff x="0" y="0"/>
+          <a:chExt cx="0" cy="0"/>
+        </a:xfrm>
+      </p:grpSpPr>
+      <p:sp>
+        <p:nvSpPr>
+          <p:cNvPr id="3" name="제목 1">
+            <a:extLst>
+              <a:ext uri="{FF2B5EF4-FFF2-40B4-BE49-F238E27FC236}">
+                <a16:creationId xmlns:a16="http://schemas.microsoft.com/office/drawing/2014/main" id="{D44B1DE3-E859-BEEC-6DB6-7AB2C39E5095}"/>
+              </a:ext>
+            </a:extLst>
+          </p:cNvPr>
+          <p:cNvSpPr txBox="1">
+            <a:spLocks/>
+          </p:cNvSpPr>
+          <p:nvPr/>
+        </p:nvSpPr>
+        <p:spPr>
+          <a:xfrm>
+            <a:off x="475645" y="481983"/>
+            <a:ext cx="10353762" cy="766439"/>
+          </a:xfrm>
+          <a:prstGeom prst="rect">
+            <a:avLst/>
+          </a:prstGeom>
+        </p:spPr>
+        <p:txBody>
+          <a:bodyPr vert="horz" lIns="91440" tIns="45720" rIns="91440" bIns="45720" rtlCol="0" anchor="ctr">
+            <a:normAutofit/>
+          </a:bodyPr>
+          <a:lstStyle>
+            <a:lvl1pPr algn="ctr" defTabSz="914400" rtl="0" eaLnBrk="1" latinLnBrk="1" hangingPunct="1">
+              <a:lnSpc>
+                <a:spcPct val="90000"/>
+              </a:lnSpc>
+              <a:spcBef>
+                <a:spcPct val="0"/>
+              </a:spcBef>
+              <a:buNone/>
+              <a:defRPr sz="3200" kern="1200" cap="all" baseline="0">
+                <a:solidFill>
+                  <a:schemeClr val="tx1"/>
+                </a:solidFill>
+                <a:effectLst/>
+                <a:latin typeface="Batang" panose="02030600000101010101" pitchFamily="18" charset="-127"/>
+                <a:ea typeface="Batang" panose="02030600000101010101" pitchFamily="18" charset="-127"/>
+                <a:cs typeface="+mj-cs"/>
+              </a:defRPr>
+            </a:lvl1pPr>
+          </a:lstStyle>
+          <a:p>
+            <a:pPr algn="l"/>
+            <a:r>
+              <a:rPr lang="en-US" altLang="ko-KR" sz="2800" cap="none" dirty="0">
+                <a:solidFill>
+                  <a:schemeClr val="bg2">
+                    <a:lumMod val="25000"/>
+                  </a:schemeClr>
+                </a:solidFill>
+                <a:latin typeface="D2Coding" panose="020B0609020101020101" pitchFamily="49" charset="-127"/>
+                <a:ea typeface="D2Coding" panose="020B0609020101020101" pitchFamily="49" charset="-127"/>
+                <a:cs typeface="Segoe UI Light" panose="020B0502040204020203" pitchFamily="34" charset="0"/>
+              </a:rPr>
+              <a:t>Mock </a:t>
+            </a:r>
+            <a:r>
+              <a:rPr lang="en-US" altLang="ko-KR" sz="2800" cap="none" dirty="0" err="1">
+                <a:solidFill>
+                  <a:schemeClr val="bg2">
+                    <a:lumMod val="25000"/>
+                  </a:schemeClr>
+                </a:solidFill>
+                <a:latin typeface="D2Coding" panose="020B0609020101020101" pitchFamily="49" charset="-127"/>
+                <a:ea typeface="D2Coding" panose="020B0609020101020101" pitchFamily="49" charset="-127"/>
+                <a:cs typeface="Segoe UI Light" panose="020B0502040204020203" pitchFamily="34" charset="0"/>
+              </a:rPr>
+              <a:t>MogoDB</a:t>
+            </a:r>
+            <a:endParaRPr lang="ko-KR" altLang="en-US" sz="2800" cap="none" dirty="0">
+              <a:solidFill>
+                <a:schemeClr val="bg2">
+                  <a:lumMod val="25000"/>
+                </a:schemeClr>
+              </a:solidFill>
+              <a:latin typeface="D2Coding" panose="020B0609020101020101" pitchFamily="49" charset="-127"/>
+              <a:ea typeface="D2Coding" panose="020B0609020101020101" pitchFamily="49" charset="-127"/>
+              <a:cs typeface="Segoe UI Light" panose="020B0502040204020203" pitchFamily="34" charset="0"/>
+            </a:endParaRPr>
+          </a:p>
+        </p:txBody>
+      </p:sp>
+      <p:sp>
+        <p:nvSpPr>
+          <p:cNvPr id="2" name="슬라이드 번호 개체 틀 3">
+            <a:extLst>
+              <a:ext uri="{FF2B5EF4-FFF2-40B4-BE49-F238E27FC236}">
+                <a16:creationId xmlns:a16="http://schemas.microsoft.com/office/drawing/2014/main" id="{85945522-C7DC-C6D1-C178-D41C5DF3515D}"/>
+              </a:ext>
+            </a:extLst>
+          </p:cNvPr>
+          <p:cNvSpPr>
+            <a:spLocks noGrp="1"/>
+          </p:cNvSpPr>
+          <p:nvPr>
+            <p:ph type="sldNum" sz="quarter" idx="12"/>
+          </p:nvPr>
+        </p:nvSpPr>
+        <p:spPr>
+          <a:xfrm>
+            <a:off x="11180761" y="299420"/>
+            <a:ext cx="753545" cy="365125"/>
+          </a:xfrm>
+        </p:spPr>
+        <p:txBody>
+          <a:bodyPr/>
+          <a:lstStyle/>
+          <a:p>
+            <a:fld id="{D57F1E4F-1CFF-5643-939E-217C01CDF565}" type="slidenum">
+              <a:rPr lang="en-US" sz="1400" b="1" smtClean="0"/>
+              <a:pPr/>
+              <a:t>34</a:t>
+            </a:fld>
+            <a:endParaRPr lang="en-US" sz="1400" b="1" dirty="0"/>
+          </a:p>
+        </p:txBody>
+      </p:sp>
+      <p:sp>
+        <p:nvSpPr>
+          <p:cNvPr id="7" name="TextBox 6">
+            <a:extLst>
+              <a:ext uri="{FF2B5EF4-FFF2-40B4-BE49-F238E27FC236}">
+                <a16:creationId xmlns:a16="http://schemas.microsoft.com/office/drawing/2014/main" id="{1B85C5AA-CA1C-1607-52DE-FEEDD436B52B}"/>
+              </a:ext>
+            </a:extLst>
+          </p:cNvPr>
+          <p:cNvSpPr txBox="1"/>
+          <p:nvPr/>
+        </p:nvSpPr>
+        <p:spPr>
+          <a:xfrm>
+            <a:off x="561976" y="1785960"/>
+            <a:ext cx="11163300" cy="2031325"/>
+          </a:xfrm>
+          <a:prstGeom prst="rect">
+            <a:avLst/>
+          </a:prstGeom>
+          <a:solidFill>
+            <a:srgbClr val="76E3FF"/>
+          </a:solidFill>
+        </p:spPr>
+        <p:txBody>
+          <a:bodyPr wrap="square">
+            <a:spAutoFit/>
+          </a:bodyPr>
+          <a:lstStyle/>
+          <a:p>
+            <a:pPr>
+              <a:buNone/>
+            </a:pPr>
+            <a:r>
+              <a:rPr lang="en-US" altLang="ko-KR" sz="1400" b="0" dirty="0">
+                <a:effectLst/>
+                <a:latin typeface="D2Coding" panose="020B0609020101020101" pitchFamily="49" charset="-127"/>
+                <a:ea typeface="D2Coding" panose="020B0609020101020101" pitchFamily="49" charset="-127"/>
+              </a:rPr>
+              <a:t>import </a:t>
+            </a:r>
+            <a:r>
+              <a:rPr lang="en-US" altLang="ko-KR" sz="1400" b="0" dirty="0" err="1">
+                <a:effectLst/>
+                <a:latin typeface="D2Coding" panose="020B0609020101020101" pitchFamily="49" charset="-127"/>
+                <a:ea typeface="D2Coding" panose="020B0609020101020101" pitchFamily="49" charset="-127"/>
+              </a:rPr>
+              <a:t>mongomock</a:t>
+            </a:r>
+            <a:endParaRPr lang="en-US" altLang="ko-KR" sz="1400" b="0" dirty="0">
+              <a:effectLst/>
+              <a:latin typeface="D2Coding" panose="020B0609020101020101" pitchFamily="49" charset="-127"/>
+              <a:ea typeface="D2Coding" panose="020B0609020101020101" pitchFamily="49" charset="-127"/>
+            </a:endParaRPr>
+          </a:p>
+          <a:p>
+            <a:pPr>
+              <a:buNone/>
+            </a:pPr>
+            <a:endParaRPr lang="en-US" altLang="ko-KR" sz="1400" b="0" dirty="0">
+              <a:effectLst/>
+              <a:latin typeface="D2Coding" panose="020B0609020101020101" pitchFamily="49" charset="-127"/>
+              <a:ea typeface="D2Coding" panose="020B0609020101020101" pitchFamily="49" charset="-127"/>
+            </a:endParaRPr>
+          </a:p>
+          <a:p>
+            <a:pPr>
+              <a:buNone/>
+            </a:pPr>
+            <a:r>
+              <a:rPr lang="en-US" altLang="ko-KR" sz="1400" b="0" dirty="0">
+                <a:effectLst/>
+                <a:latin typeface="D2Coding" panose="020B0609020101020101" pitchFamily="49" charset="-127"/>
+                <a:ea typeface="D2Coding" panose="020B0609020101020101" pitchFamily="49" charset="-127"/>
+              </a:rPr>
+              <a:t># ----------------------------------------------------</a:t>
+            </a:r>
+          </a:p>
+          <a:p>
+            <a:pPr>
+              <a:buNone/>
+            </a:pPr>
+            <a:r>
+              <a:rPr lang="en-US" altLang="ko-KR" sz="1400" b="0" dirty="0">
+                <a:effectLst/>
+                <a:latin typeface="D2Coding" panose="020B0609020101020101" pitchFamily="49" charset="-127"/>
+                <a:ea typeface="D2Coding" panose="020B0609020101020101" pitchFamily="49" charset="-127"/>
+              </a:rPr>
+              <a:t># 2. Mock MongoDB </a:t>
+            </a:r>
+            <a:r>
+              <a:rPr lang="ko-KR" altLang="en-US" sz="1400" b="0" dirty="0">
+                <a:effectLst/>
+                <a:latin typeface="D2Coding" panose="020B0609020101020101" pitchFamily="49" charset="-127"/>
+                <a:ea typeface="D2Coding" panose="020B0609020101020101" pitchFamily="49" charset="-127"/>
+              </a:rPr>
+              <a:t>클라이언트 연결 </a:t>
+            </a:r>
+            <a:r>
+              <a:rPr lang="en-US" altLang="ko-KR" sz="1400" b="0" dirty="0">
+                <a:effectLst/>
+                <a:latin typeface="D2Coding" panose="020B0609020101020101" pitchFamily="49" charset="-127"/>
+                <a:ea typeface="D2Coding" panose="020B0609020101020101" pitchFamily="49" charset="-127"/>
+              </a:rPr>
+              <a:t>(</a:t>
+            </a:r>
+            <a:r>
+              <a:rPr lang="ko-KR" altLang="en-US" sz="1400" b="0" dirty="0">
+                <a:effectLst/>
+                <a:latin typeface="D2Coding" panose="020B0609020101020101" pitchFamily="49" charset="-127"/>
+                <a:ea typeface="D2Coding" panose="020B0609020101020101" pitchFamily="49" charset="-127"/>
+              </a:rPr>
+              <a:t>네트워크</a:t>
+            </a:r>
+            <a:r>
+              <a:rPr lang="en-US" altLang="ko-KR" sz="1400" b="0" dirty="0">
+                <a:effectLst/>
+                <a:latin typeface="D2Coding" panose="020B0609020101020101" pitchFamily="49" charset="-127"/>
+                <a:ea typeface="D2Coding" panose="020B0609020101020101" pitchFamily="49" charset="-127"/>
+              </a:rPr>
+              <a:t>/</a:t>
+            </a:r>
+            <a:r>
+              <a:rPr lang="ko-KR" altLang="en-US" sz="1400" b="0" dirty="0">
+                <a:effectLst/>
+                <a:latin typeface="D2Coding" panose="020B0609020101020101" pitchFamily="49" charset="-127"/>
+                <a:ea typeface="D2Coding" panose="020B0609020101020101" pitchFamily="49" charset="-127"/>
+              </a:rPr>
+              <a:t>보안 에러 </a:t>
+            </a:r>
+            <a:r>
+              <a:rPr lang="en-US" altLang="ko-KR" sz="1400" b="0" dirty="0">
+                <a:effectLst/>
+                <a:latin typeface="D2Coding" panose="020B0609020101020101" pitchFamily="49" charset="-127"/>
+                <a:ea typeface="D2Coding" panose="020B0609020101020101" pitchFamily="49" charset="-127"/>
+              </a:rPr>
+              <a:t>100% </a:t>
+            </a:r>
+            <a:r>
+              <a:rPr lang="ko-KR" altLang="en-US" sz="1400" b="0" dirty="0">
+                <a:effectLst/>
+                <a:latin typeface="D2Coding" panose="020B0609020101020101" pitchFamily="49" charset="-127"/>
+                <a:ea typeface="D2Coding" panose="020B0609020101020101" pitchFamily="49" charset="-127"/>
+              </a:rPr>
+              <a:t>없음</a:t>
+            </a:r>
+            <a:r>
+              <a:rPr lang="en-US" altLang="ko-KR" sz="1400" b="0" dirty="0">
+                <a:effectLst/>
+                <a:latin typeface="D2Coding" panose="020B0609020101020101" pitchFamily="49" charset="-127"/>
+                <a:ea typeface="D2Coding" panose="020B0609020101020101" pitchFamily="49" charset="-127"/>
+              </a:rPr>
+              <a:t>)</a:t>
+            </a:r>
+            <a:endParaRPr lang="ko-KR" altLang="en-US" sz="1400" b="0" dirty="0">
+              <a:effectLst/>
+              <a:latin typeface="D2Coding" panose="020B0609020101020101" pitchFamily="49" charset="-127"/>
+              <a:ea typeface="D2Coding" panose="020B0609020101020101" pitchFamily="49" charset="-127"/>
+            </a:endParaRPr>
+          </a:p>
+          <a:p>
+            <a:pPr>
+              <a:buNone/>
+            </a:pPr>
+            <a:r>
+              <a:rPr lang="en-US" altLang="ko-KR" sz="1400" b="0" dirty="0">
+                <a:effectLst/>
+                <a:latin typeface="D2Coding" panose="020B0609020101020101" pitchFamily="49" charset="-127"/>
+                <a:ea typeface="D2Coding" panose="020B0609020101020101" pitchFamily="49" charset="-127"/>
+              </a:rPr>
+              <a:t># ----------------------------------------------------</a:t>
+            </a:r>
+            <a:endParaRPr lang="ko-KR" altLang="en-US" sz="1400" b="0" dirty="0">
+              <a:effectLst/>
+              <a:latin typeface="D2Coding" panose="020B0609020101020101" pitchFamily="49" charset="-127"/>
+              <a:ea typeface="D2Coding" panose="020B0609020101020101" pitchFamily="49" charset="-127"/>
+            </a:endParaRPr>
+          </a:p>
+          <a:p>
+            <a:pPr>
+              <a:buNone/>
+            </a:pPr>
+            <a:r>
+              <a:rPr lang="en-US" altLang="ko-KR" sz="1400" b="0" dirty="0">
+                <a:effectLst/>
+                <a:latin typeface="D2Coding" panose="020B0609020101020101" pitchFamily="49" charset="-127"/>
+                <a:ea typeface="D2Coding" panose="020B0609020101020101" pitchFamily="49" charset="-127"/>
+              </a:rPr>
+              <a:t>client = </a:t>
+            </a:r>
+            <a:r>
+              <a:rPr lang="en-US" altLang="ko-KR" sz="1400" b="0" dirty="0" err="1">
+                <a:effectLst/>
+                <a:latin typeface="D2Coding" panose="020B0609020101020101" pitchFamily="49" charset="-127"/>
+                <a:ea typeface="D2Coding" panose="020B0609020101020101" pitchFamily="49" charset="-127"/>
+              </a:rPr>
+              <a:t>mongomock.MongoClient</a:t>
+            </a:r>
+            <a:r>
+              <a:rPr lang="en-US" altLang="ko-KR" sz="1400" b="0" dirty="0">
+                <a:effectLst/>
+                <a:latin typeface="D2Coding" panose="020B0609020101020101" pitchFamily="49" charset="-127"/>
+                <a:ea typeface="D2Coding" panose="020B0609020101020101" pitchFamily="49" charset="-127"/>
+              </a:rPr>
+              <a:t>()</a:t>
+            </a:r>
+          </a:p>
+          <a:p>
+            <a:pPr>
+              <a:buNone/>
+            </a:pPr>
+            <a:endParaRPr lang="en-US" altLang="ko-KR" sz="1400" b="0" dirty="0">
+              <a:effectLst/>
+              <a:latin typeface="D2Coding" panose="020B0609020101020101" pitchFamily="49" charset="-127"/>
+              <a:ea typeface="D2Coding" panose="020B0609020101020101" pitchFamily="49" charset="-127"/>
+            </a:endParaRPr>
+          </a:p>
+          <a:p>
+            <a:pPr>
+              <a:buNone/>
+            </a:pPr>
+            <a:r>
+              <a:rPr lang="en-US" altLang="ko-KR" sz="1400" b="0" dirty="0" err="1">
+                <a:effectLst/>
+                <a:latin typeface="D2Coding" panose="020B0609020101020101" pitchFamily="49" charset="-127"/>
+                <a:ea typeface="D2Coding" panose="020B0609020101020101" pitchFamily="49" charset="-127"/>
+              </a:rPr>
+              <a:t>db</a:t>
+            </a:r>
+            <a:r>
+              <a:rPr lang="en-US" altLang="ko-KR" sz="1400" b="0" dirty="0">
+                <a:effectLst/>
+                <a:latin typeface="D2Coding" panose="020B0609020101020101" pitchFamily="49" charset="-127"/>
+                <a:ea typeface="D2Coding" panose="020B0609020101020101" pitchFamily="49" charset="-127"/>
+              </a:rPr>
+              <a:t> = client["</a:t>
+            </a:r>
+            <a:r>
+              <a:rPr lang="en-US" altLang="ko-KR" sz="1400" b="0" dirty="0" err="1">
+                <a:effectLst/>
+                <a:latin typeface="D2Coding" panose="020B0609020101020101" pitchFamily="49" charset="-127"/>
+                <a:ea typeface="D2Coding" panose="020B0609020101020101" pitchFamily="49" charset="-127"/>
+              </a:rPr>
+              <a:t>company_db</a:t>
+            </a:r>
+            <a:r>
+              <a:rPr lang="en-US" altLang="ko-KR" sz="1400" b="0" dirty="0">
+                <a:effectLst/>
+                <a:latin typeface="D2Coding" panose="020B0609020101020101" pitchFamily="49" charset="-127"/>
+                <a:ea typeface="D2Coding" panose="020B0609020101020101" pitchFamily="49" charset="-127"/>
+              </a:rPr>
+              <a:t>"]</a:t>
+            </a:r>
+          </a:p>
+          <a:p>
+            <a:pPr>
+              <a:buNone/>
+            </a:pPr>
+            <a:r>
+              <a:rPr lang="en-US" altLang="ko-KR" sz="1400" b="0" dirty="0">
+                <a:effectLst/>
+                <a:latin typeface="D2Coding" panose="020B0609020101020101" pitchFamily="49" charset="-127"/>
+                <a:ea typeface="D2Coding" panose="020B0609020101020101" pitchFamily="49" charset="-127"/>
+              </a:rPr>
+              <a:t>collection = </a:t>
+            </a:r>
+            <a:r>
+              <a:rPr lang="en-US" altLang="ko-KR" sz="1400" b="0" dirty="0" err="1">
+                <a:effectLst/>
+                <a:latin typeface="D2Coding" panose="020B0609020101020101" pitchFamily="49" charset="-127"/>
+                <a:ea typeface="D2Coding" panose="020B0609020101020101" pitchFamily="49" charset="-127"/>
+              </a:rPr>
+              <a:t>db</a:t>
+            </a:r>
+            <a:r>
+              <a:rPr lang="en-US" altLang="ko-KR" sz="1400" b="0" dirty="0">
+                <a:effectLst/>
+                <a:latin typeface="D2Coding" panose="020B0609020101020101" pitchFamily="49" charset="-127"/>
+                <a:ea typeface="D2Coding" panose="020B0609020101020101" pitchFamily="49" charset="-127"/>
+              </a:rPr>
+              <a:t>["employees"]</a:t>
+            </a:r>
+          </a:p>
+        </p:txBody>
+      </p:sp>
+    </p:spTree>
+    <p:extLst>
+      <p:ext uri="{BB962C8B-B14F-4D97-AF65-F5344CB8AC3E}">
+        <p14:creationId xmlns:p14="http://schemas.microsoft.com/office/powerpoint/2010/main" val="3934461546"/>
       </p:ext>
     </p:extLst>
   </p:cSld>
